--- a/protected-downloads/praesentation/M16.pptx
+++ b/protected-downloads/praesentation/M16.pptx
@@ -8,15 +8,15 @@
     <p:sldId id="256" r:id="rId7"/>
     <p:sldId id="257" r:id="rId8"/>
     <p:sldId id="258" r:id="rId9"/>
-    <p:sldId id="259" r:id="rId10"/>
-    <p:sldId id="260" r:id="rId11"/>
-    <p:sldId id="261" r:id="rId12"/>
-    <p:sldId id="262" r:id="rId13"/>
-    <p:sldId id="263" r:id="rId14"/>
-    <p:sldId id="264" r:id="rId15"/>
-    <p:sldId id="265" r:id="rId16"/>
-    <p:sldId id="266" r:id="rId17"/>
-    <p:sldId id="267" r:id="rId18"/>
+    <p:sldId id="259" r:id="rId11"/>
+    <p:sldId id="260" r:id="rId12"/>
+    <p:sldId id="261" r:id="rId13"/>
+    <p:sldId id="262" r:id="rId14"/>
+    <p:sldId id="263" r:id="rId15"/>
+    <p:sldId id="264" r:id="rId16"/>
+    <p:sldId id="265" r:id="rId17"/>
+    <p:sldId id="266" r:id="rId18"/>
+    <p:sldId id="267" r:id="rId19"/>
   </p:sldIdLst>
   <p:sldSz cx="12188952" cy="6858000" type="screen4x3"/>
   <p:notesSz cx="6858000" cy="9144000"/>
@@ -116,6 +116,986 @@
     </a:lvl9pPr>
   </p:defaultTextStyle>
 </p:presentation>
+</file>
+
+<file path=ppt/notesMasters/notesMaster1.xml><?xml version="1.0" encoding="utf-8"?>
+<p:notesMaster xmlns:a="http://schemas.openxmlformats.org/drawingml/2006/main" xmlns:p="http://schemas.openxmlformats.org/presentationml/2006/main" xmlns:r="http://schemas.openxmlformats.org/officeDocument/2006/relationships">
+  <p:cSld>
+    <p:bg>
+      <p:bgRef idx="1001">
+        <a:schemeClr val="bg1"/>
+      </p:bgRef>
+    </p:bg>
+    <p:spTree>
+      <p:nvGrpSpPr>
+        <p:cNvPr id="1" name=""/>
+        <p:cNvGrpSpPr/>
+        <p:nvPr/>
+      </p:nvGrpSpPr>
+      <p:grpSpPr>
+        <a:xfrm>
+          <a:off x="0" y="0"/>
+          <a:ext cx="0" cy="0"/>
+          <a:chOff x="0" y="0"/>
+          <a:chExt cx="0" cy="0"/>
+        </a:xfrm>
+      </p:grpSpPr>
+      <p:sp>
+        <p:nvSpPr>
+          <p:cNvPr id="2" name="Header Placeholder 1"/>
+          <p:cNvSpPr>
+            <a:spLocks noGrp="1"/>
+          </p:cNvSpPr>
+          <p:nvPr>
+            <p:ph type="hdr" sz="quarter"/>
+          </p:nvPr>
+        </p:nvSpPr>
+        <p:spPr>
+          <a:xfrm>
+            <a:off x="0" y="0"/>
+            <a:ext cx="2971800" cy="457200"/>
+          </a:xfrm>
+          <a:prstGeom prst="rect">
+            <a:avLst/>
+          </a:prstGeom>
+        </p:spPr>
+        <p:txBody>
+          <a:bodyPr vert="horz" lIns="91440" tIns="45720" rIns="91440" bIns="45720" rtlCol="0"/>
+          <a:lstStyle>
+            <a:lvl1pPr algn="l">
+              <a:defRPr sz="1200"/>
+            </a:lvl1pPr>
+          </a:lstStyle>
+          <a:p>
+            <a:endParaRPr lang="en-US"/>
+          </a:p>
+        </p:txBody>
+      </p:sp>
+      <p:sp>
+        <p:nvSpPr>
+          <p:cNvPr id="3" name="Date Placeholder 2"/>
+          <p:cNvSpPr>
+            <a:spLocks noGrp="1"/>
+          </p:cNvSpPr>
+          <p:nvPr>
+            <p:ph type="dt" idx="1"/>
+          </p:nvPr>
+        </p:nvSpPr>
+        <p:spPr>
+          <a:xfrm>
+            <a:off x="3884613" y="0"/>
+            <a:ext cx="2971800" cy="457200"/>
+          </a:xfrm>
+          <a:prstGeom prst="rect">
+            <a:avLst/>
+          </a:prstGeom>
+        </p:spPr>
+        <p:txBody>
+          <a:bodyPr vert="horz" lIns="91440" tIns="45720" rIns="91440" bIns="45720" rtlCol="0"/>
+          <a:lstStyle>
+            <a:lvl1pPr algn="r">
+              <a:defRPr sz="1200"/>
+            </a:lvl1pPr>
+          </a:lstStyle>
+          <a:p>
+            <a:fld id="{0F89C1C7-3DCD-1040-A9CF-14679D8B5DDD}" type="datetimeFigureOut">
+              <a:rPr lang="en-US" smtClean="0"/>
+              <a:t>10/17/16</a:t>
+            </a:fld>
+            <a:endParaRPr lang="en-US"/>
+          </a:p>
+        </p:txBody>
+      </p:sp>
+      <p:sp>
+        <p:nvSpPr>
+          <p:cNvPr id="4" name="Slide Image Placeholder 3"/>
+          <p:cNvSpPr>
+            <a:spLocks noGrp="1" noRot="1" noChangeAspect="1"/>
+          </p:cNvSpPr>
+          <p:nvPr>
+            <p:ph type="sldImg" idx="2"/>
+          </p:nvPr>
+        </p:nvSpPr>
+        <p:spPr>
+          <a:xfrm>
+            <a:off x="1143000" y="685800"/>
+            <a:ext cx="4572000" cy="3429000"/>
+          </a:xfrm>
+          <a:prstGeom prst="rect">
+            <a:avLst/>
+          </a:prstGeom>
+          <a:noFill/>
+          <a:ln w="12700">
+            <a:solidFill>
+              <a:prstClr val="black"/>
+            </a:solidFill>
+          </a:ln>
+        </p:spPr>
+        <p:txBody>
+          <a:bodyPr vert="horz" lIns="91440" tIns="45720" rIns="91440" bIns="45720" rtlCol="0" anchor="ctr"/>
+          <a:lstStyle/>
+          <a:p>
+            <a:endParaRPr lang="en-US"/>
+          </a:p>
+        </p:txBody>
+      </p:sp>
+      <p:sp>
+        <p:nvSpPr>
+          <p:cNvPr id="5" name="Notes Placeholder 4"/>
+          <p:cNvSpPr>
+            <a:spLocks noGrp="1"/>
+          </p:cNvSpPr>
+          <p:nvPr>
+            <p:ph type="body" sz="quarter" idx="3"/>
+          </p:nvPr>
+        </p:nvSpPr>
+        <p:spPr>
+          <a:xfrm>
+            <a:off x="685800" y="4343400"/>
+            <a:ext cx="5486400" cy="4114800"/>
+          </a:xfrm>
+          <a:prstGeom prst="rect">
+            <a:avLst/>
+          </a:prstGeom>
+        </p:spPr>
+        <p:txBody>
+          <a:bodyPr vert="horz" lIns="91440" tIns="45720" rIns="91440" bIns="45720" rtlCol="0"/>
+          <a:lstStyle/>
+          <a:p>
+            <a:pPr lvl="0"/>
+            <a:r>
+              <a:rPr lang="en-US" smtClean="0"/>
+              <a:t>Click to edit Master text styles</a:t>
+            </a:r>
+          </a:p>
+          <a:p>
+            <a:pPr lvl="1"/>
+            <a:r>
+              <a:rPr lang="en-US" smtClean="0"/>
+              <a:t>Second level</a:t>
+            </a:r>
+          </a:p>
+          <a:p>
+            <a:pPr lvl="2"/>
+            <a:r>
+              <a:rPr lang="en-US" smtClean="0"/>
+              <a:t>Third level</a:t>
+            </a:r>
+          </a:p>
+          <a:p>
+            <a:pPr lvl="3"/>
+            <a:r>
+              <a:rPr lang="en-US" smtClean="0"/>
+              <a:t>Fourth level</a:t>
+            </a:r>
+          </a:p>
+          <a:p>
+            <a:pPr lvl="4"/>
+            <a:r>
+              <a:rPr lang="en-US" smtClean="0"/>
+              <a:t>Fifth level</a:t>
+            </a:r>
+            <a:endParaRPr lang="en-US"/>
+          </a:p>
+        </p:txBody>
+      </p:sp>
+      <p:sp>
+        <p:nvSpPr>
+          <p:cNvPr id="6" name="Footer Placeholder 5"/>
+          <p:cNvSpPr>
+            <a:spLocks noGrp="1"/>
+          </p:cNvSpPr>
+          <p:nvPr>
+            <p:ph type="ftr" sz="quarter" idx="4"/>
+          </p:nvPr>
+        </p:nvSpPr>
+        <p:spPr>
+          <a:xfrm>
+            <a:off x="0" y="8685213"/>
+            <a:ext cx="2971800" cy="457200"/>
+          </a:xfrm>
+          <a:prstGeom prst="rect">
+            <a:avLst/>
+          </a:prstGeom>
+        </p:spPr>
+        <p:txBody>
+          <a:bodyPr vert="horz" lIns="91440" tIns="45720" rIns="91440" bIns="45720" rtlCol="0" anchor="b"/>
+          <a:lstStyle>
+            <a:lvl1pPr algn="l">
+              <a:defRPr sz="1200"/>
+            </a:lvl1pPr>
+          </a:lstStyle>
+          <a:p>
+            <a:endParaRPr lang="en-US"/>
+          </a:p>
+        </p:txBody>
+      </p:sp>
+      <p:sp>
+        <p:nvSpPr>
+          <p:cNvPr id="7" name="Slide Number Placeholder 6"/>
+          <p:cNvSpPr>
+            <a:spLocks noGrp="1"/>
+          </p:cNvSpPr>
+          <p:nvPr>
+            <p:ph type="sldNum" sz="quarter" idx="5"/>
+          </p:nvPr>
+        </p:nvSpPr>
+        <p:spPr>
+          <a:xfrm>
+            <a:off x="3884613" y="8685213"/>
+            <a:ext cx="2971800" cy="457200"/>
+          </a:xfrm>
+          <a:prstGeom prst="rect">
+            <a:avLst/>
+          </a:prstGeom>
+        </p:spPr>
+        <p:txBody>
+          <a:bodyPr vert="horz" lIns="91440" tIns="45720" rIns="91440" bIns="45720" rtlCol="0" anchor="b"/>
+          <a:lstStyle>
+            <a:lvl1pPr algn="r">
+              <a:defRPr sz="1200"/>
+            </a:lvl1pPr>
+          </a:lstStyle>
+          <a:p>
+            <a:fld id="{BB5E49A5-4136-284D-997B-48E1D791AD67}" type="slidenum">
+              <a:rPr lang="en-US" smtClean="0"/>
+              <a:t>‹#›</a:t>
+            </a:fld>
+            <a:endParaRPr lang="en-US"/>
+          </a:p>
+        </p:txBody>
+      </p:sp>
+    </p:spTree>
+    <p:extLst>
+      <p:ext uri="{BB962C8B-B14F-4D97-AF65-F5344CB8AC3E}">
+        <p14:creationId xmlns:p14="http://schemas.microsoft.com/office/powerpoint/2010/main" val="2623252185"/>
+      </p:ext>
+    </p:extLst>
+  </p:cSld>
+  <p:clrMap bg1="lt1" tx1="dk1" bg2="lt2" tx2="dk2" accent1="accent1" accent2="accent2" accent3="accent3" accent4="accent4" accent5="accent5" accent6="accent6" hlink="hlink" folHlink="folHlink"/>
+  <p:notesStyle>
+    <a:lvl1pPr marL="0" algn="l" defTabSz="457200" rtl="0" eaLnBrk="1" latinLnBrk="0" hangingPunct="1">
+      <a:defRPr sz="1200" kern="1200">
+        <a:solidFill>
+          <a:schemeClr val="tx1"/>
+        </a:solidFill>
+        <a:latin typeface="+mn-lt"/>
+        <a:ea typeface="+mn-ea"/>
+        <a:cs typeface="+mn-cs"/>
+      </a:defRPr>
+    </a:lvl1pPr>
+    <a:lvl2pPr marL="457200" algn="l" defTabSz="457200" rtl="0" eaLnBrk="1" latinLnBrk="0" hangingPunct="1">
+      <a:defRPr sz="1200" kern="1200">
+        <a:solidFill>
+          <a:schemeClr val="tx1"/>
+        </a:solidFill>
+        <a:latin typeface="+mn-lt"/>
+        <a:ea typeface="+mn-ea"/>
+        <a:cs typeface="+mn-cs"/>
+      </a:defRPr>
+    </a:lvl2pPr>
+    <a:lvl3pPr marL="914400" algn="l" defTabSz="457200" rtl="0" eaLnBrk="1" latinLnBrk="0" hangingPunct="1">
+      <a:defRPr sz="1200" kern="1200">
+        <a:solidFill>
+          <a:schemeClr val="tx1"/>
+        </a:solidFill>
+        <a:latin typeface="+mn-lt"/>
+        <a:ea typeface="+mn-ea"/>
+        <a:cs typeface="+mn-cs"/>
+      </a:defRPr>
+    </a:lvl3pPr>
+    <a:lvl4pPr marL="1371600" algn="l" defTabSz="457200" rtl="0" eaLnBrk="1" latinLnBrk="0" hangingPunct="1">
+      <a:defRPr sz="1200" kern="1200">
+        <a:solidFill>
+          <a:schemeClr val="tx1"/>
+        </a:solidFill>
+        <a:latin typeface="+mn-lt"/>
+        <a:ea typeface="+mn-ea"/>
+        <a:cs typeface="+mn-cs"/>
+      </a:defRPr>
+    </a:lvl4pPr>
+    <a:lvl5pPr marL="1828800" algn="l" defTabSz="457200" rtl="0" eaLnBrk="1" latinLnBrk="0" hangingPunct="1">
+      <a:defRPr sz="1200" kern="1200">
+        <a:solidFill>
+          <a:schemeClr val="tx1"/>
+        </a:solidFill>
+        <a:latin typeface="+mn-lt"/>
+        <a:ea typeface="+mn-ea"/>
+        <a:cs typeface="+mn-cs"/>
+      </a:defRPr>
+    </a:lvl5pPr>
+    <a:lvl6pPr marL="2286000" algn="l" defTabSz="457200" rtl="0" eaLnBrk="1" latinLnBrk="0" hangingPunct="1">
+      <a:defRPr sz="1200" kern="1200">
+        <a:solidFill>
+          <a:schemeClr val="tx1"/>
+        </a:solidFill>
+        <a:latin typeface="+mn-lt"/>
+        <a:ea typeface="+mn-ea"/>
+        <a:cs typeface="+mn-cs"/>
+      </a:defRPr>
+    </a:lvl6pPr>
+    <a:lvl7pPr marL="2743200" algn="l" defTabSz="457200" rtl="0" eaLnBrk="1" latinLnBrk="0" hangingPunct="1">
+      <a:defRPr sz="1200" kern="1200">
+        <a:solidFill>
+          <a:schemeClr val="tx1"/>
+        </a:solidFill>
+        <a:latin typeface="+mn-lt"/>
+        <a:ea typeface="+mn-ea"/>
+        <a:cs typeface="+mn-cs"/>
+      </a:defRPr>
+    </a:lvl7pPr>
+    <a:lvl8pPr marL="3200400" algn="l" defTabSz="457200" rtl="0" eaLnBrk="1" latinLnBrk="0" hangingPunct="1">
+      <a:defRPr sz="1200" kern="1200">
+        <a:solidFill>
+          <a:schemeClr val="tx1"/>
+        </a:solidFill>
+        <a:latin typeface="+mn-lt"/>
+        <a:ea typeface="+mn-ea"/>
+        <a:cs typeface="+mn-cs"/>
+      </a:defRPr>
+    </a:lvl8pPr>
+    <a:lvl9pPr marL="3657600" algn="l" defTabSz="457200" rtl="0" eaLnBrk="1" latinLnBrk="0" hangingPunct="1">
+      <a:defRPr sz="1200" kern="1200">
+        <a:solidFill>
+          <a:schemeClr val="tx1"/>
+        </a:solidFill>
+        <a:latin typeface="+mn-lt"/>
+        <a:ea typeface="+mn-ea"/>
+        <a:cs typeface="+mn-cs"/>
+      </a:defRPr>
+    </a:lvl9pPr>
+  </p:notesStyle>
+</p:notesMaster>
+</file>
+
+<file path=ppt/notesSlides/notesSlide1.xml><?xml version="1.0" encoding="utf-8"?>
+<p:notes xmlns:a="http://schemas.openxmlformats.org/drawingml/2006/main" xmlns:p="http://schemas.openxmlformats.org/presentationml/2006/main" xmlns:r="http://schemas.openxmlformats.org/officeDocument/2006/relationships">
+  <p:cSld>
+    <p:spTree>
+      <p:nvGrpSpPr>
+        <p:cNvPr id="1" name=""/>
+        <p:cNvGrpSpPr/>
+        <p:nvPr/>
+      </p:nvGrpSpPr>
+      <p:grpSpPr>
+        <a:xfrm>
+          <a:off x="0" y="0"/>
+          <a:ext cx="0" cy="0"/>
+          <a:chOff x="0" y="0"/>
+          <a:chExt cx="0" cy="0"/>
+        </a:xfrm>
+      </p:grpSpPr>
+      <p:sp>
+        <p:nvSpPr>
+          <p:cNvPr id="2" name="Slide Image Placeholder 1"/>
+          <p:cNvSpPr>
+            <a:spLocks noGrp="1"/>
+          </p:cNvSpPr>
+          <p:nvPr>
+            <p:ph type="sldImg" idx="2"/>
+          </p:nvPr>
+        </p:nvSpPr>
+        <p:spPr/>
+      </p:sp>
+      <p:sp>
+        <p:nvSpPr>
+          <p:cNvPr id="3" name="Notes Placeholder 2"/>
+          <p:cNvSpPr>
+            <a:spLocks noGrp="1"/>
+          </p:cNvSpPr>
+          <p:nvPr>
+            <p:ph type="body" idx="3" sz="quarter"/>
+          </p:nvPr>
+        </p:nvSpPr>
+        <p:spPr/>
+        <p:txBody>
+          <a:bodyPr/>
+          <a:lstStyle/>
+          <a:p>
+            <a:r>
+              <a:t>Siehe Trainerhandbuch (Sektion 3) für Moderationshinweise, Timing und erwartete Teilnehmerreaktionen.</a:t>
+            </a:r>
+          </a:p>
+        </p:txBody>
+      </p:sp>
+      <p:sp>
+        <p:nvSpPr>
+          <p:cNvPr id="4" name="Slide Number Placeholder 3"/>
+          <p:cNvSpPr>
+            <a:spLocks noGrp="1"/>
+          </p:cNvSpPr>
+          <p:nvPr>
+            <p:ph type="sldNum" idx="5" sz="quarter"/>
+          </p:nvPr>
+        </p:nvSpPr>
+        <p:spPr/>
+      </p:sp>
+    </p:spTree>
+  </p:cSld>
+  <p:clrMapOvr>
+    <a:masterClrMapping/>
+  </p:clrMapOvr>
+</p:notes>
+</file>
+
+<file path=ppt/notesSlides/notesSlide2.xml><?xml version="1.0" encoding="utf-8"?>
+<p:notes xmlns:a="http://schemas.openxmlformats.org/drawingml/2006/main" xmlns:p="http://schemas.openxmlformats.org/presentationml/2006/main" xmlns:r="http://schemas.openxmlformats.org/officeDocument/2006/relationships">
+  <p:cSld>
+    <p:spTree>
+      <p:nvGrpSpPr>
+        <p:cNvPr id="1" name=""/>
+        <p:cNvGrpSpPr/>
+        <p:nvPr/>
+      </p:nvGrpSpPr>
+      <p:grpSpPr>
+        <a:xfrm>
+          <a:off x="0" y="0"/>
+          <a:ext cx="0" cy="0"/>
+          <a:chOff x="0" y="0"/>
+          <a:chExt cx="0" cy="0"/>
+        </a:xfrm>
+      </p:grpSpPr>
+      <p:sp>
+        <p:nvSpPr>
+          <p:cNvPr id="2" name="Slide Image Placeholder 1"/>
+          <p:cNvSpPr>
+            <a:spLocks noGrp="1"/>
+          </p:cNvSpPr>
+          <p:nvPr>
+            <p:ph type="sldImg" idx="2"/>
+          </p:nvPr>
+        </p:nvSpPr>
+        <p:spPr/>
+      </p:sp>
+      <p:sp>
+        <p:nvSpPr>
+          <p:cNvPr id="3" name="Notes Placeholder 2"/>
+          <p:cNvSpPr>
+            <a:spLocks noGrp="1"/>
+          </p:cNvSpPr>
+          <p:nvPr>
+            <p:ph type="body" idx="3" sz="quarter"/>
+          </p:nvPr>
+        </p:nvSpPr>
+        <p:spPr/>
+        <p:txBody>
+          <a:bodyPr/>
+          <a:lstStyle/>
+          <a:p>
+            <a:r>
+              <a:t>Siehe Trainerhandbuch (Sektion 3) für Moderationshinweise, Timing und erwartete Teilnehmerreaktionen.</a:t>
+            </a:r>
+          </a:p>
+        </p:txBody>
+      </p:sp>
+      <p:sp>
+        <p:nvSpPr>
+          <p:cNvPr id="4" name="Slide Number Placeholder 3"/>
+          <p:cNvSpPr>
+            <a:spLocks noGrp="1"/>
+          </p:cNvSpPr>
+          <p:nvPr>
+            <p:ph type="sldNum" idx="5" sz="quarter"/>
+          </p:nvPr>
+        </p:nvSpPr>
+        <p:spPr/>
+      </p:sp>
+    </p:spTree>
+  </p:cSld>
+  <p:clrMapOvr>
+    <a:masterClrMapping/>
+  </p:clrMapOvr>
+</p:notes>
+</file>
+
+<file path=ppt/notesSlides/notesSlide3.xml><?xml version="1.0" encoding="utf-8"?>
+<p:notes xmlns:a="http://schemas.openxmlformats.org/drawingml/2006/main" xmlns:p="http://schemas.openxmlformats.org/presentationml/2006/main" xmlns:r="http://schemas.openxmlformats.org/officeDocument/2006/relationships">
+  <p:cSld>
+    <p:spTree>
+      <p:nvGrpSpPr>
+        <p:cNvPr id="1" name=""/>
+        <p:cNvGrpSpPr/>
+        <p:nvPr/>
+      </p:nvGrpSpPr>
+      <p:grpSpPr>
+        <a:xfrm>
+          <a:off x="0" y="0"/>
+          <a:ext cx="0" cy="0"/>
+          <a:chOff x="0" y="0"/>
+          <a:chExt cx="0" cy="0"/>
+        </a:xfrm>
+      </p:grpSpPr>
+      <p:sp>
+        <p:nvSpPr>
+          <p:cNvPr id="2" name="Slide Image Placeholder 1"/>
+          <p:cNvSpPr>
+            <a:spLocks noGrp="1"/>
+          </p:cNvSpPr>
+          <p:nvPr>
+            <p:ph type="sldImg" idx="2"/>
+          </p:nvPr>
+        </p:nvSpPr>
+        <p:spPr/>
+      </p:sp>
+      <p:sp>
+        <p:nvSpPr>
+          <p:cNvPr id="3" name="Notes Placeholder 2"/>
+          <p:cNvSpPr>
+            <a:spLocks noGrp="1"/>
+          </p:cNvSpPr>
+          <p:nvPr>
+            <p:ph type="body" idx="3" sz="quarter"/>
+          </p:nvPr>
+        </p:nvSpPr>
+        <p:spPr/>
+        <p:txBody>
+          <a:bodyPr/>
+          <a:lstStyle/>
+          <a:p>
+            <a:r>
+              <a:t>Siehe Trainerhandbuch (Sektion 3) für Moderationshinweise, Timing und erwartete Teilnehmerreaktionen.</a:t>
+            </a:r>
+          </a:p>
+        </p:txBody>
+      </p:sp>
+      <p:sp>
+        <p:nvSpPr>
+          <p:cNvPr id="4" name="Slide Number Placeholder 3"/>
+          <p:cNvSpPr>
+            <a:spLocks noGrp="1"/>
+          </p:cNvSpPr>
+          <p:nvPr>
+            <p:ph type="sldNum" idx="5" sz="quarter"/>
+          </p:nvPr>
+        </p:nvSpPr>
+        <p:spPr/>
+      </p:sp>
+    </p:spTree>
+  </p:cSld>
+  <p:clrMapOvr>
+    <a:masterClrMapping/>
+  </p:clrMapOvr>
+</p:notes>
+</file>
+
+<file path=ppt/notesSlides/notesSlide4.xml><?xml version="1.0" encoding="utf-8"?>
+<p:notes xmlns:a="http://schemas.openxmlformats.org/drawingml/2006/main" xmlns:p="http://schemas.openxmlformats.org/presentationml/2006/main" xmlns:r="http://schemas.openxmlformats.org/officeDocument/2006/relationships">
+  <p:cSld>
+    <p:spTree>
+      <p:nvGrpSpPr>
+        <p:cNvPr id="1" name=""/>
+        <p:cNvGrpSpPr/>
+        <p:nvPr/>
+      </p:nvGrpSpPr>
+      <p:grpSpPr>
+        <a:xfrm>
+          <a:off x="0" y="0"/>
+          <a:ext cx="0" cy="0"/>
+          <a:chOff x="0" y="0"/>
+          <a:chExt cx="0" cy="0"/>
+        </a:xfrm>
+      </p:grpSpPr>
+      <p:sp>
+        <p:nvSpPr>
+          <p:cNvPr id="2" name="Slide Image Placeholder 1"/>
+          <p:cNvSpPr>
+            <a:spLocks noGrp="1"/>
+          </p:cNvSpPr>
+          <p:nvPr>
+            <p:ph type="sldImg" idx="2"/>
+          </p:nvPr>
+        </p:nvSpPr>
+        <p:spPr/>
+      </p:sp>
+      <p:sp>
+        <p:nvSpPr>
+          <p:cNvPr id="3" name="Notes Placeholder 2"/>
+          <p:cNvSpPr>
+            <a:spLocks noGrp="1"/>
+          </p:cNvSpPr>
+          <p:nvPr>
+            <p:ph type="body" idx="3" sz="quarter"/>
+          </p:nvPr>
+        </p:nvSpPr>
+        <p:spPr/>
+        <p:txBody>
+          <a:bodyPr/>
+          <a:lstStyle/>
+          <a:p>
+            <a:r>
+              <a:t>Siehe Trainerhandbuch (Sektion 3) für Moderationshinweise, Timing und erwartete Teilnehmerreaktionen.</a:t>
+            </a:r>
+          </a:p>
+        </p:txBody>
+      </p:sp>
+      <p:sp>
+        <p:nvSpPr>
+          <p:cNvPr id="4" name="Slide Number Placeholder 3"/>
+          <p:cNvSpPr>
+            <a:spLocks noGrp="1"/>
+          </p:cNvSpPr>
+          <p:nvPr>
+            <p:ph type="sldNum" idx="5" sz="quarter"/>
+          </p:nvPr>
+        </p:nvSpPr>
+        <p:spPr/>
+      </p:sp>
+    </p:spTree>
+  </p:cSld>
+  <p:clrMapOvr>
+    <a:masterClrMapping/>
+  </p:clrMapOvr>
+</p:notes>
+</file>
+
+<file path=ppt/notesSlides/notesSlide5.xml><?xml version="1.0" encoding="utf-8"?>
+<p:notes xmlns:a="http://schemas.openxmlformats.org/drawingml/2006/main" xmlns:p="http://schemas.openxmlformats.org/presentationml/2006/main" xmlns:r="http://schemas.openxmlformats.org/officeDocument/2006/relationships">
+  <p:cSld>
+    <p:spTree>
+      <p:nvGrpSpPr>
+        <p:cNvPr id="1" name=""/>
+        <p:cNvGrpSpPr/>
+        <p:nvPr/>
+      </p:nvGrpSpPr>
+      <p:grpSpPr>
+        <a:xfrm>
+          <a:off x="0" y="0"/>
+          <a:ext cx="0" cy="0"/>
+          <a:chOff x="0" y="0"/>
+          <a:chExt cx="0" cy="0"/>
+        </a:xfrm>
+      </p:grpSpPr>
+      <p:sp>
+        <p:nvSpPr>
+          <p:cNvPr id="2" name="Slide Image Placeholder 1"/>
+          <p:cNvSpPr>
+            <a:spLocks noGrp="1"/>
+          </p:cNvSpPr>
+          <p:nvPr>
+            <p:ph type="sldImg" idx="2"/>
+          </p:nvPr>
+        </p:nvSpPr>
+        <p:spPr/>
+      </p:sp>
+      <p:sp>
+        <p:nvSpPr>
+          <p:cNvPr id="3" name="Notes Placeholder 2"/>
+          <p:cNvSpPr>
+            <a:spLocks noGrp="1"/>
+          </p:cNvSpPr>
+          <p:nvPr>
+            <p:ph type="body" idx="3" sz="quarter"/>
+          </p:nvPr>
+        </p:nvSpPr>
+        <p:spPr/>
+        <p:txBody>
+          <a:bodyPr/>
+          <a:lstStyle/>
+          <a:p>
+            <a:r>
+              <a:t>Siehe Trainerhandbuch (Sektion 3) für Moderationshinweise, Timing und erwartete Teilnehmerreaktionen.</a:t>
+            </a:r>
+          </a:p>
+        </p:txBody>
+      </p:sp>
+      <p:sp>
+        <p:nvSpPr>
+          <p:cNvPr id="4" name="Slide Number Placeholder 3"/>
+          <p:cNvSpPr>
+            <a:spLocks noGrp="1"/>
+          </p:cNvSpPr>
+          <p:nvPr>
+            <p:ph type="sldNum" idx="5" sz="quarter"/>
+          </p:nvPr>
+        </p:nvSpPr>
+        <p:spPr/>
+      </p:sp>
+    </p:spTree>
+  </p:cSld>
+  <p:clrMapOvr>
+    <a:masterClrMapping/>
+  </p:clrMapOvr>
+</p:notes>
+</file>
+
+<file path=ppt/notesSlides/notesSlide6.xml><?xml version="1.0" encoding="utf-8"?>
+<p:notes xmlns:a="http://schemas.openxmlformats.org/drawingml/2006/main" xmlns:p="http://schemas.openxmlformats.org/presentationml/2006/main" xmlns:r="http://schemas.openxmlformats.org/officeDocument/2006/relationships">
+  <p:cSld>
+    <p:spTree>
+      <p:nvGrpSpPr>
+        <p:cNvPr id="1" name=""/>
+        <p:cNvGrpSpPr/>
+        <p:nvPr/>
+      </p:nvGrpSpPr>
+      <p:grpSpPr>
+        <a:xfrm>
+          <a:off x="0" y="0"/>
+          <a:ext cx="0" cy="0"/>
+          <a:chOff x="0" y="0"/>
+          <a:chExt cx="0" cy="0"/>
+        </a:xfrm>
+      </p:grpSpPr>
+      <p:sp>
+        <p:nvSpPr>
+          <p:cNvPr id="2" name="Slide Image Placeholder 1"/>
+          <p:cNvSpPr>
+            <a:spLocks noGrp="1"/>
+          </p:cNvSpPr>
+          <p:nvPr>
+            <p:ph type="sldImg" idx="2"/>
+          </p:nvPr>
+        </p:nvSpPr>
+        <p:spPr/>
+      </p:sp>
+      <p:sp>
+        <p:nvSpPr>
+          <p:cNvPr id="3" name="Notes Placeholder 2"/>
+          <p:cNvSpPr>
+            <a:spLocks noGrp="1"/>
+          </p:cNvSpPr>
+          <p:nvPr>
+            <p:ph type="body" idx="3" sz="quarter"/>
+          </p:nvPr>
+        </p:nvSpPr>
+        <p:spPr/>
+        <p:txBody>
+          <a:bodyPr/>
+          <a:lstStyle/>
+          <a:p>
+            <a:r>
+              <a:t>Siehe Trainerhandbuch (Sektion 3) für Moderationshinweise, Timing und erwartete Teilnehmerreaktionen.</a:t>
+            </a:r>
+          </a:p>
+        </p:txBody>
+      </p:sp>
+      <p:sp>
+        <p:nvSpPr>
+          <p:cNvPr id="4" name="Slide Number Placeholder 3"/>
+          <p:cNvSpPr>
+            <a:spLocks noGrp="1"/>
+          </p:cNvSpPr>
+          <p:nvPr>
+            <p:ph type="sldNum" idx="5" sz="quarter"/>
+          </p:nvPr>
+        </p:nvSpPr>
+        <p:spPr/>
+      </p:sp>
+    </p:spTree>
+  </p:cSld>
+  <p:clrMapOvr>
+    <a:masterClrMapping/>
+  </p:clrMapOvr>
+</p:notes>
+</file>
+
+<file path=ppt/notesSlides/notesSlide7.xml><?xml version="1.0" encoding="utf-8"?>
+<p:notes xmlns:a="http://schemas.openxmlformats.org/drawingml/2006/main" xmlns:p="http://schemas.openxmlformats.org/presentationml/2006/main" xmlns:r="http://schemas.openxmlformats.org/officeDocument/2006/relationships">
+  <p:cSld>
+    <p:spTree>
+      <p:nvGrpSpPr>
+        <p:cNvPr id="1" name=""/>
+        <p:cNvGrpSpPr/>
+        <p:nvPr/>
+      </p:nvGrpSpPr>
+      <p:grpSpPr>
+        <a:xfrm>
+          <a:off x="0" y="0"/>
+          <a:ext cx="0" cy="0"/>
+          <a:chOff x="0" y="0"/>
+          <a:chExt cx="0" cy="0"/>
+        </a:xfrm>
+      </p:grpSpPr>
+      <p:sp>
+        <p:nvSpPr>
+          <p:cNvPr id="2" name="Slide Image Placeholder 1"/>
+          <p:cNvSpPr>
+            <a:spLocks noGrp="1"/>
+          </p:cNvSpPr>
+          <p:nvPr>
+            <p:ph type="sldImg" idx="2"/>
+          </p:nvPr>
+        </p:nvSpPr>
+        <p:spPr/>
+      </p:sp>
+      <p:sp>
+        <p:nvSpPr>
+          <p:cNvPr id="3" name="Notes Placeholder 2"/>
+          <p:cNvSpPr>
+            <a:spLocks noGrp="1"/>
+          </p:cNvSpPr>
+          <p:nvPr>
+            <p:ph type="body" idx="3" sz="quarter"/>
+          </p:nvPr>
+        </p:nvSpPr>
+        <p:spPr/>
+        <p:txBody>
+          <a:bodyPr/>
+          <a:lstStyle/>
+          <a:p>
+            <a:r>
+              <a:t>Siehe Trainerhandbuch (Sektion 3) für Moderationshinweise, Timing und erwartete Teilnehmerreaktionen.</a:t>
+            </a:r>
+          </a:p>
+        </p:txBody>
+      </p:sp>
+      <p:sp>
+        <p:nvSpPr>
+          <p:cNvPr id="4" name="Slide Number Placeholder 3"/>
+          <p:cNvSpPr>
+            <a:spLocks noGrp="1"/>
+          </p:cNvSpPr>
+          <p:nvPr>
+            <p:ph type="sldNum" idx="5" sz="quarter"/>
+          </p:nvPr>
+        </p:nvSpPr>
+        <p:spPr/>
+      </p:sp>
+    </p:spTree>
+  </p:cSld>
+  <p:clrMapOvr>
+    <a:masterClrMapping/>
+  </p:clrMapOvr>
+</p:notes>
+</file>
+
+<file path=ppt/notesSlides/notesSlide8.xml><?xml version="1.0" encoding="utf-8"?>
+<p:notes xmlns:a="http://schemas.openxmlformats.org/drawingml/2006/main" xmlns:p="http://schemas.openxmlformats.org/presentationml/2006/main" xmlns:r="http://schemas.openxmlformats.org/officeDocument/2006/relationships">
+  <p:cSld>
+    <p:spTree>
+      <p:nvGrpSpPr>
+        <p:cNvPr id="1" name=""/>
+        <p:cNvGrpSpPr/>
+        <p:nvPr/>
+      </p:nvGrpSpPr>
+      <p:grpSpPr>
+        <a:xfrm>
+          <a:off x="0" y="0"/>
+          <a:ext cx="0" cy="0"/>
+          <a:chOff x="0" y="0"/>
+          <a:chExt cx="0" cy="0"/>
+        </a:xfrm>
+      </p:grpSpPr>
+      <p:sp>
+        <p:nvSpPr>
+          <p:cNvPr id="2" name="Slide Image Placeholder 1"/>
+          <p:cNvSpPr>
+            <a:spLocks noGrp="1"/>
+          </p:cNvSpPr>
+          <p:nvPr>
+            <p:ph type="sldImg" idx="2"/>
+          </p:nvPr>
+        </p:nvSpPr>
+        <p:spPr/>
+      </p:sp>
+      <p:sp>
+        <p:nvSpPr>
+          <p:cNvPr id="3" name="Notes Placeholder 2"/>
+          <p:cNvSpPr>
+            <a:spLocks noGrp="1"/>
+          </p:cNvSpPr>
+          <p:nvPr>
+            <p:ph type="body" idx="3" sz="quarter"/>
+          </p:nvPr>
+        </p:nvSpPr>
+        <p:spPr/>
+        <p:txBody>
+          <a:bodyPr/>
+          <a:lstStyle/>
+          <a:p>
+            <a:r>
+              <a:t>Siehe Trainerhandbuch (Sektion 3) für Moderationshinweise, Timing und erwartete Teilnehmerreaktionen.</a:t>
+            </a:r>
+          </a:p>
+        </p:txBody>
+      </p:sp>
+      <p:sp>
+        <p:nvSpPr>
+          <p:cNvPr id="4" name="Slide Number Placeholder 3"/>
+          <p:cNvSpPr>
+            <a:spLocks noGrp="1"/>
+          </p:cNvSpPr>
+          <p:nvPr>
+            <p:ph type="sldNum" idx="5" sz="quarter"/>
+          </p:nvPr>
+        </p:nvSpPr>
+        <p:spPr/>
+      </p:sp>
+    </p:spTree>
+  </p:cSld>
+  <p:clrMapOvr>
+    <a:masterClrMapping/>
+  </p:clrMapOvr>
+</p:notes>
+</file>
+
+<file path=ppt/notesSlides/notesSlide9.xml><?xml version="1.0" encoding="utf-8"?>
+<p:notes xmlns:a="http://schemas.openxmlformats.org/drawingml/2006/main" xmlns:p="http://schemas.openxmlformats.org/presentationml/2006/main" xmlns:r="http://schemas.openxmlformats.org/officeDocument/2006/relationships">
+  <p:cSld>
+    <p:spTree>
+      <p:nvGrpSpPr>
+        <p:cNvPr id="1" name=""/>
+        <p:cNvGrpSpPr/>
+        <p:nvPr/>
+      </p:nvGrpSpPr>
+      <p:grpSpPr>
+        <a:xfrm>
+          <a:off x="0" y="0"/>
+          <a:ext cx="0" cy="0"/>
+          <a:chOff x="0" y="0"/>
+          <a:chExt cx="0" cy="0"/>
+        </a:xfrm>
+      </p:grpSpPr>
+      <p:sp>
+        <p:nvSpPr>
+          <p:cNvPr id="2" name="Slide Image Placeholder 1"/>
+          <p:cNvSpPr>
+            <a:spLocks noGrp="1"/>
+          </p:cNvSpPr>
+          <p:nvPr>
+            <p:ph type="sldImg" idx="2"/>
+          </p:nvPr>
+        </p:nvSpPr>
+        <p:spPr/>
+      </p:sp>
+      <p:sp>
+        <p:nvSpPr>
+          <p:cNvPr id="3" name="Notes Placeholder 2"/>
+          <p:cNvSpPr>
+            <a:spLocks noGrp="1"/>
+          </p:cNvSpPr>
+          <p:nvPr>
+            <p:ph type="body" idx="3" sz="quarter"/>
+          </p:nvPr>
+        </p:nvSpPr>
+        <p:spPr/>
+        <p:txBody>
+          <a:bodyPr/>
+          <a:lstStyle/>
+          <a:p>
+            <a:r>
+              <a:t>Siehe Trainerhandbuch (Sektion 3) für Moderationshinweise, Timing und erwartete Teilnehmerreaktionen.</a:t>
+            </a:r>
+          </a:p>
+        </p:txBody>
+      </p:sp>
+      <p:sp>
+        <p:nvSpPr>
+          <p:cNvPr id="4" name="Slide Number Placeholder 3"/>
+          <p:cNvSpPr>
+            <a:spLocks noGrp="1"/>
+          </p:cNvSpPr>
+          <p:nvPr>
+            <p:ph type="sldNum" idx="5" sz="quarter"/>
+          </p:nvPr>
+        </p:nvSpPr>
+        <p:spPr/>
+      </p:sp>
+    </p:spTree>
+  </p:cSld>
+  <p:clrMapOvr>
+    <a:masterClrMapping/>
+  </p:clrMapOvr>
+</p:notes>
 </file>
 
 <file path=ppt/slideLayouts/slideLayout1.xml><?xml version="1.0" encoding="utf-8"?>
@@ -4542,44 +5522,6 @@
                 </a:solidFill>
                 <a:latin typeface="Arial"/>
               </a:rPr>
-              <a:t>(Daten aus agree-NMZ-Ranking, Stand: _____________)</a:t>
-            </a:r>
-          </a:p>
-          <a:p>
-            <a:pPr>
-              <a:spcBef>
-                <a:spcPts val="400"/>
-              </a:spcBef>
-              <a:spcAft>
-                <a:spcPts val="200"/>
-              </a:spcAft>
-            </a:pPr>
-            <a:r>
-              <a:rPr sz="1200">
-                <a:solidFill>
-                  <a:srgbClr val="3D5466"/>
-                </a:solidFill>
-                <a:latin typeface="Arial"/>
-              </a:rPr>
-              <a:t>Bestand-NMZ gesamt: ________ % | Interner Benchmark: ________ %</a:t>
-            </a:r>
-          </a:p>
-          <a:p>
-            <a:pPr>
-              <a:spcBef>
-                <a:spcPts val="400"/>
-              </a:spcBef>
-              <a:spcAft>
-                <a:spcPts val="200"/>
-              </a:spcAft>
-            </a:pPr>
-            <a:r>
-              <a:rPr sz="1200">
-                <a:solidFill>
-                  <a:srgbClr val="3D5466"/>
-                </a:solidFill>
-                <a:latin typeface="Arial"/>
-              </a:rPr>
               <a:t>Dominantes Schwachfeld in meinem Bestand:</a:t>
             </a:r>
           </a:p>
@@ -4998,25 +5940,6 @@
                 </a:solidFill>
                 <a:latin typeface="Arial"/>
               </a:rPr>
-              <a:t>Bestand-NMZ von ________ % auf ________ % verbessern.</a:t>
-            </a:r>
-          </a:p>
-          <a:p>
-            <a:pPr>
-              <a:spcBef>
-                <a:spcPts val="400"/>
-              </a:spcBef>
-              <a:spcAft>
-                <a:spcPts val="200"/>
-              </a:spcAft>
-            </a:pPr>
-            <a:r>
-              <a:rPr sz="1200">
-                <a:solidFill>
-                  <a:srgbClr val="3D5466"/>
-                </a:solidFill>
-                <a:latin typeface="Arial"/>
-              </a:rPr>
               <a:t># 5. PRAXISTRANSFER</a:t>
             </a:r>
           </a:p>
@@ -6209,7 +7132,7 @@
                 </a:solidFill>
                 <a:latin typeface="Arial"/>
               </a:rPr>
-              <a:t>Rolfes (1999) betont, dass Banken ohne normierte Ertragskennzahlen systematisch Kapital in renditeschwache Engagements lenken, weil die absoluten Beträge groß aussehen.</a:t>
+              <a:t>Rolfes (1999 ) betont, dass Banken ohne normierte Ertragskennzahlen systematisch Kapital in renditeschwache Engagements lenken, weil die absoluten Beträge groß aussehen.</a:t>
             </a:r>
           </a:p>
           <a:p>
@@ -8682,4 +9605,324 @@
   </a:objectDefaults>
   <a:extraClrSchemeLst/>
 </a:theme>
+</file>
+
+<file path=ppt/theme/theme2.xml><?xml version="1.0" encoding="utf-8"?>
+<a:theme xmlns:a="http://schemas.openxmlformats.org/drawingml/2006/main" name="Office Theme">
+  <a:themeElements>
+    <a:clrScheme name="Office">
+      <a:dk1>
+        <a:sysClr val="windowText" lastClr="000000"/>
+      </a:dk1>
+      <a:lt1>
+        <a:sysClr val="window" lastClr="FFFFFF"/>
+      </a:lt1>
+      <a:dk2>
+        <a:srgbClr val="1F497D"/>
+      </a:dk2>
+      <a:lt2>
+        <a:srgbClr val="EEECE1"/>
+      </a:lt2>
+      <a:accent1>
+        <a:srgbClr val="4F81BD"/>
+      </a:accent1>
+      <a:accent2>
+        <a:srgbClr val="C0504D"/>
+      </a:accent2>
+      <a:accent3>
+        <a:srgbClr val="9BBB59"/>
+      </a:accent3>
+      <a:accent4>
+        <a:srgbClr val="8064A2"/>
+      </a:accent4>
+      <a:accent5>
+        <a:srgbClr val="4BACC6"/>
+      </a:accent5>
+      <a:accent6>
+        <a:srgbClr val="F79646"/>
+      </a:accent6>
+      <a:hlink>
+        <a:srgbClr val="0000FF"/>
+      </a:hlink>
+      <a:folHlink>
+        <a:srgbClr val="800080"/>
+      </a:folHlink>
+    </a:clrScheme>
+    <a:fontScheme name="Office">
+      <a:majorFont>
+        <a:latin typeface="Calibri"/>
+        <a:ea typeface=""/>
+        <a:cs typeface=""/>
+        <a:font script="Jpan" typeface="ＭＳ Ｐゴシック"/>
+        <a:font script="Hang" typeface="맑은 고딕"/>
+        <a:font script="Hans" typeface="宋体"/>
+        <a:font script="Hant" typeface="新細明體"/>
+        <a:font script="Arab" typeface="Times New Roman"/>
+        <a:font script="Hebr" typeface="Times New Roman"/>
+        <a:font script="Thai" typeface="Angsana New"/>
+        <a:font script="Ethi" typeface="Nyala"/>
+        <a:font script="Beng" typeface="Vrinda"/>
+        <a:font script="Gujr" typeface="Shruti"/>
+        <a:font script="Khmr" typeface="MoolBoran"/>
+        <a:font script="Knda" typeface="Tunga"/>
+        <a:font script="Guru" typeface="Raavi"/>
+        <a:font script="Cans" typeface="Euphemia"/>
+        <a:font script="Cher" typeface="Plantagenet Cherokee"/>
+        <a:font script="Yiii" typeface="Microsoft Yi Baiti"/>
+        <a:font script="Tibt" typeface="Microsoft Himalaya"/>
+        <a:font script="Thaa" typeface="MV Boli"/>
+        <a:font script="Deva" typeface="Mangal"/>
+        <a:font script="Telu" typeface="Gautami"/>
+        <a:font script="Taml" typeface="Latha"/>
+        <a:font script="Syrc" typeface="Estrangelo Edessa"/>
+        <a:font script="Orya" typeface="Kalinga"/>
+        <a:font script="Mlym" typeface="Kartika"/>
+        <a:font script="Laoo" typeface="DokChampa"/>
+        <a:font script="Sinh" typeface="Iskoola Pota"/>
+        <a:font script="Mong" typeface="Mongolian Baiti"/>
+        <a:font script="Viet" typeface="Times New Roman"/>
+        <a:font script="Uigh" typeface="Microsoft Uighur"/>
+        <a:font script="Geor" typeface="Sylfaen"/>
+      </a:majorFont>
+      <a:minorFont>
+        <a:latin typeface="Calibri"/>
+        <a:ea typeface=""/>
+        <a:cs typeface=""/>
+        <a:font script="Jpan" typeface="ＭＳ Ｐゴシック"/>
+        <a:font script="Hang" typeface="맑은 고딕"/>
+        <a:font script="Hans" typeface="宋体"/>
+        <a:font script="Hant" typeface="新細明體"/>
+        <a:font script="Arab" typeface="Arial"/>
+        <a:font script="Hebr" typeface="Arial"/>
+        <a:font script="Thai" typeface="Cordia New"/>
+        <a:font script="Ethi" typeface="Nyala"/>
+        <a:font script="Beng" typeface="Vrinda"/>
+        <a:font script="Gujr" typeface="Shruti"/>
+        <a:font script="Khmr" typeface="DaunPenh"/>
+        <a:font script="Knda" typeface="Tunga"/>
+        <a:font script="Guru" typeface="Raavi"/>
+        <a:font script="Cans" typeface="Euphemia"/>
+        <a:font script="Cher" typeface="Plantagenet Cherokee"/>
+        <a:font script="Yiii" typeface="Microsoft Yi Baiti"/>
+        <a:font script="Tibt" typeface="Microsoft Himalaya"/>
+        <a:font script="Thaa" typeface="MV Boli"/>
+        <a:font script="Deva" typeface="Mangal"/>
+        <a:font script="Telu" typeface="Gautami"/>
+        <a:font script="Taml" typeface="Latha"/>
+        <a:font script="Syrc" typeface="Estrangelo Edessa"/>
+        <a:font script="Orya" typeface="Kalinga"/>
+        <a:font script="Mlym" typeface="Kartika"/>
+        <a:font script="Laoo" typeface="DokChampa"/>
+        <a:font script="Sinh" typeface="Iskoola Pota"/>
+        <a:font script="Mong" typeface="Mongolian Baiti"/>
+        <a:font script="Viet" typeface="Arial"/>
+        <a:font script="Uigh" typeface="Microsoft Uighur"/>
+        <a:font script="Geor" typeface="Sylfaen"/>
+      </a:minorFont>
+    </a:fontScheme>
+    <a:fmtScheme name="Office">
+      <a:fillStyleLst>
+        <a:solidFill>
+          <a:schemeClr val="phClr"/>
+        </a:solidFill>
+        <a:gradFill rotWithShape="1">
+          <a:gsLst>
+            <a:gs pos="0">
+              <a:schemeClr val="phClr">
+                <a:tint val="50000"/>
+                <a:satMod val="300000"/>
+              </a:schemeClr>
+            </a:gs>
+            <a:gs pos="35000">
+              <a:schemeClr val="phClr">
+                <a:tint val="37000"/>
+                <a:satMod val="300000"/>
+              </a:schemeClr>
+            </a:gs>
+            <a:gs pos="100000">
+              <a:schemeClr val="phClr">
+                <a:tint val="15000"/>
+                <a:satMod val="350000"/>
+              </a:schemeClr>
+            </a:gs>
+          </a:gsLst>
+          <a:lin ang="16200000" scaled="1"/>
+        </a:gradFill>
+        <a:gradFill rotWithShape="1">
+          <a:gsLst>
+            <a:gs pos="0">
+              <a:schemeClr val="phClr">
+                <a:tint val="100000"/>
+                <a:shade val="100000"/>
+                <a:satMod val="130000"/>
+              </a:schemeClr>
+            </a:gs>
+            <a:gs pos="100000">
+              <a:schemeClr val="phClr">
+                <a:tint val="50000"/>
+                <a:shade val="100000"/>
+                <a:satMod val="350000"/>
+              </a:schemeClr>
+            </a:gs>
+          </a:gsLst>
+          <a:lin ang="16200000" scaled="0"/>
+        </a:gradFill>
+      </a:fillStyleLst>
+      <a:lnStyleLst>
+        <a:ln w="9525" cap="flat" cmpd="sng" algn="ctr">
+          <a:solidFill>
+            <a:schemeClr val="phClr">
+              <a:shade val="95000"/>
+              <a:satMod val="105000"/>
+            </a:schemeClr>
+          </a:solidFill>
+          <a:prstDash val="solid"/>
+        </a:ln>
+        <a:ln w="25400" cap="flat" cmpd="sng" algn="ctr">
+          <a:solidFill>
+            <a:schemeClr val="phClr"/>
+          </a:solidFill>
+          <a:prstDash val="solid"/>
+        </a:ln>
+        <a:ln w="38100" cap="flat" cmpd="sng" algn="ctr">
+          <a:solidFill>
+            <a:schemeClr val="phClr"/>
+          </a:solidFill>
+          <a:prstDash val="solid"/>
+        </a:ln>
+      </a:lnStyleLst>
+      <a:effectStyleLst>
+        <a:effectStyle>
+          <a:effectLst>
+            <a:outerShdw blurRad="40000" dist="20000" dir="5400000" rotWithShape="0">
+              <a:srgbClr val="000000">
+                <a:alpha val="38000"/>
+              </a:srgbClr>
+            </a:outerShdw>
+          </a:effectLst>
+        </a:effectStyle>
+        <a:effectStyle>
+          <a:effectLst>
+            <a:outerShdw blurRad="40000" dist="23000" dir="5400000" rotWithShape="0">
+              <a:srgbClr val="000000">
+                <a:alpha val="35000"/>
+              </a:srgbClr>
+            </a:outerShdw>
+          </a:effectLst>
+        </a:effectStyle>
+        <a:effectStyle>
+          <a:effectLst>
+            <a:outerShdw blurRad="40000" dist="23000" dir="5400000" rotWithShape="0">
+              <a:srgbClr val="000000">
+                <a:alpha val="35000"/>
+              </a:srgbClr>
+            </a:outerShdw>
+          </a:effectLst>
+          <a:scene3d>
+            <a:camera prst="orthographicFront">
+              <a:rot lat="0" lon="0" rev="0"/>
+            </a:camera>
+            <a:lightRig rig="threePt" dir="t">
+              <a:rot lat="0" lon="0" rev="1200000"/>
+            </a:lightRig>
+          </a:scene3d>
+          <a:sp3d>
+            <a:bevelT w="63500" h="25400"/>
+          </a:sp3d>
+        </a:effectStyle>
+      </a:effectStyleLst>
+      <a:bgFillStyleLst>
+        <a:solidFill>
+          <a:schemeClr val="phClr"/>
+        </a:solidFill>
+        <a:gradFill rotWithShape="1">
+          <a:gsLst>
+            <a:gs pos="0">
+              <a:schemeClr val="phClr">
+                <a:tint val="40000"/>
+                <a:satMod val="350000"/>
+              </a:schemeClr>
+            </a:gs>
+            <a:gs pos="40000">
+              <a:schemeClr val="phClr">
+                <a:tint val="45000"/>
+                <a:shade val="99000"/>
+                <a:satMod val="350000"/>
+              </a:schemeClr>
+            </a:gs>
+            <a:gs pos="100000">
+              <a:schemeClr val="phClr">
+                <a:shade val="20000"/>
+                <a:satMod val="255000"/>
+              </a:schemeClr>
+            </a:gs>
+          </a:gsLst>
+          <a:path path="circle">
+            <a:fillToRect l="50000" t="-80000" r="50000" b="180000"/>
+          </a:path>
+        </a:gradFill>
+        <a:gradFill rotWithShape="1">
+          <a:gsLst>
+            <a:gs pos="0">
+              <a:schemeClr val="phClr">
+                <a:tint val="80000"/>
+                <a:satMod val="300000"/>
+              </a:schemeClr>
+            </a:gs>
+            <a:gs pos="100000">
+              <a:schemeClr val="phClr">
+                <a:shade val="30000"/>
+                <a:satMod val="200000"/>
+              </a:schemeClr>
+            </a:gs>
+          </a:gsLst>
+          <a:path path="circle">
+            <a:fillToRect l="50000" t="50000" r="50000" b="50000"/>
+          </a:path>
+        </a:gradFill>
+      </a:bgFillStyleLst>
+    </a:fmtScheme>
+  </a:themeElements>
+  <a:objectDefaults>
+    <a:spDef>
+      <a:spPr/>
+      <a:bodyPr/>
+      <a:lstStyle/>
+      <a:style>
+        <a:lnRef idx="1">
+          <a:schemeClr val="accent1"/>
+        </a:lnRef>
+        <a:fillRef idx="3">
+          <a:schemeClr val="accent1"/>
+        </a:fillRef>
+        <a:effectRef idx="2">
+          <a:schemeClr val="accent1"/>
+        </a:effectRef>
+        <a:fontRef idx="minor">
+          <a:schemeClr val="lt1"/>
+        </a:fontRef>
+      </a:style>
+    </a:spDef>
+    <a:lnDef>
+      <a:spPr/>
+      <a:bodyPr/>
+      <a:lstStyle/>
+      <a:style>
+        <a:lnRef idx="2">
+          <a:schemeClr val="accent1"/>
+        </a:lnRef>
+        <a:fillRef idx="0">
+          <a:schemeClr val="accent1"/>
+        </a:fillRef>
+        <a:effectRef idx="1">
+          <a:schemeClr val="accent1"/>
+        </a:effectRef>
+        <a:fontRef idx="minor">
+          <a:schemeClr val="tx1"/>
+        </a:fontRef>
+      </a:style>
+    </a:lnDef>
+  </a:objectDefaults>
+  <a:extraClrSchemeLst/>
+</a:theme>
 </file>
--- a/protected-downloads/praesentation/M16.pptx
+++ b/protected-downloads/praesentation/M16.pptx
@@ -5922,25 +5922,6 @@
                 <a:latin typeface="Arial"/>
               </a:rPr>
               <a:t>Mein Ziel für die nächsten 90 Tage:</a:t>
-            </a:r>
-          </a:p>
-          <a:p>
-            <a:pPr>
-              <a:spcBef>
-                <a:spcPts val="400"/>
-              </a:spcBef>
-              <a:spcAft>
-                <a:spcPts val="200"/>
-              </a:spcAft>
-            </a:pPr>
-            <a:r>
-              <a:rPr sz="1200">
-                <a:solidFill>
-                  <a:srgbClr val="3D5466"/>
-                </a:solidFill>
-                <a:latin typeface="Arial"/>
-              </a:rPr>
-              <a:t># 5. PRAXISTRANSFER</a:t>
             </a:r>
           </a:p>
         </p:txBody>

--- a/protected-downloads/praesentation/M16.pptx
+++ b/protected-downloads/praesentation/M16.pptx
@@ -8,7 +8,7 @@
     <p:sldId id="256" r:id="rId7"/>
     <p:sldId id="257" r:id="rId8"/>
     <p:sldId id="258" r:id="rId9"/>
-    <p:sldId id="259" r:id="rId11"/>
+    <p:sldId id="259" r:id="rId10"/>
     <p:sldId id="260" r:id="rId12"/>
     <p:sldId id="261" r:id="rId13"/>
     <p:sldId id="262" r:id="rId14"/>
@@ -17,6 +17,7 @@
     <p:sldId id="265" r:id="rId17"/>
     <p:sldId id="266" r:id="rId18"/>
     <p:sldId id="267" r:id="rId19"/>
+    <p:sldId id="268" r:id="rId20"/>
   </p:sldIdLst>
   <p:sldSz cx="12188952" cy="6858000" type="screen4x3"/>
   <p:notesSz cx="6858000" cy="9144000"/>
@@ -4891,7 +4892,7 @@
                 </a:solidFill>
                 <a:latin typeface="Source Serif 4"/>
               </a:rPr>
-              <a:t>Schritt 3: Handeln und dokumentieren</a:t>
+              <a:t>Schritt 2: Priorisieren</a:t>
             </a:r>
           </a:p>
         </p:txBody>
@@ -4933,7 +4934,7 @@
                 </a:solidFill>
                 <a:latin typeface="Arial"/>
               </a:rPr>
-              <a:t>Für jeden Prio-1-Kunden: konkrete Maßnahme definieren, Termin setzen, in agree dokumentieren. Die Maßnahme muss einem der vier NMZ-Hebel zugeordnet sein:</a:t>
+              <a:t>Nicht alle fünf auf einmal angehen. Priorisierung nach zwei Kriterien:</a:t>
             </a:r>
           </a:p>
           <a:p>
@@ -4952,7 +4953,7 @@
                 </a:solidFill>
                 <a:latin typeface="Arial"/>
               </a:rPr>
-              <a:t>▸  Zinshebel: Konditionengespräch vorbereiten (→ M14)</a:t>
+              <a:t>▸  Potenzial der Verbesserung: Wie stark könnte sich die NMZ verbessern?</a:t>
             </a:r>
           </a:p>
           <a:p>
@@ -4971,7 +4972,7 @@
                 </a:solidFill>
                 <a:latin typeface="Arial"/>
               </a:rPr>
-              <a:t>▸  Verbundhebel: Verbundpartner-Termin vereinbaren (→ M13)</a:t>
+              <a:t>▸  Hebelverfügbarkeit: Wie schnell und einfach lässt sich der Hebel aktivieren?</a:t>
             </a:r>
           </a:p>
           <a:p>
@@ -4984,165 +4985,13 @@
               </a:spcAft>
             </a:pPr>
             <a:r>
-              <a:rPr sz="1300">
+              <a:rPr sz="1200">
                 <a:solidFill>
                   <a:srgbClr val="3D5466"/>
                 </a:solidFill>
                 <a:latin typeface="Arial"/>
               </a:rPr>
-              <a:t>▸  Risikohebel: Rating-Gespräch, Besicherungsoptimierung (gemeinsam mit Marktfolge/Kredit)</a:t>
-            </a:r>
-          </a:p>
-          <a:p>
-            <a:pPr>
-              <a:spcBef>
-                <a:spcPts val="400"/>
-              </a:spcBef>
-              <a:spcAft>
-                <a:spcPts val="200"/>
-              </a:spcAft>
-            </a:pPr>
-            <a:r>
-              <a:rPr sz="1300">
-                <a:solidFill>
-                  <a:srgbClr val="3D5466"/>
-                </a:solidFill>
-                <a:latin typeface="Arial"/>
-              </a:rPr>
-              <a:t>▸  Kostenhebel: Betreuungsintensität überprüfen (Führungsgespräch)</a:t>
-            </a:r>
-          </a:p>
-          <a:p>
-            <a:pPr>
-              <a:spcBef>
-                <a:spcPts val="600"/>
-              </a:spcBef>
-              <a:spcAft>
-                <a:spcPts val="200"/>
-              </a:spcAft>
-            </a:pPr>
-            <a:r>
-              <a:rPr sz="1200" i="1">
-                <a:solidFill>
-                  <a:srgbClr val="3D5466"/>
-                </a:solidFill>
-                <a:latin typeface="Arial"/>
-              </a:rPr>
-              <a:t>→  Stichwort-Leitfaden: Margenverteidigung im Konditionsgespräch</a:t>
-            </a:r>
-          </a:p>
-          <a:p>
-            <a:pPr>
-              <a:spcBef>
-                <a:spcPts val="600"/>
-              </a:spcBef>
-              <a:spcAft>
-                <a:spcPts val="200"/>
-              </a:spcAft>
-            </a:pPr>
-            <a:r>
-              <a:rPr sz="1200" i="1">
-                <a:solidFill>
-                  <a:srgbClr val="3D5466"/>
-                </a:solidFill>
-                <a:latin typeface="Arial"/>
-              </a:rPr>
-              <a:t>→  Das Ablesen der NMZ ist der einfache Teil. Das Gespräch mit dem Kunden über eine Margenanpassung ist der schwierige. Drei praxiserprobte Argumentationslinien:</a:t>
-            </a:r>
-          </a:p>
-          <a:p>
-            <a:pPr>
-              <a:spcBef>
-                <a:spcPts val="400"/>
-              </a:spcBef>
-              <a:spcAft>
-                <a:spcPts val="200"/>
-              </a:spcAft>
-            </a:pPr>
-            <a:r>
-              <a:rPr sz="1200">
-                <a:solidFill>
-                  <a:srgbClr val="3D5466"/>
-                </a:solidFill>
-                <a:latin typeface="Arial"/>
-              </a:rPr>
-              <a:t>## 4.5 Praxiscase: Felix Braun optimiert seinen Bestand</a:t>
-            </a:r>
-          </a:p>
-          <a:p>
-            <a:pPr>
-              <a:spcBef>
-                <a:spcPts val="400"/>
-              </a:spcBef>
-              <a:spcAft>
-                <a:spcPts val="200"/>
-              </a:spcAft>
-            </a:pPr>
-            <a:r>
-              <a:rPr sz="1200">
-                <a:solidFill>
-                  <a:srgbClr val="3D5466"/>
-                </a:solidFill>
-                <a:latin typeface="Arial"/>
-              </a:rPr>
-              <a:t>Ausgangssituation</a:t>
-            </a:r>
-          </a:p>
-          <a:p>
-            <a:pPr>
-              <a:spcBef>
-                <a:spcPts val="400"/>
-              </a:spcBef>
-              <a:spcAft>
-                <a:spcPts val="200"/>
-              </a:spcAft>
-            </a:pPr>
-            <a:r>
-              <a:rPr sz="1200">
-                <a:solidFill>
-                  <a:srgbClr val="3D5466"/>
-                </a:solidFill>
-                <a:latin typeface="Arial"/>
-              </a:rPr>
-              <a:t>Analyse</a:t>
-            </a:r>
-          </a:p>
-          <a:p>
-            <a:pPr>
-              <a:spcBef>
-                <a:spcPts val="400"/>
-              </a:spcBef>
-              <a:spcAft>
-                <a:spcPts val="200"/>
-              </a:spcAft>
-            </a:pPr>
-            <a:r>
-              <a:rPr sz="1200">
-                <a:solidFill>
-                  <a:srgbClr val="3D5466"/>
-                </a:solidFill>
-                <a:latin typeface="Arial"/>
-              </a:rPr>
-              <a:t>Felix ruft das Bestandsranking auf. Er sieht sofort: Sieben Kunden haben eine NMZ unter 0,5 %, davon zwei mit negativem DB. Die Hauptursache variiert:</a:t>
-            </a:r>
-          </a:p>
-          <a:p>
-            <a:pPr>
-              <a:spcBef>
-                <a:spcPts val="400"/>
-              </a:spcBef>
-              <a:spcAft>
-                <a:spcPts val="200"/>
-              </a:spcAft>
-            </a:pPr>
-            <a:r>
-              <a:rPr sz="1200">
-                <a:solidFill>
-                  <a:srgbClr val="3D5466"/>
-                </a:solidFill>
-                <a:latin typeface="Arial"/>
-              </a:rPr>
-              <a:t>Felix priorisiert</a:t>
+              <a:t>Einfache Priorisierungsmatrix:</a:t>
             </a:r>
           </a:p>
         </p:txBody>
@@ -5480,7 +5329,7 @@
                 </a:solidFill>
                 <a:latin typeface="Source Serif 4"/>
               </a:rPr>
-              <a:t>Arbeitsblatt A: Mein NMZ-Bestandsbild</a:t>
+              <a:t>Schritt 3: Handeln und dokumentieren</a:t>
             </a:r>
           </a:p>
         </p:txBody>
@@ -5522,7 +5371,7 @@
                 </a:solidFill>
                 <a:latin typeface="Arial"/>
               </a:rPr>
-              <a:t>Dominantes Schwachfeld in meinem Bestand:</a:t>
+              <a:t>Für jeden Prio-1-Kunden: konkrete Maßnahme definieren, Termin setzen, in agree dokumentieren. Die Maßnahme muss einem der vier NMZ-Hebel zugeordnet sein:</a:t>
             </a:r>
           </a:p>
           <a:p>
@@ -5535,13 +5384,203 @@
               </a:spcAft>
             </a:pPr>
             <a:r>
-              <a:rPr sz="1200">
+              <a:rPr sz="1300">
                 <a:solidFill>
                   <a:srgbClr val="3D5466"/>
                 </a:solidFill>
                 <a:latin typeface="Arial"/>
               </a:rPr>
-              <a:t>☐ Zinsmarge zu niedrig  ☐ Verbundgeschäft fehlt  ☐ Risikokosten zu hoch  ☐ Betreuungskosten zu hoch</a:t>
+              <a:t>▸  Zinshebel: Konditionengespräch vorbereiten (→ M14)</a:t>
+            </a:r>
+          </a:p>
+          <a:p>
+            <a:pPr>
+              <a:spcBef>
+                <a:spcPts val="400"/>
+              </a:spcBef>
+              <a:spcAft>
+                <a:spcPts val="200"/>
+              </a:spcAft>
+            </a:pPr>
+            <a:r>
+              <a:rPr sz="1300">
+                <a:solidFill>
+                  <a:srgbClr val="3D5466"/>
+                </a:solidFill>
+                <a:latin typeface="Arial"/>
+              </a:rPr>
+              <a:t>▸  Verbundhebel: Verbundpartner-Termin vereinbaren (→ M13)</a:t>
+            </a:r>
+          </a:p>
+          <a:p>
+            <a:pPr>
+              <a:spcBef>
+                <a:spcPts val="400"/>
+              </a:spcBef>
+              <a:spcAft>
+                <a:spcPts val="200"/>
+              </a:spcAft>
+            </a:pPr>
+            <a:r>
+              <a:rPr sz="1300">
+                <a:solidFill>
+                  <a:srgbClr val="3D5466"/>
+                </a:solidFill>
+                <a:latin typeface="Arial"/>
+              </a:rPr>
+              <a:t>▸  Risikohebel: Rating-Gespräch, Besicherungsoptimierung (gemeinsam mit Marktfolge/Kredit)</a:t>
+            </a:r>
+          </a:p>
+          <a:p>
+            <a:pPr>
+              <a:spcBef>
+                <a:spcPts val="400"/>
+              </a:spcBef>
+              <a:spcAft>
+                <a:spcPts val="200"/>
+              </a:spcAft>
+            </a:pPr>
+            <a:r>
+              <a:rPr sz="1300">
+                <a:solidFill>
+                  <a:srgbClr val="3D5466"/>
+                </a:solidFill>
+                <a:latin typeface="Arial"/>
+              </a:rPr>
+              <a:t>▸  Kostenhebel: Betreuungsintensität überprüfen (Führungsgespräch)</a:t>
+            </a:r>
+          </a:p>
+          <a:p>
+            <a:pPr>
+              <a:spcBef>
+                <a:spcPts val="600"/>
+              </a:spcBef>
+              <a:spcAft>
+                <a:spcPts val="200"/>
+              </a:spcAft>
+            </a:pPr>
+            <a:r>
+              <a:rPr sz="1200" i="1">
+                <a:solidFill>
+                  <a:srgbClr val="3D5466"/>
+                </a:solidFill>
+                <a:latin typeface="Arial"/>
+              </a:rPr>
+              <a:t>→  Stichwort-Leitfaden: Margenverteidigung im Konditionsgespräch</a:t>
+            </a:r>
+          </a:p>
+          <a:p>
+            <a:pPr>
+              <a:spcBef>
+                <a:spcPts val="600"/>
+              </a:spcBef>
+              <a:spcAft>
+                <a:spcPts val="200"/>
+              </a:spcAft>
+            </a:pPr>
+            <a:r>
+              <a:rPr sz="1200" i="1">
+                <a:solidFill>
+                  <a:srgbClr val="3D5466"/>
+                </a:solidFill>
+                <a:latin typeface="Arial"/>
+              </a:rPr>
+              <a:t>→  Das Ablesen der NMZ ist der einfache Teil. Das Gespräch mit dem Kunden über eine Margenanpassung ist der schwierige. Drei praxiserprobte Argumentationslinien:</a:t>
+            </a:r>
+          </a:p>
+          <a:p>
+            <a:pPr>
+              <a:spcBef>
+                <a:spcPts val="400"/>
+              </a:spcBef>
+              <a:spcAft>
+                <a:spcPts val="200"/>
+              </a:spcAft>
+            </a:pPr>
+            <a:r>
+              <a:rPr sz="1200">
+                <a:solidFill>
+                  <a:srgbClr val="3D5466"/>
+                </a:solidFill>
+                <a:latin typeface="Arial"/>
+              </a:rPr>
+              <a:t>## 4.5 Praxiscase: Felix Braun optimiert seinen Bestand</a:t>
+            </a:r>
+          </a:p>
+          <a:p>
+            <a:pPr>
+              <a:spcBef>
+                <a:spcPts val="400"/>
+              </a:spcBef>
+              <a:spcAft>
+                <a:spcPts val="200"/>
+              </a:spcAft>
+            </a:pPr>
+            <a:r>
+              <a:rPr sz="1200">
+                <a:solidFill>
+                  <a:srgbClr val="3D5466"/>
+                </a:solidFill>
+                <a:latin typeface="Arial"/>
+              </a:rPr>
+              <a:t>Ausgangssituation</a:t>
+            </a:r>
+          </a:p>
+          <a:p>
+            <a:pPr>
+              <a:spcBef>
+                <a:spcPts val="400"/>
+              </a:spcBef>
+              <a:spcAft>
+                <a:spcPts val="200"/>
+              </a:spcAft>
+            </a:pPr>
+            <a:r>
+              <a:rPr sz="1200">
+                <a:solidFill>
+                  <a:srgbClr val="3D5466"/>
+                </a:solidFill>
+                <a:latin typeface="Arial"/>
+              </a:rPr>
+              <a:t>Analyse</a:t>
+            </a:r>
+          </a:p>
+          <a:p>
+            <a:pPr>
+              <a:spcBef>
+                <a:spcPts val="400"/>
+              </a:spcBef>
+              <a:spcAft>
+                <a:spcPts val="200"/>
+              </a:spcAft>
+            </a:pPr>
+            <a:r>
+              <a:rPr sz="1200">
+                <a:solidFill>
+                  <a:srgbClr val="3D5466"/>
+                </a:solidFill>
+                <a:latin typeface="Arial"/>
+              </a:rPr>
+              <a:t>Felix ruft das Bestandsranking auf. Er sieht sofort: Sieben Kunden haben eine NMZ unter 0,5 %, davon zwei mit negativem DB. Die Hauptursache variiert:</a:t>
+            </a:r>
+          </a:p>
+          <a:p>
+            <a:pPr>
+              <a:spcBef>
+                <a:spcPts val="400"/>
+              </a:spcBef>
+              <a:spcAft>
+                <a:spcPts val="200"/>
+              </a:spcAft>
+            </a:pPr>
+            <a:r>
+              <a:rPr sz="1200">
+                <a:solidFill>
+                  <a:srgbClr val="3D5466"/>
+                </a:solidFill>
+                <a:latin typeface="Arial"/>
+              </a:rPr>
+              <a:t>Felix priorisiert</a:t>
             </a:r>
           </a:p>
         </p:txBody>
@@ -5879,6 +5918,405 @@
                 </a:solidFill>
                 <a:latin typeface="Source Serif 4"/>
               </a:rPr>
+              <a:t>Arbeitsblatt A: Mein NMZ-Bestandsbild</a:t>
+            </a:r>
+          </a:p>
+        </p:txBody>
+      </p:sp>
+      <p:sp>
+        <p:nvSpPr>
+          <p:cNvPr id="8" name="TextBox 7"/>
+          <p:cNvSpPr txBox="1"/>
+          <p:nvPr/>
+        </p:nvSpPr>
+        <p:spPr>
+          <a:xfrm>
+            <a:off x="685800" y="1417320"/>
+            <a:ext cx="10817352" cy="5029200"/>
+          </a:xfrm>
+          <a:prstGeom prst="rect">
+            <a:avLst/>
+          </a:prstGeom>
+          <a:noFill/>
+        </p:spPr>
+        <p:txBody>
+          <a:bodyPr wrap="square">
+            <a:spAutoFit/>
+          </a:bodyPr>
+          <a:lstStyle/>
+          <a:p>
+            <a:pPr>
+              <a:spcBef>
+                <a:spcPts val="400"/>
+              </a:spcBef>
+              <a:spcAft>
+                <a:spcPts val="200"/>
+              </a:spcAft>
+            </a:pPr>
+            <a:r>
+              <a:rPr sz="1200">
+                <a:solidFill>
+                  <a:srgbClr val="3D5466"/>
+                </a:solidFill>
+                <a:latin typeface="Arial"/>
+              </a:rPr>
+              <a:t>Dominantes Schwachfeld in meinem Bestand:</a:t>
+            </a:r>
+          </a:p>
+          <a:p>
+            <a:pPr>
+              <a:spcBef>
+                <a:spcPts val="400"/>
+              </a:spcBef>
+              <a:spcAft>
+                <a:spcPts val="200"/>
+              </a:spcAft>
+            </a:pPr>
+            <a:r>
+              <a:rPr sz="1200">
+                <a:solidFill>
+                  <a:srgbClr val="3D5466"/>
+                </a:solidFill>
+                <a:latin typeface="Arial"/>
+              </a:rPr>
+              <a:t>☐ Zinsmarge zu niedrig  ☐ Verbundgeschäft fehlt  ☐ Risikokosten zu hoch  ☐ Betreuungskosten zu hoch</a:t>
+            </a:r>
+          </a:p>
+        </p:txBody>
+      </p:sp>
+      <p:sp>
+        <p:nvSpPr>
+          <p:cNvPr id="9" name="Rectangle 8"/>
+          <p:cNvSpPr/>
+          <p:nvPr/>
+        </p:nvSpPr>
+        <p:spPr>
+          <a:xfrm>
+            <a:off x="0" y="6510528"/>
+            <a:ext cx="12188952" cy="347472"/>
+          </a:xfrm>
+          <a:prstGeom prst="rect">
+            <a:avLst/>
+          </a:prstGeom>
+          <a:solidFill>
+            <a:srgbClr val="0A1937"/>
+          </a:solidFill>
+          <a:ln>
+            <a:noFill/>
+          </a:ln>
+        </p:spPr>
+        <p:style>
+          <a:lnRef idx="1">
+            <a:schemeClr val="accent1"/>
+          </a:lnRef>
+          <a:fillRef idx="3">
+            <a:schemeClr val="accent1"/>
+          </a:fillRef>
+          <a:effectRef idx="2">
+            <a:schemeClr val="accent1"/>
+          </a:effectRef>
+          <a:fontRef idx="minor">
+            <a:schemeClr val="lt1"/>
+          </a:fontRef>
+        </p:style>
+        <p:txBody>
+          <a:bodyPr rtlCol="0" anchor="ctr"/>
+          <a:lstStyle/>
+          <a:p>
+            <a:pPr algn="ctr"/>
+          </a:p>
+        </p:txBody>
+      </p:sp>
+      <p:sp>
+        <p:nvSpPr>
+          <p:cNvPr id="10" name="TextBox 9"/>
+          <p:cNvSpPr txBox="1"/>
+          <p:nvPr/>
+        </p:nvSpPr>
+        <p:spPr>
+          <a:xfrm>
+            <a:off x="685800" y="6583680"/>
+            <a:ext cx="6490411" cy="256032"/>
+          </a:xfrm>
+          <a:prstGeom prst="rect">
+            <a:avLst/>
+          </a:prstGeom>
+          <a:noFill/>
+        </p:spPr>
+        <p:txBody>
+          <a:bodyPr wrap="none">
+            <a:spAutoFit/>
+          </a:bodyPr>
+          <a:lstStyle/>
+          <a:p>
+            <a:pPr algn="l"/>
+            <a:r>
+              <a:rPr sz="700">
+                <a:solidFill>
+                  <a:srgbClr val="A0B4D2"/>
+                </a:solidFill>
+                <a:latin typeface="JetBrains Mono"/>
+              </a:rPr>
+              <a:t>Benedikt Zoller Coaching  ·  FKB Campus  ·  M16</a:t>
+            </a:r>
+          </a:p>
+        </p:txBody>
+      </p:sp>
+    </p:spTree>
+  </p:cSld>
+  <p:clrMapOvr>
+    <a:masterClrMapping/>
+  </p:clrMapOvr>
+</p:sld>
+</file>
+
+<file path=ppt/slides/slide13.xml><?xml version="1.0" encoding="utf-8"?>
+<p:sld xmlns:a="http://schemas.openxmlformats.org/drawingml/2006/main" xmlns:p="http://schemas.openxmlformats.org/presentationml/2006/main" xmlns:r="http://schemas.openxmlformats.org/officeDocument/2006/relationships">
+  <p:cSld>
+    <p:spTree>
+      <p:nvGrpSpPr>
+        <p:cNvPr id="1" name=""/>
+        <p:cNvGrpSpPr/>
+        <p:nvPr/>
+      </p:nvGrpSpPr>
+      <p:grpSpPr/>
+      <p:sp>
+        <p:nvSpPr>
+          <p:cNvPr id="2" name="Rectangle 1"/>
+          <p:cNvSpPr/>
+          <p:nvPr/>
+        </p:nvSpPr>
+        <p:spPr>
+          <a:xfrm>
+            <a:off x="0" y="0"/>
+            <a:ext cx="12188952" cy="6858000"/>
+          </a:xfrm>
+          <a:prstGeom prst="rect">
+            <a:avLst/>
+          </a:prstGeom>
+          <a:solidFill>
+            <a:srgbClr val="EDEDF3"/>
+          </a:solidFill>
+          <a:ln>
+            <a:noFill/>
+          </a:ln>
+        </p:spPr>
+        <p:style>
+          <a:lnRef idx="1">
+            <a:schemeClr val="accent1"/>
+          </a:lnRef>
+          <a:fillRef idx="3">
+            <a:schemeClr val="accent1"/>
+          </a:fillRef>
+          <a:effectRef idx="2">
+            <a:schemeClr val="accent1"/>
+          </a:effectRef>
+          <a:fontRef idx="minor">
+            <a:schemeClr val="lt1"/>
+          </a:fontRef>
+        </p:style>
+        <p:txBody>
+          <a:bodyPr rtlCol="0" anchor="ctr"/>
+          <a:lstStyle/>
+          <a:p>
+            <a:pPr algn="ctr"/>
+          </a:p>
+        </p:txBody>
+      </p:sp>
+      <p:sp>
+        <p:nvSpPr>
+          <p:cNvPr id="3" name="Rectangle 2"/>
+          <p:cNvSpPr/>
+          <p:nvPr/>
+        </p:nvSpPr>
+        <p:spPr>
+          <a:xfrm>
+            <a:off x="0" y="0"/>
+            <a:ext cx="12188952" cy="50292"/>
+          </a:xfrm>
+          <a:prstGeom prst="rect">
+            <a:avLst/>
+          </a:prstGeom>
+          <a:solidFill>
+            <a:srgbClr val="1F2C56"/>
+          </a:solidFill>
+          <a:ln>
+            <a:noFill/>
+          </a:ln>
+        </p:spPr>
+        <p:style>
+          <a:lnRef idx="1">
+            <a:schemeClr val="accent1"/>
+          </a:lnRef>
+          <a:fillRef idx="3">
+            <a:schemeClr val="accent1"/>
+          </a:fillRef>
+          <a:effectRef idx="2">
+            <a:schemeClr val="accent1"/>
+          </a:effectRef>
+          <a:fontRef idx="minor">
+            <a:schemeClr val="lt1"/>
+          </a:fontRef>
+        </p:style>
+        <p:txBody>
+          <a:bodyPr rtlCol="0" anchor="ctr"/>
+          <a:lstStyle/>
+          <a:p>
+            <a:pPr algn="ctr"/>
+          </a:p>
+        </p:txBody>
+      </p:sp>
+      <p:sp>
+        <p:nvSpPr>
+          <p:cNvPr id="4" name="TextBox 3"/>
+          <p:cNvSpPr txBox="1"/>
+          <p:nvPr/>
+        </p:nvSpPr>
+        <p:spPr>
+          <a:xfrm>
+            <a:off x="685800" y="109728"/>
+            <a:ext cx="10817352" cy="228600"/>
+          </a:xfrm>
+          <a:prstGeom prst="rect">
+            <a:avLst/>
+          </a:prstGeom>
+          <a:noFill/>
+        </p:spPr>
+        <p:txBody>
+          <a:bodyPr wrap="none">
+            <a:spAutoFit/>
+          </a:bodyPr>
+          <a:lstStyle/>
+          <a:p>
+            <a:pPr algn="l"/>
+            <a:r>
+              <a:rPr sz="750">
+                <a:solidFill>
+                  <a:srgbClr val="78808C"/>
+                </a:solidFill>
+                <a:latin typeface="JetBrains Mono"/>
+              </a:rPr>
+              <a:t>M16  ·  INHALT</a:t>
+            </a:r>
+          </a:p>
+        </p:txBody>
+      </p:sp>
+      <p:sp>
+        <p:nvSpPr>
+          <p:cNvPr id="5" name="Rectangle 4"/>
+          <p:cNvSpPr/>
+          <p:nvPr/>
+        </p:nvSpPr>
+        <p:spPr>
+          <a:xfrm>
+            <a:off x="0" y="1234440"/>
+            <a:ext cx="12188952" cy="12700"/>
+          </a:xfrm>
+          <a:prstGeom prst="rect">
+            <a:avLst/>
+          </a:prstGeom>
+          <a:solidFill>
+            <a:srgbClr val="D8DFE4"/>
+          </a:solidFill>
+          <a:ln>
+            <a:noFill/>
+          </a:ln>
+        </p:spPr>
+        <p:style>
+          <a:lnRef idx="1">
+            <a:schemeClr val="accent1"/>
+          </a:lnRef>
+          <a:fillRef idx="3">
+            <a:schemeClr val="accent1"/>
+          </a:fillRef>
+          <a:effectRef idx="2">
+            <a:schemeClr val="accent1"/>
+          </a:effectRef>
+          <a:fontRef idx="minor">
+            <a:schemeClr val="lt1"/>
+          </a:fontRef>
+        </p:style>
+        <p:txBody>
+          <a:bodyPr rtlCol="0" anchor="ctr"/>
+          <a:lstStyle/>
+          <a:p>
+            <a:pPr algn="ctr"/>
+          </a:p>
+        </p:txBody>
+      </p:sp>
+      <p:sp>
+        <p:nvSpPr>
+          <p:cNvPr id="6" name="Rectangle 5"/>
+          <p:cNvSpPr/>
+          <p:nvPr/>
+        </p:nvSpPr>
+        <p:spPr>
+          <a:xfrm>
+            <a:off x="685800" y="502920"/>
+            <a:ext cx="36576" cy="658368"/>
+          </a:xfrm>
+          <a:prstGeom prst="rect">
+            <a:avLst/>
+          </a:prstGeom>
+          <a:solidFill>
+            <a:srgbClr val="D9C089"/>
+          </a:solidFill>
+          <a:ln>
+            <a:noFill/>
+          </a:ln>
+        </p:spPr>
+        <p:style>
+          <a:lnRef idx="1">
+            <a:schemeClr val="accent1"/>
+          </a:lnRef>
+          <a:fillRef idx="3">
+            <a:schemeClr val="accent1"/>
+          </a:fillRef>
+          <a:effectRef idx="2">
+            <a:schemeClr val="accent1"/>
+          </a:effectRef>
+          <a:fontRef idx="minor">
+            <a:schemeClr val="lt1"/>
+          </a:fontRef>
+        </p:style>
+        <p:txBody>
+          <a:bodyPr rtlCol="0" anchor="ctr"/>
+          <a:lstStyle/>
+          <a:p>
+            <a:pPr algn="ctr"/>
+          </a:p>
+        </p:txBody>
+      </p:sp>
+      <p:sp>
+        <p:nvSpPr>
+          <p:cNvPr id="7" name="TextBox 6"/>
+          <p:cNvSpPr txBox="1"/>
+          <p:nvPr/>
+        </p:nvSpPr>
+        <p:spPr>
+          <a:xfrm>
+            <a:off x="813816" y="502920"/>
+            <a:ext cx="10634472" cy="685800"/>
+          </a:xfrm>
+          <a:prstGeom prst="rect">
+            <a:avLst/>
+          </a:prstGeom>
+          <a:noFill/>
+        </p:spPr>
+        <p:txBody>
+          <a:bodyPr wrap="square">
+            <a:spAutoFit/>
+          </a:bodyPr>
+          <a:lstStyle/>
+          <a:p>
+            <a:pPr algn="l"/>
+            <a:r>
+              <a:rPr sz="2400" b="1" i="0">
+                <a:solidFill>
+                  <a:srgbClr val="1F2C56"/>
+                </a:solidFill>
+                <a:latin typeface="Source Serif 4"/>
+              </a:rPr>
               <a:t>Arbeitsblatt B: Maßnahmenplan</a:t>
             </a:r>
           </a:p>
@@ -6138,7 +6576,7 @@
                 </a:solidFill>
                 <a:latin typeface="JetBrains Mono"/>
               </a:rPr>
-              <a:t>LERNZIELE  ·  M16</a:t>
+              <a:t>ÜBERBLICK  ·  M16</a:t>
             </a:r>
           </a:p>
         </p:txBody>
@@ -6216,7 +6654,7 @@
                 </a:solidFill>
                 <a:latin typeface="Source Serif 4"/>
               </a:rPr>
-              <a:t>Was Sie heute mitnehmen</a:t>
+              <a:t>Worum geht es heute</a:t>
             </a:r>
           </a:p>
         </p:txBody>
@@ -6229,8 +6667,8 @@
         </p:nvSpPr>
         <p:spPr>
           <a:xfrm>
-            <a:off x="685800" y="1371600"/>
-            <a:ext cx="10817352" cy="5120640"/>
+            <a:off x="685800" y="1737360"/>
+            <a:ext cx="9720072" cy="4206240"/>
           </a:xfrm>
           <a:prstGeom prst="rect">
             <a:avLst/>
@@ -6244,97 +6682,50 @@
           <a:lstStyle/>
           <a:p>
             <a:pPr>
-              <a:spcBef>
-                <a:spcPts val="800"/>
-              </a:spcBef>
               <a:spcAft>
-                <a:spcPts val="200"/>
+                <a:spcPts val="1200"/>
               </a:spcAft>
             </a:pPr>
             <a:r>
-              <a:rPr sz="1400">
+              <a:rPr sz="1700">
                 <a:solidFill>
                   <a:srgbClr val="3D5466"/>
                 </a:solidFill>
                 <a:latin typeface="Arial"/>
               </a:rPr>
-              <a:t>▸  Erklären, was die Nettomargenziffer (NMZ) misst, wie sie berechnet wird und warum sie die zentrale Steuerungsgröße im VR-Firmenkundensegment ist</a:t>
+              <a:t>Ein erheblicher Teil der Beraterzeit fließt in Administration statt in Kundenkontakt.</a:t>
             </a:r>
           </a:p>
           <a:p>
             <a:pPr>
-              <a:spcBef>
-                <a:spcPts val="800"/>
-              </a:spcBef>
               <a:spcAft>
-                <a:spcPts val="200"/>
+                <a:spcPts val="1200"/>
               </a:spcAft>
             </a:pPr>
             <a:r>
-              <a:rPr sz="1400">
+              <a:rPr sz="1700">
                 <a:solidFill>
                   <a:srgbClr val="3D5466"/>
                 </a:solidFill>
                 <a:latin typeface="Arial"/>
               </a:rPr>
-              <a:t>▸  Unterschiede zwischen NMZ auf Einzel-, Segment- und Bestandsebene erläutern und die eigene NMZ in den internen Benchmark einordnen</a:t>
+              <a:t>Sie analysieren Ihre eigene Nettomarktzeit, identifizieren die größten Zeitfresser und entwickeln konkrete Gegenmaßnahmen.</a:t>
             </a:r>
           </a:p>
           <a:p>
             <a:pPr>
-              <a:spcBef>
-                <a:spcPts val="800"/>
-              </a:spcBef>
               <a:spcAft>
-                <a:spcPts val="200"/>
+                <a:spcPts val="1200"/>
               </a:spcAft>
             </a:pPr>
             <a:r>
-              <a:rPr sz="1400">
+              <a:rPr sz="1700">
                 <a:solidFill>
                   <a:srgbClr val="3D5466"/>
                 </a:solidFill>
                 <a:latin typeface="Arial"/>
               </a:rPr>
-              <a:t>▸  NMZ-Berichte in agree lesen und die drei Kunden mit dem größten Verbesserungspotenzial im eigenen Bestand identifizieren</a:t>
-            </a:r>
-          </a:p>
-          <a:p>
-            <a:pPr>
-              <a:spcBef>
-                <a:spcPts val="800"/>
-              </a:spcBef>
-              <a:spcAft>
-                <a:spcPts val="200"/>
-              </a:spcAft>
-            </a:pPr>
-            <a:r>
-              <a:rPr sz="1400">
-                <a:solidFill>
-                  <a:srgbClr val="3D5466"/>
-                </a:solidFill>
-                <a:latin typeface="Arial"/>
-              </a:rPr>
-              <a:t>▸  Für jeden identifizierten Kunden mind. eine konkrete NMZ-Verbesserungsmaßnahme ableiten und den Hebel begründen</a:t>
-            </a:r>
-          </a:p>
-          <a:p>
-            <a:pPr>
-              <a:spcBef>
-                <a:spcPts val="800"/>
-              </a:spcBef>
-              <a:spcAft>
-                <a:spcPts val="200"/>
-              </a:spcAft>
-            </a:pPr>
-            <a:r>
-              <a:rPr sz="1400">
-                <a:solidFill>
-                  <a:srgbClr val="3D5466"/>
-                </a:solidFill>
-                <a:latin typeface="Arial"/>
-              </a:rPr>
-              <a:t>▸  Die NMZ-Struktur des Gesamtbestands nach Ertragskomponenten analysieren und das dominante Schwachfeld benennen</a:t>
+              <a:t>Danach gewinnen Sie messbar Zeit für das, was Ertrag bringt: das Kundengespräch.</a:t>
             </a:r>
           </a:p>
         </p:txBody>
@@ -6551,7 +6942,7 @@
                 </a:solidFill>
                 <a:latin typeface="JetBrains Mono"/>
               </a:rPr>
-              <a:t>M16  ·  INHALT</a:t>
+              <a:t>LERNZIELE  ·  M16</a:t>
             </a:r>
           </a:p>
         </p:txBody>
@@ -6601,57 +6992,14 @@
       </p:sp>
       <p:sp>
         <p:nvSpPr>
-          <p:cNvPr id="6" name="Rectangle 5"/>
-          <p:cNvSpPr/>
+          <p:cNvPr id="6" name="TextBox 5"/>
+          <p:cNvSpPr txBox="1"/>
           <p:nvPr/>
         </p:nvSpPr>
         <p:spPr>
           <a:xfrm>
             <a:off x="685800" y="502920"/>
-            <a:ext cx="36576" cy="658368"/>
-          </a:xfrm>
-          <a:prstGeom prst="rect">
-            <a:avLst/>
-          </a:prstGeom>
-          <a:solidFill>
-            <a:srgbClr val="D9C089"/>
-          </a:solidFill>
-          <a:ln>
-            <a:noFill/>
-          </a:ln>
-        </p:spPr>
-        <p:style>
-          <a:lnRef idx="1">
-            <a:schemeClr val="accent1"/>
-          </a:lnRef>
-          <a:fillRef idx="3">
-            <a:schemeClr val="accent1"/>
-          </a:fillRef>
-          <a:effectRef idx="2">
-            <a:schemeClr val="accent1"/>
-          </a:effectRef>
-          <a:fontRef idx="minor">
-            <a:schemeClr val="lt1"/>
-          </a:fontRef>
-        </p:style>
-        <p:txBody>
-          <a:bodyPr rtlCol="0" anchor="ctr"/>
-          <a:lstStyle/>
-          <a:p>
-            <a:pPr algn="ctr"/>
-          </a:p>
-        </p:txBody>
-      </p:sp>
-      <p:sp>
-        <p:nvSpPr>
-          <p:cNvPr id="7" name="TextBox 6"/>
-          <p:cNvSpPr txBox="1"/>
-          <p:nvPr/>
-        </p:nvSpPr>
-        <p:spPr>
-          <a:xfrm>
-            <a:off x="813816" y="502920"/>
-            <a:ext cx="10634472" cy="685800"/>
+            <a:ext cx="10817352" cy="658368"/>
           </a:xfrm>
           <a:prstGeom prst="rect">
             <a:avLst/>
@@ -6666,27 +7014,27 @@
           <a:p>
             <a:pPr algn="l"/>
             <a:r>
-              <a:rPr sz="2400" b="1" i="0">
+              <a:rPr sz="2600" b="1" i="0">
                 <a:solidFill>
                   <a:srgbClr val="1F2C56"/>
                 </a:solidFill>
                 <a:latin typeface="Source Serif 4"/>
               </a:rPr>
-              <a:t>Definition</a:t>
-            </a:r>
-          </a:p>
-        </p:txBody>
-      </p:sp>
-      <p:sp>
-        <p:nvSpPr>
-          <p:cNvPr id="8" name="TextBox 7"/>
+              <a:t>Was Sie heute mitnehmen</a:t>
+            </a:r>
+          </a:p>
+        </p:txBody>
+      </p:sp>
+      <p:sp>
+        <p:nvSpPr>
+          <p:cNvPr id="7" name="TextBox 6"/>
           <p:cNvSpPr txBox="1"/>
           <p:nvPr/>
         </p:nvSpPr>
         <p:spPr>
           <a:xfrm>
-            <a:off x="685800" y="1417320"/>
-            <a:ext cx="10817352" cy="5029200"/>
+            <a:off x="685800" y="1371600"/>
+            <a:ext cx="10817352" cy="5120640"/>
           </a:xfrm>
           <a:prstGeom prst="rect">
             <a:avLst/>
@@ -6701,46 +7049,103 @@
           <a:p>
             <a:pPr>
               <a:spcBef>
-                <a:spcPts val="400"/>
+                <a:spcPts val="800"/>
               </a:spcBef>
               <a:spcAft>
                 <a:spcPts val="200"/>
               </a:spcAft>
             </a:pPr>
             <a:r>
-              <a:rPr sz="1200">
+              <a:rPr sz="1400">
                 <a:solidFill>
                   <a:srgbClr val="3D5466"/>
                 </a:solidFill>
                 <a:latin typeface="Arial"/>
               </a:rPr>
-              <a:t>NMZ (%) = Deckungsbeitrag II × 100 / Kreditvolumen</a:t>
+              <a:t>▸  Erklären, was die Nettomargenziffer (NMZ) misst, wie sie berechnet wird und warum sie die zentrale Steuerungsgröße im VR-Firmenkundensegment ist</a:t>
             </a:r>
           </a:p>
           <a:p>
             <a:pPr>
               <a:spcBef>
-                <a:spcPts val="400"/>
+                <a:spcPts val="800"/>
               </a:spcBef>
               <a:spcAft>
                 <a:spcPts val="200"/>
               </a:spcAft>
             </a:pPr>
             <a:r>
-              <a:rPr sz="1200">
+              <a:rPr sz="1400">
                 <a:solidFill>
                   <a:srgbClr val="3D5466"/>
                 </a:solidFill>
                 <a:latin typeface="Arial"/>
               </a:rPr>
-              <a:t>Sie ist damit die auf das Volumen normierte Version des Kundendeckungsbeitrags (M14), was Vergleiche zwischen Kunden unterschiedlicher Größe erst möglich macht.</a:t>
-            </a:r>
-          </a:p>
-        </p:txBody>
-      </p:sp>
-      <p:sp>
-        <p:nvSpPr>
-          <p:cNvPr id="9" name="Rectangle 8"/>
+              <a:t>▸  Unterschiede zwischen NMZ auf Einzel-, Segment- und Bestandsebene erläutern und die eigene NMZ in den internen Benchmark einordnen</a:t>
+            </a:r>
+          </a:p>
+          <a:p>
+            <a:pPr>
+              <a:spcBef>
+                <a:spcPts val="800"/>
+              </a:spcBef>
+              <a:spcAft>
+                <a:spcPts val="200"/>
+              </a:spcAft>
+            </a:pPr>
+            <a:r>
+              <a:rPr sz="1400">
+                <a:solidFill>
+                  <a:srgbClr val="3D5466"/>
+                </a:solidFill>
+                <a:latin typeface="Arial"/>
+              </a:rPr>
+              <a:t>▸  NMZ-Berichte in agree lesen und die drei Kunden mit dem größten Verbesserungspotenzial im eigenen Bestand identifizieren</a:t>
+            </a:r>
+          </a:p>
+          <a:p>
+            <a:pPr>
+              <a:spcBef>
+                <a:spcPts val="800"/>
+              </a:spcBef>
+              <a:spcAft>
+                <a:spcPts val="200"/>
+              </a:spcAft>
+            </a:pPr>
+            <a:r>
+              <a:rPr sz="1400">
+                <a:solidFill>
+                  <a:srgbClr val="3D5466"/>
+                </a:solidFill>
+                <a:latin typeface="Arial"/>
+              </a:rPr>
+              <a:t>▸  Für jeden identifizierten Kunden mind. eine konkrete NMZ-Verbesserungsmaßnahme ableiten und den Hebel begründen</a:t>
+            </a:r>
+          </a:p>
+          <a:p>
+            <a:pPr>
+              <a:spcBef>
+                <a:spcPts val="800"/>
+              </a:spcBef>
+              <a:spcAft>
+                <a:spcPts val="200"/>
+              </a:spcAft>
+            </a:pPr>
+            <a:r>
+              <a:rPr sz="1400">
+                <a:solidFill>
+                  <a:srgbClr val="3D5466"/>
+                </a:solidFill>
+                <a:latin typeface="Arial"/>
+              </a:rPr>
+              <a:t>▸  Die NMZ-Struktur des Gesamtbestands nach Ertragskomponenten analysieren und das dominante Schwachfeld benennen</a:t>
+            </a:r>
+          </a:p>
+        </p:txBody>
+      </p:sp>
+      <p:sp>
+        <p:nvSpPr>
+          <p:cNvPr id="8" name="Rectangle 7"/>
           <p:cNvSpPr/>
           <p:nvPr/>
         </p:nvSpPr>
@@ -6783,7 +7188,7 @@
       </p:sp>
       <p:sp>
         <p:nvSpPr>
-          <p:cNvPr id="10" name="TextBox 9"/>
+          <p:cNvPr id="9" name="TextBox 8"/>
           <p:cNvSpPr txBox="1"/>
           <p:nvPr/>
         </p:nvSpPr>
@@ -7071,7 +7476,7 @@
                 </a:solidFill>
                 <a:latin typeface="Source Serif 4"/>
               </a:rPr>
-              <a:t>Warum die NMZ dem DB überlegen ist</a:t>
+              <a:t>Definition</a:t>
             </a:r>
           </a:p>
         </p:txBody>
@@ -7113,7 +7518,7 @@
                 </a:solidFill>
                 <a:latin typeface="Arial"/>
               </a:rPr>
-              <a:t>Rolfes (1999 ) betont, dass Banken ohne normierte Ertragskennzahlen systematisch Kapital in renditeschwache Engagements lenken, weil die absoluten Beträge groß aussehen.</a:t>
+              <a:t>NMZ (%) = Deckungsbeitrag II × 100 / Kreditvolumen</a:t>
             </a:r>
           </a:p>
           <a:p>
@@ -7132,45 +7537,7 @@
                 </a:solidFill>
                 <a:latin typeface="Arial"/>
               </a:rPr>
-              <a:t>## 4.2 Die NMZ-Komponenten im Detail</a:t>
-            </a:r>
-          </a:p>
-          <a:p>
-            <a:pPr>
-              <a:spcBef>
-                <a:spcPts val="400"/>
-              </a:spcBef>
-              <a:spcAft>
-                <a:spcPts val="200"/>
-              </a:spcAft>
-            </a:pPr>
-            <a:r>
-              <a:rPr sz="1200">
-                <a:solidFill>
-                  <a:srgbClr val="3D5466"/>
-                </a:solidFill>
-                <a:latin typeface="Arial"/>
-              </a:rPr>
-              <a:t>Die NMZ wird von vier Treibern bewegt – jeder Treiber entspricht einem Hebel für die Optimierung:</a:t>
-            </a:r>
-          </a:p>
-          <a:p>
-            <a:pPr>
-              <a:spcBef>
-                <a:spcPts val="400"/>
-              </a:spcBef>
-              <a:spcAft>
-                <a:spcPts val="200"/>
-              </a:spcAft>
-            </a:pPr>
-            <a:r>
-              <a:rPr sz="1200">
-                <a:solidFill>
-                  <a:srgbClr val="3D5466"/>
-                </a:solidFill>
-                <a:latin typeface="Arial"/>
-              </a:rPr>
-              <a:t>## 4.3 NMZ-Berichte in agree lesen</a:t>
+              <a:t>Sie ist damit die auf das Volumen normierte Version des Kundendeckungsbeitrags (M14), was Vergleiche zwischen Kunden unterschiedlicher Größe erst möglich macht.</a:t>
             </a:r>
           </a:p>
         </p:txBody>
@@ -7286,7 +7653,7 @@
             <a:avLst/>
           </a:prstGeom>
           <a:solidFill>
-            <a:srgbClr val="FFFFFF"/>
+            <a:srgbClr val="EDEDF3"/>
           </a:solidFill>
           <a:ln>
             <a:noFill/>
@@ -7387,43 +7754,51 @@
                 </a:solidFill>
                 <a:latin typeface="JetBrains Mono"/>
               </a:rPr>
-              <a:t>M16  ·  SCHAUBILD</a:t>
-            </a:r>
-          </a:p>
-        </p:txBody>
-      </p:sp>
-      <p:sp>
-        <p:nvSpPr>
-          <p:cNvPr id="5" name="TextBox 4"/>
-          <p:cNvSpPr txBox="1"/>
-          <p:nvPr/>
-        </p:nvSpPr>
-        <p:spPr>
-          <a:xfrm>
-            <a:off x="685800" y="502920"/>
-            <a:ext cx="10817352" cy="594360"/>
-          </a:xfrm>
-          <a:prstGeom prst="rect">
-            <a:avLst/>
-          </a:prstGeom>
-          <a:noFill/>
-        </p:spPr>
-        <p:txBody>
-          <a:bodyPr wrap="square">
-            <a:spAutoFit/>
-          </a:bodyPr>
-          <a:lstStyle/>
-          <a:p>
-            <a:pPr algn="l"/>
-            <a:r>
-              <a:rPr sz="2000" b="1" i="0">
-                <a:solidFill>
-                  <a:srgbClr val="1F2C56"/>
-                </a:solidFill>
-                <a:latin typeface="Source Serif 4"/>
-              </a:rPr>
-              <a:t>Nettomargenbeitrag NMZ</a:t>
-            </a:r>
+              <a:t>M16  ·  INHALT</a:t>
+            </a:r>
+          </a:p>
+        </p:txBody>
+      </p:sp>
+      <p:sp>
+        <p:nvSpPr>
+          <p:cNvPr id="5" name="Rectangle 4"/>
+          <p:cNvSpPr/>
+          <p:nvPr/>
+        </p:nvSpPr>
+        <p:spPr>
+          <a:xfrm>
+            <a:off x="0" y="1234440"/>
+            <a:ext cx="12188952" cy="12700"/>
+          </a:xfrm>
+          <a:prstGeom prst="rect">
+            <a:avLst/>
+          </a:prstGeom>
+          <a:solidFill>
+            <a:srgbClr val="D8DFE4"/>
+          </a:solidFill>
+          <a:ln>
+            <a:noFill/>
+          </a:ln>
+        </p:spPr>
+        <p:style>
+          <a:lnRef idx="1">
+            <a:schemeClr val="accent1"/>
+          </a:lnRef>
+          <a:fillRef idx="3">
+            <a:schemeClr val="accent1"/>
+          </a:fillRef>
+          <a:effectRef idx="2">
+            <a:schemeClr val="accent1"/>
+          </a:effectRef>
+          <a:fontRef idx="minor">
+            <a:schemeClr val="lt1"/>
+          </a:fontRef>
+        </p:style>
+        <p:txBody>
+          <a:bodyPr rtlCol="0" anchor="ctr"/>
+          <a:lstStyle/>
+          <a:p>
+            <a:pPr algn="ctr"/>
           </a:p>
         </p:txBody>
       </p:sp>
@@ -7435,8 +7810,8 @@
         </p:nvSpPr>
         <p:spPr>
           <a:xfrm>
-            <a:off x="685800" y="1143000"/>
-            <a:ext cx="10817352" cy="25400"/>
+            <a:off x="685800" y="502920"/>
+            <a:ext cx="36576" cy="658368"/>
           </a:xfrm>
           <a:prstGeom prst="rect">
             <a:avLst/>
@@ -7470,33 +7845,143 @@
           </a:p>
         </p:txBody>
       </p:sp>
-      <p:pic>
-        <p:nvPicPr>
-          <p:cNvPr id="7" name="Picture 6" descr="image.png"/>
-          <p:cNvPicPr>
-            <a:picLocks noChangeAspect="1"/>
-          </p:cNvPicPr>
-          <p:nvPr/>
-        </p:nvPicPr>
-        <p:blipFill>
-          <a:blip r:embed="rId2"/>
-          <a:stretch>
-            <a:fillRect/>
-          </a:stretch>
-        </p:blipFill>
-        <p:spPr>
-          <a:xfrm>
-            <a:off x="2163921" y="1325880"/>
-            <a:ext cx="7861110" cy="4937760"/>
-          </a:xfrm>
-          <a:prstGeom prst="rect">
-            <a:avLst/>
-          </a:prstGeom>
-        </p:spPr>
-      </p:pic>
-      <p:sp>
-        <p:nvSpPr>
-          <p:cNvPr id="8" name="Rectangle 7"/>
+      <p:sp>
+        <p:nvSpPr>
+          <p:cNvPr id="7" name="TextBox 6"/>
+          <p:cNvSpPr txBox="1"/>
+          <p:nvPr/>
+        </p:nvSpPr>
+        <p:spPr>
+          <a:xfrm>
+            <a:off x="813816" y="502920"/>
+            <a:ext cx="10634472" cy="685800"/>
+          </a:xfrm>
+          <a:prstGeom prst="rect">
+            <a:avLst/>
+          </a:prstGeom>
+          <a:noFill/>
+        </p:spPr>
+        <p:txBody>
+          <a:bodyPr wrap="square">
+            <a:spAutoFit/>
+          </a:bodyPr>
+          <a:lstStyle/>
+          <a:p>
+            <a:pPr algn="l"/>
+            <a:r>
+              <a:rPr sz="2400" b="1" i="0">
+                <a:solidFill>
+                  <a:srgbClr val="1F2C56"/>
+                </a:solidFill>
+                <a:latin typeface="Source Serif 4"/>
+              </a:rPr>
+              <a:t>Warum die NMZ dem DB überlegen ist</a:t>
+            </a:r>
+          </a:p>
+        </p:txBody>
+      </p:sp>
+      <p:sp>
+        <p:nvSpPr>
+          <p:cNvPr id="8" name="TextBox 7"/>
+          <p:cNvSpPr txBox="1"/>
+          <p:nvPr/>
+        </p:nvSpPr>
+        <p:spPr>
+          <a:xfrm>
+            <a:off x="685800" y="1417320"/>
+            <a:ext cx="10817352" cy="5029200"/>
+          </a:xfrm>
+          <a:prstGeom prst="rect">
+            <a:avLst/>
+          </a:prstGeom>
+          <a:noFill/>
+        </p:spPr>
+        <p:txBody>
+          <a:bodyPr wrap="square">
+            <a:spAutoFit/>
+          </a:bodyPr>
+          <a:lstStyle/>
+          <a:p>
+            <a:pPr>
+              <a:spcBef>
+                <a:spcPts val="400"/>
+              </a:spcBef>
+              <a:spcAft>
+                <a:spcPts val="200"/>
+              </a:spcAft>
+            </a:pPr>
+            <a:r>
+              <a:rPr sz="1200">
+                <a:solidFill>
+                  <a:srgbClr val="3D5466"/>
+                </a:solidFill>
+                <a:latin typeface="Arial"/>
+              </a:rPr>
+              <a:t>Rolfes (1999 ) betont, dass Banken ohne normierte Ertragskennzahlen systematisch Kapital in renditeschwache Engagements lenken, weil die absoluten Beträge groß aussehen.</a:t>
+            </a:r>
+          </a:p>
+          <a:p>
+            <a:pPr>
+              <a:spcBef>
+                <a:spcPts val="400"/>
+              </a:spcBef>
+              <a:spcAft>
+                <a:spcPts val="200"/>
+              </a:spcAft>
+            </a:pPr>
+            <a:r>
+              <a:rPr sz="1200">
+                <a:solidFill>
+                  <a:srgbClr val="3D5466"/>
+                </a:solidFill>
+                <a:latin typeface="Arial"/>
+              </a:rPr>
+              <a:t>## 4.2 Die NMZ-Komponenten im Detail</a:t>
+            </a:r>
+          </a:p>
+          <a:p>
+            <a:pPr>
+              <a:spcBef>
+                <a:spcPts val="400"/>
+              </a:spcBef>
+              <a:spcAft>
+                <a:spcPts val="200"/>
+              </a:spcAft>
+            </a:pPr>
+            <a:r>
+              <a:rPr sz="1200">
+                <a:solidFill>
+                  <a:srgbClr val="3D5466"/>
+                </a:solidFill>
+                <a:latin typeface="Arial"/>
+              </a:rPr>
+              <a:t>Die NMZ wird von vier Treibern bewegt – jeder Treiber entspricht einem Hebel für die Optimierung:</a:t>
+            </a:r>
+          </a:p>
+          <a:p>
+            <a:pPr>
+              <a:spcBef>
+                <a:spcPts val="400"/>
+              </a:spcBef>
+              <a:spcAft>
+                <a:spcPts val="200"/>
+              </a:spcAft>
+            </a:pPr>
+            <a:r>
+              <a:rPr sz="1200">
+                <a:solidFill>
+                  <a:srgbClr val="3D5466"/>
+                </a:solidFill>
+                <a:latin typeface="Arial"/>
+              </a:rPr>
+              <a:t>## 4.3 NMZ-Berichte in agree lesen</a:t>
+            </a:r>
+          </a:p>
+        </p:txBody>
+      </p:sp>
+      <p:sp>
+        <p:nvSpPr>
+          <p:cNvPr id="9" name="Rectangle 8"/>
           <p:cNvSpPr/>
           <p:nvPr/>
         </p:nvSpPr>
@@ -7539,7 +8024,7 @@
       </p:sp>
       <p:sp>
         <p:nvSpPr>
-          <p:cNvPr id="9" name="TextBox 8"/>
+          <p:cNvPr id="10" name="TextBox 9"/>
           <p:cNvSpPr txBox="1"/>
           <p:nvPr/>
         </p:nvSpPr>
@@ -7568,41 +8053,6 @@
                 <a:latin typeface="JetBrains Mono"/>
               </a:rPr>
               <a:t>Benedikt Zoller Coaching  ·  FKB Campus  ·  M16</a:t>
-            </a:r>
-          </a:p>
-        </p:txBody>
-      </p:sp>
-      <p:sp>
-        <p:nvSpPr>
-          <p:cNvPr id="10" name="TextBox 9"/>
-          <p:cNvSpPr txBox="1"/>
-          <p:nvPr/>
-        </p:nvSpPr>
-        <p:spPr>
-          <a:xfrm>
-            <a:off x="7176211" y="6583680"/>
-            <a:ext cx="4326940" cy="256032"/>
-          </a:xfrm>
-          <a:prstGeom prst="rect">
-            <a:avLst/>
-          </a:prstGeom>
-          <a:noFill/>
-        </p:spPr>
-        <p:txBody>
-          <a:bodyPr wrap="none">
-            <a:spAutoFit/>
-          </a:bodyPr>
-          <a:lstStyle/>
-          <a:p>
-            <a:pPr algn="r"/>
-            <a:r>
-              <a:rPr sz="700">
-                <a:solidFill>
-                  <a:srgbClr val="A0B4D2"/>
-                </a:solidFill>
-                <a:latin typeface="JetBrains Mono"/>
-              </a:rPr>
-              <a:t>Schaubild</a:t>
             </a:r>
           </a:p>
         </p:txBody>
@@ -7640,7 +8090,7 @@
             <a:avLst/>
           </a:prstGeom>
           <a:solidFill>
-            <a:srgbClr val="EDEDF3"/>
+            <a:srgbClr val="FFFFFF"/>
           </a:solidFill>
           <a:ln>
             <a:noFill/>
@@ -7741,51 +8191,43 @@
                 </a:solidFill>
                 <a:latin typeface="JetBrains Mono"/>
               </a:rPr>
-              <a:t>M16  ·  INHALT</a:t>
-            </a:r>
-          </a:p>
-        </p:txBody>
-      </p:sp>
-      <p:sp>
-        <p:nvSpPr>
-          <p:cNvPr id="5" name="Rectangle 4"/>
-          <p:cNvSpPr/>
-          <p:nvPr/>
-        </p:nvSpPr>
-        <p:spPr>
-          <a:xfrm>
-            <a:off x="0" y="1234440"/>
-            <a:ext cx="12188952" cy="12700"/>
-          </a:xfrm>
-          <a:prstGeom prst="rect">
-            <a:avLst/>
-          </a:prstGeom>
-          <a:solidFill>
-            <a:srgbClr val="D8DFE4"/>
-          </a:solidFill>
-          <a:ln>
-            <a:noFill/>
-          </a:ln>
-        </p:spPr>
-        <p:style>
-          <a:lnRef idx="1">
-            <a:schemeClr val="accent1"/>
-          </a:lnRef>
-          <a:fillRef idx="3">
-            <a:schemeClr val="accent1"/>
-          </a:fillRef>
-          <a:effectRef idx="2">
-            <a:schemeClr val="accent1"/>
-          </a:effectRef>
-          <a:fontRef idx="minor">
-            <a:schemeClr val="lt1"/>
-          </a:fontRef>
-        </p:style>
-        <p:txBody>
-          <a:bodyPr rtlCol="0" anchor="ctr"/>
-          <a:lstStyle/>
-          <a:p>
-            <a:pPr algn="ctr"/>
+              <a:t>M16  ·  SCHAUBILD</a:t>
+            </a:r>
+          </a:p>
+        </p:txBody>
+      </p:sp>
+      <p:sp>
+        <p:nvSpPr>
+          <p:cNvPr id="5" name="TextBox 4"/>
+          <p:cNvSpPr txBox="1"/>
+          <p:nvPr/>
+        </p:nvSpPr>
+        <p:spPr>
+          <a:xfrm>
+            <a:off x="685800" y="502920"/>
+            <a:ext cx="10817352" cy="594360"/>
+          </a:xfrm>
+          <a:prstGeom prst="rect">
+            <a:avLst/>
+          </a:prstGeom>
+          <a:noFill/>
+        </p:spPr>
+        <p:txBody>
+          <a:bodyPr wrap="square">
+            <a:spAutoFit/>
+          </a:bodyPr>
+          <a:lstStyle/>
+          <a:p>
+            <a:pPr algn="l"/>
+            <a:r>
+              <a:rPr sz="2000" b="1" i="0">
+                <a:solidFill>
+                  <a:srgbClr val="1F2C56"/>
+                </a:solidFill>
+                <a:latin typeface="Source Serif 4"/>
+              </a:rPr>
+              <a:t>Nettomargenbeitrag NMZ</a:t>
+            </a:r>
           </a:p>
         </p:txBody>
       </p:sp>
@@ -7797,8 +8239,8 @@
         </p:nvSpPr>
         <p:spPr>
           <a:xfrm>
-            <a:off x="685800" y="502920"/>
-            <a:ext cx="36576" cy="658368"/>
+            <a:off x="685800" y="1143000"/>
+            <a:ext cx="10817352" cy="25400"/>
           </a:xfrm>
           <a:prstGeom prst="rect">
             <a:avLst/>
@@ -7832,86 +8274,33 @@
           </a:p>
         </p:txBody>
       </p:sp>
-      <p:sp>
-        <p:nvSpPr>
-          <p:cNvPr id="7" name="TextBox 6"/>
-          <p:cNvSpPr txBox="1"/>
-          <p:nvPr/>
-        </p:nvSpPr>
-        <p:spPr>
-          <a:xfrm>
-            <a:off x="813816" y="502920"/>
-            <a:ext cx="10634472" cy="685800"/>
-          </a:xfrm>
-          <a:prstGeom prst="rect">
-            <a:avLst/>
-          </a:prstGeom>
-          <a:noFill/>
-        </p:spPr>
-        <p:txBody>
-          <a:bodyPr wrap="square">
-            <a:spAutoFit/>
-          </a:bodyPr>
-          <a:lstStyle/>
-          <a:p>
-            <a:pPr algn="l"/>
-            <a:r>
-              <a:rPr sz="2400" b="1" i="0">
-                <a:solidFill>
-                  <a:srgbClr val="1F2C56"/>
-                </a:solidFill>
-                <a:latin typeface="Source Serif 4"/>
-              </a:rPr>
-              <a:t>Wo finde ich meine NMZ-Daten?</a:t>
-            </a:r>
-          </a:p>
-        </p:txBody>
-      </p:sp>
-      <p:sp>
-        <p:nvSpPr>
-          <p:cNvPr id="8" name="TextBox 7"/>
-          <p:cNvSpPr txBox="1"/>
-          <p:nvPr/>
-        </p:nvSpPr>
-        <p:spPr>
-          <a:xfrm>
-            <a:off x="685800" y="1417320"/>
-            <a:ext cx="10817352" cy="5029200"/>
-          </a:xfrm>
-          <a:prstGeom prst="rect">
-            <a:avLst/>
-          </a:prstGeom>
-          <a:noFill/>
-        </p:spPr>
-        <p:txBody>
-          <a:bodyPr wrap="square">
-            <a:spAutoFit/>
-          </a:bodyPr>
-          <a:lstStyle/>
-          <a:p>
-            <a:pPr>
-              <a:spcBef>
-                <a:spcPts val="400"/>
-              </a:spcBef>
-              <a:spcAft>
-                <a:spcPts val="200"/>
-              </a:spcAft>
-            </a:pPr>
-            <a:r>
-              <a:rPr sz="1200">
-                <a:solidFill>
-                  <a:srgbClr val="3D5466"/>
-                </a:solidFill>
-                <a:latin typeface="Arial"/>
-              </a:rPr>
-              <a:t>In agree (Atruvia) stehen NMZ-relevante Auswertungen über folgende Einstiegspunkte zur Verfügung:</a:t>
-            </a:r>
-          </a:p>
-        </p:txBody>
-      </p:sp>
-      <p:sp>
-        <p:nvSpPr>
-          <p:cNvPr id="9" name="Rectangle 8"/>
+      <p:pic>
+        <p:nvPicPr>
+          <p:cNvPr id="7" name="Picture 6" descr="image.png"/>
+          <p:cNvPicPr>
+            <a:picLocks noChangeAspect="1"/>
+          </p:cNvPicPr>
+          <p:nvPr/>
+        </p:nvPicPr>
+        <p:blipFill>
+          <a:blip r:embed="rId2"/>
+          <a:stretch>
+            <a:fillRect/>
+          </a:stretch>
+        </p:blipFill>
+        <p:spPr>
+          <a:xfrm>
+            <a:off x="2163921" y="1325880"/>
+            <a:ext cx="7861110" cy="4937760"/>
+          </a:xfrm>
+          <a:prstGeom prst="rect">
+            <a:avLst/>
+          </a:prstGeom>
+        </p:spPr>
+      </p:pic>
+      <p:sp>
+        <p:nvSpPr>
+          <p:cNvPr id="8" name="Rectangle 7"/>
           <p:cNvSpPr/>
           <p:nvPr/>
         </p:nvSpPr>
@@ -7954,7 +8343,7 @@
       </p:sp>
       <p:sp>
         <p:nvSpPr>
-          <p:cNvPr id="10" name="TextBox 9"/>
+          <p:cNvPr id="9" name="TextBox 8"/>
           <p:cNvSpPr txBox="1"/>
           <p:nvPr/>
         </p:nvSpPr>
@@ -7983,6 +8372,41 @@
                 <a:latin typeface="JetBrains Mono"/>
               </a:rPr>
               <a:t>Benedikt Zoller Coaching  ·  FKB Campus  ·  M16</a:t>
+            </a:r>
+          </a:p>
+        </p:txBody>
+      </p:sp>
+      <p:sp>
+        <p:nvSpPr>
+          <p:cNvPr id="10" name="TextBox 9"/>
+          <p:cNvSpPr txBox="1"/>
+          <p:nvPr/>
+        </p:nvSpPr>
+        <p:spPr>
+          <a:xfrm>
+            <a:off x="7176211" y="6583680"/>
+            <a:ext cx="4326940" cy="256032"/>
+          </a:xfrm>
+          <a:prstGeom prst="rect">
+            <a:avLst/>
+          </a:prstGeom>
+          <a:noFill/>
+        </p:spPr>
+        <p:txBody>
+          <a:bodyPr wrap="none">
+            <a:spAutoFit/>
+          </a:bodyPr>
+          <a:lstStyle/>
+          <a:p>
+            <a:pPr algn="r"/>
+            <a:r>
+              <a:rPr sz="700">
+                <a:solidFill>
+                  <a:srgbClr val="A0B4D2"/>
+                </a:solidFill>
+                <a:latin typeface="JetBrains Mono"/>
+              </a:rPr>
+              <a:t>Schaubild</a:t>
             </a:r>
           </a:p>
         </p:txBody>
@@ -8242,7 +8666,7 @@
                 </a:solidFill>
                 <a:latin typeface="Source Serif 4"/>
               </a:rPr>
-              <a:t>Leseübung: NMZ-Ranking interpretieren</a:t>
+              <a:t>Wo finde ich meine NMZ-Daten?</a:t>
             </a:r>
           </a:p>
         </p:txBody>
@@ -8284,83 +8708,7 @@
                 </a:solidFill>
                 <a:latin typeface="Arial"/>
               </a:rPr>
-              <a:t>Stellen Sie sich vor, Ihr Bestand zeigt folgendes NMZ-Ranking (Auszug):</a:t>
-            </a:r>
-          </a:p>
-          <a:p>
-            <a:pPr>
-              <a:spcBef>
-                <a:spcPts val="400"/>
-              </a:spcBef>
-              <a:spcAft>
-                <a:spcPts val="200"/>
-              </a:spcAft>
-            </a:pPr>
-            <a:r>
-              <a:rPr sz="1200">
-                <a:solidFill>
-                  <a:srgbClr val="3D5466"/>
-                </a:solidFill>
-                <a:latin typeface="Arial"/>
-              </a:rPr>
-              <a:t>Sofortmaßnahmen aus diesem Ranking:</a:t>
-            </a:r>
-          </a:p>
-          <a:p>
-            <a:pPr>
-              <a:spcBef>
-                <a:spcPts val="400"/>
-              </a:spcBef>
-              <a:spcAft>
-                <a:spcPts val="200"/>
-              </a:spcAft>
-            </a:pPr>
-            <a:r>
-              <a:rPr sz="1300">
-                <a:solidFill>
-                  <a:srgbClr val="3D5466"/>
-                </a:solidFill>
-                <a:latin typeface="Arial"/>
-              </a:rPr>
-              <a:t>▸  Huber Bau GmbH (0,30 %): Rating prüfen, Besicherung optimieren, Verbund aktivieren</a:t>
-            </a:r>
-          </a:p>
-          <a:p>
-            <a:pPr>
-              <a:spcBef>
-                <a:spcPts val="400"/>
-              </a:spcBef>
-              <a:spcAft>
-                <a:spcPts val="200"/>
-              </a:spcAft>
-            </a:pPr>
-            <a:r>
-              <a:rPr sz="1300">
-                <a:solidFill>
-                  <a:srgbClr val="3D5466"/>
-                </a:solidFill>
-                <a:latin typeface="Arial"/>
-              </a:rPr>
-              <a:t>▸  Fischer Transport (−0,30 %): Konditionengespräch unverzüglich, Exit-Prüfung falls keine Verbesserung möglich</a:t>
-            </a:r>
-          </a:p>
-          <a:p>
-            <a:pPr>
-              <a:spcBef>
-                <a:spcPts val="400"/>
-              </a:spcBef>
-              <a:spcAft>
-                <a:spcPts val="200"/>
-              </a:spcAft>
-            </a:pPr>
-            <a:r>
-              <a:rPr sz="1200">
-                <a:solidFill>
-                  <a:srgbClr val="3D5466"/>
-                </a:solidFill>
-                <a:latin typeface="Arial"/>
-              </a:rPr>
-              <a:t>## 4.4 Der NMZ-Optimierungsprozess: 3 Schritte</a:t>
+              <a:t>In agree (Atruvia) stehen NMZ-relevante Auswertungen über folgende Einstiegspunkte zur Verfügung:</a:t>
             </a:r>
           </a:p>
         </p:txBody>
@@ -8698,7 +9046,7 @@
                 </a:solidFill>
                 <a:latin typeface="Source Serif 4"/>
               </a:rPr>
-              <a:t>Schritt 1: Identifizieren (monatlich, 30 Minuten)</a:t>
+              <a:t>Leseübung: NMZ-Ranking interpretieren</a:t>
             </a:r>
           </a:p>
         </p:txBody>
@@ -8740,7 +9088,83 @@
                 </a:solidFill>
                 <a:latin typeface="Arial"/>
               </a:rPr>
-              <a:t>Einmal im Monat: agree-NMZ-Ranking aufrufen. Die fünf Kunden mit der niedrigsten NMZ markieren. Für jeden prüfen: Was ist die Hauptursache? (Marge? Kein Verbund? Rating? Betreuungskosten?)</a:t>
+              <a:t>Stellen Sie sich vor, Ihr Bestand zeigt folgendes NMZ-Ranking (Auszug):</a:t>
+            </a:r>
+          </a:p>
+          <a:p>
+            <a:pPr>
+              <a:spcBef>
+                <a:spcPts val="400"/>
+              </a:spcBef>
+              <a:spcAft>
+                <a:spcPts val="200"/>
+              </a:spcAft>
+            </a:pPr>
+            <a:r>
+              <a:rPr sz="1200">
+                <a:solidFill>
+                  <a:srgbClr val="3D5466"/>
+                </a:solidFill>
+                <a:latin typeface="Arial"/>
+              </a:rPr>
+              <a:t>Sofortmaßnahmen aus diesem Ranking:</a:t>
+            </a:r>
+          </a:p>
+          <a:p>
+            <a:pPr>
+              <a:spcBef>
+                <a:spcPts val="400"/>
+              </a:spcBef>
+              <a:spcAft>
+                <a:spcPts val="200"/>
+              </a:spcAft>
+            </a:pPr>
+            <a:r>
+              <a:rPr sz="1300">
+                <a:solidFill>
+                  <a:srgbClr val="3D5466"/>
+                </a:solidFill>
+                <a:latin typeface="Arial"/>
+              </a:rPr>
+              <a:t>▸  Huber Bau GmbH (0,30 %): Rating prüfen, Besicherung optimieren, Verbund aktivieren</a:t>
+            </a:r>
+          </a:p>
+          <a:p>
+            <a:pPr>
+              <a:spcBef>
+                <a:spcPts val="400"/>
+              </a:spcBef>
+              <a:spcAft>
+                <a:spcPts val="200"/>
+              </a:spcAft>
+            </a:pPr>
+            <a:r>
+              <a:rPr sz="1300">
+                <a:solidFill>
+                  <a:srgbClr val="3D5466"/>
+                </a:solidFill>
+                <a:latin typeface="Arial"/>
+              </a:rPr>
+              <a:t>▸  Fischer Transport (−0,30 %): Konditionengespräch unverzüglich, Exit-Prüfung falls keine Verbesserung möglich</a:t>
+            </a:r>
+          </a:p>
+          <a:p>
+            <a:pPr>
+              <a:spcBef>
+                <a:spcPts val="400"/>
+              </a:spcBef>
+              <a:spcAft>
+                <a:spcPts val="200"/>
+              </a:spcAft>
+            </a:pPr>
+            <a:r>
+              <a:rPr sz="1200">
+                <a:solidFill>
+                  <a:srgbClr val="3D5466"/>
+                </a:solidFill>
+                <a:latin typeface="Arial"/>
+              </a:rPr>
+              <a:t>## 4.4 Der NMZ-Optimierungsprozess: 3 Schritte</a:t>
             </a:r>
           </a:p>
         </p:txBody>
@@ -9078,7 +9502,7 @@
                 </a:solidFill>
                 <a:latin typeface="Source Serif 4"/>
               </a:rPr>
-              <a:t>Schritt 2: Priorisieren</a:t>
+              <a:t>Schritt 1: Identifizieren (monatlich, 30 Minuten)</a:t>
             </a:r>
           </a:p>
         </p:txBody>
@@ -9120,64 +9544,7 @@
                 </a:solidFill>
                 <a:latin typeface="Arial"/>
               </a:rPr>
-              <a:t>Nicht alle fünf auf einmal angehen. Priorisierung nach zwei Kriterien:</a:t>
-            </a:r>
-          </a:p>
-          <a:p>
-            <a:pPr>
-              <a:spcBef>
-                <a:spcPts val="400"/>
-              </a:spcBef>
-              <a:spcAft>
-                <a:spcPts val="200"/>
-              </a:spcAft>
-            </a:pPr>
-            <a:r>
-              <a:rPr sz="1300">
-                <a:solidFill>
-                  <a:srgbClr val="3D5466"/>
-                </a:solidFill>
-                <a:latin typeface="Arial"/>
-              </a:rPr>
-              <a:t>▸  Potenzial der Verbesserung: Wie stark könnte sich die NMZ verbessern?</a:t>
-            </a:r>
-          </a:p>
-          <a:p>
-            <a:pPr>
-              <a:spcBef>
-                <a:spcPts val="400"/>
-              </a:spcBef>
-              <a:spcAft>
-                <a:spcPts val="200"/>
-              </a:spcAft>
-            </a:pPr>
-            <a:r>
-              <a:rPr sz="1300">
-                <a:solidFill>
-                  <a:srgbClr val="3D5466"/>
-                </a:solidFill>
-                <a:latin typeface="Arial"/>
-              </a:rPr>
-              <a:t>▸  Hebelverfügbarkeit: Wie schnell und einfach lässt sich der Hebel aktivieren?</a:t>
-            </a:r>
-          </a:p>
-          <a:p>
-            <a:pPr>
-              <a:spcBef>
-                <a:spcPts val="400"/>
-              </a:spcBef>
-              <a:spcAft>
-                <a:spcPts val="200"/>
-              </a:spcAft>
-            </a:pPr>
-            <a:r>
-              <a:rPr sz="1200">
-                <a:solidFill>
-                  <a:srgbClr val="3D5466"/>
-                </a:solidFill>
-                <a:latin typeface="Arial"/>
-              </a:rPr>
-              <a:t>Einfache Priorisierungsmatrix:</a:t>
+              <a:t>Einmal im Monat: agree-NMZ-Ranking aufrufen. Die fünf Kunden mit der niedrigsten NMZ markieren. Für jeden prüfen: Was ist die Hauptursache? (Marge? Kein Verbund? Rating? Betreuungskosten?)</a:t>
             </a:r>
           </a:p>
         </p:txBody>

--- a/protected-downloads/praesentation/M16.pptx
+++ b/protected-downloads/praesentation/M16.pptx
@@ -18,6 +18,10 @@
     <p:sldId id="266" r:id="rId18"/>
     <p:sldId id="267" r:id="rId19"/>
     <p:sldId id="268" r:id="rId20"/>
+    <p:sldId id="269" r:id="rId21"/>
+    <p:sldId id="270" r:id="rId22"/>
+    <p:sldId id="271" r:id="rId23"/>
+    <p:sldId id="272" r:id="rId24"/>
   </p:sldIdLst>
   <p:sldSz cx="12188952" cy="6858000" type="screen4x3"/>
   <p:notesSz cx="6858000" cy="9144000"/>
@@ -470,6 +474,76 @@
 </file>
 
 <file path=ppt/notesSlides/notesSlide1.xml><?xml version="1.0" encoding="utf-8"?>
+<p:notes xmlns:a="http://schemas.openxmlformats.org/drawingml/2006/main" xmlns:p="http://schemas.openxmlformats.org/presentationml/2006/main" xmlns:r="http://schemas.openxmlformats.org/officeDocument/2006/relationships">
+  <p:cSld>
+    <p:spTree>
+      <p:nvGrpSpPr>
+        <p:cNvPr id="1" name=""/>
+        <p:cNvGrpSpPr/>
+        <p:nvPr/>
+      </p:nvGrpSpPr>
+      <p:grpSpPr>
+        <a:xfrm>
+          <a:off x="0" y="0"/>
+          <a:ext cx="0" cy="0"/>
+          <a:chOff x="0" y="0"/>
+          <a:chExt cx="0" cy="0"/>
+        </a:xfrm>
+      </p:grpSpPr>
+      <p:sp>
+        <p:nvSpPr>
+          <p:cNvPr id="2" name="Slide Image Placeholder 1"/>
+          <p:cNvSpPr>
+            <a:spLocks noGrp="1"/>
+          </p:cNvSpPr>
+          <p:nvPr>
+            <p:ph type="sldImg" idx="2"/>
+          </p:nvPr>
+        </p:nvSpPr>
+        <p:spPr/>
+      </p:sp>
+      <p:sp>
+        <p:nvSpPr>
+          <p:cNvPr id="3" name="Notes Placeholder 2"/>
+          <p:cNvSpPr>
+            <a:spLocks noGrp="1"/>
+          </p:cNvSpPr>
+          <p:nvPr>
+            <p:ph type="body" idx="3" sz="quarter"/>
+          </p:nvPr>
+        </p:nvSpPr>
+        <p:spPr/>
+        <p:txBody>
+          <a:bodyPr/>
+          <a:lstStyle/>
+          <a:p>
+            <a:r>
+              <a:t>Agenda aus dem Ablaufplan (Sektion 3.1). Timing und Pausen siehe Trainerhandbuch.</a:t>
+            </a:r>
+          </a:p>
+        </p:txBody>
+      </p:sp>
+      <p:sp>
+        <p:nvSpPr>
+          <p:cNvPr id="4" name="Slide Number Placeholder 3"/>
+          <p:cNvSpPr>
+            <a:spLocks noGrp="1"/>
+          </p:cNvSpPr>
+          <p:nvPr>
+            <p:ph type="sldNum" idx="5" sz="quarter"/>
+          </p:nvPr>
+        </p:nvSpPr>
+        <p:spPr/>
+      </p:sp>
+    </p:spTree>
+  </p:cSld>
+  <p:clrMapOvr>
+    <a:masterClrMapping/>
+  </p:clrMapOvr>
+</p:notes>
+</file>
+
+<file path=ppt/notesSlides/notesSlide10.xml><?xml version="1.0" encoding="utf-8"?>
 <p:notes xmlns:a="http://schemas.openxmlformats.org/drawingml/2006/main" xmlns:p="http://schemas.openxmlformats.org/presentationml/2006/main" xmlns:r="http://schemas.openxmlformats.org/officeDocument/2006/relationships">
   <p:cSld>
     <p:spTree>
@@ -4892,7 +4966,7 @@
                 </a:solidFill>
                 <a:latin typeface="Source Serif 4"/>
               </a:rPr>
-              <a:t>Schritt 2: Priorisieren</a:t>
+              <a:t>Schritt 1: Identifizieren (monatlich, 30 Minuten)</a:t>
             </a:r>
           </a:p>
         </p:txBody>
@@ -4928,70 +5002,13 @@
               </a:spcAft>
             </a:pPr>
             <a:r>
-              <a:rPr sz="1200">
+              <a:rPr sz="1300">
                 <a:solidFill>
                   <a:srgbClr val="3D5466"/>
                 </a:solidFill>
                 <a:latin typeface="Arial"/>
               </a:rPr>
-              <a:t>Nicht alle fünf auf einmal angehen. Priorisierung nach zwei Kriterien:</a:t>
-            </a:r>
-          </a:p>
-          <a:p>
-            <a:pPr>
-              <a:spcBef>
-                <a:spcPts val="400"/>
-              </a:spcBef>
-              <a:spcAft>
-                <a:spcPts val="200"/>
-              </a:spcAft>
-            </a:pPr>
-            <a:r>
-              <a:rPr sz="1300">
-                <a:solidFill>
-                  <a:srgbClr val="3D5466"/>
-                </a:solidFill>
-                <a:latin typeface="Arial"/>
-              </a:rPr>
-              <a:t>▸  Potenzial der Verbesserung: Wie stark könnte sich die NMZ verbessern?</a:t>
-            </a:r>
-          </a:p>
-          <a:p>
-            <a:pPr>
-              <a:spcBef>
-                <a:spcPts val="400"/>
-              </a:spcBef>
-              <a:spcAft>
-                <a:spcPts val="200"/>
-              </a:spcAft>
-            </a:pPr>
-            <a:r>
-              <a:rPr sz="1300">
-                <a:solidFill>
-                  <a:srgbClr val="3D5466"/>
-                </a:solidFill>
-                <a:latin typeface="Arial"/>
-              </a:rPr>
-              <a:t>▸  Hebelverfügbarkeit: Wie schnell und einfach lässt sich der Hebel aktivieren?</a:t>
-            </a:r>
-          </a:p>
-          <a:p>
-            <a:pPr>
-              <a:spcBef>
-                <a:spcPts val="400"/>
-              </a:spcBef>
-              <a:spcAft>
-                <a:spcPts val="200"/>
-              </a:spcAft>
-            </a:pPr>
-            <a:r>
-              <a:rPr sz="1200">
-                <a:solidFill>
-                  <a:srgbClr val="3D5466"/>
-                </a:solidFill>
-                <a:latin typeface="Arial"/>
-              </a:rPr>
-              <a:t>Einfache Priorisierungsmatrix:</a:t>
+              <a:t>▸  Einmal im Monat: agree-NMZ-Ranking aufrufen. Die fünf Kunden mit der niedrigsten NMZ markieren. Für jeden prüfen: Was ist die Hauptursache? (Marge? Kein Verbund? Rating? Betreuungskosten?)</a:t>
             </a:r>
           </a:p>
         </p:txBody>
@@ -5329,7 +5346,7 @@
                 </a:solidFill>
                 <a:latin typeface="Source Serif 4"/>
               </a:rPr>
-              <a:t>Schritt 3: Handeln und dokumentieren</a:t>
+              <a:t>Schritt 2: Priorisieren</a:t>
             </a:r>
           </a:p>
         </p:txBody>
@@ -5365,13 +5382,13 @@
               </a:spcAft>
             </a:pPr>
             <a:r>
-              <a:rPr sz="1200">
+              <a:rPr sz="1300">
                 <a:solidFill>
                   <a:srgbClr val="3D5466"/>
                 </a:solidFill>
                 <a:latin typeface="Arial"/>
               </a:rPr>
-              <a:t>Für jeden Prio-1-Kunden: konkrete Maßnahme definieren, Termin setzen, in agree dokumentieren. Die Maßnahme muss einem der vier NMZ-Hebel zugeordnet sein:</a:t>
+              <a:t>▸  Nicht alle fünf auf einmal angehen. Priorisierung nach zwei Kriterien:</a:t>
             </a:r>
           </a:p>
           <a:p>
@@ -5390,7 +5407,7 @@
                 </a:solidFill>
                 <a:latin typeface="Arial"/>
               </a:rPr>
-              <a:t>▸  Zinshebel: Konditionengespräch vorbereiten (→ M14)</a:t>
+              <a:t>▸  Potenzial der Verbesserung: Wie stark könnte sich die NMZ verbessern?</a:t>
             </a:r>
           </a:p>
           <a:p>
@@ -5409,7 +5426,7 @@
                 </a:solidFill>
                 <a:latin typeface="Arial"/>
               </a:rPr>
-              <a:t>▸  Verbundhebel: Verbundpartner-Termin vereinbaren (→ M13)</a:t>
+              <a:t>▸  Hebelverfügbarkeit: Wie schnell und einfach lässt sich der Hebel aktivieren?</a:t>
             </a:r>
           </a:p>
           <a:p>
@@ -5428,159 +5445,7 @@
                 </a:solidFill>
                 <a:latin typeface="Arial"/>
               </a:rPr>
-              <a:t>▸  Risikohebel: Rating-Gespräch, Besicherungsoptimierung (gemeinsam mit Marktfolge/Kredit)</a:t>
-            </a:r>
-          </a:p>
-          <a:p>
-            <a:pPr>
-              <a:spcBef>
-                <a:spcPts val="400"/>
-              </a:spcBef>
-              <a:spcAft>
-                <a:spcPts val="200"/>
-              </a:spcAft>
-            </a:pPr>
-            <a:r>
-              <a:rPr sz="1300">
-                <a:solidFill>
-                  <a:srgbClr val="3D5466"/>
-                </a:solidFill>
-                <a:latin typeface="Arial"/>
-              </a:rPr>
-              <a:t>▸  Kostenhebel: Betreuungsintensität überprüfen (Führungsgespräch)</a:t>
-            </a:r>
-          </a:p>
-          <a:p>
-            <a:pPr>
-              <a:spcBef>
-                <a:spcPts val="600"/>
-              </a:spcBef>
-              <a:spcAft>
-                <a:spcPts val="200"/>
-              </a:spcAft>
-            </a:pPr>
-            <a:r>
-              <a:rPr sz="1200" i="1">
-                <a:solidFill>
-                  <a:srgbClr val="3D5466"/>
-                </a:solidFill>
-                <a:latin typeface="Arial"/>
-              </a:rPr>
-              <a:t>→  Stichwort-Leitfaden: Margenverteidigung im Konditionsgespräch</a:t>
-            </a:r>
-          </a:p>
-          <a:p>
-            <a:pPr>
-              <a:spcBef>
-                <a:spcPts val="600"/>
-              </a:spcBef>
-              <a:spcAft>
-                <a:spcPts val="200"/>
-              </a:spcAft>
-            </a:pPr>
-            <a:r>
-              <a:rPr sz="1200" i="1">
-                <a:solidFill>
-                  <a:srgbClr val="3D5466"/>
-                </a:solidFill>
-                <a:latin typeface="Arial"/>
-              </a:rPr>
-              <a:t>→  Das Ablesen der NMZ ist der einfache Teil. Das Gespräch mit dem Kunden über eine Margenanpassung ist der schwierige. Drei praxiserprobte Argumentationslinien:</a:t>
-            </a:r>
-          </a:p>
-          <a:p>
-            <a:pPr>
-              <a:spcBef>
-                <a:spcPts val="400"/>
-              </a:spcBef>
-              <a:spcAft>
-                <a:spcPts val="200"/>
-              </a:spcAft>
-            </a:pPr>
-            <a:r>
-              <a:rPr sz="1200">
-                <a:solidFill>
-                  <a:srgbClr val="3D5466"/>
-                </a:solidFill>
-                <a:latin typeface="Arial"/>
-              </a:rPr>
-              <a:t>## 4.5 Praxiscase: Felix Braun optimiert seinen Bestand</a:t>
-            </a:r>
-          </a:p>
-          <a:p>
-            <a:pPr>
-              <a:spcBef>
-                <a:spcPts val="400"/>
-              </a:spcBef>
-              <a:spcAft>
-                <a:spcPts val="200"/>
-              </a:spcAft>
-            </a:pPr>
-            <a:r>
-              <a:rPr sz="1200">
-                <a:solidFill>
-                  <a:srgbClr val="3D5466"/>
-                </a:solidFill>
-                <a:latin typeface="Arial"/>
-              </a:rPr>
-              <a:t>Ausgangssituation</a:t>
-            </a:r>
-          </a:p>
-          <a:p>
-            <a:pPr>
-              <a:spcBef>
-                <a:spcPts val="400"/>
-              </a:spcBef>
-              <a:spcAft>
-                <a:spcPts val="200"/>
-              </a:spcAft>
-            </a:pPr>
-            <a:r>
-              <a:rPr sz="1200">
-                <a:solidFill>
-                  <a:srgbClr val="3D5466"/>
-                </a:solidFill>
-                <a:latin typeface="Arial"/>
-              </a:rPr>
-              <a:t>Analyse</a:t>
-            </a:r>
-          </a:p>
-          <a:p>
-            <a:pPr>
-              <a:spcBef>
-                <a:spcPts val="400"/>
-              </a:spcBef>
-              <a:spcAft>
-                <a:spcPts val="200"/>
-              </a:spcAft>
-            </a:pPr>
-            <a:r>
-              <a:rPr sz="1200">
-                <a:solidFill>
-                  <a:srgbClr val="3D5466"/>
-                </a:solidFill>
-                <a:latin typeface="Arial"/>
-              </a:rPr>
-              <a:t>Felix ruft das Bestandsranking auf. Er sieht sofort: Sieben Kunden haben eine NMZ unter 0,5 %, davon zwei mit negativem DB. Die Hauptursache variiert:</a:t>
-            </a:r>
-          </a:p>
-          <a:p>
-            <a:pPr>
-              <a:spcBef>
-                <a:spcPts val="400"/>
-              </a:spcBef>
-              <a:spcAft>
-                <a:spcPts val="200"/>
-              </a:spcAft>
-            </a:pPr>
-            <a:r>
-              <a:rPr sz="1200">
-                <a:solidFill>
-                  <a:srgbClr val="3D5466"/>
-                </a:solidFill>
-                <a:latin typeface="Arial"/>
-              </a:rPr>
-              <a:t>Felix priorisiert</a:t>
+              <a:t>▸  Einfache Priorisierungsmatrix:</a:t>
             </a:r>
           </a:p>
         </p:txBody>
@@ -5696,7 +5561,7 @@
             <a:avLst/>
           </a:prstGeom>
           <a:solidFill>
-            <a:srgbClr val="EDEDF3"/>
+            <a:srgbClr val="FFFFFF"/>
           </a:solidFill>
           <a:ln>
             <a:noFill/>
@@ -5797,51 +5662,43 @@
                 </a:solidFill>
                 <a:latin typeface="JetBrains Mono"/>
               </a:rPr>
-              <a:t>M16  ·  INHALT</a:t>
-            </a:r>
-          </a:p>
-        </p:txBody>
-      </p:sp>
-      <p:sp>
-        <p:nvSpPr>
-          <p:cNvPr id="5" name="Rectangle 4"/>
-          <p:cNvSpPr/>
-          <p:nvPr/>
-        </p:nvSpPr>
-        <p:spPr>
-          <a:xfrm>
-            <a:off x="0" y="1234440"/>
-            <a:ext cx="12188952" cy="12700"/>
-          </a:xfrm>
-          <a:prstGeom prst="rect">
-            <a:avLst/>
-          </a:prstGeom>
-          <a:solidFill>
-            <a:srgbClr val="D8DFE4"/>
-          </a:solidFill>
-          <a:ln>
-            <a:noFill/>
-          </a:ln>
-        </p:spPr>
-        <p:style>
-          <a:lnRef idx="1">
-            <a:schemeClr val="accent1"/>
-          </a:lnRef>
-          <a:fillRef idx="3">
-            <a:schemeClr val="accent1"/>
-          </a:fillRef>
-          <a:effectRef idx="2">
-            <a:schemeClr val="accent1"/>
-          </a:effectRef>
-          <a:fontRef idx="minor">
-            <a:schemeClr val="lt1"/>
-          </a:fontRef>
-        </p:style>
-        <p:txBody>
-          <a:bodyPr rtlCol="0" anchor="ctr"/>
-          <a:lstStyle/>
-          <a:p>
-            <a:pPr algn="ctr"/>
+              <a:t>M16  ·  ÜBERSICHT</a:t>
+            </a:r>
+          </a:p>
+        </p:txBody>
+      </p:sp>
+      <p:sp>
+        <p:nvSpPr>
+          <p:cNvPr id="5" name="TextBox 4"/>
+          <p:cNvSpPr txBox="1"/>
+          <p:nvPr/>
+        </p:nvSpPr>
+        <p:spPr>
+          <a:xfrm>
+            <a:off x="685800" y="502920"/>
+            <a:ext cx="10817352" cy="594360"/>
+          </a:xfrm>
+          <a:prstGeom prst="rect">
+            <a:avLst/>
+          </a:prstGeom>
+          <a:noFill/>
+        </p:spPr>
+        <p:txBody>
+          <a:bodyPr wrap="square">
+            <a:spAutoFit/>
+          </a:bodyPr>
+          <a:lstStyle/>
+          <a:p>
+            <a:pPr algn="l"/>
+            <a:r>
+              <a:rPr sz="2000" b="1" i="0">
+                <a:solidFill>
+                  <a:srgbClr val="1F2C56"/>
+                </a:solidFill>
+                <a:latin typeface="Source Serif 4"/>
+              </a:rPr>
+              <a:t>Schritt 2: Priorisieren</a:t>
+            </a:r>
           </a:p>
         </p:txBody>
       </p:sp>
@@ -5853,8 +5710,8 @@
         </p:nvSpPr>
         <p:spPr>
           <a:xfrm>
-            <a:off x="685800" y="502920"/>
-            <a:ext cx="36576" cy="658368"/>
+            <a:off x="685800" y="1143000"/>
+            <a:ext cx="10817352" cy="25400"/>
           </a:xfrm>
           <a:prstGeom prst="rect">
             <a:avLst/>
@@ -5888,105 +5745,206 @@
           </a:p>
         </p:txBody>
       </p:sp>
-      <p:sp>
-        <p:nvSpPr>
-          <p:cNvPr id="7" name="TextBox 6"/>
-          <p:cNvSpPr txBox="1"/>
-          <p:nvPr/>
-        </p:nvSpPr>
-        <p:spPr>
-          <a:xfrm>
-            <a:off x="813816" y="502920"/>
-            <a:ext cx="10634472" cy="685800"/>
-          </a:xfrm>
-          <a:prstGeom prst="rect">
-            <a:avLst/>
-          </a:prstGeom>
-          <a:noFill/>
-        </p:spPr>
-        <p:txBody>
-          <a:bodyPr wrap="square">
-            <a:spAutoFit/>
-          </a:bodyPr>
-          <a:lstStyle/>
-          <a:p>
-            <a:pPr algn="l"/>
-            <a:r>
-              <a:rPr sz="2400" b="1" i="0">
-                <a:solidFill>
-                  <a:srgbClr val="1F2C56"/>
-                </a:solidFill>
-                <a:latin typeface="Source Serif 4"/>
-              </a:rPr>
-              <a:t>Arbeitsblatt A: Mein NMZ-Bestandsbild</a:t>
-            </a:r>
-          </a:p>
-        </p:txBody>
-      </p:sp>
-      <p:sp>
-        <p:nvSpPr>
-          <p:cNvPr id="8" name="TextBox 7"/>
-          <p:cNvSpPr txBox="1"/>
-          <p:nvPr/>
-        </p:nvSpPr>
-        <p:spPr>
-          <a:xfrm>
-            <a:off x="685800" y="1417320"/>
-            <a:ext cx="10817352" cy="5029200"/>
-          </a:xfrm>
-          <a:prstGeom prst="rect">
-            <a:avLst/>
-          </a:prstGeom>
-          <a:noFill/>
-        </p:spPr>
-        <p:txBody>
-          <a:bodyPr wrap="square">
-            <a:spAutoFit/>
-          </a:bodyPr>
-          <a:lstStyle/>
-          <a:p>
-            <a:pPr>
-              <a:spcBef>
-                <a:spcPts val="400"/>
-              </a:spcBef>
-              <a:spcAft>
-                <a:spcPts val="200"/>
-              </a:spcAft>
-            </a:pPr>
-            <a:r>
-              <a:rPr sz="1200">
-                <a:solidFill>
-                  <a:srgbClr val="3D5466"/>
-                </a:solidFill>
-                <a:latin typeface="Arial"/>
-              </a:rPr>
-              <a:t>Dominantes Schwachfeld in meinem Bestand:</a:t>
-            </a:r>
-          </a:p>
-          <a:p>
-            <a:pPr>
-              <a:spcBef>
-                <a:spcPts val="400"/>
-              </a:spcBef>
-              <a:spcAft>
-                <a:spcPts val="200"/>
-              </a:spcAft>
-            </a:pPr>
-            <a:r>
-              <a:rPr sz="1200">
-                <a:solidFill>
-                  <a:srgbClr val="3D5466"/>
-                </a:solidFill>
-                <a:latin typeface="Arial"/>
-              </a:rPr>
-              <a:t>☐ Zinsmarge zu niedrig  ☐ Verbundgeschäft fehlt  ☐ Risikokosten zu hoch  ☐ Betreuungskosten zu hoch</a:t>
-            </a:r>
-          </a:p>
-        </p:txBody>
-      </p:sp>
-      <p:sp>
-        <p:nvSpPr>
-          <p:cNvPr id="9" name="Rectangle 8"/>
+      <p:graphicFrame>
+        <p:nvGraphicFramePr>
+          <p:cNvPr id="7" name="Table 6"/>
+          <p:cNvGraphicFramePr>
+            <a:graphicFrameLocks noGrp="1"/>
+          </p:cNvGraphicFramePr>
+          <p:nvPr/>
+        </p:nvGraphicFramePr>
+        <p:xfrm>
+          <a:off x="685800" y="1417320"/>
+          <a:ext cx="10817352" cy="1152144"/>
+        </p:xfrm>
+        <a:graphic>
+          <a:graphicData uri="http://schemas.openxmlformats.org/drawingml/2006/table">
+            <a:tbl>
+              <a:tblPr firstRow="1" bandRow="1">
+                <a:tableStyleId>{5C22544A-7EE6-4342-B048-85BDC9FD1C3A}</a:tableStyleId>
+              </a:tblPr>
+              <a:tblGrid>
+                <a:gridCol w="3605784"/>
+                <a:gridCol w="3605784"/>
+                <a:gridCol w="3605784"/>
+              </a:tblGrid>
+              <a:tr h="384048">
+                <a:tc>
+                  <a:txBody>
+                    <a:bodyPr/>
+                    <a:lstStyle/>
+                    <a:p/>
+                  </a:txBody>
+                  <a:tcPr>
+                    <a:solidFill>
+                      <a:srgbClr val="1F2C56"/>
+                    </a:solidFill>
+                  </a:tcPr>
+                </a:tc>
+                <a:tc>
+                  <a:txBody>
+                    <a:bodyPr/>
+                    <a:lstStyle/>
+                    <a:p>
+                      <a:r>
+                        <a:rPr sz="1100" b="1">
+                          <a:solidFill>
+                            <a:srgbClr val="FFFFFF"/>
+                          </a:solidFill>
+                          <a:latin typeface="Arial"/>
+                        </a:rPr>
+                        <a:t>Schnell umsetzbar</a:t>
+                      </a:r>
+                    </a:p>
+                  </a:txBody>
+                  <a:tcPr>
+                    <a:solidFill>
+                      <a:srgbClr val="1F2C56"/>
+                    </a:solidFill>
+                  </a:tcPr>
+                </a:tc>
+                <a:tc>
+                  <a:txBody>
+                    <a:bodyPr/>
+                    <a:lstStyle/>
+                    <a:p>
+                      <a:r>
+                        <a:rPr sz="1100" b="1">
+                          <a:solidFill>
+                            <a:srgbClr val="FFFFFF"/>
+                          </a:solidFill>
+                          <a:latin typeface="Arial"/>
+                        </a:rPr>
+                        <a:t>Langfristig</a:t>
+                      </a:r>
+                    </a:p>
+                  </a:txBody>
+                  <a:tcPr>
+                    <a:solidFill>
+                      <a:srgbClr val="1F2C56"/>
+                    </a:solidFill>
+                  </a:tcPr>
+                </a:tc>
+              </a:tr>
+              <a:tr h="384048">
+                <a:tc>
+                  <a:txBody>
+                    <a:bodyPr/>
+                    <a:lstStyle/>
+                    <a:p>
+                      <a:r>
+                        <a:rPr sz="1050">
+                          <a:solidFill>
+                            <a:srgbClr val="3D5466"/>
+                          </a:solidFill>
+                          <a:latin typeface="Arial"/>
+                        </a:rPr>
+                        <a:t>Hohes Verbesserungspotenzial</a:t>
+                      </a:r>
+                    </a:p>
+                  </a:txBody>
+                  <a:tcPr/>
+                </a:tc>
+                <a:tc>
+                  <a:txBody>
+                    <a:bodyPr/>
+                    <a:lstStyle/>
+                    <a:p>
+                      <a:r>
+                        <a:rPr sz="1050">
+                          <a:solidFill>
+                            <a:srgbClr val="3D5466"/>
+                          </a:solidFill>
+                          <a:latin typeface="Arial"/>
+                        </a:rPr>
+                        <a:t>Sofort angehen (Prio 1)</a:t>
+                      </a:r>
+                    </a:p>
+                  </a:txBody>
+                  <a:tcPr/>
+                </a:tc>
+                <a:tc>
+                  <a:txBody>
+                    <a:bodyPr/>
+                    <a:lstStyle/>
+                    <a:p>
+                      <a:r>
+                        <a:rPr sz="1050">
+                          <a:solidFill>
+                            <a:srgbClr val="3D5466"/>
+                          </a:solidFill>
+                          <a:latin typeface="Arial"/>
+                        </a:rPr>
+                        <a:t>Mittelfristig planen (Prio 2)</a:t>
+                      </a:r>
+                    </a:p>
+                  </a:txBody>
+                  <a:tcPr/>
+                </a:tc>
+              </a:tr>
+              <a:tr h="384048">
+                <a:tc>
+                  <a:txBody>
+                    <a:bodyPr/>
+                    <a:lstStyle/>
+                    <a:p>
+                      <a:r>
+                        <a:rPr sz="1050">
+                          <a:solidFill>
+                            <a:srgbClr val="3D5466"/>
+                          </a:solidFill>
+                          <a:latin typeface="Arial"/>
+                        </a:rPr>
+                        <a:t>Niedriges Verbesserungspotenzial</a:t>
+                      </a:r>
+                    </a:p>
+                  </a:txBody>
+                  <a:tcPr/>
+                </a:tc>
+                <a:tc>
+                  <a:txBody>
+                    <a:bodyPr/>
+                    <a:lstStyle/>
+                    <a:p>
+                      <a:r>
+                        <a:rPr sz="1050">
+                          <a:solidFill>
+                            <a:srgbClr val="3D5466"/>
+                          </a:solidFill>
+                          <a:latin typeface="Arial"/>
+                        </a:rPr>
+                        <a:t>Opportunistisch (Prio 3)</a:t>
+                      </a:r>
+                    </a:p>
+                  </a:txBody>
+                  <a:tcPr/>
+                </a:tc>
+                <a:tc>
+                  <a:txBody>
+                    <a:bodyPr/>
+                    <a:lstStyle/>
+                    <a:p>
+                      <a:r>
+                        <a:rPr sz="1050">
+                          <a:solidFill>
+                            <a:srgbClr val="3D5466"/>
+                          </a:solidFill>
+                          <a:latin typeface="Arial"/>
+                        </a:rPr>
+                        <a:t>Deprioritisieren (Prio 4)</a:t>
+                      </a:r>
+                    </a:p>
+                  </a:txBody>
+                  <a:tcPr/>
+                </a:tc>
+              </a:tr>
+            </a:tbl>
+          </a:graphicData>
+        </a:graphic>
+      </p:graphicFrame>
+      <p:sp>
+        <p:nvSpPr>
+          <p:cNvPr id="8" name="Rectangle 7"/>
           <p:cNvSpPr/>
           <p:nvPr/>
         </p:nvSpPr>
@@ -6029,7 +5987,7 @@
       </p:sp>
       <p:sp>
         <p:nvSpPr>
-          <p:cNvPr id="10" name="TextBox 9"/>
+          <p:cNvPr id="9" name="TextBox 8"/>
           <p:cNvSpPr txBox="1"/>
           <p:nvPr/>
         </p:nvSpPr>
@@ -6058,6 +6016,41 @@
                 <a:latin typeface="JetBrains Mono"/>
               </a:rPr>
               <a:t>Benedikt Zoller Coaching  ·  FKB Campus  ·  M16</a:t>
+            </a:r>
+          </a:p>
+        </p:txBody>
+      </p:sp>
+      <p:sp>
+        <p:nvSpPr>
+          <p:cNvPr id="10" name="TextBox 9"/>
+          <p:cNvSpPr txBox="1"/>
+          <p:nvPr/>
+        </p:nvSpPr>
+        <p:spPr>
+          <a:xfrm>
+            <a:off x="7176211" y="6583680"/>
+            <a:ext cx="4326940" cy="256032"/>
+          </a:xfrm>
+          <a:prstGeom prst="rect">
+            <a:avLst/>
+          </a:prstGeom>
+          <a:noFill/>
+        </p:spPr>
+        <p:txBody>
+          <a:bodyPr wrap="none">
+            <a:spAutoFit/>
+          </a:bodyPr>
+          <a:lstStyle/>
+          <a:p>
+            <a:pPr algn="r"/>
+            <a:r>
+              <a:rPr sz="700">
+                <a:solidFill>
+                  <a:srgbClr val="A0B4D2"/>
+                </a:solidFill>
+                <a:latin typeface="JetBrains Mono"/>
+              </a:rPr>
+              <a:t>Übersicht</a:t>
             </a:r>
           </a:p>
         </p:txBody>
@@ -6317,7 +6310,7 @@
                 </a:solidFill>
                 <a:latin typeface="Source Serif 4"/>
               </a:rPr>
-              <a:t>Arbeitsblatt B: Maßnahmenplan</a:t>
+              <a:t>Schritt 3: Handeln und dokumentieren</a:t>
             </a:r>
           </a:p>
         </p:txBody>
@@ -6353,13 +6346,2550 @@
               </a:spcAft>
             </a:pPr>
             <a:r>
-              <a:rPr sz="1200">
+              <a:rPr sz="1300">
                 <a:solidFill>
                   <a:srgbClr val="3D5466"/>
                 </a:solidFill>
                 <a:latin typeface="Arial"/>
               </a:rPr>
-              <a:t>Mein Ziel für die nächsten 90 Tage:</a:t>
+              <a:t>▸  Für jeden Prio-1-Kunden: konkrete Maßnahme definieren, Termin setzen, in agree dokumentieren. Die Maßnahme muss einem der vier NMZ-Hebel zugeordnet sein:</a:t>
+            </a:r>
+          </a:p>
+          <a:p>
+            <a:pPr>
+              <a:spcBef>
+                <a:spcPts val="400"/>
+              </a:spcBef>
+              <a:spcAft>
+                <a:spcPts val="200"/>
+              </a:spcAft>
+            </a:pPr>
+            <a:r>
+              <a:rPr sz="1300">
+                <a:solidFill>
+                  <a:srgbClr val="3D5466"/>
+                </a:solidFill>
+                <a:latin typeface="Arial"/>
+              </a:rPr>
+              <a:t>▸  Zinshebel: Konditionengespräch vorbereiten (→ M14)</a:t>
+            </a:r>
+          </a:p>
+          <a:p>
+            <a:pPr>
+              <a:spcBef>
+                <a:spcPts val="400"/>
+              </a:spcBef>
+              <a:spcAft>
+                <a:spcPts val="200"/>
+              </a:spcAft>
+            </a:pPr>
+            <a:r>
+              <a:rPr sz="1300">
+                <a:solidFill>
+                  <a:srgbClr val="3D5466"/>
+                </a:solidFill>
+                <a:latin typeface="Arial"/>
+              </a:rPr>
+              <a:t>▸  Verbundhebel: Verbundpartner-Termin vereinbaren (→ M13)</a:t>
+            </a:r>
+          </a:p>
+          <a:p>
+            <a:pPr>
+              <a:spcBef>
+                <a:spcPts val="400"/>
+              </a:spcBef>
+              <a:spcAft>
+                <a:spcPts val="200"/>
+              </a:spcAft>
+            </a:pPr>
+            <a:r>
+              <a:rPr sz="1300">
+                <a:solidFill>
+                  <a:srgbClr val="3D5466"/>
+                </a:solidFill>
+                <a:latin typeface="Arial"/>
+              </a:rPr>
+              <a:t>▸  Risikohebel: Rating-Gespräch, Besicherungsoptimierung (gemeinsam mit Marktfolge/Kredit)</a:t>
+            </a:r>
+          </a:p>
+          <a:p>
+            <a:pPr>
+              <a:spcBef>
+                <a:spcPts val="400"/>
+              </a:spcBef>
+              <a:spcAft>
+                <a:spcPts val="200"/>
+              </a:spcAft>
+            </a:pPr>
+            <a:r>
+              <a:rPr sz="1300">
+                <a:solidFill>
+                  <a:srgbClr val="3D5466"/>
+                </a:solidFill>
+                <a:latin typeface="Arial"/>
+              </a:rPr>
+              <a:t>▸  Kostenhebel: Betreuungsintensität überprüfen (Führungsgespräch)</a:t>
+            </a:r>
+          </a:p>
+          <a:p>
+            <a:pPr>
+              <a:spcBef>
+                <a:spcPts val="600"/>
+              </a:spcBef>
+              <a:spcAft>
+                <a:spcPts val="200"/>
+              </a:spcAft>
+            </a:pPr>
+            <a:r>
+              <a:rPr sz="1200" i="1">
+                <a:solidFill>
+                  <a:srgbClr val="3D5466"/>
+                </a:solidFill>
+                <a:latin typeface="Arial"/>
+              </a:rPr>
+              <a:t>→  Stichwort-Leitfaden: Margenverteidigung im Konditionsgespräch</a:t>
+            </a:r>
+          </a:p>
+          <a:p>
+            <a:pPr>
+              <a:spcBef>
+                <a:spcPts val="600"/>
+              </a:spcBef>
+              <a:spcAft>
+                <a:spcPts val="200"/>
+              </a:spcAft>
+            </a:pPr>
+            <a:r>
+              <a:rPr sz="1200" i="1">
+                <a:solidFill>
+                  <a:srgbClr val="3D5466"/>
+                </a:solidFill>
+                <a:latin typeface="Arial"/>
+              </a:rPr>
+              <a:t>→  Das Ablesen der NMZ ist der einfache Teil. Das Gespräch mit dem Kunden über eine Margenanpassung ist der schwierige. Drei praxiserprobte Argumentationslinien:</a:t>
+            </a:r>
+          </a:p>
+          <a:p>
+            <a:pPr>
+              <a:spcBef>
+                <a:spcPts val="400"/>
+              </a:spcBef>
+              <a:spcAft>
+                <a:spcPts val="200"/>
+              </a:spcAft>
+            </a:pPr>
+            <a:r>
+              <a:rPr sz="1300">
+                <a:solidFill>
+                  <a:srgbClr val="3D5466"/>
+                </a:solidFill>
+                <a:latin typeface="Arial"/>
+              </a:rPr>
+              <a:t>▸  ## 4.5 Praxiscase: Felix Braun optimiert seinen Bestand</a:t>
+            </a:r>
+          </a:p>
+          <a:p>
+            <a:pPr>
+              <a:spcBef>
+                <a:spcPts val="400"/>
+              </a:spcBef>
+              <a:spcAft>
+                <a:spcPts val="200"/>
+              </a:spcAft>
+            </a:pPr>
+            <a:r>
+              <a:rPr sz="1300">
+                <a:solidFill>
+                  <a:srgbClr val="3D5466"/>
+                </a:solidFill>
+                <a:latin typeface="Arial"/>
+              </a:rPr>
+              <a:t>▸  Ausgangssituation</a:t>
+            </a:r>
+          </a:p>
+          <a:p>
+            <a:pPr>
+              <a:spcBef>
+                <a:spcPts val="400"/>
+              </a:spcBef>
+              <a:spcAft>
+                <a:spcPts val="200"/>
+              </a:spcAft>
+            </a:pPr>
+            <a:r>
+              <a:rPr sz="1300">
+                <a:solidFill>
+                  <a:srgbClr val="3D5466"/>
+                </a:solidFill>
+                <a:latin typeface="Arial"/>
+              </a:rPr>
+              <a:t>▸  Analyse</a:t>
+            </a:r>
+          </a:p>
+          <a:p>
+            <a:pPr>
+              <a:spcBef>
+                <a:spcPts val="400"/>
+              </a:spcBef>
+              <a:spcAft>
+                <a:spcPts val="200"/>
+              </a:spcAft>
+            </a:pPr>
+            <a:r>
+              <a:rPr sz="1300">
+                <a:solidFill>
+                  <a:srgbClr val="3D5466"/>
+                </a:solidFill>
+                <a:latin typeface="Arial"/>
+              </a:rPr>
+              <a:t>▸  Felix ruft das Bestandsranking auf. Er sieht sofort: Sieben Kunden haben eine NMZ unter 0,5 %, davon zwei mit negativem DB. Die Hauptursache variiert:</a:t>
+            </a:r>
+          </a:p>
+          <a:p>
+            <a:pPr>
+              <a:spcBef>
+                <a:spcPts val="400"/>
+              </a:spcBef>
+              <a:spcAft>
+                <a:spcPts val="200"/>
+              </a:spcAft>
+            </a:pPr>
+            <a:r>
+              <a:rPr sz="1300">
+                <a:solidFill>
+                  <a:srgbClr val="3D5466"/>
+                </a:solidFill>
+                <a:latin typeface="Arial"/>
+              </a:rPr>
+              <a:t>▸  Felix priorisiert</a:t>
+            </a:r>
+          </a:p>
+        </p:txBody>
+      </p:sp>
+      <p:sp>
+        <p:nvSpPr>
+          <p:cNvPr id="9" name="Rectangle 8"/>
+          <p:cNvSpPr/>
+          <p:nvPr/>
+        </p:nvSpPr>
+        <p:spPr>
+          <a:xfrm>
+            <a:off x="0" y="6510528"/>
+            <a:ext cx="12188952" cy="347472"/>
+          </a:xfrm>
+          <a:prstGeom prst="rect">
+            <a:avLst/>
+          </a:prstGeom>
+          <a:solidFill>
+            <a:srgbClr val="0A1937"/>
+          </a:solidFill>
+          <a:ln>
+            <a:noFill/>
+          </a:ln>
+        </p:spPr>
+        <p:style>
+          <a:lnRef idx="1">
+            <a:schemeClr val="accent1"/>
+          </a:lnRef>
+          <a:fillRef idx="3">
+            <a:schemeClr val="accent1"/>
+          </a:fillRef>
+          <a:effectRef idx="2">
+            <a:schemeClr val="accent1"/>
+          </a:effectRef>
+          <a:fontRef idx="minor">
+            <a:schemeClr val="lt1"/>
+          </a:fontRef>
+        </p:style>
+        <p:txBody>
+          <a:bodyPr rtlCol="0" anchor="ctr"/>
+          <a:lstStyle/>
+          <a:p>
+            <a:pPr algn="ctr"/>
+          </a:p>
+        </p:txBody>
+      </p:sp>
+      <p:sp>
+        <p:nvSpPr>
+          <p:cNvPr id="10" name="TextBox 9"/>
+          <p:cNvSpPr txBox="1"/>
+          <p:nvPr/>
+        </p:nvSpPr>
+        <p:spPr>
+          <a:xfrm>
+            <a:off x="685800" y="6583680"/>
+            <a:ext cx="6490411" cy="256032"/>
+          </a:xfrm>
+          <a:prstGeom prst="rect">
+            <a:avLst/>
+          </a:prstGeom>
+          <a:noFill/>
+        </p:spPr>
+        <p:txBody>
+          <a:bodyPr wrap="none">
+            <a:spAutoFit/>
+          </a:bodyPr>
+          <a:lstStyle/>
+          <a:p>
+            <a:pPr algn="l"/>
+            <a:r>
+              <a:rPr sz="700">
+                <a:solidFill>
+                  <a:srgbClr val="A0B4D2"/>
+                </a:solidFill>
+                <a:latin typeface="JetBrains Mono"/>
+              </a:rPr>
+              <a:t>Benedikt Zoller Coaching  ·  FKB Campus  ·  M16</a:t>
+            </a:r>
+          </a:p>
+        </p:txBody>
+      </p:sp>
+    </p:spTree>
+  </p:cSld>
+  <p:clrMapOvr>
+    <a:masterClrMapping/>
+  </p:clrMapOvr>
+</p:sld>
+</file>
+
+<file path=ppt/slides/slide14.xml><?xml version="1.0" encoding="utf-8"?>
+<p:sld xmlns:a="http://schemas.openxmlformats.org/drawingml/2006/main" xmlns:p="http://schemas.openxmlformats.org/presentationml/2006/main" xmlns:r="http://schemas.openxmlformats.org/officeDocument/2006/relationships">
+  <p:cSld>
+    <p:spTree>
+      <p:nvGrpSpPr>
+        <p:cNvPr id="1" name=""/>
+        <p:cNvGrpSpPr/>
+        <p:nvPr/>
+      </p:nvGrpSpPr>
+      <p:grpSpPr/>
+      <p:sp>
+        <p:nvSpPr>
+          <p:cNvPr id="2" name="Rectangle 1"/>
+          <p:cNvSpPr/>
+          <p:nvPr/>
+        </p:nvSpPr>
+        <p:spPr>
+          <a:xfrm>
+            <a:off x="0" y="0"/>
+            <a:ext cx="12188952" cy="6858000"/>
+          </a:xfrm>
+          <a:prstGeom prst="rect">
+            <a:avLst/>
+          </a:prstGeom>
+          <a:solidFill>
+            <a:srgbClr val="FFFFFF"/>
+          </a:solidFill>
+          <a:ln>
+            <a:noFill/>
+          </a:ln>
+        </p:spPr>
+        <p:style>
+          <a:lnRef idx="1">
+            <a:schemeClr val="accent1"/>
+          </a:lnRef>
+          <a:fillRef idx="3">
+            <a:schemeClr val="accent1"/>
+          </a:fillRef>
+          <a:effectRef idx="2">
+            <a:schemeClr val="accent1"/>
+          </a:effectRef>
+          <a:fontRef idx="minor">
+            <a:schemeClr val="lt1"/>
+          </a:fontRef>
+        </p:style>
+        <p:txBody>
+          <a:bodyPr rtlCol="0" anchor="ctr"/>
+          <a:lstStyle/>
+          <a:p>
+            <a:pPr algn="ctr"/>
+          </a:p>
+        </p:txBody>
+      </p:sp>
+      <p:sp>
+        <p:nvSpPr>
+          <p:cNvPr id="3" name="Rectangle 2"/>
+          <p:cNvSpPr/>
+          <p:nvPr/>
+        </p:nvSpPr>
+        <p:spPr>
+          <a:xfrm>
+            <a:off x="0" y="0"/>
+            <a:ext cx="12188952" cy="50292"/>
+          </a:xfrm>
+          <a:prstGeom prst="rect">
+            <a:avLst/>
+          </a:prstGeom>
+          <a:solidFill>
+            <a:srgbClr val="1F2C56"/>
+          </a:solidFill>
+          <a:ln>
+            <a:noFill/>
+          </a:ln>
+        </p:spPr>
+        <p:style>
+          <a:lnRef idx="1">
+            <a:schemeClr val="accent1"/>
+          </a:lnRef>
+          <a:fillRef idx="3">
+            <a:schemeClr val="accent1"/>
+          </a:fillRef>
+          <a:effectRef idx="2">
+            <a:schemeClr val="accent1"/>
+          </a:effectRef>
+          <a:fontRef idx="minor">
+            <a:schemeClr val="lt1"/>
+          </a:fontRef>
+        </p:style>
+        <p:txBody>
+          <a:bodyPr rtlCol="0" anchor="ctr"/>
+          <a:lstStyle/>
+          <a:p>
+            <a:pPr algn="ctr"/>
+          </a:p>
+        </p:txBody>
+      </p:sp>
+      <p:sp>
+        <p:nvSpPr>
+          <p:cNvPr id="4" name="TextBox 3"/>
+          <p:cNvSpPr txBox="1"/>
+          <p:nvPr/>
+        </p:nvSpPr>
+        <p:spPr>
+          <a:xfrm>
+            <a:off x="685800" y="109728"/>
+            <a:ext cx="10817352" cy="228600"/>
+          </a:xfrm>
+          <a:prstGeom prst="rect">
+            <a:avLst/>
+          </a:prstGeom>
+          <a:noFill/>
+        </p:spPr>
+        <p:txBody>
+          <a:bodyPr wrap="none">
+            <a:spAutoFit/>
+          </a:bodyPr>
+          <a:lstStyle/>
+          <a:p>
+            <a:pPr algn="l"/>
+            <a:r>
+              <a:rPr sz="750">
+                <a:solidFill>
+                  <a:srgbClr val="78808C"/>
+                </a:solidFill>
+                <a:latin typeface="JetBrains Mono"/>
+              </a:rPr>
+              <a:t>M16  ·  ÜBERSICHT</a:t>
+            </a:r>
+          </a:p>
+        </p:txBody>
+      </p:sp>
+      <p:sp>
+        <p:nvSpPr>
+          <p:cNvPr id="5" name="TextBox 4"/>
+          <p:cNvSpPr txBox="1"/>
+          <p:nvPr/>
+        </p:nvSpPr>
+        <p:spPr>
+          <a:xfrm>
+            <a:off x="685800" y="502920"/>
+            <a:ext cx="10817352" cy="594360"/>
+          </a:xfrm>
+          <a:prstGeom prst="rect">
+            <a:avLst/>
+          </a:prstGeom>
+          <a:noFill/>
+        </p:spPr>
+        <p:txBody>
+          <a:bodyPr wrap="square">
+            <a:spAutoFit/>
+          </a:bodyPr>
+          <a:lstStyle/>
+          <a:p>
+            <a:pPr algn="l"/>
+            <a:r>
+              <a:rPr sz="2000" b="1" i="0">
+                <a:solidFill>
+                  <a:srgbClr val="1F2C56"/>
+                </a:solidFill>
+                <a:latin typeface="Source Serif 4"/>
+              </a:rPr>
+              <a:t>Schritt 3: Handeln und dokumentieren</a:t>
+            </a:r>
+          </a:p>
+        </p:txBody>
+      </p:sp>
+      <p:sp>
+        <p:nvSpPr>
+          <p:cNvPr id="6" name="Rectangle 5"/>
+          <p:cNvSpPr/>
+          <p:nvPr/>
+        </p:nvSpPr>
+        <p:spPr>
+          <a:xfrm>
+            <a:off x="685800" y="1143000"/>
+            <a:ext cx="10817352" cy="25400"/>
+          </a:xfrm>
+          <a:prstGeom prst="rect">
+            <a:avLst/>
+          </a:prstGeom>
+          <a:solidFill>
+            <a:srgbClr val="D9C089"/>
+          </a:solidFill>
+          <a:ln>
+            <a:noFill/>
+          </a:ln>
+        </p:spPr>
+        <p:style>
+          <a:lnRef idx="1">
+            <a:schemeClr val="accent1"/>
+          </a:lnRef>
+          <a:fillRef idx="3">
+            <a:schemeClr val="accent1"/>
+          </a:fillRef>
+          <a:effectRef idx="2">
+            <a:schemeClr val="accent1"/>
+          </a:effectRef>
+          <a:fontRef idx="minor">
+            <a:schemeClr val="lt1"/>
+          </a:fontRef>
+        </p:style>
+        <p:txBody>
+          <a:bodyPr rtlCol="0" anchor="ctr"/>
+          <a:lstStyle/>
+          <a:p>
+            <a:pPr algn="ctr"/>
+          </a:p>
+        </p:txBody>
+      </p:sp>
+      <p:graphicFrame>
+        <p:nvGraphicFramePr>
+          <p:cNvPr id="7" name="Table 6"/>
+          <p:cNvGraphicFramePr>
+            <a:graphicFrameLocks noGrp="1"/>
+          </p:cNvGraphicFramePr>
+          <p:nvPr/>
+        </p:nvGraphicFramePr>
+        <p:xfrm>
+          <a:off x="685800" y="1417320"/>
+          <a:ext cx="10817352" cy="2304288"/>
+        </p:xfrm>
+        <a:graphic>
+          <a:graphicData uri="http://schemas.openxmlformats.org/drawingml/2006/table">
+            <a:tbl>
+              <a:tblPr firstRow="1" bandRow="1">
+                <a:tableStyleId>{5C22544A-7EE6-4342-B048-85BDC9FD1C3A}</a:tableStyleId>
+              </a:tblPr>
+              <a:tblGrid>
+                <a:gridCol w="2704338"/>
+                <a:gridCol w="2704338"/>
+                <a:gridCol w="2704338"/>
+                <a:gridCol w="2704338"/>
+              </a:tblGrid>
+              <a:tr h="384048">
+                <a:tc>
+                  <a:txBody>
+                    <a:bodyPr/>
+                    <a:lstStyle/>
+                    <a:p>
+                      <a:r>
+                        <a:rPr sz="1100" b="1">
+                          <a:solidFill>
+                            <a:srgbClr val="FFFFFF"/>
+                          </a:solidFill>
+                          <a:latin typeface="Arial"/>
+                        </a:rPr>
+                        <a:t>Kunde</a:t>
+                      </a:r>
+                    </a:p>
+                  </a:txBody>
+                  <a:tcPr>
+                    <a:solidFill>
+                      <a:srgbClr val="1F2C56"/>
+                    </a:solidFill>
+                  </a:tcPr>
+                </a:tc>
+                <a:tc>
+                  <a:txBody>
+                    <a:bodyPr/>
+                    <a:lstStyle/>
+                    <a:p>
+                      <a:r>
+                        <a:rPr sz="1100" b="1">
+                          <a:solidFill>
+                            <a:srgbClr val="FFFFFF"/>
+                          </a:solidFill>
+                          <a:latin typeface="Arial"/>
+                        </a:rPr>
+                        <a:t>NMZ</a:t>
+                      </a:r>
+                    </a:p>
+                  </a:txBody>
+                  <a:tcPr>
+                    <a:solidFill>
+                      <a:srgbClr val="1F2C56"/>
+                    </a:solidFill>
+                  </a:tcPr>
+                </a:tc>
+                <a:tc>
+                  <a:txBody>
+                    <a:bodyPr/>
+                    <a:lstStyle/>
+                    <a:p>
+                      <a:r>
+                        <a:rPr sz="1100" b="1">
+                          <a:solidFill>
+                            <a:srgbClr val="FFFFFF"/>
+                          </a:solidFill>
+                          <a:latin typeface="Arial"/>
+                        </a:rPr>
+                        <a:t>Hauptursache</a:t>
+                      </a:r>
+                    </a:p>
+                  </a:txBody>
+                  <a:tcPr>
+                    <a:solidFill>
+                      <a:srgbClr val="1F2C56"/>
+                    </a:solidFill>
+                  </a:tcPr>
+                </a:tc>
+                <a:tc>
+                  <a:txBody>
+                    <a:bodyPr/>
+                    <a:lstStyle/>
+                    <a:p>
+                      <a:r>
+                        <a:rPr sz="1100" b="1">
+                          <a:solidFill>
+                            <a:srgbClr val="FFFFFF"/>
+                          </a:solidFill>
+                          <a:latin typeface="Arial"/>
+                        </a:rPr>
+                        <a:t>Hebel</a:t>
+                      </a:r>
+                    </a:p>
+                  </a:txBody>
+                  <a:tcPr>
+                    <a:solidFill>
+                      <a:srgbClr val="1F2C56"/>
+                    </a:solidFill>
+                  </a:tcPr>
+                </a:tc>
+              </a:tr>
+              <a:tr h="384048">
+                <a:tc>
+                  <a:txBody>
+                    <a:bodyPr/>
+                    <a:lstStyle/>
+                    <a:p>
+                      <a:r>
+                        <a:rPr sz="1050">
+                          <a:solidFill>
+                            <a:srgbClr val="3D5466"/>
+                          </a:solidFill>
+                          <a:latin typeface="Arial"/>
+                        </a:rPr>
+                        <a:t>Metzger GmbH</a:t>
+                      </a:r>
+                    </a:p>
+                  </a:txBody>
+                  <a:tcPr/>
+                </a:tc>
+                <a:tc>
+                  <a:txBody>
+                    <a:bodyPr/>
+                    <a:lstStyle/>
+                    <a:p>
+                      <a:r>
+                        <a:rPr sz="1050">
+                          <a:solidFill>
+                            <a:srgbClr val="3D5466"/>
+                          </a:solidFill>
+                          <a:latin typeface="Arial"/>
+                        </a:rPr>
+                        <a:t>−0,20 %</a:t>
+                      </a:r>
+                    </a:p>
+                  </a:txBody>
+                  <a:tcPr/>
+                </a:tc>
+                <a:tc>
+                  <a:txBody>
+                    <a:bodyPr/>
+                    <a:lstStyle/>
+                    <a:p>
+                      <a:r>
+                        <a:rPr sz="1050">
+                          <a:solidFill>
+                            <a:srgbClr val="3D5466"/>
+                          </a:solidFill>
+                          <a:latin typeface="Arial"/>
+                        </a:rPr>
+                        <a:t>Rating D, Marge 1,10 %</a:t>
+                      </a:r>
+                    </a:p>
+                  </a:txBody>
+                  <a:tcPr/>
+                </a:tc>
+                <a:tc>
+                  <a:txBody>
+                    <a:bodyPr/>
+                    <a:lstStyle/>
+                    <a:p>
+                      <a:r>
+                        <a:rPr sz="1050">
+                          <a:solidFill>
+                            <a:srgbClr val="3D5466"/>
+                          </a:solidFill>
+                          <a:latin typeface="Arial"/>
+                        </a:rPr>
+                        <a:t>Rating / Exit</a:t>
+                      </a:r>
+                    </a:p>
+                  </a:txBody>
+                  <a:tcPr/>
+                </a:tc>
+              </a:tr>
+              <a:tr h="384048">
+                <a:tc>
+                  <a:txBody>
+                    <a:bodyPr/>
+                    <a:lstStyle/>
+                    <a:p>
+                      <a:r>
+                        <a:rPr sz="1050">
+                          <a:solidFill>
+                            <a:srgbClr val="3D5466"/>
+                          </a:solidFill>
+                          <a:latin typeface="Arial"/>
+                        </a:rPr>
+                        <a:t>Bau Franz KG</a:t>
+                      </a:r>
+                    </a:p>
+                  </a:txBody>
+                  <a:tcPr/>
+                </a:tc>
+                <a:tc>
+                  <a:txBody>
+                    <a:bodyPr/>
+                    <a:lstStyle/>
+                    <a:p>
+                      <a:r>
+                        <a:rPr sz="1050">
+                          <a:solidFill>
+                            <a:srgbClr val="3D5466"/>
+                          </a:solidFill>
+                          <a:latin typeface="Arial"/>
+                        </a:rPr>
+                        <a:t>0,22 %</a:t>
+                      </a:r>
+                    </a:p>
+                  </a:txBody>
+                  <a:tcPr/>
+                </a:tc>
+                <a:tc>
+                  <a:txBody>
+                    <a:bodyPr/>
+                    <a:lstStyle/>
+                    <a:p>
+                      <a:r>
+                        <a:rPr sz="1050">
+                          <a:solidFill>
+                            <a:srgbClr val="3D5466"/>
+                          </a:solidFill>
+                          <a:latin typeface="Arial"/>
+                        </a:rPr>
+                        <a:t>Niedrige Marge (0,95 %), kein Verbund</a:t>
+                      </a:r>
+                    </a:p>
+                  </a:txBody>
+                  <a:tcPr/>
+                </a:tc>
+                <a:tc>
+                  <a:txBody>
+                    <a:bodyPr/>
+                    <a:lstStyle/>
+                    <a:p>
+                      <a:r>
+                        <a:rPr sz="1050">
+                          <a:solidFill>
+                            <a:srgbClr val="3D5466"/>
+                          </a:solidFill>
+                          <a:latin typeface="Arial"/>
+                        </a:rPr>
+                        <a:t>Verbund + Zins</a:t>
+                      </a:r>
+                    </a:p>
+                  </a:txBody>
+                  <a:tcPr/>
+                </a:tc>
+              </a:tr>
+              <a:tr h="384048">
+                <a:tc>
+                  <a:txBody>
+                    <a:bodyPr/>
+                    <a:lstStyle/>
+                    <a:p>
+                      <a:r>
+                        <a:rPr sz="1050">
+                          <a:solidFill>
+                            <a:srgbClr val="3D5466"/>
+                          </a:solidFill>
+                          <a:latin typeface="Arial"/>
+                        </a:rPr>
+                        <a:t>Holz Meier</a:t>
+                      </a:r>
+                    </a:p>
+                  </a:txBody>
+                  <a:tcPr/>
+                </a:tc>
+                <a:tc>
+                  <a:txBody>
+                    <a:bodyPr/>
+                    <a:lstStyle/>
+                    <a:p>
+                      <a:r>
+                        <a:rPr sz="1050">
+                          <a:solidFill>
+                            <a:srgbClr val="3D5466"/>
+                          </a:solidFill>
+                          <a:latin typeface="Arial"/>
+                        </a:rPr>
+                        <a:t>0,38 %</a:t>
+                      </a:r>
+                    </a:p>
+                  </a:txBody>
+                  <a:tcPr/>
+                </a:tc>
+                <a:tc>
+                  <a:txBody>
+                    <a:bodyPr/>
+                    <a:lstStyle/>
+                    <a:p>
+                      <a:r>
+                        <a:rPr sz="1050">
+                          <a:solidFill>
+                            <a:srgbClr val="3D5466"/>
+                          </a:solidFill>
+                          <a:latin typeface="Arial"/>
+                        </a:rPr>
+                        <a:t>Hohe Betreuungskosten (22 Std.)</a:t>
+                      </a:r>
+                    </a:p>
+                  </a:txBody>
+                  <a:tcPr/>
+                </a:tc>
+                <a:tc>
+                  <a:txBody>
+                    <a:bodyPr/>
+                    <a:lstStyle/>
+                    <a:p>
+                      <a:r>
+                        <a:rPr sz="1050">
+                          <a:solidFill>
+                            <a:srgbClr val="3D5466"/>
+                          </a:solidFill>
+                          <a:latin typeface="Arial"/>
+                        </a:rPr>
+                        <a:t>Kostenhebel</a:t>
+                      </a:r>
+                    </a:p>
+                  </a:txBody>
+                  <a:tcPr/>
+                </a:tc>
+              </a:tr>
+              <a:tr h="384048">
+                <a:tc>
+                  <a:txBody>
+                    <a:bodyPr/>
+                    <a:lstStyle/>
+                    <a:p>
+                      <a:r>
+                        <a:rPr sz="1050">
+                          <a:solidFill>
+                            <a:srgbClr val="3D5466"/>
+                          </a:solidFill>
+                          <a:latin typeface="Arial"/>
+                        </a:rPr>
+                        <a:t>Auto König GmbH</a:t>
+                      </a:r>
+                    </a:p>
+                  </a:txBody>
+                  <a:tcPr/>
+                </a:tc>
+                <a:tc>
+                  <a:txBody>
+                    <a:bodyPr/>
+                    <a:lstStyle/>
+                    <a:p>
+                      <a:r>
+                        <a:rPr sz="1050">
+                          <a:solidFill>
+                            <a:srgbClr val="3D5466"/>
+                          </a:solidFill>
+                          <a:latin typeface="Arial"/>
+                        </a:rPr>
+                        <a:t>0,41 %</a:t>
+                      </a:r>
+                    </a:p>
+                  </a:txBody>
+                  <a:tcPr/>
+                </a:tc>
+                <a:tc>
+                  <a:txBody>
+                    <a:bodyPr/>
+                    <a:lstStyle/>
+                    <a:p>
+                      <a:r>
+                        <a:rPr sz="1050">
+                          <a:solidFill>
+                            <a:srgbClr val="3D5466"/>
+                          </a:solidFill>
+                          <a:latin typeface="Arial"/>
+                        </a:rPr>
+                        <a:t>Kein Verbund (R+V, UI beide offen)</a:t>
+                      </a:r>
+                    </a:p>
+                  </a:txBody>
+                  <a:tcPr/>
+                </a:tc>
+                <a:tc>
+                  <a:txBody>
+                    <a:bodyPr/>
+                    <a:lstStyle/>
+                    <a:p>
+                      <a:r>
+                        <a:rPr sz="1050">
+                          <a:solidFill>
+                            <a:srgbClr val="3D5466"/>
+                          </a:solidFill>
+                          <a:latin typeface="Arial"/>
+                        </a:rPr>
+                        <a:t>Verbund</a:t>
+                      </a:r>
+                    </a:p>
+                  </a:txBody>
+                  <a:tcPr/>
+                </a:tc>
+              </a:tr>
+              <a:tr h="384048">
+                <a:tc>
+                  <a:txBody>
+                    <a:bodyPr/>
+                    <a:lstStyle/>
+                    <a:p>
+                      <a:r>
+                        <a:rPr sz="1050">
+                          <a:solidFill>
+                            <a:srgbClr val="3D5466"/>
+                          </a:solidFill>
+                          <a:latin typeface="Arial"/>
+                        </a:rPr>
+                        <a:t>Druck Schmidt</a:t>
+                      </a:r>
+                    </a:p>
+                  </a:txBody>
+                  <a:tcPr/>
+                </a:tc>
+                <a:tc>
+                  <a:txBody>
+                    <a:bodyPr/>
+                    <a:lstStyle/>
+                    <a:p>
+                      <a:r>
+                        <a:rPr sz="1050">
+                          <a:solidFill>
+                            <a:srgbClr val="3D5466"/>
+                          </a:solidFill>
+                          <a:latin typeface="Arial"/>
+                        </a:rPr>
+                        <a:t>0,45 %</a:t>
+                      </a:r>
+                    </a:p>
+                  </a:txBody>
+                  <a:tcPr/>
+                </a:tc>
+                <a:tc>
+                  <a:txBody>
+                    <a:bodyPr/>
+                    <a:lstStyle/>
+                    <a:p>
+                      <a:r>
+                        <a:rPr sz="1050">
+                          <a:solidFill>
+                            <a:srgbClr val="3D5466"/>
+                          </a:solidFill>
+                          <a:latin typeface="Arial"/>
+                        </a:rPr>
+                        <a:t>Laufende Linie hoch ausgenutzt (EAD↑)</a:t>
+                      </a:r>
+                    </a:p>
+                  </a:txBody>
+                  <a:tcPr/>
+                </a:tc>
+                <a:tc>
+                  <a:txBody>
+                    <a:bodyPr/>
+                    <a:lstStyle/>
+                    <a:p>
+                      <a:r>
+                        <a:rPr sz="1050">
+                          <a:solidFill>
+                            <a:srgbClr val="3D5466"/>
+                          </a:solidFill>
+                          <a:latin typeface="Arial"/>
+                        </a:rPr>
+                        <a:t>Besicherung</a:t>
+                      </a:r>
+                    </a:p>
+                  </a:txBody>
+                  <a:tcPr/>
+                </a:tc>
+              </a:tr>
+            </a:tbl>
+          </a:graphicData>
+        </a:graphic>
+      </p:graphicFrame>
+      <p:sp>
+        <p:nvSpPr>
+          <p:cNvPr id="8" name="Rectangle 7"/>
+          <p:cNvSpPr/>
+          <p:nvPr/>
+        </p:nvSpPr>
+        <p:spPr>
+          <a:xfrm>
+            <a:off x="0" y="6510528"/>
+            <a:ext cx="12188952" cy="347472"/>
+          </a:xfrm>
+          <a:prstGeom prst="rect">
+            <a:avLst/>
+          </a:prstGeom>
+          <a:solidFill>
+            <a:srgbClr val="0A1937"/>
+          </a:solidFill>
+          <a:ln>
+            <a:noFill/>
+          </a:ln>
+        </p:spPr>
+        <p:style>
+          <a:lnRef idx="1">
+            <a:schemeClr val="accent1"/>
+          </a:lnRef>
+          <a:fillRef idx="3">
+            <a:schemeClr val="accent1"/>
+          </a:fillRef>
+          <a:effectRef idx="2">
+            <a:schemeClr val="accent1"/>
+          </a:effectRef>
+          <a:fontRef idx="minor">
+            <a:schemeClr val="lt1"/>
+          </a:fontRef>
+        </p:style>
+        <p:txBody>
+          <a:bodyPr rtlCol="0" anchor="ctr"/>
+          <a:lstStyle/>
+          <a:p>
+            <a:pPr algn="ctr"/>
+          </a:p>
+        </p:txBody>
+      </p:sp>
+      <p:sp>
+        <p:nvSpPr>
+          <p:cNvPr id="9" name="TextBox 8"/>
+          <p:cNvSpPr txBox="1"/>
+          <p:nvPr/>
+        </p:nvSpPr>
+        <p:spPr>
+          <a:xfrm>
+            <a:off x="685800" y="6583680"/>
+            <a:ext cx="6490411" cy="256032"/>
+          </a:xfrm>
+          <a:prstGeom prst="rect">
+            <a:avLst/>
+          </a:prstGeom>
+          <a:noFill/>
+        </p:spPr>
+        <p:txBody>
+          <a:bodyPr wrap="none">
+            <a:spAutoFit/>
+          </a:bodyPr>
+          <a:lstStyle/>
+          <a:p>
+            <a:pPr algn="l"/>
+            <a:r>
+              <a:rPr sz="700">
+                <a:solidFill>
+                  <a:srgbClr val="A0B4D2"/>
+                </a:solidFill>
+                <a:latin typeface="JetBrains Mono"/>
+              </a:rPr>
+              <a:t>Benedikt Zoller Coaching  ·  FKB Campus  ·  M16</a:t>
+            </a:r>
+          </a:p>
+        </p:txBody>
+      </p:sp>
+      <p:sp>
+        <p:nvSpPr>
+          <p:cNvPr id="10" name="TextBox 9"/>
+          <p:cNvSpPr txBox="1"/>
+          <p:nvPr/>
+        </p:nvSpPr>
+        <p:spPr>
+          <a:xfrm>
+            <a:off x="7176211" y="6583680"/>
+            <a:ext cx="4326940" cy="256032"/>
+          </a:xfrm>
+          <a:prstGeom prst="rect">
+            <a:avLst/>
+          </a:prstGeom>
+          <a:noFill/>
+        </p:spPr>
+        <p:txBody>
+          <a:bodyPr wrap="none">
+            <a:spAutoFit/>
+          </a:bodyPr>
+          <a:lstStyle/>
+          <a:p>
+            <a:pPr algn="r"/>
+            <a:r>
+              <a:rPr sz="700">
+                <a:solidFill>
+                  <a:srgbClr val="A0B4D2"/>
+                </a:solidFill>
+                <a:latin typeface="JetBrains Mono"/>
+              </a:rPr>
+              <a:t>Übersicht</a:t>
+            </a:r>
+          </a:p>
+        </p:txBody>
+      </p:sp>
+    </p:spTree>
+  </p:cSld>
+  <p:clrMapOvr>
+    <a:masterClrMapping/>
+  </p:clrMapOvr>
+</p:sld>
+</file>
+
+<file path=ppt/slides/slide15.xml><?xml version="1.0" encoding="utf-8"?>
+<p:sld xmlns:a="http://schemas.openxmlformats.org/drawingml/2006/main" xmlns:p="http://schemas.openxmlformats.org/presentationml/2006/main" xmlns:r="http://schemas.openxmlformats.org/officeDocument/2006/relationships">
+  <p:cSld>
+    <p:spTree>
+      <p:nvGrpSpPr>
+        <p:cNvPr id="1" name=""/>
+        <p:cNvGrpSpPr/>
+        <p:nvPr/>
+      </p:nvGrpSpPr>
+      <p:grpSpPr/>
+      <p:sp>
+        <p:nvSpPr>
+          <p:cNvPr id="2" name="Rectangle 1"/>
+          <p:cNvSpPr/>
+          <p:nvPr/>
+        </p:nvSpPr>
+        <p:spPr>
+          <a:xfrm>
+            <a:off x="0" y="0"/>
+            <a:ext cx="12188952" cy="6858000"/>
+          </a:xfrm>
+          <a:prstGeom prst="rect">
+            <a:avLst/>
+          </a:prstGeom>
+          <a:solidFill>
+            <a:srgbClr val="EDEDF3"/>
+          </a:solidFill>
+          <a:ln>
+            <a:noFill/>
+          </a:ln>
+        </p:spPr>
+        <p:style>
+          <a:lnRef idx="1">
+            <a:schemeClr val="accent1"/>
+          </a:lnRef>
+          <a:fillRef idx="3">
+            <a:schemeClr val="accent1"/>
+          </a:fillRef>
+          <a:effectRef idx="2">
+            <a:schemeClr val="accent1"/>
+          </a:effectRef>
+          <a:fontRef idx="minor">
+            <a:schemeClr val="lt1"/>
+          </a:fontRef>
+        </p:style>
+        <p:txBody>
+          <a:bodyPr rtlCol="0" anchor="ctr"/>
+          <a:lstStyle/>
+          <a:p>
+            <a:pPr algn="ctr"/>
+          </a:p>
+        </p:txBody>
+      </p:sp>
+      <p:sp>
+        <p:nvSpPr>
+          <p:cNvPr id="3" name="Rectangle 2"/>
+          <p:cNvSpPr/>
+          <p:nvPr/>
+        </p:nvSpPr>
+        <p:spPr>
+          <a:xfrm>
+            <a:off x="0" y="0"/>
+            <a:ext cx="12188952" cy="50292"/>
+          </a:xfrm>
+          <a:prstGeom prst="rect">
+            <a:avLst/>
+          </a:prstGeom>
+          <a:solidFill>
+            <a:srgbClr val="1F2C56"/>
+          </a:solidFill>
+          <a:ln>
+            <a:noFill/>
+          </a:ln>
+        </p:spPr>
+        <p:style>
+          <a:lnRef idx="1">
+            <a:schemeClr val="accent1"/>
+          </a:lnRef>
+          <a:fillRef idx="3">
+            <a:schemeClr val="accent1"/>
+          </a:fillRef>
+          <a:effectRef idx="2">
+            <a:schemeClr val="accent1"/>
+          </a:effectRef>
+          <a:fontRef idx="minor">
+            <a:schemeClr val="lt1"/>
+          </a:fontRef>
+        </p:style>
+        <p:txBody>
+          <a:bodyPr rtlCol="0" anchor="ctr"/>
+          <a:lstStyle/>
+          <a:p>
+            <a:pPr algn="ctr"/>
+          </a:p>
+        </p:txBody>
+      </p:sp>
+      <p:sp>
+        <p:nvSpPr>
+          <p:cNvPr id="4" name="TextBox 3"/>
+          <p:cNvSpPr txBox="1"/>
+          <p:nvPr/>
+        </p:nvSpPr>
+        <p:spPr>
+          <a:xfrm>
+            <a:off x="685800" y="109728"/>
+            <a:ext cx="10817352" cy="228600"/>
+          </a:xfrm>
+          <a:prstGeom prst="rect">
+            <a:avLst/>
+          </a:prstGeom>
+          <a:noFill/>
+        </p:spPr>
+        <p:txBody>
+          <a:bodyPr wrap="none">
+            <a:spAutoFit/>
+          </a:bodyPr>
+          <a:lstStyle/>
+          <a:p>
+            <a:pPr algn="l"/>
+            <a:r>
+              <a:rPr sz="750">
+                <a:solidFill>
+                  <a:srgbClr val="78808C"/>
+                </a:solidFill>
+                <a:latin typeface="JetBrains Mono"/>
+              </a:rPr>
+              <a:t>M16  ·  INHALT</a:t>
+            </a:r>
+          </a:p>
+        </p:txBody>
+      </p:sp>
+      <p:sp>
+        <p:nvSpPr>
+          <p:cNvPr id="5" name="Rectangle 4"/>
+          <p:cNvSpPr/>
+          <p:nvPr/>
+        </p:nvSpPr>
+        <p:spPr>
+          <a:xfrm>
+            <a:off x="0" y="1234440"/>
+            <a:ext cx="12188952" cy="12700"/>
+          </a:xfrm>
+          <a:prstGeom prst="rect">
+            <a:avLst/>
+          </a:prstGeom>
+          <a:solidFill>
+            <a:srgbClr val="D8DFE4"/>
+          </a:solidFill>
+          <a:ln>
+            <a:noFill/>
+          </a:ln>
+        </p:spPr>
+        <p:style>
+          <a:lnRef idx="1">
+            <a:schemeClr val="accent1"/>
+          </a:lnRef>
+          <a:fillRef idx="3">
+            <a:schemeClr val="accent1"/>
+          </a:fillRef>
+          <a:effectRef idx="2">
+            <a:schemeClr val="accent1"/>
+          </a:effectRef>
+          <a:fontRef idx="minor">
+            <a:schemeClr val="lt1"/>
+          </a:fontRef>
+        </p:style>
+        <p:txBody>
+          <a:bodyPr rtlCol="0" anchor="ctr"/>
+          <a:lstStyle/>
+          <a:p>
+            <a:pPr algn="ctr"/>
+          </a:p>
+        </p:txBody>
+      </p:sp>
+      <p:sp>
+        <p:nvSpPr>
+          <p:cNvPr id="6" name="Rectangle 5"/>
+          <p:cNvSpPr/>
+          <p:nvPr/>
+        </p:nvSpPr>
+        <p:spPr>
+          <a:xfrm>
+            <a:off x="685800" y="502920"/>
+            <a:ext cx="36576" cy="658368"/>
+          </a:xfrm>
+          <a:prstGeom prst="rect">
+            <a:avLst/>
+          </a:prstGeom>
+          <a:solidFill>
+            <a:srgbClr val="D9C089"/>
+          </a:solidFill>
+          <a:ln>
+            <a:noFill/>
+          </a:ln>
+        </p:spPr>
+        <p:style>
+          <a:lnRef idx="1">
+            <a:schemeClr val="accent1"/>
+          </a:lnRef>
+          <a:fillRef idx="3">
+            <a:schemeClr val="accent1"/>
+          </a:fillRef>
+          <a:effectRef idx="2">
+            <a:schemeClr val="accent1"/>
+          </a:effectRef>
+          <a:fontRef idx="minor">
+            <a:schemeClr val="lt1"/>
+          </a:fontRef>
+        </p:style>
+        <p:txBody>
+          <a:bodyPr rtlCol="0" anchor="ctr"/>
+          <a:lstStyle/>
+          <a:p>
+            <a:pPr algn="ctr"/>
+          </a:p>
+        </p:txBody>
+      </p:sp>
+      <p:sp>
+        <p:nvSpPr>
+          <p:cNvPr id="7" name="TextBox 6"/>
+          <p:cNvSpPr txBox="1"/>
+          <p:nvPr/>
+        </p:nvSpPr>
+        <p:spPr>
+          <a:xfrm>
+            <a:off x="813816" y="502920"/>
+            <a:ext cx="10634472" cy="685800"/>
+          </a:xfrm>
+          <a:prstGeom prst="rect">
+            <a:avLst/>
+          </a:prstGeom>
+          <a:noFill/>
+        </p:spPr>
+        <p:txBody>
+          <a:bodyPr wrap="square">
+            <a:spAutoFit/>
+          </a:bodyPr>
+          <a:lstStyle/>
+          <a:p>
+            <a:pPr algn="l"/>
+            <a:r>
+              <a:rPr sz="2400" b="1" i="0">
+                <a:solidFill>
+                  <a:srgbClr val="1F2C56"/>
+                </a:solidFill>
+                <a:latin typeface="Source Serif 4"/>
+              </a:rPr>
+              <a:t>Arbeitsblatt A: Mein NMZ-Bestandsbild</a:t>
+            </a:r>
+          </a:p>
+        </p:txBody>
+      </p:sp>
+      <p:sp>
+        <p:nvSpPr>
+          <p:cNvPr id="8" name="TextBox 7"/>
+          <p:cNvSpPr txBox="1"/>
+          <p:nvPr/>
+        </p:nvSpPr>
+        <p:spPr>
+          <a:xfrm>
+            <a:off x="685800" y="1417320"/>
+            <a:ext cx="10817352" cy="5029200"/>
+          </a:xfrm>
+          <a:prstGeom prst="rect">
+            <a:avLst/>
+          </a:prstGeom>
+          <a:noFill/>
+        </p:spPr>
+        <p:txBody>
+          <a:bodyPr wrap="square">
+            <a:spAutoFit/>
+          </a:bodyPr>
+          <a:lstStyle/>
+          <a:p>
+            <a:pPr>
+              <a:spcBef>
+                <a:spcPts val="400"/>
+              </a:spcBef>
+              <a:spcAft>
+                <a:spcPts val="200"/>
+              </a:spcAft>
+            </a:pPr>
+            <a:r>
+              <a:rPr sz="1300">
+                <a:solidFill>
+                  <a:srgbClr val="3D5466"/>
+                </a:solidFill>
+                <a:latin typeface="Arial"/>
+              </a:rPr>
+              <a:t>▸  Dominantes Schwachfeld in meinem Bestand:</a:t>
+            </a:r>
+          </a:p>
+          <a:p>
+            <a:pPr>
+              <a:spcBef>
+                <a:spcPts val="400"/>
+              </a:spcBef>
+              <a:spcAft>
+                <a:spcPts val="200"/>
+              </a:spcAft>
+            </a:pPr>
+            <a:r>
+              <a:rPr sz="1300">
+                <a:solidFill>
+                  <a:srgbClr val="3D5466"/>
+                </a:solidFill>
+                <a:latin typeface="Arial"/>
+              </a:rPr>
+              <a:t>▸  ☐ Zinsmarge zu niedrig  ☐ Verbundgeschäft fehlt  ☐ Risikokosten zu hoch  ☐ Betreuungskosten zu hoch</a:t>
+            </a:r>
+          </a:p>
+        </p:txBody>
+      </p:sp>
+      <p:sp>
+        <p:nvSpPr>
+          <p:cNvPr id="9" name="Rectangle 8"/>
+          <p:cNvSpPr/>
+          <p:nvPr/>
+        </p:nvSpPr>
+        <p:spPr>
+          <a:xfrm>
+            <a:off x="0" y="6510528"/>
+            <a:ext cx="12188952" cy="347472"/>
+          </a:xfrm>
+          <a:prstGeom prst="rect">
+            <a:avLst/>
+          </a:prstGeom>
+          <a:solidFill>
+            <a:srgbClr val="0A1937"/>
+          </a:solidFill>
+          <a:ln>
+            <a:noFill/>
+          </a:ln>
+        </p:spPr>
+        <p:style>
+          <a:lnRef idx="1">
+            <a:schemeClr val="accent1"/>
+          </a:lnRef>
+          <a:fillRef idx="3">
+            <a:schemeClr val="accent1"/>
+          </a:fillRef>
+          <a:effectRef idx="2">
+            <a:schemeClr val="accent1"/>
+          </a:effectRef>
+          <a:fontRef idx="minor">
+            <a:schemeClr val="lt1"/>
+          </a:fontRef>
+        </p:style>
+        <p:txBody>
+          <a:bodyPr rtlCol="0" anchor="ctr"/>
+          <a:lstStyle/>
+          <a:p>
+            <a:pPr algn="ctr"/>
+          </a:p>
+        </p:txBody>
+      </p:sp>
+      <p:sp>
+        <p:nvSpPr>
+          <p:cNvPr id="10" name="TextBox 9"/>
+          <p:cNvSpPr txBox="1"/>
+          <p:nvPr/>
+        </p:nvSpPr>
+        <p:spPr>
+          <a:xfrm>
+            <a:off x="685800" y="6583680"/>
+            <a:ext cx="6490411" cy="256032"/>
+          </a:xfrm>
+          <a:prstGeom prst="rect">
+            <a:avLst/>
+          </a:prstGeom>
+          <a:noFill/>
+        </p:spPr>
+        <p:txBody>
+          <a:bodyPr wrap="none">
+            <a:spAutoFit/>
+          </a:bodyPr>
+          <a:lstStyle/>
+          <a:p>
+            <a:pPr algn="l"/>
+            <a:r>
+              <a:rPr sz="700">
+                <a:solidFill>
+                  <a:srgbClr val="A0B4D2"/>
+                </a:solidFill>
+                <a:latin typeface="JetBrains Mono"/>
+              </a:rPr>
+              <a:t>Benedikt Zoller Coaching  ·  FKB Campus  ·  M16</a:t>
+            </a:r>
+          </a:p>
+        </p:txBody>
+      </p:sp>
+    </p:spTree>
+  </p:cSld>
+  <p:clrMapOvr>
+    <a:masterClrMapping/>
+  </p:clrMapOvr>
+</p:sld>
+</file>
+
+<file path=ppt/slides/slide16.xml><?xml version="1.0" encoding="utf-8"?>
+<p:sld xmlns:a="http://schemas.openxmlformats.org/drawingml/2006/main" xmlns:p="http://schemas.openxmlformats.org/presentationml/2006/main" xmlns:r="http://schemas.openxmlformats.org/officeDocument/2006/relationships">
+  <p:cSld>
+    <p:spTree>
+      <p:nvGrpSpPr>
+        <p:cNvPr id="1" name=""/>
+        <p:cNvGrpSpPr/>
+        <p:nvPr/>
+      </p:nvGrpSpPr>
+      <p:grpSpPr/>
+      <p:sp>
+        <p:nvSpPr>
+          <p:cNvPr id="2" name="Rectangle 1"/>
+          <p:cNvSpPr/>
+          <p:nvPr/>
+        </p:nvSpPr>
+        <p:spPr>
+          <a:xfrm>
+            <a:off x="0" y="0"/>
+            <a:ext cx="12188952" cy="6858000"/>
+          </a:xfrm>
+          <a:prstGeom prst="rect">
+            <a:avLst/>
+          </a:prstGeom>
+          <a:solidFill>
+            <a:srgbClr val="FFFFFF"/>
+          </a:solidFill>
+          <a:ln>
+            <a:noFill/>
+          </a:ln>
+        </p:spPr>
+        <p:style>
+          <a:lnRef idx="1">
+            <a:schemeClr val="accent1"/>
+          </a:lnRef>
+          <a:fillRef idx="3">
+            <a:schemeClr val="accent1"/>
+          </a:fillRef>
+          <a:effectRef idx="2">
+            <a:schemeClr val="accent1"/>
+          </a:effectRef>
+          <a:fontRef idx="minor">
+            <a:schemeClr val="lt1"/>
+          </a:fontRef>
+        </p:style>
+        <p:txBody>
+          <a:bodyPr rtlCol="0" anchor="ctr"/>
+          <a:lstStyle/>
+          <a:p>
+            <a:pPr algn="ctr"/>
+          </a:p>
+        </p:txBody>
+      </p:sp>
+      <p:sp>
+        <p:nvSpPr>
+          <p:cNvPr id="3" name="Rectangle 2"/>
+          <p:cNvSpPr/>
+          <p:nvPr/>
+        </p:nvSpPr>
+        <p:spPr>
+          <a:xfrm>
+            <a:off x="0" y="0"/>
+            <a:ext cx="12188952" cy="50292"/>
+          </a:xfrm>
+          <a:prstGeom prst="rect">
+            <a:avLst/>
+          </a:prstGeom>
+          <a:solidFill>
+            <a:srgbClr val="1F2C56"/>
+          </a:solidFill>
+          <a:ln>
+            <a:noFill/>
+          </a:ln>
+        </p:spPr>
+        <p:style>
+          <a:lnRef idx="1">
+            <a:schemeClr val="accent1"/>
+          </a:lnRef>
+          <a:fillRef idx="3">
+            <a:schemeClr val="accent1"/>
+          </a:fillRef>
+          <a:effectRef idx="2">
+            <a:schemeClr val="accent1"/>
+          </a:effectRef>
+          <a:fontRef idx="minor">
+            <a:schemeClr val="lt1"/>
+          </a:fontRef>
+        </p:style>
+        <p:txBody>
+          <a:bodyPr rtlCol="0" anchor="ctr"/>
+          <a:lstStyle/>
+          <a:p>
+            <a:pPr algn="ctr"/>
+          </a:p>
+        </p:txBody>
+      </p:sp>
+      <p:sp>
+        <p:nvSpPr>
+          <p:cNvPr id="4" name="TextBox 3"/>
+          <p:cNvSpPr txBox="1"/>
+          <p:nvPr/>
+        </p:nvSpPr>
+        <p:spPr>
+          <a:xfrm>
+            <a:off x="685800" y="109728"/>
+            <a:ext cx="10817352" cy="228600"/>
+          </a:xfrm>
+          <a:prstGeom prst="rect">
+            <a:avLst/>
+          </a:prstGeom>
+          <a:noFill/>
+        </p:spPr>
+        <p:txBody>
+          <a:bodyPr wrap="none">
+            <a:spAutoFit/>
+          </a:bodyPr>
+          <a:lstStyle/>
+          <a:p>
+            <a:pPr algn="l"/>
+            <a:r>
+              <a:rPr sz="750">
+                <a:solidFill>
+                  <a:srgbClr val="78808C"/>
+                </a:solidFill>
+                <a:latin typeface="JetBrains Mono"/>
+              </a:rPr>
+              <a:t>M16  ·  ÜBERSICHT</a:t>
+            </a:r>
+          </a:p>
+        </p:txBody>
+      </p:sp>
+      <p:sp>
+        <p:nvSpPr>
+          <p:cNvPr id="5" name="TextBox 4"/>
+          <p:cNvSpPr txBox="1"/>
+          <p:nvPr/>
+        </p:nvSpPr>
+        <p:spPr>
+          <a:xfrm>
+            <a:off x="685800" y="502920"/>
+            <a:ext cx="10817352" cy="594360"/>
+          </a:xfrm>
+          <a:prstGeom prst="rect">
+            <a:avLst/>
+          </a:prstGeom>
+          <a:noFill/>
+        </p:spPr>
+        <p:txBody>
+          <a:bodyPr wrap="square">
+            <a:spAutoFit/>
+          </a:bodyPr>
+          <a:lstStyle/>
+          <a:p>
+            <a:pPr algn="l"/>
+            <a:r>
+              <a:rPr sz="2000" b="1" i="0">
+                <a:solidFill>
+                  <a:srgbClr val="1F2C56"/>
+                </a:solidFill>
+                <a:latin typeface="Source Serif 4"/>
+              </a:rPr>
+              <a:t>Arbeitsblatt A: Mein NMZ-Bestandsbild</a:t>
+            </a:r>
+          </a:p>
+        </p:txBody>
+      </p:sp>
+      <p:sp>
+        <p:nvSpPr>
+          <p:cNvPr id="6" name="Rectangle 5"/>
+          <p:cNvSpPr/>
+          <p:nvPr/>
+        </p:nvSpPr>
+        <p:spPr>
+          <a:xfrm>
+            <a:off x="685800" y="1143000"/>
+            <a:ext cx="10817352" cy="25400"/>
+          </a:xfrm>
+          <a:prstGeom prst="rect">
+            <a:avLst/>
+          </a:prstGeom>
+          <a:solidFill>
+            <a:srgbClr val="D9C089"/>
+          </a:solidFill>
+          <a:ln>
+            <a:noFill/>
+          </a:ln>
+        </p:spPr>
+        <p:style>
+          <a:lnRef idx="1">
+            <a:schemeClr val="accent1"/>
+          </a:lnRef>
+          <a:fillRef idx="3">
+            <a:schemeClr val="accent1"/>
+          </a:fillRef>
+          <a:effectRef idx="2">
+            <a:schemeClr val="accent1"/>
+          </a:effectRef>
+          <a:fontRef idx="minor">
+            <a:schemeClr val="lt1"/>
+          </a:fontRef>
+        </p:style>
+        <p:txBody>
+          <a:bodyPr rtlCol="0" anchor="ctr"/>
+          <a:lstStyle/>
+          <a:p>
+            <a:pPr algn="ctr"/>
+          </a:p>
+        </p:txBody>
+      </p:sp>
+      <p:graphicFrame>
+        <p:nvGraphicFramePr>
+          <p:cNvPr id="7" name="Table 6"/>
+          <p:cNvGraphicFramePr>
+            <a:graphicFrameLocks noGrp="1"/>
+          </p:cNvGraphicFramePr>
+          <p:nvPr/>
+        </p:nvGraphicFramePr>
+        <p:xfrm>
+          <a:off x="685800" y="1417320"/>
+          <a:ext cx="10817352" cy="2304288"/>
+        </p:xfrm>
+        <a:graphic>
+          <a:graphicData uri="http://schemas.openxmlformats.org/drawingml/2006/table">
+            <a:tbl>
+              <a:tblPr firstRow="1" bandRow="1">
+                <a:tableStyleId>{5C22544A-7EE6-4342-B048-85BDC9FD1C3A}</a:tableStyleId>
+              </a:tblPr>
+              <a:tblGrid>
+                <a:gridCol w="2163470"/>
+                <a:gridCol w="2163470"/>
+                <a:gridCol w="2163470"/>
+                <a:gridCol w="2163470"/>
+                <a:gridCol w="2163472"/>
+              </a:tblGrid>
+              <a:tr h="384048">
+                <a:tc>
+                  <a:txBody>
+                    <a:bodyPr/>
+                    <a:lstStyle/>
+                    <a:p>
+                      <a:r>
+                        <a:rPr sz="1100" b="1">
+                          <a:solidFill>
+                            <a:srgbClr val="FFFFFF"/>
+                          </a:solidFill>
+                          <a:latin typeface="Arial"/>
+                        </a:rPr>
+                        <a:t>Rang (von unten)</a:t>
+                      </a:r>
+                    </a:p>
+                  </a:txBody>
+                  <a:tcPr>
+                    <a:solidFill>
+                      <a:srgbClr val="1F2C56"/>
+                    </a:solidFill>
+                  </a:tcPr>
+                </a:tc>
+                <a:tc>
+                  <a:txBody>
+                    <a:bodyPr/>
+                    <a:lstStyle/>
+                    <a:p>
+                      <a:r>
+                        <a:rPr sz="1100" b="1">
+                          <a:solidFill>
+                            <a:srgbClr val="FFFFFF"/>
+                          </a:solidFill>
+                          <a:latin typeface="Arial"/>
+                        </a:rPr>
+                        <a:t>Kunde (anonymisiert)</a:t>
+                      </a:r>
+                    </a:p>
+                  </a:txBody>
+                  <a:tcPr>
+                    <a:solidFill>
+                      <a:srgbClr val="1F2C56"/>
+                    </a:solidFill>
+                  </a:tcPr>
+                </a:tc>
+                <a:tc>
+                  <a:txBody>
+                    <a:bodyPr/>
+                    <a:lstStyle/>
+                    <a:p>
+                      <a:r>
+                        <a:rPr sz="1100" b="1">
+                          <a:solidFill>
+                            <a:srgbClr val="FFFFFF"/>
+                          </a:solidFill>
+                          <a:latin typeface="Arial"/>
+                        </a:rPr>
+                        <a:t>NMZ</a:t>
+                      </a:r>
+                    </a:p>
+                  </a:txBody>
+                  <a:tcPr>
+                    <a:solidFill>
+                      <a:srgbClr val="1F2C56"/>
+                    </a:solidFill>
+                  </a:tcPr>
+                </a:tc>
+                <a:tc>
+                  <a:txBody>
+                    <a:bodyPr/>
+                    <a:lstStyle/>
+                    <a:p>
+                      <a:r>
+                        <a:rPr sz="1100" b="1">
+                          <a:solidFill>
+                            <a:srgbClr val="FFFFFF"/>
+                          </a:solidFill>
+                          <a:latin typeface="Arial"/>
+                        </a:rPr>
+                        <a:t>Hauptursache</a:t>
+                      </a:r>
+                    </a:p>
+                  </a:txBody>
+                  <a:tcPr>
+                    <a:solidFill>
+                      <a:srgbClr val="1F2C56"/>
+                    </a:solidFill>
+                  </a:tcPr>
+                </a:tc>
+                <a:tc>
+                  <a:txBody>
+                    <a:bodyPr/>
+                    <a:lstStyle/>
+                    <a:p>
+                      <a:r>
+                        <a:rPr sz="1100" b="1">
+                          <a:solidFill>
+                            <a:srgbClr val="FFFFFF"/>
+                          </a:solidFill>
+                          <a:latin typeface="Arial"/>
+                        </a:rPr>
+                        <a:t>Hebel</a:t>
+                      </a:r>
+                    </a:p>
+                  </a:txBody>
+                  <a:tcPr>
+                    <a:solidFill>
+                      <a:srgbClr val="1F2C56"/>
+                    </a:solidFill>
+                  </a:tcPr>
+                </a:tc>
+              </a:tr>
+              <a:tr h="384048">
+                <a:tc>
+                  <a:txBody>
+                    <a:bodyPr/>
+                    <a:lstStyle/>
+                    <a:p>
+                      <a:r>
+                        <a:rPr sz="1050">
+                          <a:solidFill>
+                            <a:srgbClr val="3D5466"/>
+                          </a:solidFill>
+                          <a:latin typeface="Arial"/>
+                        </a:rPr>
+                        <a:t>1</a:t>
+                      </a:r>
+                    </a:p>
+                  </a:txBody>
+                  <a:tcPr/>
+                </a:tc>
+                <a:tc>
+                  <a:txBody>
+                    <a:bodyPr/>
+                    <a:lstStyle/>
+                    <a:p/>
+                  </a:txBody>
+                  <a:tcPr/>
+                </a:tc>
+                <a:tc>
+                  <a:txBody>
+                    <a:bodyPr/>
+                    <a:lstStyle/>
+                    <a:p/>
+                  </a:txBody>
+                  <a:tcPr/>
+                </a:tc>
+                <a:tc>
+                  <a:txBody>
+                    <a:bodyPr/>
+                    <a:lstStyle/>
+                    <a:p/>
+                  </a:txBody>
+                  <a:tcPr/>
+                </a:tc>
+                <a:tc>
+                  <a:txBody>
+                    <a:bodyPr/>
+                    <a:lstStyle/>
+                    <a:p/>
+                  </a:txBody>
+                  <a:tcPr/>
+                </a:tc>
+              </a:tr>
+              <a:tr h="384048">
+                <a:tc>
+                  <a:txBody>
+                    <a:bodyPr/>
+                    <a:lstStyle/>
+                    <a:p>
+                      <a:r>
+                        <a:rPr sz="1050">
+                          <a:solidFill>
+                            <a:srgbClr val="3D5466"/>
+                          </a:solidFill>
+                          <a:latin typeface="Arial"/>
+                        </a:rPr>
+                        <a:t>2</a:t>
+                      </a:r>
+                    </a:p>
+                  </a:txBody>
+                  <a:tcPr/>
+                </a:tc>
+                <a:tc>
+                  <a:txBody>
+                    <a:bodyPr/>
+                    <a:lstStyle/>
+                    <a:p/>
+                  </a:txBody>
+                  <a:tcPr/>
+                </a:tc>
+                <a:tc>
+                  <a:txBody>
+                    <a:bodyPr/>
+                    <a:lstStyle/>
+                    <a:p/>
+                  </a:txBody>
+                  <a:tcPr/>
+                </a:tc>
+                <a:tc>
+                  <a:txBody>
+                    <a:bodyPr/>
+                    <a:lstStyle/>
+                    <a:p/>
+                  </a:txBody>
+                  <a:tcPr/>
+                </a:tc>
+                <a:tc>
+                  <a:txBody>
+                    <a:bodyPr/>
+                    <a:lstStyle/>
+                    <a:p/>
+                  </a:txBody>
+                  <a:tcPr/>
+                </a:tc>
+              </a:tr>
+              <a:tr h="384048">
+                <a:tc>
+                  <a:txBody>
+                    <a:bodyPr/>
+                    <a:lstStyle/>
+                    <a:p>
+                      <a:r>
+                        <a:rPr sz="1050">
+                          <a:solidFill>
+                            <a:srgbClr val="3D5466"/>
+                          </a:solidFill>
+                          <a:latin typeface="Arial"/>
+                        </a:rPr>
+                        <a:t>3</a:t>
+                      </a:r>
+                    </a:p>
+                  </a:txBody>
+                  <a:tcPr/>
+                </a:tc>
+                <a:tc>
+                  <a:txBody>
+                    <a:bodyPr/>
+                    <a:lstStyle/>
+                    <a:p/>
+                  </a:txBody>
+                  <a:tcPr/>
+                </a:tc>
+                <a:tc>
+                  <a:txBody>
+                    <a:bodyPr/>
+                    <a:lstStyle/>
+                    <a:p/>
+                  </a:txBody>
+                  <a:tcPr/>
+                </a:tc>
+                <a:tc>
+                  <a:txBody>
+                    <a:bodyPr/>
+                    <a:lstStyle/>
+                    <a:p/>
+                  </a:txBody>
+                  <a:tcPr/>
+                </a:tc>
+                <a:tc>
+                  <a:txBody>
+                    <a:bodyPr/>
+                    <a:lstStyle/>
+                    <a:p/>
+                  </a:txBody>
+                  <a:tcPr/>
+                </a:tc>
+              </a:tr>
+              <a:tr h="384048">
+                <a:tc>
+                  <a:txBody>
+                    <a:bodyPr/>
+                    <a:lstStyle/>
+                    <a:p>
+                      <a:r>
+                        <a:rPr sz="1050">
+                          <a:solidFill>
+                            <a:srgbClr val="3D5466"/>
+                          </a:solidFill>
+                          <a:latin typeface="Arial"/>
+                        </a:rPr>
+                        <a:t>4</a:t>
+                      </a:r>
+                    </a:p>
+                  </a:txBody>
+                  <a:tcPr/>
+                </a:tc>
+                <a:tc>
+                  <a:txBody>
+                    <a:bodyPr/>
+                    <a:lstStyle/>
+                    <a:p/>
+                  </a:txBody>
+                  <a:tcPr/>
+                </a:tc>
+                <a:tc>
+                  <a:txBody>
+                    <a:bodyPr/>
+                    <a:lstStyle/>
+                    <a:p/>
+                  </a:txBody>
+                  <a:tcPr/>
+                </a:tc>
+                <a:tc>
+                  <a:txBody>
+                    <a:bodyPr/>
+                    <a:lstStyle/>
+                    <a:p/>
+                  </a:txBody>
+                  <a:tcPr/>
+                </a:tc>
+                <a:tc>
+                  <a:txBody>
+                    <a:bodyPr/>
+                    <a:lstStyle/>
+                    <a:p/>
+                  </a:txBody>
+                  <a:tcPr/>
+                </a:tc>
+              </a:tr>
+              <a:tr h="384048">
+                <a:tc>
+                  <a:txBody>
+                    <a:bodyPr/>
+                    <a:lstStyle/>
+                    <a:p>
+                      <a:r>
+                        <a:rPr sz="1050">
+                          <a:solidFill>
+                            <a:srgbClr val="3D5466"/>
+                          </a:solidFill>
+                          <a:latin typeface="Arial"/>
+                        </a:rPr>
+                        <a:t>5</a:t>
+                      </a:r>
+                    </a:p>
+                  </a:txBody>
+                  <a:tcPr/>
+                </a:tc>
+                <a:tc>
+                  <a:txBody>
+                    <a:bodyPr/>
+                    <a:lstStyle/>
+                    <a:p/>
+                  </a:txBody>
+                  <a:tcPr/>
+                </a:tc>
+                <a:tc>
+                  <a:txBody>
+                    <a:bodyPr/>
+                    <a:lstStyle/>
+                    <a:p/>
+                  </a:txBody>
+                  <a:tcPr/>
+                </a:tc>
+                <a:tc>
+                  <a:txBody>
+                    <a:bodyPr/>
+                    <a:lstStyle/>
+                    <a:p/>
+                  </a:txBody>
+                  <a:tcPr/>
+                </a:tc>
+                <a:tc>
+                  <a:txBody>
+                    <a:bodyPr/>
+                    <a:lstStyle/>
+                    <a:p/>
+                  </a:txBody>
+                  <a:tcPr/>
+                </a:tc>
+              </a:tr>
+            </a:tbl>
+          </a:graphicData>
+        </a:graphic>
+      </p:graphicFrame>
+      <p:sp>
+        <p:nvSpPr>
+          <p:cNvPr id="8" name="Rectangle 7"/>
+          <p:cNvSpPr/>
+          <p:nvPr/>
+        </p:nvSpPr>
+        <p:spPr>
+          <a:xfrm>
+            <a:off x="0" y="6510528"/>
+            <a:ext cx="12188952" cy="347472"/>
+          </a:xfrm>
+          <a:prstGeom prst="rect">
+            <a:avLst/>
+          </a:prstGeom>
+          <a:solidFill>
+            <a:srgbClr val="0A1937"/>
+          </a:solidFill>
+          <a:ln>
+            <a:noFill/>
+          </a:ln>
+        </p:spPr>
+        <p:style>
+          <a:lnRef idx="1">
+            <a:schemeClr val="accent1"/>
+          </a:lnRef>
+          <a:fillRef idx="3">
+            <a:schemeClr val="accent1"/>
+          </a:fillRef>
+          <a:effectRef idx="2">
+            <a:schemeClr val="accent1"/>
+          </a:effectRef>
+          <a:fontRef idx="minor">
+            <a:schemeClr val="lt1"/>
+          </a:fontRef>
+        </p:style>
+        <p:txBody>
+          <a:bodyPr rtlCol="0" anchor="ctr"/>
+          <a:lstStyle/>
+          <a:p>
+            <a:pPr algn="ctr"/>
+          </a:p>
+        </p:txBody>
+      </p:sp>
+      <p:sp>
+        <p:nvSpPr>
+          <p:cNvPr id="9" name="TextBox 8"/>
+          <p:cNvSpPr txBox="1"/>
+          <p:nvPr/>
+        </p:nvSpPr>
+        <p:spPr>
+          <a:xfrm>
+            <a:off x="685800" y="6583680"/>
+            <a:ext cx="6490411" cy="256032"/>
+          </a:xfrm>
+          <a:prstGeom prst="rect">
+            <a:avLst/>
+          </a:prstGeom>
+          <a:noFill/>
+        </p:spPr>
+        <p:txBody>
+          <a:bodyPr wrap="none">
+            <a:spAutoFit/>
+          </a:bodyPr>
+          <a:lstStyle/>
+          <a:p>
+            <a:pPr algn="l"/>
+            <a:r>
+              <a:rPr sz="700">
+                <a:solidFill>
+                  <a:srgbClr val="A0B4D2"/>
+                </a:solidFill>
+                <a:latin typeface="JetBrains Mono"/>
+              </a:rPr>
+              <a:t>Benedikt Zoller Coaching  ·  FKB Campus  ·  M16</a:t>
+            </a:r>
+          </a:p>
+        </p:txBody>
+      </p:sp>
+      <p:sp>
+        <p:nvSpPr>
+          <p:cNvPr id="10" name="TextBox 9"/>
+          <p:cNvSpPr txBox="1"/>
+          <p:nvPr/>
+        </p:nvSpPr>
+        <p:spPr>
+          <a:xfrm>
+            <a:off x="7176211" y="6583680"/>
+            <a:ext cx="4326940" cy="256032"/>
+          </a:xfrm>
+          <a:prstGeom prst="rect">
+            <a:avLst/>
+          </a:prstGeom>
+          <a:noFill/>
+        </p:spPr>
+        <p:txBody>
+          <a:bodyPr wrap="none">
+            <a:spAutoFit/>
+          </a:bodyPr>
+          <a:lstStyle/>
+          <a:p>
+            <a:pPr algn="r"/>
+            <a:r>
+              <a:rPr sz="700">
+                <a:solidFill>
+                  <a:srgbClr val="A0B4D2"/>
+                </a:solidFill>
+                <a:latin typeface="JetBrains Mono"/>
+              </a:rPr>
+              <a:t>Übersicht</a:t>
+            </a:r>
+          </a:p>
+        </p:txBody>
+      </p:sp>
+    </p:spTree>
+  </p:cSld>
+  <p:clrMapOvr>
+    <a:masterClrMapping/>
+  </p:clrMapOvr>
+</p:sld>
+</file>
+
+<file path=ppt/slides/slide17.xml><?xml version="1.0" encoding="utf-8"?>
+<p:sld xmlns:a="http://schemas.openxmlformats.org/drawingml/2006/main" xmlns:p="http://schemas.openxmlformats.org/presentationml/2006/main" xmlns:r="http://schemas.openxmlformats.org/officeDocument/2006/relationships">
+  <p:cSld>
+    <p:spTree>
+      <p:nvGrpSpPr>
+        <p:cNvPr id="1" name=""/>
+        <p:cNvGrpSpPr/>
+        <p:nvPr/>
+      </p:nvGrpSpPr>
+      <p:grpSpPr/>
+      <p:sp>
+        <p:nvSpPr>
+          <p:cNvPr id="2" name="Rectangle 1"/>
+          <p:cNvSpPr/>
+          <p:nvPr/>
+        </p:nvSpPr>
+        <p:spPr>
+          <a:xfrm>
+            <a:off x="0" y="0"/>
+            <a:ext cx="12188952" cy="6858000"/>
+          </a:xfrm>
+          <a:prstGeom prst="rect">
+            <a:avLst/>
+          </a:prstGeom>
+          <a:solidFill>
+            <a:srgbClr val="EDEDF3"/>
+          </a:solidFill>
+          <a:ln>
+            <a:noFill/>
+          </a:ln>
+        </p:spPr>
+        <p:style>
+          <a:lnRef idx="1">
+            <a:schemeClr val="accent1"/>
+          </a:lnRef>
+          <a:fillRef idx="3">
+            <a:schemeClr val="accent1"/>
+          </a:fillRef>
+          <a:effectRef idx="2">
+            <a:schemeClr val="accent1"/>
+          </a:effectRef>
+          <a:fontRef idx="minor">
+            <a:schemeClr val="lt1"/>
+          </a:fontRef>
+        </p:style>
+        <p:txBody>
+          <a:bodyPr rtlCol="0" anchor="ctr"/>
+          <a:lstStyle/>
+          <a:p>
+            <a:pPr algn="ctr"/>
+          </a:p>
+        </p:txBody>
+      </p:sp>
+      <p:sp>
+        <p:nvSpPr>
+          <p:cNvPr id="3" name="Rectangle 2"/>
+          <p:cNvSpPr/>
+          <p:nvPr/>
+        </p:nvSpPr>
+        <p:spPr>
+          <a:xfrm>
+            <a:off x="0" y="0"/>
+            <a:ext cx="12188952" cy="50292"/>
+          </a:xfrm>
+          <a:prstGeom prst="rect">
+            <a:avLst/>
+          </a:prstGeom>
+          <a:solidFill>
+            <a:srgbClr val="1F2C56"/>
+          </a:solidFill>
+          <a:ln>
+            <a:noFill/>
+          </a:ln>
+        </p:spPr>
+        <p:style>
+          <a:lnRef idx="1">
+            <a:schemeClr val="accent1"/>
+          </a:lnRef>
+          <a:fillRef idx="3">
+            <a:schemeClr val="accent1"/>
+          </a:fillRef>
+          <a:effectRef idx="2">
+            <a:schemeClr val="accent1"/>
+          </a:effectRef>
+          <a:fontRef idx="minor">
+            <a:schemeClr val="lt1"/>
+          </a:fontRef>
+        </p:style>
+        <p:txBody>
+          <a:bodyPr rtlCol="0" anchor="ctr"/>
+          <a:lstStyle/>
+          <a:p>
+            <a:pPr algn="ctr"/>
+          </a:p>
+        </p:txBody>
+      </p:sp>
+      <p:sp>
+        <p:nvSpPr>
+          <p:cNvPr id="4" name="TextBox 3"/>
+          <p:cNvSpPr txBox="1"/>
+          <p:nvPr/>
+        </p:nvSpPr>
+        <p:spPr>
+          <a:xfrm>
+            <a:off x="685800" y="109728"/>
+            <a:ext cx="10817352" cy="228600"/>
+          </a:xfrm>
+          <a:prstGeom prst="rect">
+            <a:avLst/>
+          </a:prstGeom>
+          <a:noFill/>
+        </p:spPr>
+        <p:txBody>
+          <a:bodyPr wrap="none">
+            <a:spAutoFit/>
+          </a:bodyPr>
+          <a:lstStyle/>
+          <a:p>
+            <a:pPr algn="l"/>
+            <a:r>
+              <a:rPr sz="750">
+                <a:solidFill>
+                  <a:srgbClr val="78808C"/>
+                </a:solidFill>
+                <a:latin typeface="JetBrains Mono"/>
+              </a:rPr>
+              <a:t>M16  ·  INHALT</a:t>
+            </a:r>
+          </a:p>
+        </p:txBody>
+      </p:sp>
+      <p:sp>
+        <p:nvSpPr>
+          <p:cNvPr id="5" name="Rectangle 4"/>
+          <p:cNvSpPr/>
+          <p:nvPr/>
+        </p:nvSpPr>
+        <p:spPr>
+          <a:xfrm>
+            <a:off x="0" y="1234440"/>
+            <a:ext cx="12188952" cy="12700"/>
+          </a:xfrm>
+          <a:prstGeom prst="rect">
+            <a:avLst/>
+          </a:prstGeom>
+          <a:solidFill>
+            <a:srgbClr val="D8DFE4"/>
+          </a:solidFill>
+          <a:ln>
+            <a:noFill/>
+          </a:ln>
+        </p:spPr>
+        <p:style>
+          <a:lnRef idx="1">
+            <a:schemeClr val="accent1"/>
+          </a:lnRef>
+          <a:fillRef idx="3">
+            <a:schemeClr val="accent1"/>
+          </a:fillRef>
+          <a:effectRef idx="2">
+            <a:schemeClr val="accent1"/>
+          </a:effectRef>
+          <a:fontRef idx="minor">
+            <a:schemeClr val="lt1"/>
+          </a:fontRef>
+        </p:style>
+        <p:txBody>
+          <a:bodyPr rtlCol="0" anchor="ctr"/>
+          <a:lstStyle/>
+          <a:p>
+            <a:pPr algn="ctr"/>
+          </a:p>
+        </p:txBody>
+      </p:sp>
+      <p:sp>
+        <p:nvSpPr>
+          <p:cNvPr id="6" name="Rectangle 5"/>
+          <p:cNvSpPr/>
+          <p:nvPr/>
+        </p:nvSpPr>
+        <p:spPr>
+          <a:xfrm>
+            <a:off x="685800" y="502920"/>
+            <a:ext cx="36576" cy="658368"/>
+          </a:xfrm>
+          <a:prstGeom prst="rect">
+            <a:avLst/>
+          </a:prstGeom>
+          <a:solidFill>
+            <a:srgbClr val="D9C089"/>
+          </a:solidFill>
+          <a:ln>
+            <a:noFill/>
+          </a:ln>
+        </p:spPr>
+        <p:style>
+          <a:lnRef idx="1">
+            <a:schemeClr val="accent1"/>
+          </a:lnRef>
+          <a:fillRef idx="3">
+            <a:schemeClr val="accent1"/>
+          </a:fillRef>
+          <a:effectRef idx="2">
+            <a:schemeClr val="accent1"/>
+          </a:effectRef>
+          <a:fontRef idx="minor">
+            <a:schemeClr val="lt1"/>
+          </a:fontRef>
+        </p:style>
+        <p:txBody>
+          <a:bodyPr rtlCol="0" anchor="ctr"/>
+          <a:lstStyle/>
+          <a:p>
+            <a:pPr algn="ctr"/>
+          </a:p>
+        </p:txBody>
+      </p:sp>
+      <p:sp>
+        <p:nvSpPr>
+          <p:cNvPr id="7" name="TextBox 6"/>
+          <p:cNvSpPr txBox="1"/>
+          <p:nvPr/>
+        </p:nvSpPr>
+        <p:spPr>
+          <a:xfrm>
+            <a:off x="813816" y="502920"/>
+            <a:ext cx="10634472" cy="685800"/>
+          </a:xfrm>
+          <a:prstGeom prst="rect">
+            <a:avLst/>
+          </a:prstGeom>
+          <a:noFill/>
+        </p:spPr>
+        <p:txBody>
+          <a:bodyPr wrap="square">
+            <a:spAutoFit/>
+          </a:bodyPr>
+          <a:lstStyle/>
+          <a:p>
+            <a:pPr algn="l"/>
+            <a:r>
+              <a:rPr sz="2400" b="1" i="0">
+                <a:solidFill>
+                  <a:srgbClr val="1F2C56"/>
+                </a:solidFill>
+                <a:latin typeface="Source Serif 4"/>
+              </a:rPr>
+              <a:t>Arbeitsblatt B: Maßnahmenplan</a:t>
+            </a:r>
+          </a:p>
+        </p:txBody>
+      </p:sp>
+      <p:sp>
+        <p:nvSpPr>
+          <p:cNvPr id="8" name="TextBox 7"/>
+          <p:cNvSpPr txBox="1"/>
+          <p:nvPr/>
+        </p:nvSpPr>
+        <p:spPr>
+          <a:xfrm>
+            <a:off x="685800" y="1417320"/>
+            <a:ext cx="10817352" cy="5029200"/>
+          </a:xfrm>
+          <a:prstGeom prst="rect">
+            <a:avLst/>
+          </a:prstGeom>
+          <a:noFill/>
+        </p:spPr>
+        <p:txBody>
+          <a:bodyPr wrap="square">
+            <a:spAutoFit/>
+          </a:bodyPr>
+          <a:lstStyle/>
+          <a:p>
+            <a:pPr>
+              <a:spcBef>
+                <a:spcPts val="400"/>
+              </a:spcBef>
+              <a:spcAft>
+                <a:spcPts val="200"/>
+              </a:spcAft>
+            </a:pPr>
+            <a:r>
+              <a:rPr sz="1300">
+                <a:solidFill>
+                  <a:srgbClr val="3D5466"/>
+                </a:solidFill>
+                <a:latin typeface="Arial"/>
+              </a:rPr>
+              <a:t>▸  Mein Ziel für die nächsten 90 Tage:</a:t>
             </a:r>
           </a:p>
         </p:txBody>
@@ -7355,7 +9885,7 @@
                 </a:solidFill>
                 <a:latin typeface="JetBrains Mono"/>
               </a:rPr>
-              <a:t>M16  ·  INHALT</a:t>
+              <a:t>AGENDA  ·  M16</a:t>
             </a:r>
           </a:p>
         </p:txBody>
@@ -7405,57 +9935,14 @@
       </p:sp>
       <p:sp>
         <p:nvSpPr>
-          <p:cNvPr id="6" name="Rectangle 5"/>
-          <p:cNvSpPr/>
+          <p:cNvPr id="6" name="TextBox 5"/>
+          <p:cNvSpPr txBox="1"/>
           <p:nvPr/>
         </p:nvSpPr>
         <p:spPr>
           <a:xfrm>
             <a:off x="685800" y="502920"/>
-            <a:ext cx="36576" cy="658368"/>
-          </a:xfrm>
-          <a:prstGeom prst="rect">
-            <a:avLst/>
-          </a:prstGeom>
-          <a:solidFill>
-            <a:srgbClr val="D9C089"/>
-          </a:solidFill>
-          <a:ln>
-            <a:noFill/>
-          </a:ln>
-        </p:spPr>
-        <p:style>
-          <a:lnRef idx="1">
-            <a:schemeClr val="accent1"/>
-          </a:lnRef>
-          <a:fillRef idx="3">
-            <a:schemeClr val="accent1"/>
-          </a:fillRef>
-          <a:effectRef idx="2">
-            <a:schemeClr val="accent1"/>
-          </a:effectRef>
-          <a:fontRef idx="minor">
-            <a:schemeClr val="lt1"/>
-          </a:fontRef>
-        </p:style>
-        <p:txBody>
-          <a:bodyPr rtlCol="0" anchor="ctr"/>
-          <a:lstStyle/>
-          <a:p>
-            <a:pPr algn="ctr"/>
-          </a:p>
-        </p:txBody>
-      </p:sp>
-      <p:sp>
-        <p:nvSpPr>
-          <p:cNvPr id="7" name="TextBox 6"/>
-          <p:cNvSpPr txBox="1"/>
-          <p:nvPr/>
-        </p:nvSpPr>
-        <p:spPr>
-          <a:xfrm>
-            <a:off x="813816" y="502920"/>
-            <a:ext cx="10634472" cy="685800"/>
+            <a:ext cx="10817352" cy="658368"/>
           </a:xfrm>
           <a:prstGeom prst="rect">
             <a:avLst/>
@@ -7470,27 +9957,27 @@
           <a:p>
             <a:pPr algn="l"/>
             <a:r>
-              <a:rPr sz="2400" b="1" i="0">
+              <a:rPr sz="2600" b="1" i="0">
                 <a:solidFill>
                   <a:srgbClr val="1F2C56"/>
                 </a:solidFill>
                 <a:latin typeface="Source Serif 4"/>
               </a:rPr>
-              <a:t>Definition</a:t>
-            </a:r>
-          </a:p>
-        </p:txBody>
-      </p:sp>
-      <p:sp>
-        <p:nvSpPr>
-          <p:cNvPr id="8" name="TextBox 7"/>
+              <a:t>So läuft das Modul</a:t>
+            </a:r>
+          </a:p>
+        </p:txBody>
+      </p:sp>
+      <p:sp>
+        <p:nvSpPr>
+          <p:cNvPr id="7" name="TextBox 6"/>
           <p:cNvSpPr txBox="1"/>
           <p:nvPr/>
         </p:nvSpPr>
         <p:spPr>
           <a:xfrm>
-            <a:off x="685800" y="1417320"/>
-            <a:ext cx="10817352" cy="5029200"/>
+            <a:off x="685800" y="1463040"/>
+            <a:ext cx="10817352" cy="4937760"/>
           </a:xfrm>
           <a:prstGeom prst="rect">
             <a:avLst/>
@@ -7508,17 +9995,35 @@
                 <a:spcPts val="400"/>
               </a:spcBef>
               <a:spcAft>
-                <a:spcPts val="200"/>
+                <a:spcPts val="100"/>
               </a:spcAft>
             </a:pPr>
             <a:r>
-              <a:rPr sz="1200">
+              <a:rPr sz="900">
+                <a:solidFill>
+                  <a:srgbClr val="78808C"/>
+                </a:solidFill>
+                <a:latin typeface="Consolas"/>
+              </a:rPr>
+              <a:t>00:00       </a:t>
+            </a:r>
+            <a:r>
+              <a:rPr sz="1200" b="1">
                 <a:solidFill>
                   <a:srgbClr val="3D5466"/>
                 </a:solidFill>
                 <a:latin typeface="Arial"/>
               </a:rPr>
-              <a:t>NMZ (%) = Deckungsbeitrag II × 100 / Kreditvolumen</a:t>
+              <a:t>  Einstieg</a:t>
+            </a:r>
+            <a:r>
+              <a:rPr sz="900">
+                <a:solidFill>
+                  <a:srgbClr val="78808C"/>
+                </a:solidFill>
+                <a:latin typeface="Arial"/>
+              </a:rPr>
+              <a:t>  ·  Plenum</a:t>
             </a:r>
           </a:p>
           <a:p>
@@ -7527,24 +10032,329 @@
                 <a:spcPts val="400"/>
               </a:spcBef>
               <a:spcAft>
-                <a:spcPts val="200"/>
+                <a:spcPts val="100"/>
               </a:spcAft>
             </a:pPr>
             <a:r>
-              <a:rPr sz="1200">
+              <a:rPr sz="900">
+                <a:solidFill>
+                  <a:srgbClr val="78808C"/>
+                </a:solidFill>
+                <a:latin typeface="Consolas"/>
+              </a:rPr>
+              <a:t>00:05       </a:t>
+            </a:r>
+            <a:r>
+              <a:rPr sz="1200" b="1">
                 <a:solidFill>
                   <a:srgbClr val="3D5466"/>
                 </a:solidFill>
                 <a:latin typeface="Arial"/>
               </a:rPr>
-              <a:t>Sie ist damit die auf das Volumen normierte Version des Kundendeckungsbeitrags (M14), was Vergleiche zwischen Kunden unterschiedlicher Größe erst möglich macht.</a:t>
-            </a:r>
-          </a:p>
-        </p:txBody>
-      </p:sp>
-      <p:sp>
-        <p:nvSpPr>
-          <p:cNvPr id="9" name="Rectangle 8"/>
+              <a:t>  Theorie-Input</a:t>
+            </a:r>
+            <a:r>
+              <a:rPr sz="900">
+                <a:solidFill>
+                  <a:srgbClr val="78808C"/>
+                </a:solidFill>
+                <a:latin typeface="Arial"/>
+              </a:rPr>
+              <a:t>  ·  Vortrag + Folie</a:t>
+            </a:r>
+          </a:p>
+          <a:p>
+            <a:pPr>
+              <a:spcBef>
+                <a:spcPts val="400"/>
+              </a:spcBef>
+              <a:spcAft>
+                <a:spcPts val="100"/>
+              </a:spcAft>
+            </a:pPr>
+            <a:r>
+              <a:rPr sz="900">
+                <a:solidFill>
+                  <a:srgbClr val="78808C"/>
+                </a:solidFill>
+                <a:latin typeface="Consolas"/>
+              </a:rPr>
+              <a:t>00:20       </a:t>
+            </a:r>
+            <a:r>
+              <a:rPr sz="1200" b="1">
+                <a:solidFill>
+                  <a:srgbClr val="3D5466"/>
+                </a:solidFill>
+                <a:latin typeface="Arial"/>
+              </a:rPr>
+              <a:t>  agree-Demo</a:t>
+            </a:r>
+            <a:r>
+              <a:rPr sz="900">
+                <a:solidFill>
+                  <a:srgbClr val="78808C"/>
+                </a:solidFill>
+                <a:latin typeface="Arial"/>
+              </a:rPr>
+              <a:t>  ·  Demo am Beamer</a:t>
+            </a:r>
+          </a:p>
+          <a:p>
+            <a:pPr>
+              <a:spcBef>
+                <a:spcPts val="400"/>
+              </a:spcBef>
+              <a:spcAft>
+                <a:spcPts val="100"/>
+              </a:spcAft>
+            </a:pPr>
+            <a:r>
+              <a:rPr sz="900">
+                <a:solidFill>
+                  <a:srgbClr val="78808C"/>
+                </a:solidFill>
+                <a:latin typeface="Consolas"/>
+              </a:rPr>
+              <a:t>00:30       </a:t>
+            </a:r>
+            <a:r>
+              <a:rPr sz="1200" b="1">
+                <a:solidFill>
+                  <a:srgbClr val="3D5466"/>
+                </a:solidFill>
+                <a:latin typeface="Arial"/>
+              </a:rPr>
+              <a:t>  Pause</a:t>
+            </a:r>
+            <a:r>
+              <a:rPr sz="900">
+                <a:solidFill>
+                  <a:srgbClr val="78808C"/>
+                </a:solidFill>
+                <a:latin typeface="Arial"/>
+              </a:rPr>
+              <a:t>  ·  –</a:t>
+            </a:r>
+          </a:p>
+          <a:p>
+            <a:pPr>
+              <a:spcBef>
+                <a:spcPts val="400"/>
+              </a:spcBef>
+              <a:spcAft>
+                <a:spcPts val="100"/>
+              </a:spcAft>
+            </a:pPr>
+            <a:r>
+              <a:rPr sz="900">
+                <a:solidFill>
+                  <a:srgbClr val="78808C"/>
+                </a:solidFill>
+                <a:latin typeface="Consolas"/>
+              </a:rPr>
+              <a:t>00:35       </a:t>
+            </a:r>
+            <a:r>
+              <a:rPr sz="1200" b="1">
+                <a:solidFill>
+                  <a:srgbClr val="3D5466"/>
+                </a:solidFill>
+                <a:latin typeface="Arial"/>
+              </a:rPr>
+              <a:t>  Einzelübung I</a:t>
+            </a:r>
+            <a:r>
+              <a:rPr sz="900">
+                <a:solidFill>
+                  <a:srgbClr val="78808C"/>
+                </a:solidFill>
+                <a:latin typeface="Arial"/>
+              </a:rPr>
+              <a:t>  ·  agree-Einzelarbeit</a:t>
+            </a:r>
+          </a:p>
+          <a:p>
+            <a:pPr>
+              <a:spcBef>
+                <a:spcPts val="400"/>
+              </a:spcBef>
+              <a:spcAft>
+                <a:spcPts val="100"/>
+              </a:spcAft>
+            </a:pPr>
+            <a:r>
+              <a:rPr sz="900">
+                <a:solidFill>
+                  <a:srgbClr val="78808C"/>
+                </a:solidFill>
+                <a:latin typeface="Consolas"/>
+              </a:rPr>
+              <a:t>01:00       </a:t>
+            </a:r>
+            <a:r>
+              <a:rPr sz="1200" b="1">
+                <a:solidFill>
+                  <a:srgbClr val="3D5466"/>
+                </a:solidFill>
+                <a:latin typeface="Arial"/>
+              </a:rPr>
+              <a:t>  Partnercheck</a:t>
+            </a:r>
+            <a:r>
+              <a:rPr sz="900">
+                <a:solidFill>
+                  <a:srgbClr val="78808C"/>
+                </a:solidFill>
+                <a:latin typeface="Arial"/>
+              </a:rPr>
+              <a:t>  ·  2er-Teams</a:t>
+            </a:r>
+          </a:p>
+          <a:p>
+            <a:pPr>
+              <a:spcBef>
+                <a:spcPts val="400"/>
+              </a:spcBef>
+              <a:spcAft>
+                <a:spcPts val="100"/>
+              </a:spcAft>
+            </a:pPr>
+            <a:r>
+              <a:rPr sz="900">
+                <a:solidFill>
+                  <a:srgbClr val="78808C"/>
+                </a:solidFill>
+                <a:latin typeface="Consolas"/>
+              </a:rPr>
+              <a:t>01:05       </a:t>
+            </a:r>
+            <a:r>
+              <a:rPr sz="1200" b="1">
+                <a:solidFill>
+                  <a:srgbClr val="3D5466"/>
+                </a:solidFill>
+                <a:latin typeface="Arial"/>
+              </a:rPr>
+              <a:t>  Einzelübung II</a:t>
+            </a:r>
+            <a:r>
+              <a:rPr sz="900">
+                <a:solidFill>
+                  <a:srgbClr val="78808C"/>
+                </a:solidFill>
+                <a:latin typeface="Arial"/>
+              </a:rPr>
+              <a:t>  ·  Einzelarbeit</a:t>
+            </a:r>
+          </a:p>
+          <a:p>
+            <a:pPr>
+              <a:spcBef>
+                <a:spcPts val="400"/>
+              </a:spcBef>
+              <a:spcAft>
+                <a:spcPts val="100"/>
+              </a:spcAft>
+            </a:pPr>
+            <a:r>
+              <a:rPr sz="900">
+                <a:solidFill>
+                  <a:srgbClr val="78808C"/>
+                </a:solidFill>
+                <a:latin typeface="Consolas"/>
+              </a:rPr>
+              <a:t>01:20       </a:t>
+            </a:r>
+            <a:r>
+              <a:rPr sz="1200" b="1">
+                <a:solidFill>
+                  <a:srgbClr val="3D5466"/>
+                </a:solidFill>
+                <a:latin typeface="Arial"/>
+              </a:rPr>
+              <a:t>  Blitzlicht-Runde</a:t>
+            </a:r>
+            <a:r>
+              <a:rPr sz="900">
+                <a:solidFill>
+                  <a:srgbClr val="78808C"/>
+                </a:solidFill>
+                <a:latin typeface="Arial"/>
+              </a:rPr>
+              <a:t>  ·  Plenum</a:t>
+            </a:r>
+          </a:p>
+          <a:p>
+            <a:pPr>
+              <a:spcBef>
+                <a:spcPts val="400"/>
+              </a:spcBef>
+              <a:spcAft>
+                <a:spcPts val="100"/>
+              </a:spcAft>
+            </a:pPr>
+            <a:r>
+              <a:rPr sz="900">
+                <a:solidFill>
+                  <a:srgbClr val="78808C"/>
+                </a:solidFill>
+                <a:latin typeface="Consolas"/>
+              </a:rPr>
+              <a:t>01:30       </a:t>
+            </a:r>
+            <a:r>
+              <a:rPr sz="1200" b="1">
+                <a:solidFill>
+                  <a:srgbClr val="3D5466"/>
+                </a:solidFill>
+                <a:latin typeface="Arial"/>
+              </a:rPr>
+              <a:t>  Transfer &amp; Abschluss</a:t>
+            </a:r>
+            <a:r>
+              <a:rPr sz="900">
+                <a:solidFill>
+                  <a:srgbClr val="78808C"/>
+                </a:solidFill>
+                <a:latin typeface="Arial"/>
+              </a:rPr>
+              <a:t>  ·  Einzeln schriftlich</a:t>
+            </a:r>
+          </a:p>
+          <a:p>
+            <a:pPr>
+              <a:spcBef>
+                <a:spcPts val="400"/>
+              </a:spcBef>
+              <a:spcAft>
+                <a:spcPts val="100"/>
+              </a:spcAft>
+            </a:pPr>
+            <a:r>
+              <a:rPr sz="900">
+                <a:solidFill>
+                  <a:srgbClr val="78808C"/>
+                </a:solidFill>
+                <a:latin typeface="Consolas"/>
+              </a:rPr>
+              <a:t>01:35       </a:t>
+            </a:r>
+            <a:r>
+              <a:rPr sz="1200" b="1">
+                <a:solidFill>
+                  <a:srgbClr val="3D5466"/>
+                </a:solidFill>
+                <a:latin typeface="Arial"/>
+              </a:rPr>
+              <a:t>  Ende</a:t>
+            </a:r>
+          </a:p>
+        </p:txBody>
+      </p:sp>
+      <p:sp>
+        <p:nvSpPr>
+          <p:cNvPr id="8" name="Rectangle 7"/>
           <p:cNvSpPr/>
           <p:nvPr/>
         </p:nvSpPr>
@@ -7587,7 +10397,7 @@
       </p:sp>
       <p:sp>
         <p:nvSpPr>
-          <p:cNvPr id="10" name="TextBox 9"/>
+          <p:cNvPr id="9" name="TextBox 8"/>
           <p:cNvSpPr txBox="1"/>
           <p:nvPr/>
         </p:nvSpPr>
@@ -7875,7 +10685,7 @@
                 </a:solidFill>
                 <a:latin typeface="Source Serif 4"/>
               </a:rPr>
-              <a:t>Warum die NMZ dem DB überlegen ist</a:t>
+              <a:t>Definition</a:t>
             </a:r>
           </a:p>
         </p:txBody>
@@ -7911,13 +10721,13 @@
               </a:spcAft>
             </a:pPr>
             <a:r>
-              <a:rPr sz="1200">
+              <a:rPr sz="1300">
                 <a:solidFill>
                   <a:srgbClr val="3D5466"/>
                 </a:solidFill>
                 <a:latin typeface="Arial"/>
               </a:rPr>
-              <a:t>Rolfes (1999 ) betont, dass Banken ohne normierte Ertragskennzahlen systematisch Kapital in renditeschwache Engagements lenken, weil die absoluten Beträge groß aussehen.</a:t>
+              <a:t>▸  NMZ (%) = Deckungsbeitrag II × 100 / Kreditvolumen</a:t>
             </a:r>
           </a:p>
           <a:p>
@@ -7930,51 +10740,13 @@
               </a:spcAft>
             </a:pPr>
             <a:r>
-              <a:rPr sz="1200">
+              <a:rPr sz="1300">
                 <a:solidFill>
                   <a:srgbClr val="3D5466"/>
                 </a:solidFill>
                 <a:latin typeface="Arial"/>
               </a:rPr>
-              <a:t>## 4.2 Die NMZ-Komponenten im Detail</a:t>
-            </a:r>
-          </a:p>
-          <a:p>
-            <a:pPr>
-              <a:spcBef>
-                <a:spcPts val="400"/>
-              </a:spcBef>
-              <a:spcAft>
-                <a:spcPts val="200"/>
-              </a:spcAft>
-            </a:pPr>
-            <a:r>
-              <a:rPr sz="1200">
-                <a:solidFill>
-                  <a:srgbClr val="3D5466"/>
-                </a:solidFill>
-                <a:latin typeface="Arial"/>
-              </a:rPr>
-              <a:t>Die NMZ wird von vier Treibern bewegt – jeder Treiber entspricht einem Hebel für die Optimierung:</a:t>
-            </a:r>
-          </a:p>
-          <a:p>
-            <a:pPr>
-              <a:spcBef>
-                <a:spcPts val="400"/>
-              </a:spcBef>
-              <a:spcAft>
-                <a:spcPts val="200"/>
-              </a:spcAft>
-            </a:pPr>
-            <a:r>
-              <a:rPr sz="1200">
-                <a:solidFill>
-                  <a:srgbClr val="3D5466"/>
-                </a:solidFill>
-                <a:latin typeface="Arial"/>
-              </a:rPr>
-              <a:t>## 4.3 NMZ-Berichte in agree lesen</a:t>
+              <a:t>▸  Sie ist damit die auf das Volumen normierte Version des Kundendeckungsbeitrags (M14), was Vergleiche zwischen Kunden unterschiedlicher Größe erst möglich macht.</a:t>
             </a:r>
           </a:p>
         </p:txBody>
@@ -8090,7 +10862,7 @@
             <a:avLst/>
           </a:prstGeom>
           <a:solidFill>
-            <a:srgbClr val="FFFFFF"/>
+            <a:srgbClr val="EDEDF3"/>
           </a:solidFill>
           <a:ln>
             <a:noFill/>
@@ -8191,43 +10963,51 @@
                 </a:solidFill>
                 <a:latin typeface="JetBrains Mono"/>
               </a:rPr>
-              <a:t>M16  ·  SCHAUBILD</a:t>
-            </a:r>
-          </a:p>
-        </p:txBody>
-      </p:sp>
-      <p:sp>
-        <p:nvSpPr>
-          <p:cNvPr id="5" name="TextBox 4"/>
-          <p:cNvSpPr txBox="1"/>
-          <p:nvPr/>
-        </p:nvSpPr>
-        <p:spPr>
-          <a:xfrm>
-            <a:off x="685800" y="502920"/>
-            <a:ext cx="10817352" cy="594360"/>
-          </a:xfrm>
-          <a:prstGeom prst="rect">
-            <a:avLst/>
-          </a:prstGeom>
-          <a:noFill/>
-        </p:spPr>
-        <p:txBody>
-          <a:bodyPr wrap="square">
-            <a:spAutoFit/>
-          </a:bodyPr>
-          <a:lstStyle/>
-          <a:p>
-            <a:pPr algn="l"/>
-            <a:r>
-              <a:rPr sz="2000" b="1" i="0">
-                <a:solidFill>
-                  <a:srgbClr val="1F2C56"/>
-                </a:solidFill>
-                <a:latin typeface="Source Serif 4"/>
-              </a:rPr>
-              <a:t>Nettomargenbeitrag NMZ</a:t>
-            </a:r>
+              <a:t>M16  ·  INHALT</a:t>
+            </a:r>
+          </a:p>
+        </p:txBody>
+      </p:sp>
+      <p:sp>
+        <p:nvSpPr>
+          <p:cNvPr id="5" name="Rectangle 4"/>
+          <p:cNvSpPr/>
+          <p:nvPr/>
+        </p:nvSpPr>
+        <p:spPr>
+          <a:xfrm>
+            <a:off x="0" y="1234440"/>
+            <a:ext cx="12188952" cy="12700"/>
+          </a:xfrm>
+          <a:prstGeom prst="rect">
+            <a:avLst/>
+          </a:prstGeom>
+          <a:solidFill>
+            <a:srgbClr val="D8DFE4"/>
+          </a:solidFill>
+          <a:ln>
+            <a:noFill/>
+          </a:ln>
+        </p:spPr>
+        <p:style>
+          <a:lnRef idx="1">
+            <a:schemeClr val="accent1"/>
+          </a:lnRef>
+          <a:fillRef idx="3">
+            <a:schemeClr val="accent1"/>
+          </a:fillRef>
+          <a:effectRef idx="2">
+            <a:schemeClr val="accent1"/>
+          </a:effectRef>
+          <a:fontRef idx="minor">
+            <a:schemeClr val="lt1"/>
+          </a:fontRef>
+        </p:style>
+        <p:txBody>
+          <a:bodyPr rtlCol="0" anchor="ctr"/>
+          <a:lstStyle/>
+          <a:p>
+            <a:pPr algn="ctr"/>
           </a:p>
         </p:txBody>
       </p:sp>
@@ -8239,8 +11019,8 @@
         </p:nvSpPr>
         <p:spPr>
           <a:xfrm>
-            <a:off x="685800" y="1143000"/>
-            <a:ext cx="10817352" cy="25400"/>
+            <a:off x="685800" y="502920"/>
+            <a:ext cx="36576" cy="658368"/>
           </a:xfrm>
           <a:prstGeom prst="rect">
             <a:avLst/>
@@ -8274,33 +11054,143 @@
           </a:p>
         </p:txBody>
       </p:sp>
-      <p:pic>
-        <p:nvPicPr>
-          <p:cNvPr id="7" name="Picture 6" descr="image.png"/>
-          <p:cNvPicPr>
-            <a:picLocks noChangeAspect="1"/>
-          </p:cNvPicPr>
-          <p:nvPr/>
-        </p:nvPicPr>
-        <p:blipFill>
-          <a:blip r:embed="rId2"/>
-          <a:stretch>
-            <a:fillRect/>
-          </a:stretch>
-        </p:blipFill>
-        <p:spPr>
-          <a:xfrm>
-            <a:off x="2163921" y="1325880"/>
-            <a:ext cx="7861110" cy="4937760"/>
-          </a:xfrm>
-          <a:prstGeom prst="rect">
-            <a:avLst/>
-          </a:prstGeom>
-        </p:spPr>
-      </p:pic>
-      <p:sp>
-        <p:nvSpPr>
-          <p:cNvPr id="8" name="Rectangle 7"/>
+      <p:sp>
+        <p:nvSpPr>
+          <p:cNvPr id="7" name="TextBox 6"/>
+          <p:cNvSpPr txBox="1"/>
+          <p:nvPr/>
+        </p:nvSpPr>
+        <p:spPr>
+          <a:xfrm>
+            <a:off x="813816" y="502920"/>
+            <a:ext cx="10634472" cy="685800"/>
+          </a:xfrm>
+          <a:prstGeom prst="rect">
+            <a:avLst/>
+          </a:prstGeom>
+          <a:noFill/>
+        </p:spPr>
+        <p:txBody>
+          <a:bodyPr wrap="square">
+            <a:spAutoFit/>
+          </a:bodyPr>
+          <a:lstStyle/>
+          <a:p>
+            <a:pPr algn="l"/>
+            <a:r>
+              <a:rPr sz="2400" b="1" i="0">
+                <a:solidFill>
+                  <a:srgbClr val="1F2C56"/>
+                </a:solidFill>
+                <a:latin typeface="Source Serif 4"/>
+              </a:rPr>
+              <a:t>Warum die NMZ dem DB überlegen ist</a:t>
+            </a:r>
+          </a:p>
+        </p:txBody>
+      </p:sp>
+      <p:sp>
+        <p:nvSpPr>
+          <p:cNvPr id="8" name="TextBox 7"/>
+          <p:cNvSpPr txBox="1"/>
+          <p:nvPr/>
+        </p:nvSpPr>
+        <p:spPr>
+          <a:xfrm>
+            <a:off x="685800" y="1417320"/>
+            <a:ext cx="10817352" cy="5029200"/>
+          </a:xfrm>
+          <a:prstGeom prst="rect">
+            <a:avLst/>
+          </a:prstGeom>
+          <a:noFill/>
+        </p:spPr>
+        <p:txBody>
+          <a:bodyPr wrap="square">
+            <a:spAutoFit/>
+          </a:bodyPr>
+          <a:lstStyle/>
+          <a:p>
+            <a:pPr>
+              <a:spcBef>
+                <a:spcPts val="400"/>
+              </a:spcBef>
+              <a:spcAft>
+                <a:spcPts val="200"/>
+              </a:spcAft>
+            </a:pPr>
+            <a:r>
+              <a:rPr sz="1300">
+                <a:solidFill>
+                  <a:srgbClr val="3D5466"/>
+                </a:solidFill>
+                <a:latin typeface="Arial"/>
+              </a:rPr>
+              <a:t>▸  Rolfes (1999 ) betont, dass Banken ohne normierte Ertragskennzahlen systematisch Kapital in renditeschwache Engagements lenken, weil die absoluten Beträge groß aussehen.</a:t>
+            </a:r>
+          </a:p>
+          <a:p>
+            <a:pPr>
+              <a:spcBef>
+                <a:spcPts val="400"/>
+              </a:spcBef>
+              <a:spcAft>
+                <a:spcPts val="200"/>
+              </a:spcAft>
+            </a:pPr>
+            <a:r>
+              <a:rPr sz="1300">
+                <a:solidFill>
+                  <a:srgbClr val="3D5466"/>
+                </a:solidFill>
+                <a:latin typeface="Arial"/>
+              </a:rPr>
+              <a:t>▸  ## 4.2 Die NMZ-Komponenten im Detail</a:t>
+            </a:r>
+          </a:p>
+          <a:p>
+            <a:pPr>
+              <a:spcBef>
+                <a:spcPts val="400"/>
+              </a:spcBef>
+              <a:spcAft>
+                <a:spcPts val="200"/>
+              </a:spcAft>
+            </a:pPr>
+            <a:r>
+              <a:rPr sz="1300">
+                <a:solidFill>
+                  <a:srgbClr val="3D5466"/>
+                </a:solidFill>
+                <a:latin typeface="Arial"/>
+              </a:rPr>
+              <a:t>▸  Die NMZ wird von vier Treibern bewegt – jeder Treiber entspricht einem Hebel für die Optimierung:</a:t>
+            </a:r>
+          </a:p>
+          <a:p>
+            <a:pPr>
+              <a:spcBef>
+                <a:spcPts val="400"/>
+              </a:spcBef>
+              <a:spcAft>
+                <a:spcPts val="200"/>
+              </a:spcAft>
+            </a:pPr>
+            <a:r>
+              <a:rPr sz="1300">
+                <a:solidFill>
+                  <a:srgbClr val="3D5466"/>
+                </a:solidFill>
+                <a:latin typeface="Arial"/>
+              </a:rPr>
+              <a:t>▸  ## 4.3 NMZ-Berichte in agree lesen</a:t>
+            </a:r>
+          </a:p>
+        </p:txBody>
+      </p:sp>
+      <p:sp>
+        <p:nvSpPr>
+          <p:cNvPr id="9" name="Rectangle 8"/>
           <p:cNvSpPr/>
           <p:nvPr/>
         </p:nvSpPr>
@@ -8343,7 +11233,7 @@
       </p:sp>
       <p:sp>
         <p:nvSpPr>
-          <p:cNvPr id="9" name="TextBox 8"/>
+          <p:cNvPr id="10" name="TextBox 9"/>
           <p:cNvSpPr txBox="1"/>
           <p:nvPr/>
         </p:nvSpPr>
@@ -8372,41 +11262,6 @@
                 <a:latin typeface="JetBrains Mono"/>
               </a:rPr>
               <a:t>Benedikt Zoller Coaching  ·  FKB Campus  ·  M16</a:t>
-            </a:r>
-          </a:p>
-        </p:txBody>
-      </p:sp>
-      <p:sp>
-        <p:nvSpPr>
-          <p:cNvPr id="10" name="TextBox 9"/>
-          <p:cNvSpPr txBox="1"/>
-          <p:nvPr/>
-        </p:nvSpPr>
-        <p:spPr>
-          <a:xfrm>
-            <a:off x="7176211" y="6583680"/>
-            <a:ext cx="4326940" cy="256032"/>
-          </a:xfrm>
-          <a:prstGeom prst="rect">
-            <a:avLst/>
-          </a:prstGeom>
-          <a:noFill/>
-        </p:spPr>
-        <p:txBody>
-          <a:bodyPr wrap="none">
-            <a:spAutoFit/>
-          </a:bodyPr>
-          <a:lstStyle/>
-          <a:p>
-            <a:pPr algn="r"/>
-            <a:r>
-              <a:rPr sz="700">
-                <a:solidFill>
-                  <a:srgbClr val="A0B4D2"/>
-                </a:solidFill>
-                <a:latin typeface="JetBrains Mono"/>
-              </a:rPr>
-              <a:t>Schaubild</a:t>
             </a:r>
           </a:p>
         </p:txBody>
@@ -8444,7 +11299,7 @@
             <a:avLst/>
           </a:prstGeom>
           <a:solidFill>
-            <a:srgbClr val="EDEDF3"/>
+            <a:srgbClr val="FFFFFF"/>
           </a:solidFill>
           <a:ln>
             <a:noFill/>
@@ -8545,51 +11400,43 @@
                 </a:solidFill>
                 <a:latin typeface="JetBrains Mono"/>
               </a:rPr>
-              <a:t>M16  ·  INHALT</a:t>
-            </a:r>
-          </a:p>
-        </p:txBody>
-      </p:sp>
-      <p:sp>
-        <p:nvSpPr>
-          <p:cNvPr id="5" name="Rectangle 4"/>
-          <p:cNvSpPr/>
-          <p:nvPr/>
-        </p:nvSpPr>
-        <p:spPr>
-          <a:xfrm>
-            <a:off x="0" y="1234440"/>
-            <a:ext cx="12188952" cy="12700"/>
-          </a:xfrm>
-          <a:prstGeom prst="rect">
-            <a:avLst/>
-          </a:prstGeom>
-          <a:solidFill>
-            <a:srgbClr val="D8DFE4"/>
-          </a:solidFill>
-          <a:ln>
-            <a:noFill/>
-          </a:ln>
-        </p:spPr>
-        <p:style>
-          <a:lnRef idx="1">
-            <a:schemeClr val="accent1"/>
-          </a:lnRef>
-          <a:fillRef idx="3">
-            <a:schemeClr val="accent1"/>
-          </a:fillRef>
-          <a:effectRef idx="2">
-            <a:schemeClr val="accent1"/>
-          </a:effectRef>
-          <a:fontRef idx="minor">
-            <a:schemeClr val="lt1"/>
-          </a:fontRef>
-        </p:style>
-        <p:txBody>
-          <a:bodyPr rtlCol="0" anchor="ctr"/>
-          <a:lstStyle/>
-          <a:p>
-            <a:pPr algn="ctr"/>
+              <a:t>M16  ·  SCHAUBILD</a:t>
+            </a:r>
+          </a:p>
+        </p:txBody>
+      </p:sp>
+      <p:sp>
+        <p:nvSpPr>
+          <p:cNvPr id="5" name="TextBox 4"/>
+          <p:cNvSpPr txBox="1"/>
+          <p:nvPr/>
+        </p:nvSpPr>
+        <p:spPr>
+          <a:xfrm>
+            <a:off x="685800" y="502920"/>
+            <a:ext cx="10817352" cy="594360"/>
+          </a:xfrm>
+          <a:prstGeom prst="rect">
+            <a:avLst/>
+          </a:prstGeom>
+          <a:noFill/>
+        </p:spPr>
+        <p:txBody>
+          <a:bodyPr wrap="square">
+            <a:spAutoFit/>
+          </a:bodyPr>
+          <a:lstStyle/>
+          <a:p>
+            <a:pPr algn="l"/>
+            <a:r>
+              <a:rPr sz="2000" b="1" i="0">
+                <a:solidFill>
+                  <a:srgbClr val="1F2C56"/>
+                </a:solidFill>
+                <a:latin typeface="Source Serif 4"/>
+              </a:rPr>
+              <a:t>Nettomargenbeitrag NMZ</a:t>
+            </a:r>
           </a:p>
         </p:txBody>
       </p:sp>
@@ -8601,8 +11448,8 @@
         </p:nvSpPr>
         <p:spPr>
           <a:xfrm>
-            <a:off x="685800" y="502920"/>
-            <a:ext cx="36576" cy="658368"/>
+            <a:off x="685800" y="1143000"/>
+            <a:ext cx="10817352" cy="25400"/>
           </a:xfrm>
           <a:prstGeom prst="rect">
             <a:avLst/>
@@ -8636,86 +11483,33 @@
           </a:p>
         </p:txBody>
       </p:sp>
-      <p:sp>
-        <p:nvSpPr>
-          <p:cNvPr id="7" name="TextBox 6"/>
-          <p:cNvSpPr txBox="1"/>
-          <p:nvPr/>
-        </p:nvSpPr>
-        <p:spPr>
-          <a:xfrm>
-            <a:off x="813816" y="502920"/>
-            <a:ext cx="10634472" cy="685800"/>
-          </a:xfrm>
-          <a:prstGeom prst="rect">
-            <a:avLst/>
-          </a:prstGeom>
-          <a:noFill/>
-        </p:spPr>
-        <p:txBody>
-          <a:bodyPr wrap="square">
-            <a:spAutoFit/>
-          </a:bodyPr>
-          <a:lstStyle/>
-          <a:p>
-            <a:pPr algn="l"/>
-            <a:r>
-              <a:rPr sz="2400" b="1" i="0">
-                <a:solidFill>
-                  <a:srgbClr val="1F2C56"/>
-                </a:solidFill>
-                <a:latin typeface="Source Serif 4"/>
-              </a:rPr>
-              <a:t>Wo finde ich meine NMZ-Daten?</a:t>
-            </a:r>
-          </a:p>
-        </p:txBody>
-      </p:sp>
-      <p:sp>
-        <p:nvSpPr>
-          <p:cNvPr id="8" name="TextBox 7"/>
-          <p:cNvSpPr txBox="1"/>
-          <p:nvPr/>
-        </p:nvSpPr>
-        <p:spPr>
-          <a:xfrm>
-            <a:off x="685800" y="1417320"/>
-            <a:ext cx="10817352" cy="5029200"/>
-          </a:xfrm>
-          <a:prstGeom prst="rect">
-            <a:avLst/>
-          </a:prstGeom>
-          <a:noFill/>
-        </p:spPr>
-        <p:txBody>
-          <a:bodyPr wrap="square">
-            <a:spAutoFit/>
-          </a:bodyPr>
-          <a:lstStyle/>
-          <a:p>
-            <a:pPr>
-              <a:spcBef>
-                <a:spcPts val="400"/>
-              </a:spcBef>
-              <a:spcAft>
-                <a:spcPts val="200"/>
-              </a:spcAft>
-            </a:pPr>
-            <a:r>
-              <a:rPr sz="1200">
-                <a:solidFill>
-                  <a:srgbClr val="3D5466"/>
-                </a:solidFill>
-                <a:latin typeface="Arial"/>
-              </a:rPr>
-              <a:t>In agree (Atruvia) stehen NMZ-relevante Auswertungen über folgende Einstiegspunkte zur Verfügung:</a:t>
-            </a:r>
-          </a:p>
-        </p:txBody>
-      </p:sp>
-      <p:sp>
-        <p:nvSpPr>
-          <p:cNvPr id="9" name="Rectangle 8"/>
+      <p:pic>
+        <p:nvPicPr>
+          <p:cNvPr id="7" name="Picture 6" descr="image.png"/>
+          <p:cNvPicPr>
+            <a:picLocks noChangeAspect="1"/>
+          </p:cNvPicPr>
+          <p:nvPr/>
+        </p:nvPicPr>
+        <p:blipFill>
+          <a:blip r:embed="rId2"/>
+          <a:stretch>
+            <a:fillRect/>
+          </a:stretch>
+        </p:blipFill>
+        <p:spPr>
+          <a:xfrm>
+            <a:off x="2163921" y="1325880"/>
+            <a:ext cx="7861110" cy="4937760"/>
+          </a:xfrm>
+          <a:prstGeom prst="rect">
+            <a:avLst/>
+          </a:prstGeom>
+        </p:spPr>
+      </p:pic>
+      <p:sp>
+        <p:nvSpPr>
+          <p:cNvPr id="8" name="Rectangle 7"/>
           <p:cNvSpPr/>
           <p:nvPr/>
         </p:nvSpPr>
@@ -8758,7 +11552,7 @@
       </p:sp>
       <p:sp>
         <p:nvSpPr>
-          <p:cNvPr id="10" name="TextBox 9"/>
+          <p:cNvPr id="9" name="TextBox 8"/>
           <p:cNvSpPr txBox="1"/>
           <p:nvPr/>
         </p:nvSpPr>
@@ -8787,6 +11581,41 @@
                 <a:latin typeface="JetBrains Mono"/>
               </a:rPr>
               <a:t>Benedikt Zoller Coaching  ·  FKB Campus  ·  M16</a:t>
+            </a:r>
+          </a:p>
+        </p:txBody>
+      </p:sp>
+      <p:sp>
+        <p:nvSpPr>
+          <p:cNvPr id="10" name="TextBox 9"/>
+          <p:cNvSpPr txBox="1"/>
+          <p:nvPr/>
+        </p:nvSpPr>
+        <p:spPr>
+          <a:xfrm>
+            <a:off x="7176211" y="6583680"/>
+            <a:ext cx="4326940" cy="256032"/>
+          </a:xfrm>
+          <a:prstGeom prst="rect">
+            <a:avLst/>
+          </a:prstGeom>
+          <a:noFill/>
+        </p:spPr>
+        <p:txBody>
+          <a:bodyPr wrap="none">
+            <a:spAutoFit/>
+          </a:bodyPr>
+          <a:lstStyle/>
+          <a:p>
+            <a:pPr algn="r"/>
+            <a:r>
+              <a:rPr sz="700">
+                <a:solidFill>
+                  <a:srgbClr val="A0B4D2"/>
+                </a:solidFill>
+                <a:latin typeface="JetBrains Mono"/>
+              </a:rPr>
+              <a:t>Schaubild</a:t>
             </a:r>
           </a:p>
         </p:txBody>
@@ -9046,7 +11875,7 @@
                 </a:solidFill>
                 <a:latin typeface="Source Serif 4"/>
               </a:rPr>
-              <a:t>Leseübung: NMZ-Ranking interpretieren</a:t>
+              <a:t>Wo finde ich meine NMZ-Daten?</a:t>
             </a:r>
           </a:p>
         </p:txBody>
@@ -9082,89 +11911,13 @@
               </a:spcAft>
             </a:pPr>
             <a:r>
-              <a:rPr sz="1200">
+              <a:rPr sz="1300">
                 <a:solidFill>
                   <a:srgbClr val="3D5466"/>
                 </a:solidFill>
                 <a:latin typeface="Arial"/>
               </a:rPr>
-              <a:t>Stellen Sie sich vor, Ihr Bestand zeigt folgendes NMZ-Ranking (Auszug):</a:t>
-            </a:r>
-          </a:p>
-          <a:p>
-            <a:pPr>
-              <a:spcBef>
-                <a:spcPts val="400"/>
-              </a:spcBef>
-              <a:spcAft>
-                <a:spcPts val="200"/>
-              </a:spcAft>
-            </a:pPr>
-            <a:r>
-              <a:rPr sz="1200">
-                <a:solidFill>
-                  <a:srgbClr val="3D5466"/>
-                </a:solidFill>
-                <a:latin typeface="Arial"/>
-              </a:rPr>
-              <a:t>Sofortmaßnahmen aus diesem Ranking:</a:t>
-            </a:r>
-          </a:p>
-          <a:p>
-            <a:pPr>
-              <a:spcBef>
-                <a:spcPts val="400"/>
-              </a:spcBef>
-              <a:spcAft>
-                <a:spcPts val="200"/>
-              </a:spcAft>
-            </a:pPr>
-            <a:r>
-              <a:rPr sz="1300">
-                <a:solidFill>
-                  <a:srgbClr val="3D5466"/>
-                </a:solidFill>
-                <a:latin typeface="Arial"/>
-              </a:rPr>
-              <a:t>▸  Huber Bau GmbH (0,30 %): Rating prüfen, Besicherung optimieren, Verbund aktivieren</a:t>
-            </a:r>
-          </a:p>
-          <a:p>
-            <a:pPr>
-              <a:spcBef>
-                <a:spcPts val="400"/>
-              </a:spcBef>
-              <a:spcAft>
-                <a:spcPts val="200"/>
-              </a:spcAft>
-            </a:pPr>
-            <a:r>
-              <a:rPr sz="1300">
-                <a:solidFill>
-                  <a:srgbClr val="3D5466"/>
-                </a:solidFill>
-                <a:latin typeface="Arial"/>
-              </a:rPr>
-              <a:t>▸  Fischer Transport (−0,30 %): Konditionengespräch unverzüglich, Exit-Prüfung falls keine Verbesserung möglich</a:t>
-            </a:r>
-          </a:p>
-          <a:p>
-            <a:pPr>
-              <a:spcBef>
-                <a:spcPts val="400"/>
-              </a:spcBef>
-              <a:spcAft>
-                <a:spcPts val="200"/>
-              </a:spcAft>
-            </a:pPr>
-            <a:r>
-              <a:rPr sz="1200">
-                <a:solidFill>
-                  <a:srgbClr val="3D5466"/>
-                </a:solidFill>
-                <a:latin typeface="Arial"/>
-              </a:rPr>
-              <a:t>## 4.4 Der NMZ-Optimierungsprozess: 3 Schritte</a:t>
+              <a:t>▸  In agree (Atruvia) stehen NMZ-relevante Auswertungen über folgende Einstiegspunkte zur Verfügung:</a:t>
             </a:r>
           </a:p>
         </p:txBody>
@@ -9502,7 +12255,7 @@
                 </a:solidFill>
                 <a:latin typeface="Source Serif 4"/>
               </a:rPr>
-              <a:t>Schritt 1: Identifizieren (monatlich, 30 Minuten)</a:t>
+              <a:t>Leseübung: NMZ-Ranking interpretieren</a:t>
             </a:r>
           </a:p>
         </p:txBody>
@@ -9538,13 +12291,89 @@
               </a:spcAft>
             </a:pPr>
             <a:r>
-              <a:rPr sz="1200">
+              <a:rPr sz="1300">
                 <a:solidFill>
                   <a:srgbClr val="3D5466"/>
                 </a:solidFill>
                 <a:latin typeface="Arial"/>
               </a:rPr>
-              <a:t>Einmal im Monat: agree-NMZ-Ranking aufrufen. Die fünf Kunden mit der niedrigsten NMZ markieren. Für jeden prüfen: Was ist die Hauptursache? (Marge? Kein Verbund? Rating? Betreuungskosten?)</a:t>
+              <a:t>▸  Stellen Sie sich vor, Ihr Bestand zeigt folgendes NMZ-Ranking (Auszug):</a:t>
+            </a:r>
+          </a:p>
+          <a:p>
+            <a:pPr>
+              <a:spcBef>
+                <a:spcPts val="400"/>
+              </a:spcBef>
+              <a:spcAft>
+                <a:spcPts val="200"/>
+              </a:spcAft>
+            </a:pPr>
+            <a:r>
+              <a:rPr sz="1300">
+                <a:solidFill>
+                  <a:srgbClr val="3D5466"/>
+                </a:solidFill>
+                <a:latin typeface="Arial"/>
+              </a:rPr>
+              <a:t>▸  Sofortmaßnahmen aus diesem Ranking:</a:t>
+            </a:r>
+          </a:p>
+          <a:p>
+            <a:pPr>
+              <a:spcBef>
+                <a:spcPts val="400"/>
+              </a:spcBef>
+              <a:spcAft>
+                <a:spcPts val="200"/>
+              </a:spcAft>
+            </a:pPr>
+            <a:r>
+              <a:rPr sz="1300">
+                <a:solidFill>
+                  <a:srgbClr val="3D5466"/>
+                </a:solidFill>
+                <a:latin typeface="Arial"/>
+              </a:rPr>
+              <a:t>▸  Huber Bau GmbH (0,30 %): Rating prüfen, Besicherung optimieren, Verbund aktivieren</a:t>
+            </a:r>
+          </a:p>
+          <a:p>
+            <a:pPr>
+              <a:spcBef>
+                <a:spcPts val="400"/>
+              </a:spcBef>
+              <a:spcAft>
+                <a:spcPts val="200"/>
+              </a:spcAft>
+            </a:pPr>
+            <a:r>
+              <a:rPr sz="1300">
+                <a:solidFill>
+                  <a:srgbClr val="3D5466"/>
+                </a:solidFill>
+                <a:latin typeface="Arial"/>
+              </a:rPr>
+              <a:t>▸  Fischer Transport (−0,30 %): Konditionengespräch unverzüglich, Exit-Prüfung falls keine Verbesserung möglich</a:t>
+            </a:r>
+          </a:p>
+          <a:p>
+            <a:pPr>
+              <a:spcBef>
+                <a:spcPts val="400"/>
+              </a:spcBef>
+              <a:spcAft>
+                <a:spcPts val="200"/>
+              </a:spcAft>
+            </a:pPr>
+            <a:r>
+              <a:rPr sz="1300">
+                <a:solidFill>
+                  <a:srgbClr val="3D5466"/>
+                </a:solidFill>
+                <a:latin typeface="Arial"/>
+              </a:rPr>
+              <a:t>▸  ## 4.4 Der NMZ-Optimierungsprozess: 3 Schritte</a:t>
             </a:r>
           </a:p>
         </p:txBody>

--- a/protected-downloads/praesentation/M16.pptx
+++ b/protected-downloads/praesentation/M16.pptx
@@ -4671,7 +4671,7 @@
                 </a:solidFill>
                 <a:latin typeface="JetBrains Mono"/>
               </a:rPr>
-              <a:t>Benedikt Zoller Coaching  ·  FKB Campus  ·  2026</a:t>
+              <a:t>FKB Campus  ·  2026</a:t>
             </a:r>
           </a:p>
         </p:txBody>
@@ -5086,7 +5086,7 @@
                 </a:solidFill>
                 <a:latin typeface="JetBrains Mono"/>
               </a:rPr>
-              <a:t>Benedikt Zoller Coaching  ·  FKB Campus  ·  M16</a:t>
+              <a:t>FKB Campus  ·  M16</a:t>
             </a:r>
           </a:p>
         </p:txBody>
@@ -5523,7 +5523,7 @@
                 </a:solidFill>
                 <a:latin typeface="JetBrains Mono"/>
               </a:rPr>
-              <a:t>Benedikt Zoller Coaching  ·  FKB Campus  ·  M16</a:t>
+              <a:t>FKB Campus  ·  M16</a:t>
             </a:r>
           </a:p>
         </p:txBody>
@@ -6015,7 +6015,7 @@
                 </a:solidFill>
                 <a:latin typeface="JetBrains Mono"/>
               </a:rPr>
-              <a:t>Benedikt Zoller Coaching  ·  FKB Campus  ·  M16</a:t>
+              <a:t>FKB Campus  ·  M16</a:t>
             </a:r>
           </a:p>
         </p:txBody>
@@ -6639,7 +6639,7 @@
                 </a:solidFill>
                 <a:latin typeface="JetBrains Mono"/>
               </a:rPr>
-              <a:t>Benedikt Zoller Coaching  ·  FKB Campus  ·  M16</a:t>
+              <a:t>FKB Campus  ·  M16</a:t>
             </a:r>
           </a:p>
         </p:txBody>
@@ -7422,7 +7422,7 @@
                 </a:solidFill>
                 <a:latin typeface="JetBrains Mono"/>
               </a:rPr>
-              <a:t>Benedikt Zoller Coaching  ·  FKB Campus  ·  M16</a:t>
+              <a:t>FKB Campus  ·  M16</a:t>
             </a:r>
           </a:p>
         </p:txBody>
@@ -7856,7 +7856,7 @@
                 </a:solidFill>
                 <a:latin typeface="JetBrains Mono"/>
               </a:rPr>
-              <a:t>Benedikt Zoller Coaching  ·  FKB Campus  ·  M16</a:t>
+              <a:t>FKB Campus  ·  M16</a:t>
             </a:r>
           </a:p>
         </p:txBody>
@@ -8552,7 +8552,7 @@
                 </a:solidFill>
                 <a:latin typeface="JetBrains Mono"/>
               </a:rPr>
-              <a:t>Benedikt Zoller Coaching  ·  FKB Campus  ·  M16</a:t>
+              <a:t>FKB Campus  ·  M16</a:t>
             </a:r>
           </a:p>
         </p:txBody>
@@ -8967,7 +8967,7 @@
                 </a:solidFill>
                 <a:latin typeface="JetBrains Mono"/>
               </a:rPr>
-              <a:t>Benedikt Zoller Coaching  ·  FKB Campus  ·  M16</a:t>
+              <a:t>FKB Campus  ·  M16</a:t>
             </a:r>
           </a:p>
         </p:txBody>
@@ -9333,7 +9333,7 @@
                 </a:solidFill>
                 <a:latin typeface="JetBrains Mono"/>
               </a:rPr>
-              <a:t>Benedikt Zoller Coaching  ·  FKB Campus  ·  M16</a:t>
+              <a:t>FKB Campus  ·  M16</a:t>
             </a:r>
           </a:p>
         </p:txBody>
@@ -9746,7 +9746,7 @@
                 </a:solidFill>
                 <a:latin typeface="JetBrains Mono"/>
               </a:rPr>
-              <a:t>Benedikt Zoller Coaching  ·  FKB Campus  ·  M16</a:t>
+              <a:t>FKB Campus  ·  M16</a:t>
             </a:r>
           </a:p>
         </p:txBody>
@@ -10425,7 +10425,7 @@
                 </a:solidFill>
                 <a:latin typeface="JetBrains Mono"/>
               </a:rPr>
-              <a:t>Benedikt Zoller Coaching  ·  FKB Campus  ·  M16</a:t>
+              <a:t>FKB Campus  ·  M16</a:t>
             </a:r>
           </a:p>
         </p:txBody>
@@ -10824,7 +10824,7 @@
                 </a:solidFill>
                 <a:latin typeface="JetBrains Mono"/>
               </a:rPr>
-              <a:t>Benedikt Zoller Coaching  ·  FKB Campus  ·  M16</a:t>
+              <a:t>FKB Campus  ·  M16</a:t>
             </a:r>
           </a:p>
         </p:txBody>
@@ -11261,7 +11261,7 @@
                 </a:solidFill>
                 <a:latin typeface="JetBrains Mono"/>
               </a:rPr>
-              <a:t>Benedikt Zoller Coaching  ·  FKB Campus  ·  M16</a:t>
+              <a:t>FKB Campus  ·  M16</a:t>
             </a:r>
           </a:p>
         </p:txBody>
@@ -11580,7 +11580,7 @@
                 </a:solidFill>
                 <a:latin typeface="JetBrains Mono"/>
               </a:rPr>
-              <a:t>Benedikt Zoller Coaching  ·  FKB Campus  ·  M16</a:t>
+              <a:t>FKB Campus  ·  M16</a:t>
             </a:r>
           </a:p>
         </p:txBody>
@@ -11995,7 +11995,7 @@
                 </a:solidFill>
                 <a:latin typeface="JetBrains Mono"/>
               </a:rPr>
-              <a:t>Benedikt Zoller Coaching  ·  FKB Campus  ·  M16</a:t>
+              <a:t>FKB Campus  ·  M16</a:t>
             </a:r>
           </a:p>
         </p:txBody>
@@ -12451,7 +12451,7 @@
                 </a:solidFill>
                 <a:latin typeface="JetBrains Mono"/>
               </a:rPr>
-              <a:t>Benedikt Zoller Coaching  ·  FKB Campus  ·  M16</a:t>
+              <a:t>FKB Campus  ·  M16</a:t>
             </a:r>
           </a:p>
         </p:txBody>

--- a/protected-downloads/praesentation/M16.pptx
+++ b/protected-downloads/praesentation/M16.pptx
@@ -10190,7 +10190,7 @@
                 </a:solidFill>
                 <a:latin typeface="Consolas"/>
               </a:rPr>
-              <a:t>01:00       </a:t>
+              <a:t>01:03       </a:t>
             </a:r>
             <a:r>
               <a:rPr sz="1200" b="1">
@@ -10227,7 +10227,7 @@
                 </a:solidFill>
                 <a:latin typeface="Consolas"/>
               </a:rPr>
-              <a:t>01:05       </a:t>
+              <a:t>01:06       </a:t>
             </a:r>
             <a:r>
               <a:rPr sz="1200" b="1">
@@ -10264,7 +10264,7 @@
                 </a:solidFill>
                 <a:latin typeface="Consolas"/>
               </a:rPr>
-              <a:t>01:20       </a:t>
+              <a:t>01:23       </a:t>
             </a:r>
             <a:r>
               <a:rPr sz="1200" b="1">
@@ -10301,7 +10301,7 @@
                 </a:solidFill>
                 <a:latin typeface="Consolas"/>
               </a:rPr>
-              <a:t>01:30       </a:t>
+              <a:t>01:35       </a:t>
             </a:r>
             <a:r>
               <a:rPr sz="1200" b="1">
@@ -10338,7 +10338,7 @@
                 </a:solidFill>
                 <a:latin typeface="Consolas"/>
               </a:rPr>
-              <a:t>01:35       </a:t>
+              <a:t>01:40       </a:t>
             </a:r>
             <a:r>
               <a:rPr sz="1200" b="1">

--- a/protected-downloads/praesentation/M16.pptx
+++ b/protected-downloads/praesentation/M16.pptx
@@ -4593,7 +4593,7 @@
                 </a:solidFill>
                 <a:latin typeface="Arial"/>
               </a:rPr>
-              <a:t>v0.4</a:t>
+              <a:t>v1.0</a:t>
             </a:r>
           </a:p>
         </p:txBody>

--- a/protected-downloads/praesentation/M16.pptx
+++ b/protected-downloads/praesentation/M16.pptx
@@ -7717,7 +7717,7 @@
                 </a:solidFill>
                 <a:latin typeface="Source Serif 4"/>
               </a:rPr>
-              <a:t>Arbeitsblatt A: Mein NMZ-Bestandsbild</a:t>
+              <a:t>AB-1: Mein NMZ-Bestandsbild</a:t>
             </a:r>
           </a:p>
         </p:txBody>
@@ -8030,7 +8030,7 @@
                 </a:solidFill>
                 <a:latin typeface="Source Serif 4"/>
               </a:rPr>
-              <a:t>Arbeitsblatt A: Mein NMZ-Bestandsbild</a:t>
+              <a:t>AB-1: Mein NMZ-Bestandsbild</a:t>
             </a:r>
           </a:p>
         </p:txBody>
@@ -8847,7 +8847,7 @@
                 </a:solidFill>
                 <a:latin typeface="Source Serif 4"/>
               </a:rPr>
-              <a:t>Arbeitsblatt B: Maßnahmenplan</a:t>
+              <a:t>AB-2: Maßnahmenplan</a:t>
             </a:r>
           </a:p>
         </p:txBody>

--- a/protected-downloads/praesentation/M16.pptx
+++ b/protected-downloads/praesentation/M16.pptx
@@ -4268,7 +4268,7 @@
                 <a:solidFill>
                   <a:srgbClr val="C8D2E6"/>
                 </a:solidFill>
-                <a:latin typeface="JetBrains Mono"/>
+                <a:latin typeface="Consolas"/>
               </a:rPr>
               <a:t>FKB CAMPUS  ·  FIRMENKUNDENAKADEMIE  ·  M16</a:t>
             </a:r>
@@ -4303,7 +4303,7 @@
                 <a:solidFill>
                   <a:srgbClr val="FFFFFF"/>
                 </a:solidFill>
-                <a:latin typeface="Source Serif 4"/>
+                <a:latin typeface="Arial"/>
               </a:rPr>
               <a:t>NMZ-Optimierung</a:t>
             </a:r>
@@ -4338,7 +4338,7 @@
                 <a:solidFill>
                   <a:srgbClr val="BECDE6"/>
                 </a:solidFill>
-                <a:latin typeface="Source Serif 4"/>
+                <a:latin typeface="Arial"/>
               </a:rPr>
               <a:t>Nettomargenziffer im Firmenkundenbestand messen, verstehen und systematisch verbessern</a:t>
             </a:r>
@@ -4416,7 +4416,7 @@
                 <a:solidFill>
                   <a:srgbClr val="A0B4D2"/>
                 </a:solidFill>
-                <a:latin typeface="JetBrains Mono"/>
+                <a:latin typeface="Consolas"/>
               </a:rPr>
               <a:t>KOMPETENZFELD</a:t>
             </a:r>
@@ -4486,7 +4486,7 @@
                 <a:solidFill>
                   <a:srgbClr val="A0B4D2"/>
                 </a:solidFill>
-                <a:latin typeface="JetBrains Mono"/>
+                <a:latin typeface="Consolas"/>
               </a:rPr>
               <a:t>KOMPETENZSTUFE</a:t>
             </a:r>
@@ -4556,7 +4556,7 @@
                 <a:solidFill>
                   <a:srgbClr val="A0B4D2"/>
                 </a:solidFill>
-                <a:latin typeface="JetBrains Mono"/>
+                <a:latin typeface="Consolas"/>
               </a:rPr>
               <a:t>VERSION</a:t>
             </a:r>
@@ -4669,7 +4669,7 @@
                 <a:solidFill>
                   <a:srgbClr val="96A5BE"/>
                 </a:solidFill>
-                <a:latin typeface="JetBrains Mono"/>
+                <a:latin typeface="Consolas"/>
               </a:rPr>
               <a:t>FKB Campus  ·  2026</a:t>
             </a:r>
@@ -4704,7 +4704,7 @@
                 <a:solidFill>
                   <a:srgbClr val="96A5BE"/>
                 </a:solidFill>
-                <a:latin typeface="JetBrains Mono"/>
+                <a:latin typeface="Consolas"/>
               </a:rPr>
               <a:t>Trainer-Präsentation</a:t>
             </a:r>
@@ -4843,7 +4843,7 @@
                 <a:solidFill>
                   <a:srgbClr val="78808C"/>
                 </a:solidFill>
-                <a:latin typeface="JetBrains Mono"/>
+                <a:latin typeface="Consolas"/>
               </a:rPr>
               <a:t>M16  ·  INHALT</a:t>
             </a:r>
@@ -4964,7 +4964,7 @@
                 <a:solidFill>
                   <a:srgbClr val="1F2C56"/>
                 </a:solidFill>
-                <a:latin typeface="Source Serif 4"/>
+                <a:latin typeface="Arial"/>
               </a:rPr>
               <a:t>Schritt 1: Identifizieren (monatlich, 30 Minuten)</a:t>
             </a:r>
@@ -4980,7 +4980,7 @@
         <p:spPr>
           <a:xfrm>
             <a:off x="685800" y="1417320"/>
-            <a:ext cx="10817352" cy="5029200"/>
+            <a:ext cx="10817352" cy="4892040"/>
           </a:xfrm>
           <a:prstGeom prst="rect">
             <a:avLst/>
@@ -4988,12 +4988,12 @@
           <a:noFill/>
         </p:spPr>
         <p:txBody>
-          <a:bodyPr wrap="square">
+          <a:bodyPr wrap="square" anchor="ctr">
             <a:spAutoFit/>
           </a:bodyPr>
           <a:lstStyle/>
           <a:p>
-            <a:pPr>
+            <a:pPr marL="190500" indent="-190500">
               <a:spcBef>
                 <a:spcPts val="400"/>
               </a:spcBef>
@@ -5084,7 +5084,7 @@
                 <a:solidFill>
                   <a:srgbClr val="A0B4D2"/>
                 </a:solidFill>
-                <a:latin typeface="JetBrains Mono"/>
+                <a:latin typeface="Consolas"/>
               </a:rPr>
               <a:t>FKB Campus  ·  M16</a:t>
             </a:r>
@@ -5223,7 +5223,7 @@
                 <a:solidFill>
                   <a:srgbClr val="78808C"/>
                 </a:solidFill>
-                <a:latin typeface="JetBrains Mono"/>
+                <a:latin typeface="Consolas"/>
               </a:rPr>
               <a:t>M16  ·  INHALT</a:t>
             </a:r>
@@ -5344,7 +5344,7 @@
                 <a:solidFill>
                   <a:srgbClr val="1F2C56"/>
                 </a:solidFill>
-                <a:latin typeface="Source Serif 4"/>
+                <a:latin typeface="Arial"/>
               </a:rPr>
               <a:t>Schritt 2: Priorisieren</a:t>
             </a:r>
@@ -5360,7 +5360,7 @@
         <p:spPr>
           <a:xfrm>
             <a:off x="685800" y="1417320"/>
-            <a:ext cx="10817352" cy="5029200"/>
+            <a:ext cx="10817352" cy="4892040"/>
           </a:xfrm>
           <a:prstGeom prst="rect">
             <a:avLst/>
@@ -5368,12 +5368,12 @@
           <a:noFill/>
         </p:spPr>
         <p:txBody>
-          <a:bodyPr wrap="square">
+          <a:bodyPr wrap="square" anchor="ctr">
             <a:spAutoFit/>
           </a:bodyPr>
           <a:lstStyle/>
           <a:p>
-            <a:pPr>
+            <a:pPr marL="190500" indent="-190500">
               <a:spcBef>
                 <a:spcPts val="400"/>
               </a:spcBef>
@@ -5392,7 +5392,7 @@
             </a:r>
           </a:p>
           <a:p>
-            <a:pPr>
+            <a:pPr marL="190500" indent="-190500">
               <a:spcBef>
                 <a:spcPts val="400"/>
               </a:spcBef>
@@ -5411,7 +5411,7 @@
             </a:r>
           </a:p>
           <a:p>
-            <a:pPr>
+            <a:pPr marL="190500" indent="-190500">
               <a:spcBef>
                 <a:spcPts val="400"/>
               </a:spcBef>
@@ -5430,7 +5430,7 @@
             </a:r>
           </a:p>
           <a:p>
-            <a:pPr>
+            <a:pPr marL="190500" indent="-190500">
               <a:spcBef>
                 <a:spcPts val="400"/>
               </a:spcBef>
@@ -5521,7 +5521,7 @@
                 <a:solidFill>
                   <a:srgbClr val="A0B4D2"/>
                 </a:solidFill>
-                <a:latin typeface="JetBrains Mono"/>
+                <a:latin typeface="Consolas"/>
               </a:rPr>
               <a:t>FKB Campus  ·  M16</a:t>
             </a:r>
@@ -5660,7 +5660,7 @@
                 <a:solidFill>
                   <a:srgbClr val="78808C"/>
                 </a:solidFill>
-                <a:latin typeface="JetBrains Mono"/>
+                <a:latin typeface="Consolas"/>
               </a:rPr>
               <a:t>M16  ·  ÜBERSICHT</a:t>
             </a:r>
@@ -5695,7 +5695,7 @@
                 <a:solidFill>
                   <a:srgbClr val="1F2C56"/>
                 </a:solidFill>
-                <a:latin typeface="Source Serif 4"/>
+                <a:latin typeface="Arial"/>
               </a:rPr>
               <a:t>Schritt 2: Priorisieren</a:t>
             </a:r>
@@ -6013,7 +6013,7 @@
                 <a:solidFill>
                   <a:srgbClr val="A0B4D2"/>
                 </a:solidFill>
-                <a:latin typeface="JetBrains Mono"/>
+                <a:latin typeface="Consolas"/>
               </a:rPr>
               <a:t>FKB Campus  ·  M16</a:t>
             </a:r>
@@ -6048,7 +6048,7 @@
                 <a:solidFill>
                   <a:srgbClr val="A0B4D2"/>
                 </a:solidFill>
-                <a:latin typeface="JetBrains Mono"/>
+                <a:latin typeface="Consolas"/>
               </a:rPr>
               <a:t>Übersicht</a:t>
             </a:r>
@@ -6187,7 +6187,7 @@
                 <a:solidFill>
                   <a:srgbClr val="78808C"/>
                 </a:solidFill>
-                <a:latin typeface="JetBrains Mono"/>
+                <a:latin typeface="Consolas"/>
               </a:rPr>
               <a:t>M16  ·  INHALT</a:t>
             </a:r>
@@ -6308,7 +6308,7 @@
                 <a:solidFill>
                   <a:srgbClr val="1F2C56"/>
                 </a:solidFill>
-                <a:latin typeface="Source Serif 4"/>
+                <a:latin typeface="Arial"/>
               </a:rPr>
               <a:t>Schritt 3: Handeln und dokumentieren</a:t>
             </a:r>
@@ -6324,7 +6324,7 @@
         <p:spPr>
           <a:xfrm>
             <a:off x="685800" y="1417320"/>
-            <a:ext cx="10817352" cy="5029200"/>
+            <a:ext cx="10817352" cy="4892040"/>
           </a:xfrm>
           <a:prstGeom prst="rect">
             <a:avLst/>
@@ -6337,7 +6337,7 @@
           </a:bodyPr>
           <a:lstStyle/>
           <a:p>
-            <a:pPr>
+            <a:pPr marL="190500" indent="-190500">
               <a:spcBef>
                 <a:spcPts val="400"/>
               </a:spcBef>
@@ -6356,7 +6356,7 @@
             </a:r>
           </a:p>
           <a:p>
-            <a:pPr>
+            <a:pPr marL="190500" indent="-190500">
               <a:spcBef>
                 <a:spcPts val="400"/>
               </a:spcBef>
@@ -6375,7 +6375,7 @@
             </a:r>
           </a:p>
           <a:p>
-            <a:pPr>
+            <a:pPr marL="190500" indent="-190500">
               <a:spcBef>
                 <a:spcPts val="400"/>
               </a:spcBef>
@@ -6394,7 +6394,7 @@
             </a:r>
           </a:p>
           <a:p>
-            <a:pPr>
+            <a:pPr marL="190500" indent="-190500">
               <a:spcBef>
                 <a:spcPts val="400"/>
               </a:spcBef>
@@ -6413,7 +6413,7 @@
             </a:r>
           </a:p>
           <a:p>
-            <a:pPr>
+            <a:pPr marL="190500" indent="-190500">
               <a:spcBef>
                 <a:spcPts val="400"/>
               </a:spcBef>
@@ -6432,7 +6432,7 @@
             </a:r>
           </a:p>
           <a:p>
-            <a:pPr>
+            <a:pPr marL="177800" indent="-177800">
               <a:spcBef>
                 <a:spcPts val="600"/>
               </a:spcBef>
@@ -6451,7 +6451,7 @@
             </a:r>
           </a:p>
           <a:p>
-            <a:pPr>
+            <a:pPr marL="177800" indent="-177800">
               <a:spcBef>
                 <a:spcPts val="600"/>
               </a:spcBef>
@@ -6470,7 +6470,7 @@
             </a:r>
           </a:p>
           <a:p>
-            <a:pPr>
+            <a:pPr marL="190500" indent="-190500">
               <a:spcBef>
                 <a:spcPts val="400"/>
               </a:spcBef>
@@ -6489,7 +6489,7 @@
             </a:r>
           </a:p>
           <a:p>
-            <a:pPr>
+            <a:pPr marL="190500" indent="-190500">
               <a:spcBef>
                 <a:spcPts val="400"/>
               </a:spcBef>
@@ -6508,7 +6508,7 @@
             </a:r>
           </a:p>
           <a:p>
-            <a:pPr>
+            <a:pPr marL="190500" indent="-190500">
               <a:spcBef>
                 <a:spcPts val="400"/>
               </a:spcBef>
@@ -6527,7 +6527,7 @@
             </a:r>
           </a:p>
           <a:p>
-            <a:pPr>
+            <a:pPr marL="190500" indent="-190500">
               <a:spcBef>
                 <a:spcPts val="400"/>
               </a:spcBef>
@@ -6546,7 +6546,7 @@
             </a:r>
           </a:p>
           <a:p>
-            <a:pPr>
+            <a:pPr marL="190500" indent="-190500">
               <a:spcBef>
                 <a:spcPts val="400"/>
               </a:spcBef>
@@ -6637,7 +6637,7 @@
                 <a:solidFill>
                   <a:srgbClr val="A0B4D2"/>
                 </a:solidFill>
-                <a:latin typeface="JetBrains Mono"/>
+                <a:latin typeface="Consolas"/>
               </a:rPr>
               <a:t>FKB Campus  ·  M16</a:t>
             </a:r>
@@ -6776,7 +6776,7 @@
                 <a:solidFill>
                   <a:srgbClr val="78808C"/>
                 </a:solidFill>
-                <a:latin typeface="JetBrains Mono"/>
+                <a:latin typeface="Consolas"/>
               </a:rPr>
               <a:t>M16  ·  ÜBERSICHT</a:t>
             </a:r>
@@ -6811,7 +6811,7 @@
                 <a:solidFill>
                   <a:srgbClr val="1F2C56"/>
                 </a:solidFill>
-                <a:latin typeface="Source Serif 4"/>
+                <a:latin typeface="Arial"/>
               </a:rPr>
               <a:t>Schritt 3: Handeln und dokumentieren</a:t>
             </a:r>
@@ -7420,7 +7420,7 @@
                 <a:solidFill>
                   <a:srgbClr val="A0B4D2"/>
                 </a:solidFill>
-                <a:latin typeface="JetBrains Mono"/>
+                <a:latin typeface="Consolas"/>
               </a:rPr>
               <a:t>FKB Campus  ·  M16</a:t>
             </a:r>
@@ -7455,7 +7455,7 @@
                 <a:solidFill>
                   <a:srgbClr val="A0B4D2"/>
                 </a:solidFill>
-                <a:latin typeface="JetBrains Mono"/>
+                <a:latin typeface="Consolas"/>
               </a:rPr>
               <a:t>Übersicht</a:t>
             </a:r>
@@ -7594,7 +7594,7 @@
                 <a:solidFill>
                   <a:srgbClr val="78808C"/>
                 </a:solidFill>
-                <a:latin typeface="JetBrains Mono"/>
+                <a:latin typeface="Consolas"/>
               </a:rPr>
               <a:t>M16  ·  INHALT</a:t>
             </a:r>
@@ -7715,7 +7715,7 @@
                 <a:solidFill>
                   <a:srgbClr val="1F2C56"/>
                 </a:solidFill>
-                <a:latin typeface="Source Serif 4"/>
+                <a:latin typeface="Arial"/>
               </a:rPr>
               <a:t>AB-1: Mein NMZ-Bestandsbild</a:t>
             </a:r>
@@ -7731,7 +7731,7 @@
         <p:spPr>
           <a:xfrm>
             <a:off x="685800" y="1417320"/>
-            <a:ext cx="10817352" cy="5029200"/>
+            <a:ext cx="10817352" cy="4892040"/>
           </a:xfrm>
           <a:prstGeom prst="rect">
             <a:avLst/>
@@ -7739,12 +7739,12 @@
           <a:noFill/>
         </p:spPr>
         <p:txBody>
-          <a:bodyPr wrap="square">
+          <a:bodyPr wrap="square" anchor="ctr">
             <a:spAutoFit/>
           </a:bodyPr>
           <a:lstStyle/>
           <a:p>
-            <a:pPr>
+            <a:pPr marL="190500" indent="-190500">
               <a:spcBef>
                 <a:spcPts val="400"/>
               </a:spcBef>
@@ -7763,7 +7763,7 @@
             </a:r>
           </a:p>
           <a:p>
-            <a:pPr>
+            <a:pPr marL="190500" indent="-190500">
               <a:spcBef>
                 <a:spcPts val="400"/>
               </a:spcBef>
@@ -7854,7 +7854,7 @@
                 <a:solidFill>
                   <a:srgbClr val="A0B4D2"/>
                 </a:solidFill>
-                <a:latin typeface="JetBrains Mono"/>
+                <a:latin typeface="Consolas"/>
               </a:rPr>
               <a:t>FKB Campus  ·  M16</a:t>
             </a:r>
@@ -7993,7 +7993,7 @@
                 <a:solidFill>
                   <a:srgbClr val="78808C"/>
                 </a:solidFill>
-                <a:latin typeface="JetBrains Mono"/>
+                <a:latin typeface="Consolas"/>
               </a:rPr>
               <a:t>M16  ·  ÜBERSICHT</a:t>
             </a:r>
@@ -8028,7 +8028,7 @@
                 <a:solidFill>
                   <a:srgbClr val="1F2C56"/>
                 </a:solidFill>
-                <a:latin typeface="Source Serif 4"/>
+                <a:latin typeface="Arial"/>
               </a:rPr>
               <a:t>AB-1: Mein NMZ-Bestandsbild</a:t>
             </a:r>
@@ -8550,7 +8550,7 @@
                 <a:solidFill>
                   <a:srgbClr val="A0B4D2"/>
                 </a:solidFill>
-                <a:latin typeface="JetBrains Mono"/>
+                <a:latin typeface="Consolas"/>
               </a:rPr>
               <a:t>FKB Campus  ·  M16</a:t>
             </a:r>
@@ -8585,7 +8585,7 @@
                 <a:solidFill>
                   <a:srgbClr val="A0B4D2"/>
                 </a:solidFill>
-                <a:latin typeface="JetBrains Mono"/>
+                <a:latin typeface="Consolas"/>
               </a:rPr>
               <a:t>Übersicht</a:t>
             </a:r>
@@ -8724,7 +8724,7 @@
                 <a:solidFill>
                   <a:srgbClr val="78808C"/>
                 </a:solidFill>
-                <a:latin typeface="JetBrains Mono"/>
+                <a:latin typeface="Consolas"/>
               </a:rPr>
               <a:t>M16  ·  INHALT</a:t>
             </a:r>
@@ -8845,7 +8845,7 @@
                 <a:solidFill>
                   <a:srgbClr val="1F2C56"/>
                 </a:solidFill>
-                <a:latin typeface="Source Serif 4"/>
+                <a:latin typeface="Arial"/>
               </a:rPr>
               <a:t>AB-2: Maßnahmenplan</a:t>
             </a:r>
@@ -8861,7 +8861,7 @@
         <p:spPr>
           <a:xfrm>
             <a:off x="685800" y="1417320"/>
-            <a:ext cx="10817352" cy="5029200"/>
+            <a:ext cx="10817352" cy="4892040"/>
           </a:xfrm>
           <a:prstGeom prst="rect">
             <a:avLst/>
@@ -8869,12 +8869,12 @@
           <a:noFill/>
         </p:spPr>
         <p:txBody>
-          <a:bodyPr wrap="square">
+          <a:bodyPr wrap="square" anchor="ctr">
             <a:spAutoFit/>
           </a:bodyPr>
           <a:lstStyle/>
           <a:p>
-            <a:pPr>
+            <a:pPr marL="190500" indent="-190500">
               <a:spcBef>
                 <a:spcPts val="400"/>
               </a:spcBef>
@@ -8965,7 +8965,7 @@
                 <a:solidFill>
                   <a:srgbClr val="A0B4D2"/>
                 </a:solidFill>
-                <a:latin typeface="JetBrains Mono"/>
+                <a:latin typeface="Consolas"/>
               </a:rPr>
               <a:t>FKB Campus  ·  M16</a:t>
             </a:r>
@@ -9104,7 +9104,7 @@
                 <a:solidFill>
                   <a:srgbClr val="78808C"/>
                 </a:solidFill>
-                <a:latin typeface="JetBrains Mono"/>
+                <a:latin typeface="Consolas"/>
               </a:rPr>
               <a:t>ÜBERBLICK  ·  M16</a:t>
             </a:r>
@@ -9182,7 +9182,7 @@
                 <a:solidFill>
                   <a:srgbClr val="1F2C56"/>
                 </a:solidFill>
-                <a:latin typeface="Source Serif 4"/>
+                <a:latin typeface="Arial"/>
               </a:rPr>
               <a:t>Worum geht es heute</a:t>
             </a:r>
@@ -9331,7 +9331,7 @@
                 <a:solidFill>
                   <a:srgbClr val="A0B4D2"/>
                 </a:solidFill>
-                <a:latin typeface="JetBrains Mono"/>
+                <a:latin typeface="Consolas"/>
               </a:rPr>
               <a:t>FKB Campus  ·  M16</a:t>
             </a:r>
@@ -9470,7 +9470,7 @@
                 <a:solidFill>
                   <a:srgbClr val="78808C"/>
                 </a:solidFill>
-                <a:latin typeface="JetBrains Mono"/>
+                <a:latin typeface="Consolas"/>
               </a:rPr>
               <a:t>LERNZIELE  ·  M16</a:t>
             </a:r>
@@ -9548,7 +9548,7 @@
                 <a:solidFill>
                   <a:srgbClr val="1F2C56"/>
                 </a:solidFill>
-                <a:latin typeface="Source Serif 4"/>
+                <a:latin typeface="Arial"/>
               </a:rPr>
               <a:t>Was Sie heute mitnehmen</a:t>
             </a:r>
@@ -9744,7 +9744,7 @@
                 <a:solidFill>
                   <a:srgbClr val="A0B4D2"/>
                 </a:solidFill>
-                <a:latin typeface="JetBrains Mono"/>
+                <a:latin typeface="Consolas"/>
               </a:rPr>
               <a:t>FKB Campus  ·  M16</a:t>
             </a:r>
@@ -9883,7 +9883,7 @@
                 <a:solidFill>
                   <a:srgbClr val="78808C"/>
                 </a:solidFill>
-                <a:latin typeface="JetBrains Mono"/>
+                <a:latin typeface="Consolas"/>
               </a:rPr>
               <a:t>AGENDA  ·  M16</a:t>
             </a:r>
@@ -9961,7 +9961,7 @@
                 <a:solidFill>
                   <a:srgbClr val="1F2C56"/>
                 </a:solidFill>
-                <a:latin typeface="Source Serif 4"/>
+                <a:latin typeface="Arial"/>
               </a:rPr>
               <a:t>So läuft das Modul</a:t>
             </a:r>
@@ -10423,7 +10423,7 @@
                 <a:solidFill>
                   <a:srgbClr val="A0B4D2"/>
                 </a:solidFill>
-                <a:latin typeface="JetBrains Mono"/>
+                <a:latin typeface="Consolas"/>
               </a:rPr>
               <a:t>FKB Campus  ·  M16</a:t>
             </a:r>
@@ -10562,7 +10562,7 @@
                 <a:solidFill>
                   <a:srgbClr val="78808C"/>
                 </a:solidFill>
-                <a:latin typeface="JetBrains Mono"/>
+                <a:latin typeface="Consolas"/>
               </a:rPr>
               <a:t>M16  ·  INHALT</a:t>
             </a:r>
@@ -10683,7 +10683,7 @@
                 <a:solidFill>
                   <a:srgbClr val="1F2C56"/>
                 </a:solidFill>
-                <a:latin typeface="Source Serif 4"/>
+                <a:latin typeface="Arial"/>
               </a:rPr>
               <a:t>Definition</a:t>
             </a:r>
@@ -10699,7 +10699,7 @@
         <p:spPr>
           <a:xfrm>
             <a:off x="685800" y="1417320"/>
-            <a:ext cx="10817352" cy="5029200"/>
+            <a:ext cx="10817352" cy="4892040"/>
           </a:xfrm>
           <a:prstGeom prst="rect">
             <a:avLst/>
@@ -10707,12 +10707,12 @@
           <a:noFill/>
         </p:spPr>
         <p:txBody>
-          <a:bodyPr wrap="square">
+          <a:bodyPr wrap="square" anchor="ctr">
             <a:spAutoFit/>
           </a:bodyPr>
           <a:lstStyle/>
           <a:p>
-            <a:pPr>
+            <a:pPr marL="190500" indent="-190500">
               <a:spcBef>
                 <a:spcPts val="400"/>
               </a:spcBef>
@@ -10731,7 +10731,7 @@
             </a:r>
           </a:p>
           <a:p>
-            <a:pPr>
+            <a:pPr marL="190500" indent="-190500">
               <a:spcBef>
                 <a:spcPts val="400"/>
               </a:spcBef>
@@ -10822,7 +10822,7 @@
                 <a:solidFill>
                   <a:srgbClr val="A0B4D2"/>
                 </a:solidFill>
-                <a:latin typeface="JetBrains Mono"/>
+                <a:latin typeface="Consolas"/>
               </a:rPr>
               <a:t>FKB Campus  ·  M16</a:t>
             </a:r>
@@ -10961,7 +10961,7 @@
                 <a:solidFill>
                   <a:srgbClr val="78808C"/>
                 </a:solidFill>
-                <a:latin typeface="JetBrains Mono"/>
+                <a:latin typeface="Consolas"/>
               </a:rPr>
               <a:t>M16  ·  INHALT</a:t>
             </a:r>
@@ -11082,7 +11082,7 @@
                 <a:solidFill>
                   <a:srgbClr val="1F2C56"/>
                 </a:solidFill>
-                <a:latin typeface="Source Serif 4"/>
+                <a:latin typeface="Arial"/>
               </a:rPr>
               <a:t>Warum die NMZ dem DB überlegen ist</a:t>
             </a:r>
@@ -11098,7 +11098,7 @@
         <p:spPr>
           <a:xfrm>
             <a:off x="685800" y="1417320"/>
-            <a:ext cx="10817352" cy="5029200"/>
+            <a:ext cx="10817352" cy="4892040"/>
           </a:xfrm>
           <a:prstGeom prst="rect">
             <a:avLst/>
@@ -11106,12 +11106,12 @@
           <a:noFill/>
         </p:spPr>
         <p:txBody>
-          <a:bodyPr wrap="square">
+          <a:bodyPr wrap="square" anchor="ctr">
             <a:spAutoFit/>
           </a:bodyPr>
           <a:lstStyle/>
           <a:p>
-            <a:pPr>
+            <a:pPr marL="190500" indent="-190500">
               <a:spcBef>
                 <a:spcPts val="400"/>
               </a:spcBef>
@@ -11130,7 +11130,7 @@
             </a:r>
           </a:p>
           <a:p>
-            <a:pPr>
+            <a:pPr marL="190500" indent="-190500">
               <a:spcBef>
                 <a:spcPts val="400"/>
               </a:spcBef>
@@ -11149,7 +11149,7 @@
             </a:r>
           </a:p>
           <a:p>
-            <a:pPr>
+            <a:pPr marL="190500" indent="-190500">
               <a:spcBef>
                 <a:spcPts val="400"/>
               </a:spcBef>
@@ -11168,7 +11168,7 @@
             </a:r>
           </a:p>
           <a:p>
-            <a:pPr>
+            <a:pPr marL="190500" indent="-190500">
               <a:spcBef>
                 <a:spcPts val="400"/>
               </a:spcBef>
@@ -11259,7 +11259,7 @@
                 <a:solidFill>
                   <a:srgbClr val="A0B4D2"/>
                 </a:solidFill>
-                <a:latin typeface="JetBrains Mono"/>
+                <a:latin typeface="Consolas"/>
               </a:rPr>
               <a:t>FKB Campus  ·  M16</a:t>
             </a:r>
@@ -11398,7 +11398,7 @@
                 <a:solidFill>
                   <a:srgbClr val="78808C"/>
                 </a:solidFill>
-                <a:latin typeface="JetBrains Mono"/>
+                <a:latin typeface="Consolas"/>
               </a:rPr>
               <a:t>M16  ·  SCHAUBILD</a:t>
             </a:r>
@@ -11433,7 +11433,7 @@
                 <a:solidFill>
                   <a:srgbClr val="1F2C56"/>
                 </a:solidFill>
-                <a:latin typeface="Source Serif 4"/>
+                <a:latin typeface="Arial"/>
               </a:rPr>
               <a:t>Nettomargenbeitrag NMZ</a:t>
             </a:r>
@@ -11578,7 +11578,7 @@
                 <a:solidFill>
                   <a:srgbClr val="A0B4D2"/>
                 </a:solidFill>
-                <a:latin typeface="JetBrains Mono"/>
+                <a:latin typeface="Consolas"/>
               </a:rPr>
               <a:t>FKB Campus  ·  M16</a:t>
             </a:r>
@@ -11613,7 +11613,7 @@
                 <a:solidFill>
                   <a:srgbClr val="A0B4D2"/>
                 </a:solidFill>
-                <a:latin typeface="JetBrains Mono"/>
+                <a:latin typeface="Consolas"/>
               </a:rPr>
               <a:t>Schaubild</a:t>
             </a:r>
@@ -11752,7 +11752,7 @@
                 <a:solidFill>
                   <a:srgbClr val="78808C"/>
                 </a:solidFill>
-                <a:latin typeface="JetBrains Mono"/>
+                <a:latin typeface="Consolas"/>
               </a:rPr>
               <a:t>M16  ·  INHALT</a:t>
             </a:r>
@@ -11873,7 +11873,7 @@
                 <a:solidFill>
                   <a:srgbClr val="1F2C56"/>
                 </a:solidFill>
-                <a:latin typeface="Source Serif 4"/>
+                <a:latin typeface="Arial"/>
               </a:rPr>
               <a:t>Wo finde ich meine NMZ-Daten?</a:t>
             </a:r>
@@ -11889,7 +11889,7 @@
         <p:spPr>
           <a:xfrm>
             <a:off x="685800" y="1417320"/>
-            <a:ext cx="10817352" cy="5029200"/>
+            <a:ext cx="10817352" cy="4892040"/>
           </a:xfrm>
           <a:prstGeom prst="rect">
             <a:avLst/>
@@ -11897,12 +11897,12 @@
           <a:noFill/>
         </p:spPr>
         <p:txBody>
-          <a:bodyPr wrap="square">
+          <a:bodyPr wrap="square" anchor="ctr">
             <a:spAutoFit/>
           </a:bodyPr>
           <a:lstStyle/>
           <a:p>
-            <a:pPr>
+            <a:pPr marL="190500" indent="-190500">
               <a:spcBef>
                 <a:spcPts val="400"/>
               </a:spcBef>
@@ -11993,7 +11993,7 @@
                 <a:solidFill>
                   <a:srgbClr val="A0B4D2"/>
                 </a:solidFill>
-                <a:latin typeface="JetBrains Mono"/>
+                <a:latin typeface="Consolas"/>
               </a:rPr>
               <a:t>FKB Campus  ·  M16</a:t>
             </a:r>
@@ -12132,7 +12132,7 @@
                 <a:solidFill>
                   <a:srgbClr val="78808C"/>
                 </a:solidFill>
-                <a:latin typeface="JetBrains Mono"/>
+                <a:latin typeface="Consolas"/>
               </a:rPr>
               <a:t>M16  ·  INHALT</a:t>
             </a:r>
@@ -12253,7 +12253,7 @@
                 <a:solidFill>
                   <a:srgbClr val="1F2C56"/>
                 </a:solidFill>
-                <a:latin typeface="Source Serif 4"/>
+                <a:latin typeface="Arial"/>
               </a:rPr>
               <a:t>Leseübung: NMZ-Ranking interpretieren</a:t>
             </a:r>
@@ -12269,7 +12269,7 @@
         <p:spPr>
           <a:xfrm>
             <a:off x="685800" y="1417320"/>
-            <a:ext cx="10817352" cy="5029200"/>
+            <a:ext cx="10817352" cy="4892040"/>
           </a:xfrm>
           <a:prstGeom prst="rect">
             <a:avLst/>
@@ -12277,12 +12277,12 @@
           <a:noFill/>
         </p:spPr>
         <p:txBody>
-          <a:bodyPr wrap="square">
+          <a:bodyPr wrap="square" anchor="ctr">
             <a:spAutoFit/>
           </a:bodyPr>
           <a:lstStyle/>
           <a:p>
-            <a:pPr>
+            <a:pPr marL="190500" indent="-190500">
               <a:spcBef>
                 <a:spcPts val="400"/>
               </a:spcBef>
@@ -12301,7 +12301,7 @@
             </a:r>
           </a:p>
           <a:p>
-            <a:pPr>
+            <a:pPr marL="190500" indent="-190500">
               <a:spcBef>
                 <a:spcPts val="400"/>
               </a:spcBef>
@@ -12320,7 +12320,7 @@
             </a:r>
           </a:p>
           <a:p>
-            <a:pPr>
+            <a:pPr marL="190500" indent="-190500">
               <a:spcBef>
                 <a:spcPts val="400"/>
               </a:spcBef>
@@ -12339,7 +12339,7 @@
             </a:r>
           </a:p>
           <a:p>
-            <a:pPr>
+            <a:pPr marL="190500" indent="-190500">
               <a:spcBef>
                 <a:spcPts val="400"/>
               </a:spcBef>
@@ -12358,7 +12358,7 @@
             </a:r>
           </a:p>
           <a:p>
-            <a:pPr>
+            <a:pPr marL="190500" indent="-190500">
               <a:spcBef>
                 <a:spcPts val="400"/>
               </a:spcBef>
@@ -12449,7 +12449,7 @@
                 <a:solidFill>
                   <a:srgbClr val="A0B4D2"/>
                 </a:solidFill>
-                <a:latin typeface="JetBrains Mono"/>
+                <a:latin typeface="Consolas"/>
               </a:rPr>
               <a:t>FKB Campus  ·  M16</a:t>
             </a:r>

--- a/protected-downloads/praesentation/M16.pptx
+++ b/protected-downloads/praesentation/M16.pptx
@@ -588,7 +588,77 @@
           <a:lstStyle/>
           <a:p>
             <a:r>
-              <a:t>Siehe Trainerhandbuch (Sektion 3) für Moderationshinweise, Timing und erwartete Teilnehmerreaktionen.</a:t>
+              <a:t>Überleitung zum Maßnahmenplan und Selbstcheck.</a:t>
+            </a:r>
+          </a:p>
+        </p:txBody>
+      </p:sp>
+      <p:sp>
+        <p:nvSpPr>
+          <p:cNvPr id="4" name="Slide Number Placeholder 3"/>
+          <p:cNvSpPr>
+            <a:spLocks noGrp="1"/>
+          </p:cNvSpPr>
+          <p:nvPr>
+            <p:ph type="sldNum" idx="5" sz="quarter"/>
+          </p:nvPr>
+        </p:nvSpPr>
+        <p:spPr/>
+      </p:sp>
+    </p:spTree>
+  </p:cSld>
+  <p:clrMapOvr>
+    <a:masterClrMapping/>
+  </p:clrMapOvr>
+</p:notes>
+</file>
+
+<file path=ppt/notesSlides/notesSlide11.xml><?xml version="1.0" encoding="utf-8"?>
+<p:notes xmlns:a="http://schemas.openxmlformats.org/drawingml/2006/main" xmlns:p="http://schemas.openxmlformats.org/presentationml/2006/main" xmlns:r="http://schemas.openxmlformats.org/officeDocument/2006/relationships">
+  <p:cSld>
+    <p:spTree>
+      <p:nvGrpSpPr>
+        <p:cNvPr id="1" name=""/>
+        <p:cNvGrpSpPr/>
+        <p:nvPr/>
+      </p:nvGrpSpPr>
+      <p:grpSpPr>
+        <a:xfrm>
+          <a:off x="0" y="0"/>
+          <a:ext cx="0" cy="0"/>
+          <a:chOff x="0" y="0"/>
+          <a:chExt cx="0" cy="0"/>
+        </a:xfrm>
+      </p:grpSpPr>
+      <p:sp>
+        <p:nvSpPr>
+          <p:cNvPr id="2" name="Slide Image Placeholder 1"/>
+          <p:cNvSpPr>
+            <a:spLocks noGrp="1"/>
+          </p:cNvSpPr>
+          <p:nvPr>
+            <p:ph type="sldImg" idx="2"/>
+          </p:nvPr>
+        </p:nvSpPr>
+        <p:spPr/>
+      </p:sp>
+      <p:sp>
+        <p:nvSpPr>
+          <p:cNvPr id="3" name="Notes Placeholder 2"/>
+          <p:cNvSpPr>
+            <a:spLocks noGrp="1"/>
+          </p:cNvSpPr>
+          <p:nvPr>
+            <p:ph type="body" idx="3" sz="quarter"/>
+          </p:nvPr>
+        </p:nvSpPr>
+        <p:spPr/>
+        <p:txBody>
+          <a:bodyPr/>
+          <a:lstStyle/>
+          <a:p>
+            <a:r>
+              <a:t>Selbstcheck nach 4 Wochen als Transferanker.</a:t>
             </a:r>
           </a:p>
         </p:txBody>
@@ -658,7 +728,7 @@
           <a:lstStyle/>
           <a:p>
             <a:r>
-              <a:t>Siehe Trainerhandbuch (Sektion 3) für Moderationshinweise, Timing und erwartete Teilnehmerreaktionen.</a:t>
+              <a:t>Einstieg: „Welche Kennzahl nutzen Sie heute, um Ihren Bestand zu steuern?" Meist DB – die NMZ geht weiter.</a:t>
             </a:r>
           </a:p>
         </p:txBody>
@@ -728,7 +798,7 @@
           <a:lstStyle/>
           <a:p>
             <a:r>
-              <a:t>Siehe Trainerhandbuch (Sektion 3) für Moderationshinweise, Timing und erwartete Teilnehmerreaktionen.</a:t>
+              <a:t>Kernbotschaft: der DB kann trügen – ein margenstarker, aber risikoreicher Kunde ist auf NMZ-Basis oft unattraktiv.</a:t>
             </a:r>
           </a:p>
         </p:txBody>
@@ -798,7 +868,7 @@
           <a:lstStyle/>
           <a:p>
             <a:r>
-              <a:t>Siehe Trainerhandbuch (Sektion 3) für Moderationshinweise, Timing und erwartete Teilnehmerreaktionen.</a:t>
+              <a:t>Leseübung: ein NMZ-Ranking gemeinsam interpretieren – wo sitzt der Ertrag, wo die Verlustbringer?</a:t>
             </a:r>
           </a:p>
         </p:txBody>
@@ -868,7 +938,7 @@
           <a:lstStyle/>
           <a:p>
             <a:r>
-              <a:t>Siehe Trainerhandbuch (Sektion 3) für Moderationshinweise, Timing und erwartete Teilnehmerreaktionen.</a:t>
+              <a:t>Der Prozess funktioniert nur als Routine – 30 Minuten fest im Monatskalender.</a:t>
             </a:r>
           </a:p>
         </p:txBody>
@@ -938,7 +1008,7 @@
           <a:lstStyle/>
           <a:p>
             <a:r>
-              <a:t>Siehe Trainerhandbuch (Sektion 3) für Moderationshinweise, Timing und erwartete Teilnehmerreaktionen.</a:t>
+              <a:t>Nicht alle Verlustbringer gleich behandeln: manche haben einen klaren Hebel, andere sind Exit-Kandidaten.</a:t>
             </a:r>
           </a:p>
         </p:txBody>
@@ -1008,7 +1078,7 @@
           <a:lstStyle/>
           <a:p>
             <a:r>
-              <a:t>Siehe Trainerhandbuch (Sektion 3) für Moderationshinweise, Timing und erwartete Teilnehmerreaktionen.</a:t>
+              <a:t>Wenn der Kunde mit Sparkassen-Wechsel droht: ruhig bleiben, Gesamtpaket anbieten, im Zweifel Exit-Prüfung mit Bereichsleiter (M14).</a:t>
             </a:r>
           </a:p>
         </p:txBody>
@@ -1078,7 +1148,7 @@
           <a:lstStyle/>
           <a:p>
             <a:r>
-              <a:t>Siehe Trainerhandbuch (Sektion 3) für Moderationshinweise, Timing und erwartete Teilnehmerreaktionen.</a:t>
+              <a:t>Felix ist 0,29 Prozentpunkte unter Ziel. Sieben Kunden ziehen die Bestands-NMZ nach unten – dort liegt der Hebel.</a:t>
             </a:r>
           </a:p>
         </p:txBody>
@@ -1148,7 +1218,12 @@
           <a:lstStyle/>
           <a:p>
             <a:r>
-              <a:t>Siehe Trainerhandbuch (Sektion 3) für Moderationshinweise, Timing und erwartete Teilnehmerreaktionen.</a:t>
+              <a:t>AB Musterlösung (Trainer-Version)</a:t>
+            </a:r>
+          </a:p>
+          <a:p>
+            <a:r>
+              <a:t>Beispiel Metzger GmbH: NMZ −0,20 %, Rating D, Marge zu niedrig – Hebel Rating/Exit, nicht Konditionen. Ursachengerecht handeln, nicht pauschal.</a:t>
             </a:r>
           </a:p>
         </p:txBody>
@@ -4966,7 +5041,7 @@
                 </a:solidFill>
                 <a:latin typeface="Arial"/>
               </a:rPr>
-              <a:t>Schritt 1: Identifizieren (monatlich, 30 Minuten)</a:t>
+              <a:t>Schritt 1: identifizieren</a:t>
             </a:r>
           </a:p>
         </p:txBody>
@@ -4992,6 +5067,25 @@
             <a:spAutoFit/>
           </a:bodyPr>
           <a:lstStyle/>
+          <a:p>
+            <a:pPr marL="177800" indent="-177800">
+              <a:spcBef>
+                <a:spcPts val="600"/>
+              </a:spcBef>
+              <a:spcAft>
+                <a:spcPts val="200"/>
+              </a:spcAft>
+            </a:pPr>
+            <a:r>
+              <a:rPr sz="1200" i="1">
+                <a:solidFill>
+                  <a:srgbClr val="3D5466"/>
+                </a:solidFill>
+                <a:latin typeface="Arial"/>
+              </a:rPr>
+              <a:t>→  Dreißig Minuten im Monat genügen, um die Verlustbringer und die Hebel im Bestand zu finden.</a:t>
+            </a:r>
+          </a:p>
           <a:p>
             <a:pPr marL="190500" indent="-190500">
               <a:spcBef>
@@ -5008,7 +5102,26 @@
                 </a:solidFill>
                 <a:latin typeface="Arial"/>
               </a:rPr>
-              <a:t>▸  Einmal im Monat: agree-NMZ-Ranking aufrufen. Die fünf Kunden mit der niedrigsten NMZ markieren. Für jeden prüfen: Was ist die Hauptursache? (Marge? Kein Verbund? Rating? Betreuungskosten?)</a:t>
+              <a:t>▸  Monatlich das NMZ-Ranking aufrufen und die Kunden unter Benchmark markieren.</a:t>
+            </a:r>
+          </a:p>
+          <a:p>
+            <a:pPr marL="190500" indent="-190500">
+              <a:spcBef>
+                <a:spcPts val="400"/>
+              </a:spcBef>
+              <a:spcAft>
+                <a:spcPts val="200"/>
+              </a:spcAft>
+            </a:pPr>
+            <a:r>
+              <a:rPr sz="1300">
+                <a:solidFill>
+                  <a:srgbClr val="3D5466"/>
+                </a:solidFill>
+                <a:latin typeface="Arial"/>
+              </a:rPr>
+              <a:t>▸  Besonderes Augenmerk auf Kunden mit NMZ unter 0,5 % oder negativem DB.</a:t>
             </a:r>
           </a:p>
         </p:txBody>
@@ -5346,7 +5459,7 @@
                 </a:solidFill>
                 <a:latin typeface="Arial"/>
               </a:rPr>
-              <a:t>Schritt 2: Priorisieren</a:t>
+              <a:t>Schritt 2: priorisieren nach Hebel</a:t>
             </a:r>
           </a:p>
         </p:txBody>
@@ -5372,6 +5485,25 @@
             <a:spAutoFit/>
           </a:bodyPr>
           <a:lstStyle/>
+          <a:p>
+            <a:pPr marL="177800" indent="-177800">
+              <a:spcBef>
+                <a:spcPts val="600"/>
+              </a:spcBef>
+              <a:spcAft>
+                <a:spcPts val="200"/>
+              </a:spcAft>
+            </a:pPr>
+            <a:r>
+              <a:rPr sz="1200" i="1">
+                <a:solidFill>
+                  <a:srgbClr val="3D5466"/>
+                </a:solidFill>
+                <a:latin typeface="Arial"/>
+              </a:rPr>
+              <a:t>→  Die drei Kunden mit dem größten Hebel schlagen zwanzig Aktionen ohne Fokus.</a:t>
+            </a:r>
+          </a:p>
           <a:p>
             <a:pPr marL="190500" indent="-190500">
               <a:spcBef>
@@ -5388,7 +5520,7 @@
                 </a:solidFill>
                 <a:latin typeface="Arial"/>
               </a:rPr>
-              <a:t>▸  Nicht alle fünf auf einmal angehen. Priorisierung nach zwei Kriterien:</a:t>
+              <a:t>▸  Je Kunde die Hauptursache bestimmen: Konditionen, Rating, Cross-Selling-Lücke, Risikokosten.</a:t>
             </a:r>
           </a:p>
           <a:p>
@@ -5407,45 +5539,7 @@
                 </a:solidFill>
                 <a:latin typeface="Arial"/>
               </a:rPr>
-              <a:t>▸  Potenzial der Verbesserung: Wie stark könnte sich die NMZ verbessern?</a:t>
-            </a:r>
-          </a:p>
-          <a:p>
-            <a:pPr marL="190500" indent="-190500">
-              <a:spcBef>
-                <a:spcPts val="400"/>
-              </a:spcBef>
-              <a:spcAft>
-                <a:spcPts val="200"/>
-              </a:spcAft>
-            </a:pPr>
-            <a:r>
-              <a:rPr sz="1300">
-                <a:solidFill>
-                  <a:srgbClr val="3D5466"/>
-                </a:solidFill>
-                <a:latin typeface="Arial"/>
-              </a:rPr>
-              <a:t>▸  Hebelverfügbarkeit: Wie schnell und einfach lässt sich der Hebel aktivieren?</a:t>
-            </a:r>
-          </a:p>
-          <a:p>
-            <a:pPr marL="190500" indent="-190500">
-              <a:spcBef>
-                <a:spcPts val="400"/>
-              </a:spcBef>
-              <a:spcAft>
-                <a:spcPts val="200"/>
-              </a:spcAft>
-            </a:pPr>
-            <a:r>
-              <a:rPr sz="1300">
-                <a:solidFill>
-                  <a:srgbClr val="3D5466"/>
-                </a:solidFill>
-                <a:latin typeface="Arial"/>
-              </a:rPr>
-              <a:t>▸  Einfache Priorisierungsmatrix:</a:t>
+              <a:t>▸  Nach Hebelgröße sortieren – wo bringt eine Maßnahme den meisten NMZ-Zuwachs?</a:t>
             </a:r>
           </a:p>
         </p:txBody>
@@ -5561,7 +5655,7 @@
             <a:avLst/>
           </a:prstGeom>
           <a:solidFill>
-            <a:srgbClr val="FFFFFF"/>
+            <a:srgbClr val="EDEDF3"/>
           </a:solidFill>
           <a:ln>
             <a:noFill/>
@@ -5662,43 +5756,51 @@
                 </a:solidFill>
                 <a:latin typeface="Consolas"/>
               </a:rPr>
-              <a:t>M16  ·  ÜBERSICHT</a:t>
-            </a:r>
-          </a:p>
-        </p:txBody>
-      </p:sp>
-      <p:sp>
-        <p:nvSpPr>
-          <p:cNvPr id="5" name="TextBox 4"/>
-          <p:cNvSpPr txBox="1"/>
-          <p:nvPr/>
-        </p:nvSpPr>
-        <p:spPr>
-          <a:xfrm>
-            <a:off x="685800" y="502920"/>
-            <a:ext cx="10817352" cy="594360"/>
-          </a:xfrm>
-          <a:prstGeom prst="rect">
-            <a:avLst/>
-          </a:prstGeom>
-          <a:noFill/>
-        </p:spPr>
-        <p:txBody>
-          <a:bodyPr wrap="square">
-            <a:spAutoFit/>
-          </a:bodyPr>
-          <a:lstStyle/>
-          <a:p>
-            <a:pPr algn="l"/>
-            <a:r>
-              <a:rPr sz="2000" b="1" i="0">
-                <a:solidFill>
-                  <a:srgbClr val="1F2C56"/>
-                </a:solidFill>
-                <a:latin typeface="Arial"/>
-              </a:rPr>
-              <a:t>Schritt 2: Priorisieren</a:t>
-            </a:r>
+              <a:t>M16  ·  INHALT</a:t>
+            </a:r>
+          </a:p>
+        </p:txBody>
+      </p:sp>
+      <p:sp>
+        <p:nvSpPr>
+          <p:cNvPr id="5" name="Rectangle 4"/>
+          <p:cNvSpPr/>
+          <p:nvPr/>
+        </p:nvSpPr>
+        <p:spPr>
+          <a:xfrm>
+            <a:off x="0" y="1234440"/>
+            <a:ext cx="12188952" cy="12700"/>
+          </a:xfrm>
+          <a:prstGeom prst="rect">
+            <a:avLst/>
+          </a:prstGeom>
+          <a:solidFill>
+            <a:srgbClr val="D8DFE4"/>
+          </a:solidFill>
+          <a:ln>
+            <a:noFill/>
+          </a:ln>
+        </p:spPr>
+        <p:style>
+          <a:lnRef idx="1">
+            <a:schemeClr val="accent1"/>
+          </a:lnRef>
+          <a:fillRef idx="3">
+            <a:schemeClr val="accent1"/>
+          </a:fillRef>
+          <a:effectRef idx="2">
+            <a:schemeClr val="accent1"/>
+          </a:effectRef>
+          <a:fontRef idx="minor">
+            <a:schemeClr val="lt1"/>
+          </a:fontRef>
+        </p:style>
+        <p:txBody>
+          <a:bodyPr rtlCol="0" anchor="ctr"/>
+          <a:lstStyle/>
+          <a:p>
+            <a:pPr algn="ctr"/>
           </a:p>
         </p:txBody>
       </p:sp>
@@ -5710,8 +5812,8 @@
         </p:nvSpPr>
         <p:spPr>
           <a:xfrm>
-            <a:off x="685800" y="1143000"/>
-            <a:ext cx="10817352" cy="25400"/>
+            <a:off x="685800" y="502920"/>
+            <a:ext cx="36576" cy="658368"/>
           </a:xfrm>
           <a:prstGeom prst="rect">
             <a:avLst/>
@@ -5745,6 +5847,660 @@
           </a:p>
         </p:txBody>
       </p:sp>
+      <p:sp>
+        <p:nvSpPr>
+          <p:cNvPr id="7" name="TextBox 6"/>
+          <p:cNvSpPr txBox="1"/>
+          <p:nvPr/>
+        </p:nvSpPr>
+        <p:spPr>
+          <a:xfrm>
+            <a:off x="813816" y="502920"/>
+            <a:ext cx="10634472" cy="685800"/>
+          </a:xfrm>
+          <a:prstGeom prst="rect">
+            <a:avLst/>
+          </a:prstGeom>
+          <a:noFill/>
+        </p:spPr>
+        <p:txBody>
+          <a:bodyPr wrap="square">
+            <a:spAutoFit/>
+          </a:bodyPr>
+          <a:lstStyle/>
+          <a:p>
+            <a:pPr algn="l"/>
+            <a:r>
+              <a:rPr sz="2400" b="1" i="0">
+                <a:solidFill>
+                  <a:srgbClr val="1F2C56"/>
+                </a:solidFill>
+                <a:latin typeface="Arial"/>
+              </a:rPr>
+              <a:t>Schritt 3: handeln und dokumentieren</a:t>
+            </a:r>
+          </a:p>
+        </p:txBody>
+      </p:sp>
+      <p:sp>
+        <p:nvSpPr>
+          <p:cNvPr id="8" name="TextBox 7"/>
+          <p:cNvSpPr txBox="1"/>
+          <p:nvPr/>
+        </p:nvSpPr>
+        <p:spPr>
+          <a:xfrm>
+            <a:off x="685800" y="1417320"/>
+            <a:ext cx="10817352" cy="4892040"/>
+          </a:xfrm>
+          <a:prstGeom prst="rect">
+            <a:avLst/>
+          </a:prstGeom>
+          <a:noFill/>
+        </p:spPr>
+        <p:txBody>
+          <a:bodyPr wrap="square" anchor="ctr">
+            <a:spAutoFit/>
+          </a:bodyPr>
+          <a:lstStyle/>
+          <a:p>
+            <a:pPr marL="177800" indent="-177800">
+              <a:spcBef>
+                <a:spcPts val="600"/>
+              </a:spcBef>
+              <a:spcAft>
+                <a:spcPts val="200"/>
+              </a:spcAft>
+            </a:pPr>
+            <a:r>
+              <a:rPr sz="1200" i="1">
+                <a:solidFill>
+                  <a:srgbClr val="3D5466"/>
+                </a:solidFill>
+                <a:latin typeface="Arial"/>
+              </a:rPr>
+              <a:t>→  Eine erkannte NMZ-Lücke ist erst geschlossen, wenn die Maßnahme umgesetzt und dokumentiert ist.</a:t>
+            </a:r>
+          </a:p>
+          <a:p>
+            <a:pPr marL="190500" indent="-190500">
+              <a:spcBef>
+                <a:spcPts val="400"/>
+              </a:spcBef>
+              <a:spcAft>
+                <a:spcPts val="200"/>
+              </a:spcAft>
+            </a:pPr>
+            <a:r>
+              <a:rPr sz="1300">
+                <a:solidFill>
+                  <a:srgbClr val="3D5466"/>
+                </a:solidFill>
+                <a:latin typeface="Arial"/>
+              </a:rPr>
+              <a:t>▸  Je nach Ursache: Konditionen anpassen, Cross-Selling, Rating verbessern oder Exit prüfen.</a:t>
+            </a:r>
+          </a:p>
+          <a:p>
+            <a:pPr marL="190500" indent="-190500">
+              <a:spcBef>
+                <a:spcPts val="400"/>
+              </a:spcBef>
+              <a:spcAft>
+                <a:spcPts val="200"/>
+              </a:spcAft>
+            </a:pPr>
+            <a:r>
+              <a:rPr sz="1300">
+                <a:solidFill>
+                  <a:srgbClr val="3D5466"/>
+                </a:solidFill>
+                <a:latin typeface="Arial"/>
+              </a:rPr>
+              <a:t>▸  Maßnahme, Verantwortlichen und Termin im System festhalten.</a:t>
+            </a:r>
+          </a:p>
+        </p:txBody>
+      </p:sp>
+      <p:sp>
+        <p:nvSpPr>
+          <p:cNvPr id="9" name="Rectangle 8"/>
+          <p:cNvSpPr/>
+          <p:nvPr/>
+        </p:nvSpPr>
+        <p:spPr>
+          <a:xfrm>
+            <a:off x="0" y="6510528"/>
+            <a:ext cx="12188952" cy="347472"/>
+          </a:xfrm>
+          <a:prstGeom prst="rect">
+            <a:avLst/>
+          </a:prstGeom>
+          <a:solidFill>
+            <a:srgbClr val="0A1937"/>
+          </a:solidFill>
+          <a:ln>
+            <a:noFill/>
+          </a:ln>
+        </p:spPr>
+        <p:style>
+          <a:lnRef idx="1">
+            <a:schemeClr val="accent1"/>
+          </a:lnRef>
+          <a:fillRef idx="3">
+            <a:schemeClr val="accent1"/>
+          </a:fillRef>
+          <a:effectRef idx="2">
+            <a:schemeClr val="accent1"/>
+          </a:effectRef>
+          <a:fontRef idx="minor">
+            <a:schemeClr val="lt1"/>
+          </a:fontRef>
+        </p:style>
+        <p:txBody>
+          <a:bodyPr rtlCol="0" anchor="ctr"/>
+          <a:lstStyle/>
+          <a:p>
+            <a:pPr algn="ctr"/>
+          </a:p>
+        </p:txBody>
+      </p:sp>
+      <p:sp>
+        <p:nvSpPr>
+          <p:cNvPr id="10" name="TextBox 9"/>
+          <p:cNvSpPr txBox="1"/>
+          <p:nvPr/>
+        </p:nvSpPr>
+        <p:spPr>
+          <a:xfrm>
+            <a:off x="685800" y="6583680"/>
+            <a:ext cx="6490411" cy="256032"/>
+          </a:xfrm>
+          <a:prstGeom prst="rect">
+            <a:avLst/>
+          </a:prstGeom>
+          <a:noFill/>
+        </p:spPr>
+        <p:txBody>
+          <a:bodyPr wrap="none">
+            <a:spAutoFit/>
+          </a:bodyPr>
+          <a:lstStyle/>
+          <a:p>
+            <a:pPr algn="l"/>
+            <a:r>
+              <a:rPr sz="700">
+                <a:solidFill>
+                  <a:srgbClr val="A0B4D2"/>
+                </a:solidFill>
+                <a:latin typeface="Consolas"/>
+              </a:rPr>
+              <a:t>FKB Campus  ·  M16</a:t>
+            </a:r>
+          </a:p>
+        </p:txBody>
+      </p:sp>
+    </p:spTree>
+  </p:cSld>
+  <p:clrMapOvr>
+    <a:masterClrMapping/>
+  </p:clrMapOvr>
+</p:sld>
+</file>
+
+<file path=ppt/slides/slide13.xml><?xml version="1.0" encoding="utf-8"?>
+<p:sld xmlns:a="http://schemas.openxmlformats.org/drawingml/2006/main" xmlns:p="http://schemas.openxmlformats.org/presentationml/2006/main" xmlns:r="http://schemas.openxmlformats.org/officeDocument/2006/relationships">
+  <p:cSld>
+    <p:spTree>
+      <p:nvGrpSpPr>
+        <p:cNvPr id="1" name=""/>
+        <p:cNvGrpSpPr/>
+        <p:nvPr/>
+      </p:nvGrpSpPr>
+      <p:grpSpPr/>
+      <p:sp>
+        <p:nvSpPr>
+          <p:cNvPr id="2" name="Rectangle 1"/>
+          <p:cNvSpPr/>
+          <p:nvPr/>
+        </p:nvSpPr>
+        <p:spPr>
+          <a:xfrm>
+            <a:off x="0" y="0"/>
+            <a:ext cx="12188952" cy="6858000"/>
+          </a:xfrm>
+          <a:prstGeom prst="rect">
+            <a:avLst/>
+          </a:prstGeom>
+          <a:solidFill>
+            <a:srgbClr val="1F2C56"/>
+          </a:solidFill>
+          <a:ln>
+            <a:noFill/>
+          </a:ln>
+        </p:spPr>
+        <p:style>
+          <a:lnRef idx="1">
+            <a:schemeClr val="accent1"/>
+          </a:lnRef>
+          <a:fillRef idx="3">
+            <a:schemeClr val="accent1"/>
+          </a:fillRef>
+          <a:effectRef idx="2">
+            <a:schemeClr val="accent1"/>
+          </a:effectRef>
+          <a:fontRef idx="minor">
+            <a:schemeClr val="lt1"/>
+          </a:fontRef>
+        </p:style>
+        <p:txBody>
+          <a:bodyPr rtlCol="0" anchor="ctr"/>
+          <a:lstStyle/>
+          <a:p>
+            <a:pPr algn="ctr"/>
+          </a:p>
+        </p:txBody>
+      </p:sp>
+      <p:sp>
+        <p:nvSpPr>
+          <p:cNvPr id="3" name="TextBox 2"/>
+          <p:cNvSpPr txBox="1"/>
+          <p:nvPr/>
+        </p:nvSpPr>
+        <p:spPr>
+          <a:xfrm>
+            <a:off x="685800" y="2377440"/>
+            <a:ext cx="10817352" cy="365760"/>
+          </a:xfrm>
+          <a:prstGeom prst="rect">
+            <a:avLst/>
+          </a:prstGeom>
+          <a:noFill/>
+        </p:spPr>
+        <p:txBody>
+          <a:bodyPr wrap="none">
+            <a:spAutoFit/>
+          </a:bodyPr>
+          <a:lstStyle/>
+          <a:p>
+            <a:pPr algn="l"/>
+            <a:r>
+              <a:rPr sz="1200">
+                <a:solidFill>
+                  <a:srgbClr val="D9C089"/>
+                </a:solidFill>
+                <a:latin typeface="Consolas"/>
+              </a:rPr>
+              <a:t>FALLARBEIT</a:t>
+            </a:r>
+          </a:p>
+        </p:txBody>
+      </p:sp>
+      <p:sp>
+        <p:nvSpPr>
+          <p:cNvPr id="4" name="Rectangle 3"/>
+          <p:cNvSpPr/>
+          <p:nvPr/>
+        </p:nvSpPr>
+        <p:spPr>
+          <a:xfrm>
+            <a:off x="685800" y="2788920"/>
+            <a:ext cx="548640" cy="38100"/>
+          </a:xfrm>
+          <a:prstGeom prst="rect">
+            <a:avLst/>
+          </a:prstGeom>
+          <a:solidFill>
+            <a:srgbClr val="D9C089"/>
+          </a:solidFill>
+          <a:ln>
+            <a:noFill/>
+          </a:ln>
+        </p:spPr>
+        <p:style>
+          <a:lnRef idx="1">
+            <a:schemeClr val="accent1"/>
+          </a:lnRef>
+          <a:fillRef idx="3">
+            <a:schemeClr val="accent1"/>
+          </a:fillRef>
+          <a:effectRef idx="2">
+            <a:schemeClr val="accent1"/>
+          </a:effectRef>
+          <a:fontRef idx="minor">
+            <a:schemeClr val="lt1"/>
+          </a:fontRef>
+        </p:style>
+        <p:txBody>
+          <a:bodyPr rtlCol="0" anchor="ctr"/>
+          <a:lstStyle/>
+          <a:p>
+            <a:pPr algn="ctr"/>
+          </a:p>
+        </p:txBody>
+      </p:sp>
+      <p:sp>
+        <p:nvSpPr>
+          <p:cNvPr id="5" name="TextBox 4"/>
+          <p:cNvSpPr txBox="1"/>
+          <p:nvPr/>
+        </p:nvSpPr>
+        <p:spPr>
+          <a:xfrm>
+            <a:off x="685800" y="3017520"/>
+            <a:ext cx="10817352" cy="1463040"/>
+          </a:xfrm>
+          <a:prstGeom prst="rect">
+            <a:avLst/>
+          </a:prstGeom>
+          <a:noFill/>
+        </p:spPr>
+        <p:txBody>
+          <a:bodyPr wrap="square">
+            <a:spAutoFit/>
+          </a:bodyPr>
+          <a:lstStyle/>
+          <a:p>
+            <a:pPr algn="l"/>
+            <a:r>
+              <a:rPr sz="4000" b="1" i="0">
+                <a:solidFill>
+                  <a:srgbClr val="FFFFFF"/>
+                </a:solidFill>
+                <a:latin typeface="Arial"/>
+              </a:rPr>
+              <a:t>Praxiscase Felix Braun</a:t>
+            </a:r>
+          </a:p>
+        </p:txBody>
+      </p:sp>
+      <p:sp>
+        <p:nvSpPr>
+          <p:cNvPr id="6" name="TextBox 5"/>
+          <p:cNvSpPr txBox="1"/>
+          <p:nvPr/>
+        </p:nvSpPr>
+        <p:spPr>
+          <a:xfrm>
+            <a:off x="685800" y="4480560"/>
+            <a:ext cx="8653881" cy="1280160"/>
+          </a:xfrm>
+          <a:prstGeom prst="rect">
+            <a:avLst/>
+          </a:prstGeom>
+          <a:noFill/>
+        </p:spPr>
+        <p:txBody>
+          <a:bodyPr wrap="square">
+            <a:spAutoFit/>
+          </a:bodyPr>
+          <a:lstStyle/>
+          <a:p>
+            <a:pPr algn="l"/>
+            <a:r>
+              <a:rPr sz="1600" b="0" i="0">
+                <a:solidFill>
+                  <a:srgbClr val="C8D2E6"/>
+                </a:solidFill>
+                <a:latin typeface="Arial"/>
+              </a:rPr>
+              <a:t>Ein Maßnahmenpaket entwickeln, das die Bestands-NMZ zum Benchmark bringt.</a:t>
+            </a:r>
+          </a:p>
+        </p:txBody>
+      </p:sp>
+      <p:sp>
+        <p:nvSpPr>
+          <p:cNvPr id="7" name="TextBox 6"/>
+          <p:cNvSpPr txBox="1"/>
+          <p:nvPr/>
+        </p:nvSpPr>
+        <p:spPr>
+          <a:xfrm>
+            <a:off x="685800" y="6355080"/>
+            <a:ext cx="10817352" cy="274320"/>
+          </a:xfrm>
+          <a:prstGeom prst="rect">
+            <a:avLst/>
+          </a:prstGeom>
+          <a:noFill/>
+        </p:spPr>
+        <p:txBody>
+          <a:bodyPr wrap="none">
+            <a:spAutoFit/>
+          </a:bodyPr>
+          <a:lstStyle/>
+          <a:p>
+            <a:pPr algn="l"/>
+            <a:r>
+              <a:rPr sz="700">
+                <a:solidFill>
+                  <a:srgbClr val="8CA0C3"/>
+                </a:solidFill>
+                <a:latin typeface="Consolas"/>
+              </a:rPr>
+              <a:t>FKB Campus  ·  M16</a:t>
+            </a:r>
+          </a:p>
+        </p:txBody>
+      </p:sp>
+    </p:spTree>
+  </p:cSld>
+  <p:clrMapOvr>
+    <a:masterClrMapping/>
+  </p:clrMapOvr>
+</p:sld>
+</file>
+
+<file path=ppt/slides/slide14.xml><?xml version="1.0" encoding="utf-8"?>
+<p:sld xmlns:a="http://schemas.openxmlformats.org/drawingml/2006/main" xmlns:p="http://schemas.openxmlformats.org/presentationml/2006/main" xmlns:r="http://schemas.openxmlformats.org/officeDocument/2006/relationships">
+  <p:cSld>
+    <p:spTree>
+      <p:nvGrpSpPr>
+        <p:cNvPr id="1" name=""/>
+        <p:cNvGrpSpPr/>
+        <p:nvPr/>
+      </p:nvGrpSpPr>
+      <p:grpSpPr/>
+      <p:sp>
+        <p:nvSpPr>
+          <p:cNvPr id="2" name="Rectangle 1"/>
+          <p:cNvSpPr/>
+          <p:nvPr/>
+        </p:nvSpPr>
+        <p:spPr>
+          <a:xfrm>
+            <a:off x="0" y="0"/>
+            <a:ext cx="12188952" cy="6858000"/>
+          </a:xfrm>
+          <a:prstGeom prst="rect">
+            <a:avLst/>
+          </a:prstGeom>
+          <a:solidFill>
+            <a:srgbClr val="FFFFFF"/>
+          </a:solidFill>
+          <a:ln>
+            <a:noFill/>
+          </a:ln>
+        </p:spPr>
+        <p:style>
+          <a:lnRef idx="1">
+            <a:schemeClr val="accent1"/>
+          </a:lnRef>
+          <a:fillRef idx="3">
+            <a:schemeClr val="accent1"/>
+          </a:fillRef>
+          <a:effectRef idx="2">
+            <a:schemeClr val="accent1"/>
+          </a:effectRef>
+          <a:fontRef idx="minor">
+            <a:schemeClr val="lt1"/>
+          </a:fontRef>
+        </p:style>
+        <p:txBody>
+          <a:bodyPr rtlCol="0" anchor="ctr"/>
+          <a:lstStyle/>
+          <a:p>
+            <a:pPr algn="ctr"/>
+          </a:p>
+        </p:txBody>
+      </p:sp>
+      <p:sp>
+        <p:nvSpPr>
+          <p:cNvPr id="3" name="Rectangle 2"/>
+          <p:cNvSpPr/>
+          <p:nvPr/>
+        </p:nvSpPr>
+        <p:spPr>
+          <a:xfrm>
+            <a:off x="0" y="0"/>
+            <a:ext cx="12188952" cy="50292"/>
+          </a:xfrm>
+          <a:prstGeom prst="rect">
+            <a:avLst/>
+          </a:prstGeom>
+          <a:solidFill>
+            <a:srgbClr val="1F2C56"/>
+          </a:solidFill>
+          <a:ln>
+            <a:noFill/>
+          </a:ln>
+        </p:spPr>
+        <p:style>
+          <a:lnRef idx="1">
+            <a:schemeClr val="accent1"/>
+          </a:lnRef>
+          <a:fillRef idx="3">
+            <a:schemeClr val="accent1"/>
+          </a:fillRef>
+          <a:effectRef idx="2">
+            <a:schemeClr val="accent1"/>
+          </a:effectRef>
+          <a:fontRef idx="minor">
+            <a:schemeClr val="lt1"/>
+          </a:fontRef>
+        </p:style>
+        <p:txBody>
+          <a:bodyPr rtlCol="0" anchor="ctr"/>
+          <a:lstStyle/>
+          <a:p>
+            <a:pPr algn="ctr"/>
+          </a:p>
+        </p:txBody>
+      </p:sp>
+      <p:sp>
+        <p:nvSpPr>
+          <p:cNvPr id="4" name="TextBox 3"/>
+          <p:cNvSpPr txBox="1"/>
+          <p:nvPr/>
+        </p:nvSpPr>
+        <p:spPr>
+          <a:xfrm>
+            <a:off x="685800" y="109728"/>
+            <a:ext cx="10817352" cy="228600"/>
+          </a:xfrm>
+          <a:prstGeom prst="rect">
+            <a:avLst/>
+          </a:prstGeom>
+          <a:noFill/>
+        </p:spPr>
+        <p:txBody>
+          <a:bodyPr wrap="none">
+            <a:spAutoFit/>
+          </a:bodyPr>
+          <a:lstStyle/>
+          <a:p>
+            <a:pPr algn="l"/>
+            <a:r>
+              <a:rPr sz="750">
+                <a:solidFill>
+                  <a:srgbClr val="78808C"/>
+                </a:solidFill>
+                <a:latin typeface="Consolas"/>
+              </a:rPr>
+              <a:t>M16  ·  ÜBERSICHT</a:t>
+            </a:r>
+          </a:p>
+        </p:txBody>
+      </p:sp>
+      <p:sp>
+        <p:nvSpPr>
+          <p:cNvPr id="5" name="TextBox 4"/>
+          <p:cNvSpPr txBox="1"/>
+          <p:nvPr/>
+        </p:nvSpPr>
+        <p:spPr>
+          <a:xfrm>
+            <a:off x="685800" y="502920"/>
+            <a:ext cx="10817352" cy="594360"/>
+          </a:xfrm>
+          <a:prstGeom prst="rect">
+            <a:avLst/>
+          </a:prstGeom>
+          <a:noFill/>
+        </p:spPr>
+        <p:txBody>
+          <a:bodyPr wrap="square">
+            <a:spAutoFit/>
+          </a:bodyPr>
+          <a:lstStyle/>
+          <a:p>
+            <a:pPr algn="l"/>
+            <a:r>
+              <a:rPr sz="2000" b="1" i="0">
+                <a:solidFill>
+                  <a:srgbClr val="1F2C56"/>
+                </a:solidFill>
+                <a:latin typeface="Arial"/>
+              </a:rPr>
+              <a:t>Felix Braun: Ausgangslage im Bestand</a:t>
+            </a:r>
+          </a:p>
+        </p:txBody>
+      </p:sp>
+      <p:sp>
+        <p:nvSpPr>
+          <p:cNvPr id="6" name="Rectangle 5"/>
+          <p:cNvSpPr/>
+          <p:nvPr/>
+        </p:nvSpPr>
+        <p:spPr>
+          <a:xfrm>
+            <a:off x="685800" y="1143000"/>
+            <a:ext cx="10817352" cy="25400"/>
+          </a:xfrm>
+          <a:prstGeom prst="rect">
+            <a:avLst/>
+          </a:prstGeom>
+          <a:solidFill>
+            <a:srgbClr val="D9C089"/>
+          </a:solidFill>
+          <a:ln>
+            <a:noFill/>
+          </a:ln>
+        </p:spPr>
+        <p:style>
+          <a:lnRef idx="1">
+            <a:schemeClr val="accent1"/>
+          </a:lnRef>
+          <a:fillRef idx="3">
+            <a:schemeClr val="accent1"/>
+          </a:fillRef>
+          <a:effectRef idx="2">
+            <a:schemeClr val="accent1"/>
+          </a:effectRef>
+          <a:fontRef idx="minor">
+            <a:schemeClr val="lt1"/>
+          </a:fontRef>
+        </p:style>
+        <p:txBody>
+          <a:bodyPr rtlCol="0" anchor="ctr"/>
+          <a:lstStyle/>
+          <a:p>
+            <a:pPr algn="ctr"/>
+          </a:p>
+        </p:txBody>
+      </p:sp>
       <p:graphicFrame>
         <p:nvGraphicFramePr>
           <p:cNvPr id="7" name="Table 6"/>
@@ -5755,7 +6511,7 @@
         </p:nvGraphicFramePr>
         <p:xfrm>
           <a:off x="685800" y="1417320"/>
-          <a:ext cx="10817352" cy="1152144"/>
+          <a:ext cx="10817352" cy="1536192"/>
         </p:xfrm>
         <a:graphic>
           <a:graphicData uri="http://schemas.openxmlformats.org/drawingml/2006/table">
@@ -5773,18 +6529,6 @@
                   <a:txBody>
                     <a:bodyPr/>
                     <a:lstStyle/>
-                    <a:p/>
-                  </a:txBody>
-                  <a:tcPr>
-                    <a:solidFill>
-                      <a:srgbClr val="1F2C56"/>
-                    </a:solidFill>
-                  </a:tcPr>
-                </a:tc>
-                <a:tc>
-                  <a:txBody>
-                    <a:bodyPr/>
-                    <a:lstStyle/>
                     <a:p>
                       <a:r>
                         <a:rPr sz="1100" b="1">
@@ -5793,7 +6537,7 @@
                           </a:solidFill>
                           <a:latin typeface="Arial"/>
                         </a:rPr>
-                        <a:t>Schnell umsetzbar</a:t>
+                        <a:t>Größe</a:t>
                       </a:r>
                     </a:p>
                   </a:txBody>
@@ -5815,7 +6559,29 @@
                           </a:solidFill>
                           <a:latin typeface="Arial"/>
                         </a:rPr>
-                        <a:t>Langfristig</a:t>
+                        <a:t>Wert</a:t>
+                      </a:r>
+                    </a:p>
+                  </a:txBody>
+                  <a:tcPr>
+                    <a:solidFill>
+                      <a:srgbClr val="1F2C56"/>
+                    </a:solidFill>
+                  </a:tcPr>
+                </a:tc>
+                <a:tc>
+                  <a:txBody>
+                    <a:bodyPr/>
+                    <a:lstStyle/>
+                    <a:p>
+                      <a:r>
+                        <a:rPr sz="1100" b="1">
+                          <a:solidFill>
+                            <a:srgbClr val="FFFFFF"/>
+                          </a:solidFill>
+                          <a:latin typeface="Arial"/>
+                        </a:rPr>
+                        <a:t>Ziel/Hebel</a:t>
                       </a:r>
                     </a:p>
                   </a:txBody>
@@ -5839,7 +6605,7 @@
                           </a:solidFill>
                           <a:latin typeface="Arial"/>
                         </a:rPr>
-                        <a:t>Hohes Verbesserungspotenzial</a:t>
+                        <a:t>Bestands-NMZ</a:t>
                       </a:r>
                     </a:p>
                   </a:txBody>
@@ -5857,7 +6623,7 @@
                           </a:solidFill>
                           <a:latin typeface="Arial"/>
                         </a:rPr>
-                        <a:t>Sofort angehen (Prio 1)</a:t>
+                        <a:t>0,81 %</a:t>
                       </a:r>
                     </a:p>
                   </a:txBody>
@@ -5875,7 +6641,7 @@
                           </a:solidFill>
                           <a:latin typeface="Arial"/>
                         </a:rPr>
-                        <a:t>Mittelfristig planen (Prio 2)</a:t>
+                        <a:t>Benchmark 1,10 %</a:t>
                       </a:r>
                     </a:p>
                   </a:txBody>
@@ -5895,7 +6661,7 @@
                           </a:solidFill>
                           <a:latin typeface="Arial"/>
                         </a:rPr>
-                        <a:t>Niedriges Verbesserungspotenzial</a:t>
+                        <a:t>Kunden gesamt</a:t>
                       </a:r>
                     </a:p>
                   </a:txBody>
@@ -5913,7 +6679,7 @@
                           </a:solidFill>
                           <a:latin typeface="Arial"/>
                         </a:rPr>
-                        <a:t>Opportunistisch (Prio 3)</a:t>
+                        <a:t>42</a:t>
                       </a:r>
                     </a:p>
                   </a:txBody>
@@ -5931,1118 +6697,7 @@
                           </a:solidFill>
                           <a:latin typeface="Arial"/>
                         </a:rPr>
-                        <a:t>Deprioritisieren (Prio 4)</a:t>
-                      </a:r>
-                    </a:p>
-                  </a:txBody>
-                  <a:tcPr/>
-                </a:tc>
-              </a:tr>
-            </a:tbl>
-          </a:graphicData>
-        </a:graphic>
-      </p:graphicFrame>
-      <p:sp>
-        <p:nvSpPr>
-          <p:cNvPr id="8" name="Rectangle 7"/>
-          <p:cNvSpPr/>
-          <p:nvPr/>
-        </p:nvSpPr>
-        <p:spPr>
-          <a:xfrm>
-            <a:off x="0" y="6510528"/>
-            <a:ext cx="12188952" cy="347472"/>
-          </a:xfrm>
-          <a:prstGeom prst="rect">
-            <a:avLst/>
-          </a:prstGeom>
-          <a:solidFill>
-            <a:srgbClr val="0A1937"/>
-          </a:solidFill>
-          <a:ln>
-            <a:noFill/>
-          </a:ln>
-        </p:spPr>
-        <p:style>
-          <a:lnRef idx="1">
-            <a:schemeClr val="accent1"/>
-          </a:lnRef>
-          <a:fillRef idx="3">
-            <a:schemeClr val="accent1"/>
-          </a:fillRef>
-          <a:effectRef idx="2">
-            <a:schemeClr val="accent1"/>
-          </a:effectRef>
-          <a:fontRef idx="minor">
-            <a:schemeClr val="lt1"/>
-          </a:fontRef>
-        </p:style>
-        <p:txBody>
-          <a:bodyPr rtlCol="0" anchor="ctr"/>
-          <a:lstStyle/>
-          <a:p>
-            <a:pPr algn="ctr"/>
-          </a:p>
-        </p:txBody>
-      </p:sp>
-      <p:sp>
-        <p:nvSpPr>
-          <p:cNvPr id="9" name="TextBox 8"/>
-          <p:cNvSpPr txBox="1"/>
-          <p:nvPr/>
-        </p:nvSpPr>
-        <p:spPr>
-          <a:xfrm>
-            <a:off x="685800" y="6583680"/>
-            <a:ext cx="6490411" cy="256032"/>
-          </a:xfrm>
-          <a:prstGeom prst="rect">
-            <a:avLst/>
-          </a:prstGeom>
-          <a:noFill/>
-        </p:spPr>
-        <p:txBody>
-          <a:bodyPr wrap="none">
-            <a:spAutoFit/>
-          </a:bodyPr>
-          <a:lstStyle/>
-          <a:p>
-            <a:pPr algn="l"/>
-            <a:r>
-              <a:rPr sz="700">
-                <a:solidFill>
-                  <a:srgbClr val="A0B4D2"/>
-                </a:solidFill>
-                <a:latin typeface="Consolas"/>
-              </a:rPr>
-              <a:t>FKB Campus  ·  M16</a:t>
-            </a:r>
-          </a:p>
-        </p:txBody>
-      </p:sp>
-      <p:sp>
-        <p:nvSpPr>
-          <p:cNvPr id="10" name="TextBox 9"/>
-          <p:cNvSpPr txBox="1"/>
-          <p:nvPr/>
-        </p:nvSpPr>
-        <p:spPr>
-          <a:xfrm>
-            <a:off x="7176211" y="6583680"/>
-            <a:ext cx="4326940" cy="256032"/>
-          </a:xfrm>
-          <a:prstGeom prst="rect">
-            <a:avLst/>
-          </a:prstGeom>
-          <a:noFill/>
-        </p:spPr>
-        <p:txBody>
-          <a:bodyPr wrap="none">
-            <a:spAutoFit/>
-          </a:bodyPr>
-          <a:lstStyle/>
-          <a:p>
-            <a:pPr algn="r"/>
-            <a:r>
-              <a:rPr sz="700">
-                <a:solidFill>
-                  <a:srgbClr val="A0B4D2"/>
-                </a:solidFill>
-                <a:latin typeface="Consolas"/>
-              </a:rPr>
-              <a:t>Übersicht</a:t>
-            </a:r>
-          </a:p>
-        </p:txBody>
-      </p:sp>
-    </p:spTree>
-  </p:cSld>
-  <p:clrMapOvr>
-    <a:masterClrMapping/>
-  </p:clrMapOvr>
-</p:sld>
-</file>
-
-<file path=ppt/slides/slide13.xml><?xml version="1.0" encoding="utf-8"?>
-<p:sld xmlns:a="http://schemas.openxmlformats.org/drawingml/2006/main" xmlns:p="http://schemas.openxmlformats.org/presentationml/2006/main" xmlns:r="http://schemas.openxmlformats.org/officeDocument/2006/relationships">
-  <p:cSld>
-    <p:spTree>
-      <p:nvGrpSpPr>
-        <p:cNvPr id="1" name=""/>
-        <p:cNvGrpSpPr/>
-        <p:nvPr/>
-      </p:nvGrpSpPr>
-      <p:grpSpPr/>
-      <p:sp>
-        <p:nvSpPr>
-          <p:cNvPr id="2" name="Rectangle 1"/>
-          <p:cNvSpPr/>
-          <p:nvPr/>
-        </p:nvSpPr>
-        <p:spPr>
-          <a:xfrm>
-            <a:off x="0" y="0"/>
-            <a:ext cx="12188952" cy="6858000"/>
-          </a:xfrm>
-          <a:prstGeom prst="rect">
-            <a:avLst/>
-          </a:prstGeom>
-          <a:solidFill>
-            <a:srgbClr val="EDEDF3"/>
-          </a:solidFill>
-          <a:ln>
-            <a:noFill/>
-          </a:ln>
-        </p:spPr>
-        <p:style>
-          <a:lnRef idx="1">
-            <a:schemeClr val="accent1"/>
-          </a:lnRef>
-          <a:fillRef idx="3">
-            <a:schemeClr val="accent1"/>
-          </a:fillRef>
-          <a:effectRef idx="2">
-            <a:schemeClr val="accent1"/>
-          </a:effectRef>
-          <a:fontRef idx="minor">
-            <a:schemeClr val="lt1"/>
-          </a:fontRef>
-        </p:style>
-        <p:txBody>
-          <a:bodyPr rtlCol="0" anchor="ctr"/>
-          <a:lstStyle/>
-          <a:p>
-            <a:pPr algn="ctr"/>
-          </a:p>
-        </p:txBody>
-      </p:sp>
-      <p:sp>
-        <p:nvSpPr>
-          <p:cNvPr id="3" name="Rectangle 2"/>
-          <p:cNvSpPr/>
-          <p:nvPr/>
-        </p:nvSpPr>
-        <p:spPr>
-          <a:xfrm>
-            <a:off x="0" y="0"/>
-            <a:ext cx="12188952" cy="50292"/>
-          </a:xfrm>
-          <a:prstGeom prst="rect">
-            <a:avLst/>
-          </a:prstGeom>
-          <a:solidFill>
-            <a:srgbClr val="1F2C56"/>
-          </a:solidFill>
-          <a:ln>
-            <a:noFill/>
-          </a:ln>
-        </p:spPr>
-        <p:style>
-          <a:lnRef idx="1">
-            <a:schemeClr val="accent1"/>
-          </a:lnRef>
-          <a:fillRef idx="3">
-            <a:schemeClr val="accent1"/>
-          </a:fillRef>
-          <a:effectRef idx="2">
-            <a:schemeClr val="accent1"/>
-          </a:effectRef>
-          <a:fontRef idx="minor">
-            <a:schemeClr val="lt1"/>
-          </a:fontRef>
-        </p:style>
-        <p:txBody>
-          <a:bodyPr rtlCol="0" anchor="ctr"/>
-          <a:lstStyle/>
-          <a:p>
-            <a:pPr algn="ctr"/>
-          </a:p>
-        </p:txBody>
-      </p:sp>
-      <p:sp>
-        <p:nvSpPr>
-          <p:cNvPr id="4" name="TextBox 3"/>
-          <p:cNvSpPr txBox="1"/>
-          <p:nvPr/>
-        </p:nvSpPr>
-        <p:spPr>
-          <a:xfrm>
-            <a:off x="685800" y="109728"/>
-            <a:ext cx="10817352" cy="228600"/>
-          </a:xfrm>
-          <a:prstGeom prst="rect">
-            <a:avLst/>
-          </a:prstGeom>
-          <a:noFill/>
-        </p:spPr>
-        <p:txBody>
-          <a:bodyPr wrap="none">
-            <a:spAutoFit/>
-          </a:bodyPr>
-          <a:lstStyle/>
-          <a:p>
-            <a:pPr algn="l"/>
-            <a:r>
-              <a:rPr sz="750">
-                <a:solidFill>
-                  <a:srgbClr val="78808C"/>
-                </a:solidFill>
-                <a:latin typeface="Consolas"/>
-              </a:rPr>
-              <a:t>M16  ·  INHALT</a:t>
-            </a:r>
-          </a:p>
-        </p:txBody>
-      </p:sp>
-      <p:sp>
-        <p:nvSpPr>
-          <p:cNvPr id="5" name="Rectangle 4"/>
-          <p:cNvSpPr/>
-          <p:nvPr/>
-        </p:nvSpPr>
-        <p:spPr>
-          <a:xfrm>
-            <a:off x="0" y="1234440"/>
-            <a:ext cx="12188952" cy="12700"/>
-          </a:xfrm>
-          <a:prstGeom prst="rect">
-            <a:avLst/>
-          </a:prstGeom>
-          <a:solidFill>
-            <a:srgbClr val="D8DFE4"/>
-          </a:solidFill>
-          <a:ln>
-            <a:noFill/>
-          </a:ln>
-        </p:spPr>
-        <p:style>
-          <a:lnRef idx="1">
-            <a:schemeClr val="accent1"/>
-          </a:lnRef>
-          <a:fillRef idx="3">
-            <a:schemeClr val="accent1"/>
-          </a:fillRef>
-          <a:effectRef idx="2">
-            <a:schemeClr val="accent1"/>
-          </a:effectRef>
-          <a:fontRef idx="minor">
-            <a:schemeClr val="lt1"/>
-          </a:fontRef>
-        </p:style>
-        <p:txBody>
-          <a:bodyPr rtlCol="0" anchor="ctr"/>
-          <a:lstStyle/>
-          <a:p>
-            <a:pPr algn="ctr"/>
-          </a:p>
-        </p:txBody>
-      </p:sp>
-      <p:sp>
-        <p:nvSpPr>
-          <p:cNvPr id="6" name="Rectangle 5"/>
-          <p:cNvSpPr/>
-          <p:nvPr/>
-        </p:nvSpPr>
-        <p:spPr>
-          <a:xfrm>
-            <a:off x="685800" y="502920"/>
-            <a:ext cx="36576" cy="658368"/>
-          </a:xfrm>
-          <a:prstGeom prst="rect">
-            <a:avLst/>
-          </a:prstGeom>
-          <a:solidFill>
-            <a:srgbClr val="D9C089"/>
-          </a:solidFill>
-          <a:ln>
-            <a:noFill/>
-          </a:ln>
-        </p:spPr>
-        <p:style>
-          <a:lnRef idx="1">
-            <a:schemeClr val="accent1"/>
-          </a:lnRef>
-          <a:fillRef idx="3">
-            <a:schemeClr val="accent1"/>
-          </a:fillRef>
-          <a:effectRef idx="2">
-            <a:schemeClr val="accent1"/>
-          </a:effectRef>
-          <a:fontRef idx="minor">
-            <a:schemeClr val="lt1"/>
-          </a:fontRef>
-        </p:style>
-        <p:txBody>
-          <a:bodyPr rtlCol="0" anchor="ctr"/>
-          <a:lstStyle/>
-          <a:p>
-            <a:pPr algn="ctr"/>
-          </a:p>
-        </p:txBody>
-      </p:sp>
-      <p:sp>
-        <p:nvSpPr>
-          <p:cNvPr id="7" name="TextBox 6"/>
-          <p:cNvSpPr txBox="1"/>
-          <p:nvPr/>
-        </p:nvSpPr>
-        <p:spPr>
-          <a:xfrm>
-            <a:off x="813816" y="502920"/>
-            <a:ext cx="10634472" cy="685800"/>
-          </a:xfrm>
-          <a:prstGeom prst="rect">
-            <a:avLst/>
-          </a:prstGeom>
-          <a:noFill/>
-        </p:spPr>
-        <p:txBody>
-          <a:bodyPr wrap="square">
-            <a:spAutoFit/>
-          </a:bodyPr>
-          <a:lstStyle/>
-          <a:p>
-            <a:pPr algn="l"/>
-            <a:r>
-              <a:rPr sz="2400" b="1" i="0">
-                <a:solidFill>
-                  <a:srgbClr val="1F2C56"/>
-                </a:solidFill>
-                <a:latin typeface="Arial"/>
-              </a:rPr>
-              <a:t>Schritt 3: Handeln und dokumentieren</a:t>
-            </a:r>
-          </a:p>
-        </p:txBody>
-      </p:sp>
-      <p:sp>
-        <p:nvSpPr>
-          <p:cNvPr id="8" name="TextBox 7"/>
-          <p:cNvSpPr txBox="1"/>
-          <p:nvPr/>
-        </p:nvSpPr>
-        <p:spPr>
-          <a:xfrm>
-            <a:off x="685800" y="1417320"/>
-            <a:ext cx="10817352" cy="4892040"/>
-          </a:xfrm>
-          <a:prstGeom prst="rect">
-            <a:avLst/>
-          </a:prstGeom>
-          <a:noFill/>
-        </p:spPr>
-        <p:txBody>
-          <a:bodyPr wrap="square">
-            <a:spAutoFit/>
-          </a:bodyPr>
-          <a:lstStyle/>
-          <a:p>
-            <a:pPr marL="190500" indent="-190500">
-              <a:spcBef>
-                <a:spcPts val="400"/>
-              </a:spcBef>
-              <a:spcAft>
-                <a:spcPts val="200"/>
-              </a:spcAft>
-            </a:pPr>
-            <a:r>
-              <a:rPr sz="1300">
-                <a:solidFill>
-                  <a:srgbClr val="3D5466"/>
-                </a:solidFill>
-                <a:latin typeface="Arial"/>
-              </a:rPr>
-              <a:t>▸  Für jeden Prio-1-Kunden: konkrete Maßnahme definieren, Termin setzen, in agree dokumentieren. Die Maßnahme muss einem der vier NMZ-Hebel zugeordnet sein:</a:t>
-            </a:r>
-          </a:p>
-          <a:p>
-            <a:pPr marL="190500" indent="-190500">
-              <a:spcBef>
-                <a:spcPts val="400"/>
-              </a:spcBef>
-              <a:spcAft>
-                <a:spcPts val="200"/>
-              </a:spcAft>
-            </a:pPr>
-            <a:r>
-              <a:rPr sz="1300">
-                <a:solidFill>
-                  <a:srgbClr val="3D5466"/>
-                </a:solidFill>
-                <a:latin typeface="Arial"/>
-              </a:rPr>
-              <a:t>▸  Zinshebel: Konditionengespräch vorbereiten (→ M14)</a:t>
-            </a:r>
-          </a:p>
-          <a:p>
-            <a:pPr marL="190500" indent="-190500">
-              <a:spcBef>
-                <a:spcPts val="400"/>
-              </a:spcBef>
-              <a:spcAft>
-                <a:spcPts val="200"/>
-              </a:spcAft>
-            </a:pPr>
-            <a:r>
-              <a:rPr sz="1300">
-                <a:solidFill>
-                  <a:srgbClr val="3D5466"/>
-                </a:solidFill>
-                <a:latin typeface="Arial"/>
-              </a:rPr>
-              <a:t>▸  Verbundhebel: Verbundpartner-Termin vereinbaren (→ M13)</a:t>
-            </a:r>
-          </a:p>
-          <a:p>
-            <a:pPr marL="190500" indent="-190500">
-              <a:spcBef>
-                <a:spcPts val="400"/>
-              </a:spcBef>
-              <a:spcAft>
-                <a:spcPts val="200"/>
-              </a:spcAft>
-            </a:pPr>
-            <a:r>
-              <a:rPr sz="1300">
-                <a:solidFill>
-                  <a:srgbClr val="3D5466"/>
-                </a:solidFill>
-                <a:latin typeface="Arial"/>
-              </a:rPr>
-              <a:t>▸  Risikohebel: Rating-Gespräch, Besicherungsoptimierung (gemeinsam mit Marktfolge/Kredit)</a:t>
-            </a:r>
-          </a:p>
-          <a:p>
-            <a:pPr marL="190500" indent="-190500">
-              <a:spcBef>
-                <a:spcPts val="400"/>
-              </a:spcBef>
-              <a:spcAft>
-                <a:spcPts val="200"/>
-              </a:spcAft>
-            </a:pPr>
-            <a:r>
-              <a:rPr sz="1300">
-                <a:solidFill>
-                  <a:srgbClr val="3D5466"/>
-                </a:solidFill>
-                <a:latin typeface="Arial"/>
-              </a:rPr>
-              <a:t>▸  Kostenhebel: Betreuungsintensität überprüfen (Führungsgespräch)</a:t>
-            </a:r>
-          </a:p>
-          <a:p>
-            <a:pPr marL="177800" indent="-177800">
-              <a:spcBef>
-                <a:spcPts val="600"/>
-              </a:spcBef>
-              <a:spcAft>
-                <a:spcPts val="200"/>
-              </a:spcAft>
-            </a:pPr>
-            <a:r>
-              <a:rPr sz="1200" i="1">
-                <a:solidFill>
-                  <a:srgbClr val="3D5466"/>
-                </a:solidFill>
-                <a:latin typeface="Arial"/>
-              </a:rPr>
-              <a:t>→  Stichwort-Leitfaden: Margenverteidigung im Konditionsgespräch</a:t>
-            </a:r>
-          </a:p>
-          <a:p>
-            <a:pPr marL="177800" indent="-177800">
-              <a:spcBef>
-                <a:spcPts val="600"/>
-              </a:spcBef>
-              <a:spcAft>
-                <a:spcPts val="200"/>
-              </a:spcAft>
-            </a:pPr>
-            <a:r>
-              <a:rPr sz="1200" i="1">
-                <a:solidFill>
-                  <a:srgbClr val="3D5466"/>
-                </a:solidFill>
-                <a:latin typeface="Arial"/>
-              </a:rPr>
-              <a:t>→  Das Ablesen der NMZ ist der einfache Teil. Das Gespräch mit dem Kunden über eine Margenanpassung ist der schwierige. Drei praxiserprobte Argumentationslinien:</a:t>
-            </a:r>
-          </a:p>
-          <a:p>
-            <a:pPr marL="190500" indent="-190500">
-              <a:spcBef>
-                <a:spcPts val="400"/>
-              </a:spcBef>
-              <a:spcAft>
-                <a:spcPts val="200"/>
-              </a:spcAft>
-            </a:pPr>
-            <a:r>
-              <a:rPr sz="1300">
-                <a:solidFill>
-                  <a:srgbClr val="3D5466"/>
-                </a:solidFill>
-                <a:latin typeface="Arial"/>
-              </a:rPr>
-              <a:t>▸  ## 4.5 Praxiscase: Felix Braun optimiert seinen Bestand</a:t>
-            </a:r>
-          </a:p>
-          <a:p>
-            <a:pPr marL="190500" indent="-190500">
-              <a:spcBef>
-                <a:spcPts val="400"/>
-              </a:spcBef>
-              <a:spcAft>
-                <a:spcPts val="200"/>
-              </a:spcAft>
-            </a:pPr>
-            <a:r>
-              <a:rPr sz="1300">
-                <a:solidFill>
-                  <a:srgbClr val="3D5466"/>
-                </a:solidFill>
-                <a:latin typeface="Arial"/>
-              </a:rPr>
-              <a:t>▸  Ausgangssituation</a:t>
-            </a:r>
-          </a:p>
-          <a:p>
-            <a:pPr marL="190500" indent="-190500">
-              <a:spcBef>
-                <a:spcPts val="400"/>
-              </a:spcBef>
-              <a:spcAft>
-                <a:spcPts val="200"/>
-              </a:spcAft>
-            </a:pPr>
-            <a:r>
-              <a:rPr sz="1300">
-                <a:solidFill>
-                  <a:srgbClr val="3D5466"/>
-                </a:solidFill>
-                <a:latin typeface="Arial"/>
-              </a:rPr>
-              <a:t>▸  Analyse</a:t>
-            </a:r>
-          </a:p>
-          <a:p>
-            <a:pPr marL="190500" indent="-190500">
-              <a:spcBef>
-                <a:spcPts val="400"/>
-              </a:spcBef>
-              <a:spcAft>
-                <a:spcPts val="200"/>
-              </a:spcAft>
-            </a:pPr>
-            <a:r>
-              <a:rPr sz="1300">
-                <a:solidFill>
-                  <a:srgbClr val="3D5466"/>
-                </a:solidFill>
-                <a:latin typeface="Arial"/>
-              </a:rPr>
-              <a:t>▸  Felix ruft das Bestandsranking auf. Er sieht sofort: Sieben Kunden haben eine NMZ unter 0,5 %, davon zwei mit negativem DB. Die Hauptursache variiert:</a:t>
-            </a:r>
-          </a:p>
-          <a:p>
-            <a:pPr marL="190500" indent="-190500">
-              <a:spcBef>
-                <a:spcPts val="400"/>
-              </a:spcBef>
-              <a:spcAft>
-                <a:spcPts val="200"/>
-              </a:spcAft>
-            </a:pPr>
-            <a:r>
-              <a:rPr sz="1300">
-                <a:solidFill>
-                  <a:srgbClr val="3D5466"/>
-                </a:solidFill>
-                <a:latin typeface="Arial"/>
-              </a:rPr>
-              <a:t>▸  Felix priorisiert</a:t>
-            </a:r>
-          </a:p>
-        </p:txBody>
-      </p:sp>
-      <p:sp>
-        <p:nvSpPr>
-          <p:cNvPr id="9" name="Rectangle 8"/>
-          <p:cNvSpPr/>
-          <p:nvPr/>
-        </p:nvSpPr>
-        <p:spPr>
-          <a:xfrm>
-            <a:off x="0" y="6510528"/>
-            <a:ext cx="12188952" cy="347472"/>
-          </a:xfrm>
-          <a:prstGeom prst="rect">
-            <a:avLst/>
-          </a:prstGeom>
-          <a:solidFill>
-            <a:srgbClr val="0A1937"/>
-          </a:solidFill>
-          <a:ln>
-            <a:noFill/>
-          </a:ln>
-        </p:spPr>
-        <p:style>
-          <a:lnRef idx="1">
-            <a:schemeClr val="accent1"/>
-          </a:lnRef>
-          <a:fillRef idx="3">
-            <a:schemeClr val="accent1"/>
-          </a:fillRef>
-          <a:effectRef idx="2">
-            <a:schemeClr val="accent1"/>
-          </a:effectRef>
-          <a:fontRef idx="minor">
-            <a:schemeClr val="lt1"/>
-          </a:fontRef>
-        </p:style>
-        <p:txBody>
-          <a:bodyPr rtlCol="0" anchor="ctr"/>
-          <a:lstStyle/>
-          <a:p>
-            <a:pPr algn="ctr"/>
-          </a:p>
-        </p:txBody>
-      </p:sp>
-      <p:sp>
-        <p:nvSpPr>
-          <p:cNvPr id="10" name="TextBox 9"/>
-          <p:cNvSpPr txBox="1"/>
-          <p:nvPr/>
-        </p:nvSpPr>
-        <p:spPr>
-          <a:xfrm>
-            <a:off x="685800" y="6583680"/>
-            <a:ext cx="6490411" cy="256032"/>
-          </a:xfrm>
-          <a:prstGeom prst="rect">
-            <a:avLst/>
-          </a:prstGeom>
-          <a:noFill/>
-        </p:spPr>
-        <p:txBody>
-          <a:bodyPr wrap="none">
-            <a:spAutoFit/>
-          </a:bodyPr>
-          <a:lstStyle/>
-          <a:p>
-            <a:pPr algn="l"/>
-            <a:r>
-              <a:rPr sz="700">
-                <a:solidFill>
-                  <a:srgbClr val="A0B4D2"/>
-                </a:solidFill>
-                <a:latin typeface="Consolas"/>
-              </a:rPr>
-              <a:t>FKB Campus  ·  M16</a:t>
-            </a:r>
-          </a:p>
-        </p:txBody>
-      </p:sp>
-    </p:spTree>
-  </p:cSld>
-  <p:clrMapOvr>
-    <a:masterClrMapping/>
-  </p:clrMapOvr>
-</p:sld>
-</file>
-
-<file path=ppt/slides/slide14.xml><?xml version="1.0" encoding="utf-8"?>
-<p:sld xmlns:a="http://schemas.openxmlformats.org/drawingml/2006/main" xmlns:p="http://schemas.openxmlformats.org/presentationml/2006/main" xmlns:r="http://schemas.openxmlformats.org/officeDocument/2006/relationships">
-  <p:cSld>
-    <p:spTree>
-      <p:nvGrpSpPr>
-        <p:cNvPr id="1" name=""/>
-        <p:cNvGrpSpPr/>
-        <p:nvPr/>
-      </p:nvGrpSpPr>
-      <p:grpSpPr/>
-      <p:sp>
-        <p:nvSpPr>
-          <p:cNvPr id="2" name="Rectangle 1"/>
-          <p:cNvSpPr/>
-          <p:nvPr/>
-        </p:nvSpPr>
-        <p:spPr>
-          <a:xfrm>
-            <a:off x="0" y="0"/>
-            <a:ext cx="12188952" cy="6858000"/>
-          </a:xfrm>
-          <a:prstGeom prst="rect">
-            <a:avLst/>
-          </a:prstGeom>
-          <a:solidFill>
-            <a:srgbClr val="FFFFFF"/>
-          </a:solidFill>
-          <a:ln>
-            <a:noFill/>
-          </a:ln>
-        </p:spPr>
-        <p:style>
-          <a:lnRef idx="1">
-            <a:schemeClr val="accent1"/>
-          </a:lnRef>
-          <a:fillRef idx="3">
-            <a:schemeClr val="accent1"/>
-          </a:fillRef>
-          <a:effectRef idx="2">
-            <a:schemeClr val="accent1"/>
-          </a:effectRef>
-          <a:fontRef idx="minor">
-            <a:schemeClr val="lt1"/>
-          </a:fontRef>
-        </p:style>
-        <p:txBody>
-          <a:bodyPr rtlCol="0" anchor="ctr"/>
-          <a:lstStyle/>
-          <a:p>
-            <a:pPr algn="ctr"/>
-          </a:p>
-        </p:txBody>
-      </p:sp>
-      <p:sp>
-        <p:nvSpPr>
-          <p:cNvPr id="3" name="Rectangle 2"/>
-          <p:cNvSpPr/>
-          <p:nvPr/>
-        </p:nvSpPr>
-        <p:spPr>
-          <a:xfrm>
-            <a:off x="0" y="0"/>
-            <a:ext cx="12188952" cy="50292"/>
-          </a:xfrm>
-          <a:prstGeom prst="rect">
-            <a:avLst/>
-          </a:prstGeom>
-          <a:solidFill>
-            <a:srgbClr val="1F2C56"/>
-          </a:solidFill>
-          <a:ln>
-            <a:noFill/>
-          </a:ln>
-        </p:spPr>
-        <p:style>
-          <a:lnRef idx="1">
-            <a:schemeClr val="accent1"/>
-          </a:lnRef>
-          <a:fillRef idx="3">
-            <a:schemeClr val="accent1"/>
-          </a:fillRef>
-          <a:effectRef idx="2">
-            <a:schemeClr val="accent1"/>
-          </a:effectRef>
-          <a:fontRef idx="minor">
-            <a:schemeClr val="lt1"/>
-          </a:fontRef>
-        </p:style>
-        <p:txBody>
-          <a:bodyPr rtlCol="0" anchor="ctr"/>
-          <a:lstStyle/>
-          <a:p>
-            <a:pPr algn="ctr"/>
-          </a:p>
-        </p:txBody>
-      </p:sp>
-      <p:sp>
-        <p:nvSpPr>
-          <p:cNvPr id="4" name="TextBox 3"/>
-          <p:cNvSpPr txBox="1"/>
-          <p:nvPr/>
-        </p:nvSpPr>
-        <p:spPr>
-          <a:xfrm>
-            <a:off x="685800" y="109728"/>
-            <a:ext cx="10817352" cy="228600"/>
-          </a:xfrm>
-          <a:prstGeom prst="rect">
-            <a:avLst/>
-          </a:prstGeom>
-          <a:noFill/>
-        </p:spPr>
-        <p:txBody>
-          <a:bodyPr wrap="none">
-            <a:spAutoFit/>
-          </a:bodyPr>
-          <a:lstStyle/>
-          <a:p>
-            <a:pPr algn="l"/>
-            <a:r>
-              <a:rPr sz="750">
-                <a:solidFill>
-                  <a:srgbClr val="78808C"/>
-                </a:solidFill>
-                <a:latin typeface="Consolas"/>
-              </a:rPr>
-              <a:t>M16  ·  ÜBERSICHT</a:t>
-            </a:r>
-          </a:p>
-        </p:txBody>
-      </p:sp>
-      <p:sp>
-        <p:nvSpPr>
-          <p:cNvPr id="5" name="TextBox 4"/>
-          <p:cNvSpPr txBox="1"/>
-          <p:nvPr/>
-        </p:nvSpPr>
-        <p:spPr>
-          <a:xfrm>
-            <a:off x="685800" y="502920"/>
-            <a:ext cx="10817352" cy="594360"/>
-          </a:xfrm>
-          <a:prstGeom prst="rect">
-            <a:avLst/>
-          </a:prstGeom>
-          <a:noFill/>
-        </p:spPr>
-        <p:txBody>
-          <a:bodyPr wrap="square">
-            <a:spAutoFit/>
-          </a:bodyPr>
-          <a:lstStyle/>
-          <a:p>
-            <a:pPr algn="l"/>
-            <a:r>
-              <a:rPr sz="2000" b="1" i="0">
-                <a:solidFill>
-                  <a:srgbClr val="1F2C56"/>
-                </a:solidFill>
-                <a:latin typeface="Arial"/>
-              </a:rPr>
-              <a:t>Schritt 3: Handeln und dokumentieren</a:t>
-            </a:r>
-          </a:p>
-        </p:txBody>
-      </p:sp>
-      <p:sp>
-        <p:nvSpPr>
-          <p:cNvPr id="6" name="Rectangle 5"/>
-          <p:cNvSpPr/>
-          <p:nvPr/>
-        </p:nvSpPr>
-        <p:spPr>
-          <a:xfrm>
-            <a:off x="685800" y="1143000"/>
-            <a:ext cx="10817352" cy="25400"/>
-          </a:xfrm>
-          <a:prstGeom prst="rect">
-            <a:avLst/>
-          </a:prstGeom>
-          <a:solidFill>
-            <a:srgbClr val="D9C089"/>
-          </a:solidFill>
-          <a:ln>
-            <a:noFill/>
-          </a:ln>
-        </p:spPr>
-        <p:style>
-          <a:lnRef idx="1">
-            <a:schemeClr val="accent1"/>
-          </a:lnRef>
-          <a:fillRef idx="3">
-            <a:schemeClr val="accent1"/>
-          </a:fillRef>
-          <a:effectRef idx="2">
-            <a:schemeClr val="accent1"/>
-          </a:effectRef>
-          <a:fontRef idx="minor">
-            <a:schemeClr val="lt1"/>
-          </a:fontRef>
-        </p:style>
-        <p:txBody>
-          <a:bodyPr rtlCol="0" anchor="ctr"/>
-          <a:lstStyle/>
-          <a:p>
-            <a:pPr algn="ctr"/>
-          </a:p>
-        </p:txBody>
-      </p:sp>
-      <p:graphicFrame>
-        <p:nvGraphicFramePr>
-          <p:cNvPr id="7" name="Table 6"/>
-          <p:cNvGraphicFramePr>
-            <a:graphicFrameLocks noGrp="1"/>
-          </p:cNvGraphicFramePr>
-          <p:nvPr/>
-        </p:nvGraphicFramePr>
-        <p:xfrm>
-          <a:off x="685800" y="1417320"/>
-          <a:ext cx="10817352" cy="2304288"/>
-        </p:xfrm>
-        <a:graphic>
-          <a:graphicData uri="http://schemas.openxmlformats.org/drawingml/2006/table">
-            <a:tbl>
-              <a:tblPr firstRow="1" bandRow="1">
-                <a:tableStyleId>{5C22544A-7EE6-4342-B048-85BDC9FD1C3A}</a:tableStyleId>
-              </a:tblPr>
-              <a:tblGrid>
-                <a:gridCol w="2704338"/>
-                <a:gridCol w="2704338"/>
-                <a:gridCol w="2704338"/>
-                <a:gridCol w="2704338"/>
-              </a:tblGrid>
-              <a:tr h="384048">
-                <a:tc>
-                  <a:txBody>
-                    <a:bodyPr/>
-                    <a:lstStyle/>
-                    <a:p>
-                      <a:r>
-                        <a:rPr sz="1100" b="1">
-                          <a:solidFill>
-                            <a:srgbClr val="FFFFFF"/>
-                          </a:solidFill>
-                          <a:latin typeface="Arial"/>
-                        </a:rPr>
-                        <a:t>Kunde</a:t>
-                      </a:r>
-                    </a:p>
-                  </a:txBody>
-                  <a:tcPr>
-                    <a:solidFill>
-                      <a:srgbClr val="1F2C56"/>
-                    </a:solidFill>
-                  </a:tcPr>
-                </a:tc>
-                <a:tc>
-                  <a:txBody>
-                    <a:bodyPr/>
-                    <a:lstStyle/>
-                    <a:p>
-                      <a:r>
-                        <a:rPr sz="1100" b="1">
-                          <a:solidFill>
-                            <a:srgbClr val="FFFFFF"/>
-                          </a:solidFill>
-                          <a:latin typeface="Arial"/>
-                        </a:rPr>
-                        <a:t>NMZ</a:t>
-                      </a:r>
-                    </a:p>
-                  </a:txBody>
-                  <a:tcPr>
-                    <a:solidFill>
-                      <a:srgbClr val="1F2C56"/>
-                    </a:solidFill>
-                  </a:tcPr>
-                </a:tc>
-                <a:tc>
-                  <a:txBody>
-                    <a:bodyPr/>
-                    <a:lstStyle/>
-                    <a:p>
-                      <a:r>
-                        <a:rPr sz="1100" b="1">
-                          <a:solidFill>
-                            <a:srgbClr val="FFFFFF"/>
-                          </a:solidFill>
-                          <a:latin typeface="Arial"/>
-                        </a:rPr>
-                        <a:t>Hauptursache</a:t>
-                      </a:r>
-                    </a:p>
-                  </a:txBody>
-                  <a:tcPr>
-                    <a:solidFill>
-                      <a:srgbClr val="1F2C56"/>
-                    </a:solidFill>
-                  </a:tcPr>
-                </a:tc>
-                <a:tc>
-                  <a:txBody>
-                    <a:bodyPr/>
-                    <a:lstStyle/>
-                    <a:p>
-                      <a:r>
-                        <a:rPr sz="1100" b="1">
-                          <a:solidFill>
-                            <a:srgbClr val="FFFFFF"/>
-                          </a:solidFill>
-                          <a:latin typeface="Arial"/>
-                        </a:rPr>
-                        <a:t>Hebel</a:t>
-                      </a:r>
-                    </a:p>
-                  </a:txBody>
-                  <a:tcPr>
-                    <a:solidFill>
-                      <a:srgbClr val="1F2C56"/>
-                    </a:solidFill>
-                  </a:tcPr>
-                </a:tc>
-              </a:tr>
-              <a:tr h="384048">
-                <a:tc>
-                  <a:txBody>
-                    <a:bodyPr/>
-                    <a:lstStyle/>
-                    <a:p>
-                      <a:r>
-                        <a:rPr sz="1050">
-                          <a:solidFill>
-                            <a:srgbClr val="3D5466"/>
-                          </a:solidFill>
-                          <a:latin typeface="Arial"/>
-                        </a:rPr>
-                        <a:t>Metzger GmbH</a:t>
-                      </a:r>
-                    </a:p>
-                  </a:txBody>
-                  <a:tcPr/>
-                </a:tc>
-                <a:tc>
-                  <a:txBody>
-                    <a:bodyPr/>
-                    <a:lstStyle/>
-                    <a:p>
-                      <a:r>
-                        <a:rPr sz="1050">
-                          <a:solidFill>
-                            <a:srgbClr val="3D5466"/>
-                          </a:solidFill>
-                          <a:latin typeface="Arial"/>
-                        </a:rPr>
-                        <a:t>−0,20 %</a:t>
-                      </a:r>
-                    </a:p>
-                  </a:txBody>
-                  <a:tcPr/>
-                </a:tc>
-                <a:tc>
-                  <a:txBody>
-                    <a:bodyPr/>
-                    <a:lstStyle/>
-                    <a:p>
-                      <a:r>
-                        <a:rPr sz="1050">
-                          <a:solidFill>
-                            <a:srgbClr val="3D5466"/>
-                          </a:solidFill>
-                          <a:latin typeface="Arial"/>
-                        </a:rPr>
-                        <a:t>Rating D, Marge 1,10 %</a:t>
-                      </a:r>
-                    </a:p>
-                  </a:txBody>
-                  <a:tcPr/>
-                </a:tc>
-                <a:tc>
-                  <a:txBody>
-                    <a:bodyPr/>
-                    <a:lstStyle/>
-                    <a:p>
-                      <a:r>
-                        <a:rPr sz="1050">
-                          <a:solidFill>
-                            <a:srgbClr val="3D5466"/>
-                          </a:solidFill>
-                          <a:latin typeface="Arial"/>
-                        </a:rPr>
-                        <a:t>Rating / Exit</a:t>
+                        <a:t>—</a:t>
                       </a:r>
                     </a:p>
                   </a:txBody>
@@ -7062,7 +6717,7 @@
                           </a:solidFill>
                           <a:latin typeface="Arial"/>
                         </a:rPr>
-                        <a:t>Bau Franz KG</a:t>
+                        <a:t>NMZ &lt; 0,5 %</a:t>
                       </a:r>
                     </a:p>
                   </a:txBody>
@@ -7080,7 +6735,7 @@
                           </a:solidFill>
                           <a:latin typeface="Arial"/>
                         </a:rPr>
-                        <a:t>0,22 %</a:t>
+                        <a:t>7 Kunden</a:t>
                       </a:r>
                     </a:p>
                   </a:txBody>
@@ -7098,247 +6753,7 @@
                           </a:solidFill>
                           <a:latin typeface="Arial"/>
                         </a:rPr>
-                        <a:t>Niedrige Marge (0,95 %), kein Verbund</a:t>
-                      </a:r>
-                    </a:p>
-                  </a:txBody>
-                  <a:tcPr/>
-                </a:tc>
-                <a:tc>
-                  <a:txBody>
-                    <a:bodyPr/>
-                    <a:lstStyle/>
-                    <a:p>
-                      <a:r>
-                        <a:rPr sz="1050">
-                          <a:solidFill>
-                            <a:srgbClr val="3D5466"/>
-                          </a:solidFill>
-                          <a:latin typeface="Arial"/>
-                        </a:rPr>
-                        <a:t>Verbund + Zins</a:t>
-                      </a:r>
-                    </a:p>
-                  </a:txBody>
-                  <a:tcPr/>
-                </a:tc>
-              </a:tr>
-              <a:tr h="384048">
-                <a:tc>
-                  <a:txBody>
-                    <a:bodyPr/>
-                    <a:lstStyle/>
-                    <a:p>
-                      <a:r>
-                        <a:rPr sz="1050">
-                          <a:solidFill>
-                            <a:srgbClr val="3D5466"/>
-                          </a:solidFill>
-                          <a:latin typeface="Arial"/>
-                        </a:rPr>
-                        <a:t>Holz Meier</a:t>
-                      </a:r>
-                    </a:p>
-                  </a:txBody>
-                  <a:tcPr/>
-                </a:tc>
-                <a:tc>
-                  <a:txBody>
-                    <a:bodyPr/>
-                    <a:lstStyle/>
-                    <a:p>
-                      <a:r>
-                        <a:rPr sz="1050">
-                          <a:solidFill>
-                            <a:srgbClr val="3D5466"/>
-                          </a:solidFill>
-                          <a:latin typeface="Arial"/>
-                        </a:rPr>
-                        <a:t>0,38 %</a:t>
-                      </a:r>
-                    </a:p>
-                  </a:txBody>
-                  <a:tcPr/>
-                </a:tc>
-                <a:tc>
-                  <a:txBody>
-                    <a:bodyPr/>
-                    <a:lstStyle/>
-                    <a:p>
-                      <a:r>
-                        <a:rPr sz="1050">
-                          <a:solidFill>
-                            <a:srgbClr val="3D5466"/>
-                          </a:solidFill>
-                          <a:latin typeface="Arial"/>
-                        </a:rPr>
-                        <a:t>Hohe Betreuungskosten (22 Std.)</a:t>
-                      </a:r>
-                    </a:p>
-                  </a:txBody>
-                  <a:tcPr/>
-                </a:tc>
-                <a:tc>
-                  <a:txBody>
-                    <a:bodyPr/>
-                    <a:lstStyle/>
-                    <a:p>
-                      <a:r>
-                        <a:rPr sz="1050">
-                          <a:solidFill>
-                            <a:srgbClr val="3D5466"/>
-                          </a:solidFill>
-                          <a:latin typeface="Arial"/>
-                        </a:rPr>
-                        <a:t>Kostenhebel</a:t>
-                      </a:r>
-                    </a:p>
-                  </a:txBody>
-                  <a:tcPr/>
-                </a:tc>
-              </a:tr>
-              <a:tr h="384048">
-                <a:tc>
-                  <a:txBody>
-                    <a:bodyPr/>
-                    <a:lstStyle/>
-                    <a:p>
-                      <a:r>
-                        <a:rPr sz="1050">
-                          <a:solidFill>
-                            <a:srgbClr val="3D5466"/>
-                          </a:solidFill>
-                          <a:latin typeface="Arial"/>
-                        </a:rPr>
-                        <a:t>Auto König GmbH</a:t>
-                      </a:r>
-                    </a:p>
-                  </a:txBody>
-                  <a:tcPr/>
-                </a:tc>
-                <a:tc>
-                  <a:txBody>
-                    <a:bodyPr/>
-                    <a:lstStyle/>
-                    <a:p>
-                      <a:r>
-                        <a:rPr sz="1050">
-                          <a:solidFill>
-                            <a:srgbClr val="3D5466"/>
-                          </a:solidFill>
-                          <a:latin typeface="Arial"/>
-                        </a:rPr>
-                        <a:t>0,41 %</a:t>
-                      </a:r>
-                    </a:p>
-                  </a:txBody>
-                  <a:tcPr/>
-                </a:tc>
-                <a:tc>
-                  <a:txBody>
-                    <a:bodyPr/>
-                    <a:lstStyle/>
-                    <a:p>
-                      <a:r>
-                        <a:rPr sz="1050">
-                          <a:solidFill>
-                            <a:srgbClr val="3D5466"/>
-                          </a:solidFill>
-                          <a:latin typeface="Arial"/>
-                        </a:rPr>
-                        <a:t>Kein Verbund (R+V, UI beide offen)</a:t>
-                      </a:r>
-                    </a:p>
-                  </a:txBody>
-                  <a:tcPr/>
-                </a:tc>
-                <a:tc>
-                  <a:txBody>
-                    <a:bodyPr/>
-                    <a:lstStyle/>
-                    <a:p>
-                      <a:r>
-                        <a:rPr sz="1050">
-                          <a:solidFill>
-                            <a:srgbClr val="3D5466"/>
-                          </a:solidFill>
-                          <a:latin typeface="Arial"/>
-                        </a:rPr>
-                        <a:t>Verbund</a:t>
-                      </a:r>
-                    </a:p>
-                  </a:txBody>
-                  <a:tcPr/>
-                </a:tc>
-              </a:tr>
-              <a:tr h="384048">
-                <a:tc>
-                  <a:txBody>
-                    <a:bodyPr/>
-                    <a:lstStyle/>
-                    <a:p>
-                      <a:r>
-                        <a:rPr sz="1050">
-                          <a:solidFill>
-                            <a:srgbClr val="3D5466"/>
-                          </a:solidFill>
-                          <a:latin typeface="Arial"/>
-                        </a:rPr>
-                        <a:t>Druck Schmidt</a:t>
-                      </a:r>
-                    </a:p>
-                  </a:txBody>
-                  <a:tcPr/>
-                </a:tc>
-                <a:tc>
-                  <a:txBody>
-                    <a:bodyPr/>
-                    <a:lstStyle/>
-                    <a:p>
-                      <a:r>
-                        <a:rPr sz="1050">
-                          <a:solidFill>
-                            <a:srgbClr val="3D5466"/>
-                          </a:solidFill>
-                          <a:latin typeface="Arial"/>
-                        </a:rPr>
-                        <a:t>0,45 %</a:t>
-                      </a:r>
-                    </a:p>
-                  </a:txBody>
-                  <a:tcPr/>
-                </a:tc>
-                <a:tc>
-                  <a:txBody>
-                    <a:bodyPr/>
-                    <a:lstStyle/>
-                    <a:p>
-                      <a:r>
-                        <a:rPr sz="1050">
-                          <a:solidFill>
-                            <a:srgbClr val="3D5466"/>
-                          </a:solidFill>
-                          <a:latin typeface="Arial"/>
-                        </a:rPr>
-                        <a:t>Laufende Linie hoch ausgenutzt (EAD↑)</a:t>
-                      </a:r>
-                    </a:p>
-                  </a:txBody>
-                  <a:tcPr/>
-                </a:tc>
-                <a:tc>
-                  <a:txBody>
-                    <a:bodyPr/>
-                    <a:lstStyle/>
-                    <a:p>
-                      <a:r>
-                        <a:rPr sz="1050">
-                          <a:solidFill>
-                            <a:srgbClr val="3D5466"/>
-                          </a:solidFill>
-                          <a:latin typeface="Arial"/>
-                        </a:rPr>
-                        <a:t>Besicherung</a:t>
+                        <a:t>davon 2 negativer DB</a:t>
                       </a:r>
                     </a:p>
                   </a:txBody>
@@ -7596,7 +7011,7 @@
                 </a:solidFill>
                 <a:latin typeface="Consolas"/>
               </a:rPr>
-              <a:t>M16  ·  INHALT</a:t>
+              <a:t>M16  ·  ARBEITSBLATT</a:t>
             </a:r>
           </a:p>
         </p:txBody>
@@ -7717,7 +7132,7 @@
                 </a:solidFill>
                 <a:latin typeface="Arial"/>
               </a:rPr>
-              <a:t>AB-1: Mein NMZ-Bestandsbild</a:t>
+              <a:t>Praxisfall bearbeiten: NMZ-Bestandsbild und Maßnahmenplan</a:t>
             </a:r>
           </a:p>
         </p:txBody>
@@ -7730,8 +7145,8 @@
         </p:nvSpPr>
         <p:spPr>
           <a:xfrm>
-            <a:off x="685800" y="1417320"/>
-            <a:ext cx="10817352" cy="4892040"/>
+            <a:off x="685800" y="1554480"/>
+            <a:ext cx="10817352" cy="3840480"/>
           </a:xfrm>
           <a:prstGeom prst="rect">
             <a:avLst/>
@@ -7739,7 +7154,7 @@
           <a:noFill/>
         </p:spPr>
         <p:txBody>
-          <a:bodyPr wrap="square" anchor="ctr">
+          <a:bodyPr wrap="square">
             <a:spAutoFit/>
           </a:bodyPr>
           <a:lstStyle/>
@@ -7753,13 +7168,13 @@
               </a:spcAft>
             </a:pPr>
             <a:r>
-              <a:rPr sz="1300">
+              <a:rPr sz="1400">
                 <a:solidFill>
                   <a:srgbClr val="3D5466"/>
                 </a:solidFill>
                 <a:latin typeface="Arial"/>
               </a:rPr>
-              <a:t>▸  Dominantes Schwachfeld in meinem Bestand:</a:t>
+              <a:t>▸  Erstellen Sie Ihr NMZ-Bestandsbild und markieren Sie die Kunden unter Benchmark (AB-1).</a:t>
             </a:r>
           </a:p>
           <a:p>
@@ -7772,13 +7187,32 @@
               </a:spcAft>
             </a:pPr>
             <a:r>
-              <a:rPr sz="1300">
+              <a:rPr sz="1400">
                 <a:solidFill>
                   <a:srgbClr val="3D5466"/>
                 </a:solidFill>
                 <a:latin typeface="Arial"/>
               </a:rPr>
-              <a:t>▸  ☐ Zinsmarge zu niedrig  ☐ Verbundgeschäft fehlt  ☐ Risikokosten zu hoch  ☐ Betreuungskosten zu hoch</a:t>
+              <a:t>▸  Priorisieren Sie die drei Kunden mit dem größten Hebel.</a:t>
+            </a:r>
+          </a:p>
+          <a:p>
+            <a:pPr marL="190500" indent="-190500">
+              <a:spcBef>
+                <a:spcPts val="400"/>
+              </a:spcBef>
+              <a:spcAft>
+                <a:spcPts val="200"/>
+              </a:spcAft>
+            </a:pPr>
+            <a:r>
+              <a:rPr sz="1400">
+                <a:solidFill>
+                  <a:srgbClr val="3D5466"/>
+                </a:solidFill>
+                <a:latin typeface="Arial"/>
+              </a:rPr>
+              <a:t>▸  Entwickeln Sie je Kunde einen Maßnahmenplan mit Ursache, Hebel und Termin (AB-2).</a:t>
             </a:r>
           </a:p>
         </p:txBody>
@@ -7786,6 +7220,84 @@
       <p:sp>
         <p:nvSpPr>
           <p:cNvPr id="9" name="Rectangle 8"/>
+          <p:cNvSpPr/>
+          <p:nvPr/>
+        </p:nvSpPr>
+        <p:spPr>
+          <a:xfrm>
+            <a:off x="685800" y="5486400"/>
+            <a:ext cx="10817352" cy="640080"/>
+          </a:xfrm>
+          <a:prstGeom prst="rect">
+            <a:avLst/>
+          </a:prstGeom>
+          <a:solidFill>
+            <a:srgbClr val="1F2C56"/>
+          </a:solidFill>
+          <a:ln>
+            <a:noFill/>
+          </a:ln>
+        </p:spPr>
+        <p:style>
+          <a:lnRef idx="1">
+            <a:schemeClr val="accent1"/>
+          </a:lnRef>
+          <a:fillRef idx="3">
+            <a:schemeClr val="accent1"/>
+          </a:fillRef>
+          <a:effectRef idx="2">
+            <a:schemeClr val="accent1"/>
+          </a:effectRef>
+          <a:fontRef idx="minor">
+            <a:schemeClr val="lt1"/>
+          </a:fontRef>
+        </p:style>
+        <p:txBody>
+          <a:bodyPr rtlCol="0" anchor="ctr"/>
+          <a:lstStyle/>
+          <a:p>
+            <a:pPr algn="ctr"/>
+          </a:p>
+        </p:txBody>
+      </p:sp>
+      <p:sp>
+        <p:nvSpPr>
+          <p:cNvPr id="10" name="TextBox 9"/>
+          <p:cNvSpPr txBox="1"/>
+          <p:nvPr/>
+        </p:nvSpPr>
+        <p:spPr>
+          <a:xfrm>
+            <a:off x="868680" y="5596128"/>
+            <a:ext cx="10451592" cy="457200"/>
+          </a:xfrm>
+          <a:prstGeom prst="rect">
+            <a:avLst/>
+          </a:prstGeom>
+          <a:noFill/>
+        </p:spPr>
+        <p:txBody>
+          <a:bodyPr wrap="square">
+            <a:spAutoFit/>
+          </a:bodyPr>
+          <a:lstStyle/>
+          <a:p>
+            <a:pPr algn="l"/>
+            <a:r>
+              <a:rPr sz="1300" b="1" i="0">
+                <a:solidFill>
+                  <a:srgbClr val="FFFFFF"/>
+                </a:solidFill>
+                <a:latin typeface="Arial"/>
+              </a:rPr>
+              <a:t>→  Bearbeitung im Teilnehmer-Workbook (Arbeitsblatt mit Ausfüllfeldern)</a:t>
+            </a:r>
+          </a:p>
+        </p:txBody>
+      </p:sp>
+      <p:sp>
+        <p:nvSpPr>
+          <p:cNvPr id="11" name="Rectangle 10"/>
           <p:cNvSpPr/>
           <p:nvPr/>
         </p:nvSpPr>
@@ -7828,7 +7340,7 @@
       </p:sp>
       <p:sp>
         <p:nvSpPr>
-          <p:cNvPr id="10" name="TextBox 9"/>
+          <p:cNvPr id="12" name="TextBox 11"/>
           <p:cNvSpPr txBox="1"/>
           <p:nvPr/>
         </p:nvSpPr>
@@ -7894,7 +7406,7 @@
             <a:avLst/>
           </a:prstGeom>
           <a:solidFill>
-            <a:srgbClr val="FFFFFF"/>
+            <a:srgbClr val="EDEDF3"/>
           </a:solidFill>
           <a:ln>
             <a:noFill/>
@@ -7995,43 +7507,51 @@
                 </a:solidFill>
                 <a:latin typeface="Consolas"/>
               </a:rPr>
-              <a:t>M16  ·  ÜBERSICHT</a:t>
-            </a:r>
-          </a:p>
-        </p:txBody>
-      </p:sp>
-      <p:sp>
-        <p:nvSpPr>
-          <p:cNvPr id="5" name="TextBox 4"/>
-          <p:cNvSpPr txBox="1"/>
-          <p:nvPr/>
-        </p:nvSpPr>
-        <p:spPr>
-          <a:xfrm>
-            <a:off x="685800" y="502920"/>
-            <a:ext cx="10817352" cy="594360"/>
-          </a:xfrm>
-          <a:prstGeom prst="rect">
-            <a:avLst/>
-          </a:prstGeom>
-          <a:noFill/>
-        </p:spPr>
-        <p:txBody>
-          <a:bodyPr wrap="square">
-            <a:spAutoFit/>
-          </a:bodyPr>
-          <a:lstStyle/>
-          <a:p>
-            <a:pPr algn="l"/>
-            <a:r>
-              <a:rPr sz="2000" b="1" i="0">
-                <a:solidFill>
-                  <a:srgbClr val="1F2C56"/>
-                </a:solidFill>
-                <a:latin typeface="Arial"/>
-              </a:rPr>
-              <a:t>AB-1: Mein NMZ-Bestandsbild</a:t>
-            </a:r>
+              <a:t>M16  ·  INHALT</a:t>
+            </a:r>
+          </a:p>
+        </p:txBody>
+      </p:sp>
+      <p:sp>
+        <p:nvSpPr>
+          <p:cNvPr id="5" name="Rectangle 4"/>
+          <p:cNvSpPr/>
+          <p:nvPr/>
+        </p:nvSpPr>
+        <p:spPr>
+          <a:xfrm>
+            <a:off x="0" y="1234440"/>
+            <a:ext cx="12188952" cy="12700"/>
+          </a:xfrm>
+          <a:prstGeom prst="rect">
+            <a:avLst/>
+          </a:prstGeom>
+          <a:solidFill>
+            <a:srgbClr val="D8DFE4"/>
+          </a:solidFill>
+          <a:ln>
+            <a:noFill/>
+          </a:ln>
+        </p:spPr>
+        <p:style>
+          <a:lnRef idx="1">
+            <a:schemeClr val="accent1"/>
+          </a:lnRef>
+          <a:fillRef idx="3">
+            <a:schemeClr val="accent1"/>
+          </a:fillRef>
+          <a:effectRef idx="2">
+            <a:schemeClr val="accent1"/>
+          </a:effectRef>
+          <a:fontRef idx="minor">
+            <a:schemeClr val="lt1"/>
+          </a:fontRef>
+        </p:style>
+        <p:txBody>
+          <a:bodyPr rtlCol="0" anchor="ctr"/>
+          <a:lstStyle/>
+          <a:p>
+            <a:pPr algn="ctr"/>
           </a:p>
         </p:txBody>
       </p:sp>
@@ -8043,8 +7563,8 @@
         </p:nvSpPr>
         <p:spPr>
           <a:xfrm>
-            <a:off x="685800" y="1143000"/>
-            <a:ext cx="10817352" cy="25400"/>
+            <a:off x="685800" y="502920"/>
+            <a:ext cx="36576" cy="658368"/>
           </a:xfrm>
           <a:prstGeom prst="rect">
             <a:avLst/>
@@ -8078,410 +7598,105 @@
           </a:p>
         </p:txBody>
       </p:sp>
-      <p:graphicFrame>
-        <p:nvGraphicFramePr>
-          <p:cNvPr id="7" name="Table 6"/>
-          <p:cNvGraphicFramePr>
-            <a:graphicFrameLocks noGrp="1"/>
-          </p:cNvGraphicFramePr>
-          <p:nvPr/>
-        </p:nvGraphicFramePr>
-        <p:xfrm>
-          <a:off x="685800" y="1417320"/>
-          <a:ext cx="10817352" cy="2304288"/>
-        </p:xfrm>
-        <a:graphic>
-          <a:graphicData uri="http://schemas.openxmlformats.org/drawingml/2006/table">
-            <a:tbl>
-              <a:tblPr firstRow="1" bandRow="1">
-                <a:tableStyleId>{5C22544A-7EE6-4342-B048-85BDC9FD1C3A}</a:tableStyleId>
-              </a:tblPr>
-              <a:tblGrid>
-                <a:gridCol w="2163470"/>
-                <a:gridCol w="2163470"/>
-                <a:gridCol w="2163470"/>
-                <a:gridCol w="2163470"/>
-                <a:gridCol w="2163472"/>
-              </a:tblGrid>
-              <a:tr h="384048">
-                <a:tc>
-                  <a:txBody>
-                    <a:bodyPr/>
-                    <a:lstStyle/>
-                    <a:p>
-                      <a:r>
-                        <a:rPr sz="1100" b="1">
-                          <a:solidFill>
-                            <a:srgbClr val="FFFFFF"/>
-                          </a:solidFill>
-                          <a:latin typeface="Arial"/>
-                        </a:rPr>
-                        <a:t>Rang (von unten)</a:t>
-                      </a:r>
-                    </a:p>
-                  </a:txBody>
-                  <a:tcPr>
-                    <a:solidFill>
-                      <a:srgbClr val="1F2C56"/>
-                    </a:solidFill>
-                  </a:tcPr>
-                </a:tc>
-                <a:tc>
-                  <a:txBody>
-                    <a:bodyPr/>
-                    <a:lstStyle/>
-                    <a:p>
-                      <a:r>
-                        <a:rPr sz="1100" b="1">
-                          <a:solidFill>
-                            <a:srgbClr val="FFFFFF"/>
-                          </a:solidFill>
-                          <a:latin typeface="Arial"/>
-                        </a:rPr>
-                        <a:t>Kunde (anonymisiert)</a:t>
-                      </a:r>
-                    </a:p>
-                  </a:txBody>
-                  <a:tcPr>
-                    <a:solidFill>
-                      <a:srgbClr val="1F2C56"/>
-                    </a:solidFill>
-                  </a:tcPr>
-                </a:tc>
-                <a:tc>
-                  <a:txBody>
-                    <a:bodyPr/>
-                    <a:lstStyle/>
-                    <a:p>
-                      <a:r>
-                        <a:rPr sz="1100" b="1">
-                          <a:solidFill>
-                            <a:srgbClr val="FFFFFF"/>
-                          </a:solidFill>
-                          <a:latin typeface="Arial"/>
-                        </a:rPr>
-                        <a:t>NMZ</a:t>
-                      </a:r>
-                    </a:p>
-                  </a:txBody>
-                  <a:tcPr>
-                    <a:solidFill>
-                      <a:srgbClr val="1F2C56"/>
-                    </a:solidFill>
-                  </a:tcPr>
-                </a:tc>
-                <a:tc>
-                  <a:txBody>
-                    <a:bodyPr/>
-                    <a:lstStyle/>
-                    <a:p>
-                      <a:r>
-                        <a:rPr sz="1100" b="1">
-                          <a:solidFill>
-                            <a:srgbClr val="FFFFFF"/>
-                          </a:solidFill>
-                          <a:latin typeface="Arial"/>
-                        </a:rPr>
-                        <a:t>Hauptursache</a:t>
-                      </a:r>
-                    </a:p>
-                  </a:txBody>
-                  <a:tcPr>
-                    <a:solidFill>
-                      <a:srgbClr val="1F2C56"/>
-                    </a:solidFill>
-                  </a:tcPr>
-                </a:tc>
-                <a:tc>
-                  <a:txBody>
-                    <a:bodyPr/>
-                    <a:lstStyle/>
-                    <a:p>
-                      <a:r>
-                        <a:rPr sz="1100" b="1">
-                          <a:solidFill>
-                            <a:srgbClr val="FFFFFF"/>
-                          </a:solidFill>
-                          <a:latin typeface="Arial"/>
-                        </a:rPr>
-                        <a:t>Hebel</a:t>
-                      </a:r>
-                    </a:p>
-                  </a:txBody>
-                  <a:tcPr>
-                    <a:solidFill>
-                      <a:srgbClr val="1F2C56"/>
-                    </a:solidFill>
-                  </a:tcPr>
-                </a:tc>
-              </a:tr>
-              <a:tr h="384048">
-                <a:tc>
-                  <a:txBody>
-                    <a:bodyPr/>
-                    <a:lstStyle/>
-                    <a:p>
-                      <a:r>
-                        <a:rPr sz="1050">
-                          <a:solidFill>
-                            <a:srgbClr val="3D5466"/>
-                          </a:solidFill>
-                          <a:latin typeface="Arial"/>
-                        </a:rPr>
-                        <a:t>1</a:t>
-                      </a:r>
-                    </a:p>
-                  </a:txBody>
-                  <a:tcPr/>
-                </a:tc>
-                <a:tc>
-                  <a:txBody>
-                    <a:bodyPr/>
-                    <a:lstStyle/>
-                    <a:p/>
-                  </a:txBody>
-                  <a:tcPr/>
-                </a:tc>
-                <a:tc>
-                  <a:txBody>
-                    <a:bodyPr/>
-                    <a:lstStyle/>
-                    <a:p/>
-                  </a:txBody>
-                  <a:tcPr/>
-                </a:tc>
-                <a:tc>
-                  <a:txBody>
-                    <a:bodyPr/>
-                    <a:lstStyle/>
-                    <a:p/>
-                  </a:txBody>
-                  <a:tcPr/>
-                </a:tc>
-                <a:tc>
-                  <a:txBody>
-                    <a:bodyPr/>
-                    <a:lstStyle/>
-                    <a:p/>
-                  </a:txBody>
-                  <a:tcPr/>
-                </a:tc>
-              </a:tr>
-              <a:tr h="384048">
-                <a:tc>
-                  <a:txBody>
-                    <a:bodyPr/>
-                    <a:lstStyle/>
-                    <a:p>
-                      <a:r>
-                        <a:rPr sz="1050">
-                          <a:solidFill>
-                            <a:srgbClr val="3D5466"/>
-                          </a:solidFill>
-                          <a:latin typeface="Arial"/>
-                        </a:rPr>
-                        <a:t>2</a:t>
-                      </a:r>
-                    </a:p>
-                  </a:txBody>
-                  <a:tcPr/>
-                </a:tc>
-                <a:tc>
-                  <a:txBody>
-                    <a:bodyPr/>
-                    <a:lstStyle/>
-                    <a:p/>
-                  </a:txBody>
-                  <a:tcPr/>
-                </a:tc>
-                <a:tc>
-                  <a:txBody>
-                    <a:bodyPr/>
-                    <a:lstStyle/>
-                    <a:p/>
-                  </a:txBody>
-                  <a:tcPr/>
-                </a:tc>
-                <a:tc>
-                  <a:txBody>
-                    <a:bodyPr/>
-                    <a:lstStyle/>
-                    <a:p/>
-                  </a:txBody>
-                  <a:tcPr/>
-                </a:tc>
-                <a:tc>
-                  <a:txBody>
-                    <a:bodyPr/>
-                    <a:lstStyle/>
-                    <a:p/>
-                  </a:txBody>
-                  <a:tcPr/>
-                </a:tc>
-              </a:tr>
-              <a:tr h="384048">
-                <a:tc>
-                  <a:txBody>
-                    <a:bodyPr/>
-                    <a:lstStyle/>
-                    <a:p>
-                      <a:r>
-                        <a:rPr sz="1050">
-                          <a:solidFill>
-                            <a:srgbClr val="3D5466"/>
-                          </a:solidFill>
-                          <a:latin typeface="Arial"/>
-                        </a:rPr>
-                        <a:t>3</a:t>
-                      </a:r>
-                    </a:p>
-                  </a:txBody>
-                  <a:tcPr/>
-                </a:tc>
-                <a:tc>
-                  <a:txBody>
-                    <a:bodyPr/>
-                    <a:lstStyle/>
-                    <a:p/>
-                  </a:txBody>
-                  <a:tcPr/>
-                </a:tc>
-                <a:tc>
-                  <a:txBody>
-                    <a:bodyPr/>
-                    <a:lstStyle/>
-                    <a:p/>
-                  </a:txBody>
-                  <a:tcPr/>
-                </a:tc>
-                <a:tc>
-                  <a:txBody>
-                    <a:bodyPr/>
-                    <a:lstStyle/>
-                    <a:p/>
-                  </a:txBody>
-                  <a:tcPr/>
-                </a:tc>
-                <a:tc>
-                  <a:txBody>
-                    <a:bodyPr/>
-                    <a:lstStyle/>
-                    <a:p/>
-                  </a:txBody>
-                  <a:tcPr/>
-                </a:tc>
-              </a:tr>
-              <a:tr h="384048">
-                <a:tc>
-                  <a:txBody>
-                    <a:bodyPr/>
-                    <a:lstStyle/>
-                    <a:p>
-                      <a:r>
-                        <a:rPr sz="1050">
-                          <a:solidFill>
-                            <a:srgbClr val="3D5466"/>
-                          </a:solidFill>
-                          <a:latin typeface="Arial"/>
-                        </a:rPr>
-                        <a:t>4</a:t>
-                      </a:r>
-                    </a:p>
-                  </a:txBody>
-                  <a:tcPr/>
-                </a:tc>
-                <a:tc>
-                  <a:txBody>
-                    <a:bodyPr/>
-                    <a:lstStyle/>
-                    <a:p/>
-                  </a:txBody>
-                  <a:tcPr/>
-                </a:tc>
-                <a:tc>
-                  <a:txBody>
-                    <a:bodyPr/>
-                    <a:lstStyle/>
-                    <a:p/>
-                  </a:txBody>
-                  <a:tcPr/>
-                </a:tc>
-                <a:tc>
-                  <a:txBody>
-                    <a:bodyPr/>
-                    <a:lstStyle/>
-                    <a:p/>
-                  </a:txBody>
-                  <a:tcPr/>
-                </a:tc>
-                <a:tc>
-                  <a:txBody>
-                    <a:bodyPr/>
-                    <a:lstStyle/>
-                    <a:p/>
-                  </a:txBody>
-                  <a:tcPr/>
-                </a:tc>
-              </a:tr>
-              <a:tr h="384048">
-                <a:tc>
-                  <a:txBody>
-                    <a:bodyPr/>
-                    <a:lstStyle/>
-                    <a:p>
-                      <a:r>
-                        <a:rPr sz="1050">
-                          <a:solidFill>
-                            <a:srgbClr val="3D5466"/>
-                          </a:solidFill>
-                          <a:latin typeface="Arial"/>
-                        </a:rPr>
-                        <a:t>5</a:t>
-                      </a:r>
-                    </a:p>
-                  </a:txBody>
-                  <a:tcPr/>
-                </a:tc>
-                <a:tc>
-                  <a:txBody>
-                    <a:bodyPr/>
-                    <a:lstStyle/>
-                    <a:p/>
-                  </a:txBody>
-                  <a:tcPr/>
-                </a:tc>
-                <a:tc>
-                  <a:txBody>
-                    <a:bodyPr/>
-                    <a:lstStyle/>
-                    <a:p/>
-                  </a:txBody>
-                  <a:tcPr/>
-                </a:tc>
-                <a:tc>
-                  <a:txBody>
-                    <a:bodyPr/>
-                    <a:lstStyle/>
-                    <a:p/>
-                  </a:txBody>
-                  <a:tcPr/>
-                </a:tc>
-                <a:tc>
-                  <a:txBody>
-                    <a:bodyPr/>
-                    <a:lstStyle/>
-                    <a:p/>
-                  </a:txBody>
-                  <a:tcPr/>
-                </a:tc>
-              </a:tr>
-            </a:tbl>
-          </a:graphicData>
-        </a:graphic>
-      </p:graphicFrame>
-      <p:sp>
-        <p:nvSpPr>
-          <p:cNvPr id="8" name="Rectangle 7"/>
+      <p:sp>
+        <p:nvSpPr>
+          <p:cNvPr id="7" name="TextBox 6"/>
+          <p:cNvSpPr txBox="1"/>
+          <p:nvPr/>
+        </p:nvSpPr>
+        <p:spPr>
+          <a:xfrm>
+            <a:off x="813816" y="502920"/>
+            <a:ext cx="10634472" cy="685800"/>
+          </a:xfrm>
+          <a:prstGeom prst="rect">
+            <a:avLst/>
+          </a:prstGeom>
+          <a:noFill/>
+        </p:spPr>
+        <p:txBody>
+          <a:bodyPr wrap="square">
+            <a:spAutoFit/>
+          </a:bodyPr>
+          <a:lstStyle/>
+          <a:p>
+            <a:pPr algn="l"/>
+            <a:r>
+              <a:rPr sz="2400" b="1" i="0">
+                <a:solidFill>
+                  <a:srgbClr val="1F2C56"/>
+                </a:solidFill>
+                <a:latin typeface="Arial"/>
+              </a:rPr>
+              <a:t>Prinzip dieses Moduls</a:t>
+            </a:r>
+          </a:p>
+        </p:txBody>
+      </p:sp>
+      <p:sp>
+        <p:nvSpPr>
+          <p:cNvPr id="8" name="TextBox 7"/>
+          <p:cNvSpPr txBox="1"/>
+          <p:nvPr/>
+        </p:nvSpPr>
+        <p:spPr>
+          <a:xfrm>
+            <a:off x="685800" y="1417320"/>
+            <a:ext cx="10817352" cy="4892040"/>
+          </a:xfrm>
+          <a:prstGeom prst="rect">
+            <a:avLst/>
+          </a:prstGeom>
+          <a:noFill/>
+        </p:spPr>
+        <p:txBody>
+          <a:bodyPr wrap="square" anchor="ctr">
+            <a:spAutoFit/>
+          </a:bodyPr>
+          <a:lstStyle/>
+          <a:p>
+            <a:pPr marL="177800" indent="-177800">
+              <a:spcBef>
+                <a:spcPts val="600"/>
+              </a:spcBef>
+              <a:spcAft>
+                <a:spcPts val="200"/>
+              </a:spcAft>
+            </a:pPr>
+            <a:r>
+              <a:rPr sz="1200" i="1">
+                <a:solidFill>
+                  <a:srgbClr val="3D5466"/>
+                </a:solidFill>
+                <a:latin typeface="Arial"/>
+              </a:rPr>
+              <a:t>→  Steuere den Bestand über die eine Kennzahl, die alles bündelt: die Nettomarge.</a:t>
+            </a:r>
+          </a:p>
+          <a:p>
+            <a:pPr marL="190500" indent="-190500">
+              <a:spcBef>
+                <a:spcPts val="400"/>
+              </a:spcBef>
+              <a:spcAft>
+                <a:spcPts val="200"/>
+              </a:spcAft>
+            </a:pPr>
+            <a:r>
+              <a:rPr sz="1300">
+                <a:solidFill>
+                  <a:srgbClr val="3D5466"/>
+                </a:solidFill>
+                <a:latin typeface="Arial"/>
+              </a:rPr>
+              <a:t>▸  Die NMZ zeigt, wo Ertrag verloren geht – die drei Kunden mit dem größten Hebel schlagen zwanzig Aktionen ohne Fokus.</a:t>
+            </a:r>
+          </a:p>
+        </p:txBody>
+      </p:sp>
+      <p:sp>
+        <p:nvSpPr>
+          <p:cNvPr id="9" name="Rectangle 8"/>
           <p:cNvSpPr/>
           <p:nvPr/>
         </p:nvSpPr>
@@ -8524,7 +7739,7 @@
       </p:sp>
       <p:sp>
         <p:nvSpPr>
-          <p:cNvPr id="9" name="TextBox 8"/>
+          <p:cNvPr id="10" name="TextBox 9"/>
           <p:cNvSpPr txBox="1"/>
           <p:nvPr/>
         </p:nvSpPr>
@@ -8553,41 +7768,6 @@
                 <a:latin typeface="Consolas"/>
               </a:rPr>
               <a:t>FKB Campus  ·  M16</a:t>
-            </a:r>
-          </a:p>
-        </p:txBody>
-      </p:sp>
-      <p:sp>
-        <p:nvSpPr>
-          <p:cNvPr id="10" name="TextBox 9"/>
-          <p:cNvSpPr txBox="1"/>
-          <p:nvPr/>
-        </p:nvSpPr>
-        <p:spPr>
-          <a:xfrm>
-            <a:off x="7176211" y="6583680"/>
-            <a:ext cx="4326940" cy="256032"/>
-          </a:xfrm>
-          <a:prstGeom prst="rect">
-            <a:avLst/>
-          </a:prstGeom>
-          <a:noFill/>
-        </p:spPr>
-        <p:txBody>
-          <a:bodyPr wrap="none">
-            <a:spAutoFit/>
-          </a:bodyPr>
-          <a:lstStyle/>
-          <a:p>
-            <a:pPr algn="r"/>
-            <a:r>
-              <a:rPr sz="700">
-                <a:solidFill>
-                  <a:srgbClr val="A0B4D2"/>
-                </a:solidFill>
-                <a:latin typeface="Consolas"/>
-              </a:rPr>
-              <a:t>Übersicht</a:t>
             </a:r>
           </a:p>
         </p:txBody>
@@ -8847,7 +8027,7 @@
                 </a:solidFill>
                 <a:latin typeface="Arial"/>
               </a:rPr>
-              <a:t>AB-2: Maßnahmenplan</a:t>
+              <a:t>Reflexion und Selbstcheck</a:t>
             </a:r>
           </a:p>
         </p:txBody>
@@ -8889,7 +8069,45 @@
                 </a:solidFill>
                 <a:latin typeface="Arial"/>
               </a:rPr>
-              <a:t>▸  Mein Ziel für die nächsten 90 Tage:</a:t>
+              <a:t>▸  Welche drei Kunden in Ihrem Bestand haben den größten NMZ-Hebel?</a:t>
+            </a:r>
+          </a:p>
+          <a:p>
+            <a:pPr marL="190500" indent="-190500">
+              <a:spcBef>
+                <a:spcPts val="400"/>
+              </a:spcBef>
+              <a:spcAft>
+                <a:spcPts val="200"/>
+              </a:spcAft>
+            </a:pPr>
+            <a:r>
+              <a:rPr sz="1300">
+                <a:solidFill>
+                  <a:srgbClr val="3D5466"/>
+                </a:solidFill>
+                <a:latin typeface="Arial"/>
+              </a:rPr>
+              <a:t>▸  Wann in Ihrem Monat ist die feste halbe Stunde für den NMZ-Blick?</a:t>
+            </a:r>
+          </a:p>
+          <a:p>
+            <a:pPr marL="190500" indent="-190500">
+              <a:spcBef>
+                <a:spcPts val="400"/>
+              </a:spcBef>
+              <a:spcAft>
+                <a:spcPts val="200"/>
+              </a:spcAft>
+            </a:pPr>
+            <a:r>
+              <a:rPr sz="1300">
+                <a:solidFill>
+                  <a:srgbClr val="3D5466"/>
+                </a:solidFill>
+                <a:latin typeface="Arial"/>
+              </a:rPr>
+              <a:t>▸  Bei welchem Verlustbringer ist der Hebel eine Konditionsanpassung – und bei welchem der Exit?</a:t>
             </a:r>
           </a:p>
         </p:txBody>
@@ -10685,7 +9903,7 @@
                 </a:solidFill>
                 <a:latin typeface="Arial"/>
               </a:rPr>
-              <a:t>Definition</a:t>
+              <a:t>Die eine Kennzahl, die alles bündelt</a:t>
             </a:r>
           </a:p>
         </p:txBody>
@@ -10711,6 +9929,25 @@
             <a:spAutoFit/>
           </a:bodyPr>
           <a:lstStyle/>
+          <a:p>
+            <a:pPr marL="177800" indent="-177800">
+              <a:spcBef>
+                <a:spcPts val="600"/>
+              </a:spcBef>
+              <a:spcAft>
+                <a:spcPts val="200"/>
+              </a:spcAft>
+            </a:pPr>
+            <a:r>
+              <a:rPr sz="1200" i="1">
+                <a:solidFill>
+                  <a:srgbClr val="3D5466"/>
+                </a:solidFill>
+                <a:latin typeface="Arial"/>
+              </a:rPr>
+              <a:t>→  Steuere den Bestand über die eine Kennzahl, die alles bündelt: die Nettomarge (NMZ).</a:t>
+            </a:r>
+          </a:p>
           <a:p>
             <a:pPr marL="190500" indent="-190500">
               <a:spcBef>
@@ -10727,7 +9964,7 @@
                 </a:solidFill>
                 <a:latin typeface="Arial"/>
               </a:rPr>
-              <a:t>▸  NMZ (%) = Deckungsbeitrag II × 100 / Kreditvolumen</a:t>
+              <a:t>▸  Die NMZ vereint Zinsergebnis, Provisionen, Risikokosten und Eigenkapitalkosten in einer Zahl.</a:t>
             </a:r>
           </a:p>
           <a:p>
@@ -10746,7 +9983,7 @@
                 </a:solidFill>
                 <a:latin typeface="Arial"/>
               </a:rPr>
-              <a:t>▸  Sie ist damit die auf das Volumen normierte Version des Kundendeckungsbeitrags (M14), was Vergleiche zwischen Kunden unterschiedlicher Größe erst möglich macht.</a:t>
+              <a:t>▸  Sie zeigt, was ein Kunde nach allen Kosten wirklich zum Ergebnis beiträgt.</a:t>
             </a:r>
           </a:p>
         </p:txBody>
@@ -11084,7 +10321,7 @@
                 </a:solidFill>
                 <a:latin typeface="Arial"/>
               </a:rPr>
-              <a:t>Warum die NMZ dem DB überlegen ist</a:t>
+              <a:t>Warum die NMZ dem Deckungsbeitrag überlegen ist</a:t>
             </a:r>
           </a:p>
         </p:txBody>
@@ -11110,6 +10347,25 @@
             <a:spAutoFit/>
           </a:bodyPr>
           <a:lstStyle/>
+          <a:p>
+            <a:pPr marL="177800" indent="-177800">
+              <a:spcBef>
+                <a:spcPts val="600"/>
+              </a:spcBef>
+              <a:spcAft>
+                <a:spcPts val="200"/>
+              </a:spcAft>
+            </a:pPr>
+            <a:r>
+              <a:rPr sz="1200" i="1">
+                <a:solidFill>
+                  <a:srgbClr val="3D5466"/>
+                </a:solidFill>
+                <a:latin typeface="Arial"/>
+              </a:rPr>
+              <a:t>→  Der DB zeigt den Ertrag, die NMZ zeigt den Ertrag nach Risiko und Kapitalbindung – erst das ist Steuerungsgröße.</a:t>
+            </a:r>
+          </a:p>
           <a:p>
             <a:pPr marL="190500" indent="-190500">
               <a:spcBef>
@@ -11126,7 +10382,7 @@
                 </a:solidFill>
                 <a:latin typeface="Arial"/>
               </a:rPr>
-              <a:t>▸  Rolfes (1999 ) betont, dass Banken ohne normierte Ertragskennzahlen systematisch Kapital in renditeschwache Engagements lenken, weil die absoluten Beträge groß aussehen.</a:t>
+              <a:t>▸  Der DB ignoriert Risikokosten und Eigenkapitalkosten; die NMZ rechnet sie ein.</a:t>
             </a:r>
           </a:p>
           <a:p>
@@ -11145,45 +10401,7 @@
                 </a:solidFill>
                 <a:latin typeface="Arial"/>
               </a:rPr>
-              <a:t>▸  ## 4.2 Die NMZ-Komponenten im Detail</a:t>
-            </a:r>
-          </a:p>
-          <a:p>
-            <a:pPr marL="190500" indent="-190500">
-              <a:spcBef>
-                <a:spcPts val="400"/>
-              </a:spcBef>
-              <a:spcAft>
-                <a:spcPts val="200"/>
-              </a:spcAft>
-            </a:pPr>
-            <a:r>
-              <a:rPr sz="1300">
-                <a:solidFill>
-                  <a:srgbClr val="3D5466"/>
-                </a:solidFill>
-                <a:latin typeface="Arial"/>
-              </a:rPr>
-              <a:t>▸  Die NMZ wird von vier Treibern bewegt – jeder Treiber entspricht einem Hebel für die Optimierung:</a:t>
-            </a:r>
-          </a:p>
-          <a:p>
-            <a:pPr marL="190500" indent="-190500">
-              <a:spcBef>
-                <a:spcPts val="400"/>
-              </a:spcBef>
-              <a:spcAft>
-                <a:spcPts val="200"/>
-              </a:spcAft>
-            </a:pPr>
-            <a:r>
-              <a:rPr sz="1300">
-                <a:solidFill>
-                  <a:srgbClr val="3D5466"/>
-                </a:solidFill>
-                <a:latin typeface="Arial"/>
-              </a:rPr>
-              <a:t>▸  ## 4.3 NMZ-Berichte in agree lesen</a:t>
+              <a:t>▸  Zwei Kunden mit gleichem DB können völlig unterschiedliche NMZ haben.</a:t>
             </a:r>
           </a:p>
         </p:txBody>
@@ -11435,7 +10653,7 @@
                 </a:solidFill>
                 <a:latin typeface="Arial"/>
               </a:rPr>
-              <a:t>Nettomargenbeitrag NMZ</a:t>
+              <a:t>Der Nettomargenbeitrag (NMZ) im Aufbau</a:t>
             </a:r>
           </a:p>
         </p:txBody>
@@ -11875,7 +11093,7 @@
                 </a:solidFill>
                 <a:latin typeface="Arial"/>
               </a:rPr>
-              <a:t>Wo finde ich meine NMZ-Daten?</a:t>
+              <a:t>Wo die NMZ-Daten herkommen</a:t>
             </a:r>
           </a:p>
         </p:txBody>
@@ -11901,6 +11119,25 @@
             <a:spAutoFit/>
           </a:bodyPr>
           <a:lstStyle/>
+          <a:p>
+            <a:pPr marL="177800" indent="-177800">
+              <a:spcBef>
+                <a:spcPts val="600"/>
+              </a:spcBef>
+              <a:spcAft>
+                <a:spcPts val="200"/>
+              </a:spcAft>
+            </a:pPr>
+            <a:r>
+              <a:rPr sz="1200" i="1">
+                <a:solidFill>
+                  <a:srgbClr val="3D5466"/>
+                </a:solidFill>
+                <a:latin typeface="Arial"/>
+              </a:rPr>
+              <a:t>→  Die NMZ liegt im agree-Reporting bereit – man muss das Ranking nur regelmäßig lesen.</a:t>
+            </a:r>
+          </a:p>
           <a:p>
             <a:pPr marL="190500" indent="-190500">
               <a:spcBef>
@@ -11917,7 +11154,26 @@
                 </a:solidFill>
                 <a:latin typeface="Arial"/>
               </a:rPr>
-              <a:t>▸  In agree (Atruvia) stehen NMZ-relevante Auswertungen über folgende Einstiegspunkte zur Verfügung:</a:t>
+              <a:t>▸  Das Bestandsranking zeigt jeden Kunden mit seiner NMZ und den Komponenten.</a:t>
+            </a:r>
+          </a:p>
+          <a:p>
+            <a:pPr marL="190500" indent="-190500">
+              <a:spcBef>
+                <a:spcPts val="400"/>
+              </a:spcBef>
+              <a:spcAft>
+                <a:spcPts val="200"/>
+              </a:spcAft>
+            </a:pPr>
+            <a:r>
+              <a:rPr sz="1300">
+                <a:solidFill>
+                  <a:srgbClr val="3D5466"/>
+                </a:solidFill>
+                <a:latin typeface="Arial"/>
+              </a:rPr>
+              <a:t>▸  Interner Benchmark der Bank als Zielmarke (z. B. 1,10 %).</a:t>
             </a:r>
           </a:p>
         </p:txBody>
@@ -12033,7 +11289,7 @@
             <a:avLst/>
           </a:prstGeom>
           <a:solidFill>
-            <a:srgbClr val="EDEDF3"/>
+            <a:srgbClr val="1F2C56"/>
           </a:solidFill>
           <a:ln>
             <a:noFill/>
@@ -12063,57 +11319,14 @@
       </p:sp>
       <p:sp>
         <p:nvSpPr>
-          <p:cNvPr id="3" name="Rectangle 2"/>
-          <p:cNvSpPr/>
-          <p:nvPr/>
-        </p:nvSpPr>
-        <p:spPr>
-          <a:xfrm>
-            <a:off x="0" y="0"/>
-            <a:ext cx="12188952" cy="50292"/>
-          </a:xfrm>
-          <a:prstGeom prst="rect">
-            <a:avLst/>
-          </a:prstGeom>
-          <a:solidFill>
-            <a:srgbClr val="1F2C56"/>
-          </a:solidFill>
-          <a:ln>
-            <a:noFill/>
-          </a:ln>
-        </p:spPr>
-        <p:style>
-          <a:lnRef idx="1">
-            <a:schemeClr val="accent1"/>
-          </a:lnRef>
-          <a:fillRef idx="3">
-            <a:schemeClr val="accent1"/>
-          </a:fillRef>
-          <a:effectRef idx="2">
-            <a:schemeClr val="accent1"/>
-          </a:effectRef>
-          <a:fontRef idx="minor">
-            <a:schemeClr val="lt1"/>
-          </a:fontRef>
-        </p:style>
-        <p:txBody>
-          <a:bodyPr rtlCol="0" anchor="ctr"/>
-          <a:lstStyle/>
-          <a:p>
-            <a:pPr algn="ctr"/>
-          </a:p>
-        </p:txBody>
-      </p:sp>
-      <p:sp>
-        <p:nvSpPr>
-          <p:cNvPr id="4" name="TextBox 3"/>
+          <p:cNvPr id="3" name="TextBox 2"/>
           <p:cNvSpPr txBox="1"/>
           <p:nvPr/>
         </p:nvSpPr>
         <p:spPr>
           <a:xfrm>
-            <a:off x="685800" y="109728"/>
-            <a:ext cx="10817352" cy="228600"/>
+            <a:off x="685800" y="2377440"/>
+            <a:ext cx="10817352" cy="365760"/>
           </a:xfrm>
           <a:prstGeom prst="rect">
             <a:avLst/>
@@ -12128,70 +11341,27 @@
           <a:p>
             <a:pPr algn="l"/>
             <a:r>
-              <a:rPr sz="750">
-                <a:solidFill>
-                  <a:srgbClr val="78808C"/>
+              <a:rPr sz="1200">
+                <a:solidFill>
+                  <a:srgbClr val="D9C089"/>
                 </a:solidFill>
                 <a:latin typeface="Consolas"/>
               </a:rPr>
-              <a:t>M16  ·  INHALT</a:t>
-            </a:r>
-          </a:p>
-        </p:txBody>
-      </p:sp>
-      <p:sp>
-        <p:nvSpPr>
-          <p:cNvPr id="5" name="Rectangle 4"/>
+              <a:t>3 SCHRITTE</a:t>
+            </a:r>
+          </a:p>
+        </p:txBody>
+      </p:sp>
+      <p:sp>
+        <p:nvSpPr>
+          <p:cNvPr id="4" name="Rectangle 3"/>
           <p:cNvSpPr/>
           <p:nvPr/>
         </p:nvSpPr>
         <p:spPr>
           <a:xfrm>
-            <a:off x="0" y="1234440"/>
-            <a:ext cx="12188952" cy="12700"/>
-          </a:xfrm>
-          <a:prstGeom prst="rect">
-            <a:avLst/>
-          </a:prstGeom>
-          <a:solidFill>
-            <a:srgbClr val="D8DFE4"/>
-          </a:solidFill>
-          <a:ln>
-            <a:noFill/>
-          </a:ln>
-        </p:spPr>
-        <p:style>
-          <a:lnRef idx="1">
-            <a:schemeClr val="accent1"/>
-          </a:lnRef>
-          <a:fillRef idx="3">
-            <a:schemeClr val="accent1"/>
-          </a:fillRef>
-          <a:effectRef idx="2">
-            <a:schemeClr val="accent1"/>
-          </a:effectRef>
-          <a:fontRef idx="minor">
-            <a:schemeClr val="lt1"/>
-          </a:fontRef>
-        </p:style>
-        <p:txBody>
-          <a:bodyPr rtlCol="0" anchor="ctr"/>
-          <a:lstStyle/>
-          <a:p>
-            <a:pPr algn="ctr"/>
-          </a:p>
-        </p:txBody>
-      </p:sp>
-      <p:sp>
-        <p:nvSpPr>
-          <p:cNvPr id="6" name="Rectangle 5"/>
-          <p:cNvSpPr/>
-          <p:nvPr/>
-        </p:nvSpPr>
-        <p:spPr>
-          <a:xfrm>
-            <a:off x="685800" y="502920"/>
-            <a:ext cx="36576" cy="658368"/>
+            <a:off x="685800" y="2788920"/>
+            <a:ext cx="548640" cy="38100"/>
           </a:xfrm>
           <a:prstGeom prst="rect">
             <a:avLst/>
@@ -12227,14 +11397,14 @@
       </p:sp>
       <p:sp>
         <p:nvSpPr>
-          <p:cNvPr id="7" name="TextBox 6"/>
+          <p:cNvPr id="5" name="TextBox 4"/>
           <p:cNvSpPr txBox="1"/>
           <p:nvPr/>
         </p:nvSpPr>
         <p:spPr>
           <a:xfrm>
-            <a:off x="813816" y="502920"/>
-            <a:ext cx="10634472" cy="685800"/>
+            <a:off x="685800" y="3017520"/>
+            <a:ext cx="10817352" cy="1463040"/>
           </a:xfrm>
           <a:prstGeom prst="rect">
             <a:avLst/>
@@ -12249,27 +11419,27 @@
           <a:p>
             <a:pPr algn="l"/>
             <a:r>
-              <a:rPr sz="2400" b="1" i="0">
-                <a:solidFill>
-                  <a:srgbClr val="1F2C56"/>
+              <a:rPr sz="4000" b="1" i="0">
+                <a:solidFill>
+                  <a:srgbClr val="FFFFFF"/>
                 </a:solidFill>
                 <a:latin typeface="Arial"/>
               </a:rPr>
-              <a:t>Leseübung: NMZ-Ranking interpretieren</a:t>
-            </a:r>
-          </a:p>
-        </p:txBody>
-      </p:sp>
-      <p:sp>
-        <p:nvSpPr>
-          <p:cNvPr id="8" name="TextBox 7"/>
+              <a:t>Der NMZ-Optimierungsprozess</a:t>
+            </a:r>
+          </a:p>
+        </p:txBody>
+      </p:sp>
+      <p:sp>
+        <p:nvSpPr>
+          <p:cNvPr id="6" name="TextBox 5"/>
           <p:cNvSpPr txBox="1"/>
           <p:nvPr/>
         </p:nvSpPr>
         <p:spPr>
           <a:xfrm>
-            <a:off x="685800" y="1417320"/>
-            <a:ext cx="10817352" cy="4892040"/>
+            <a:off x="685800" y="4480560"/>
+            <a:ext cx="8653881" cy="1280160"/>
           </a:xfrm>
           <a:prstGeom prst="rect">
             <a:avLst/>
@@ -12277,160 +11447,34 @@
           <a:noFill/>
         </p:spPr>
         <p:txBody>
-          <a:bodyPr wrap="square" anchor="ctr">
+          <a:bodyPr wrap="square">
             <a:spAutoFit/>
           </a:bodyPr>
           <a:lstStyle/>
           <a:p>
-            <a:pPr marL="190500" indent="-190500">
-              <a:spcBef>
-                <a:spcPts val="400"/>
-              </a:spcBef>
-              <a:spcAft>
-                <a:spcPts val="200"/>
-              </a:spcAft>
-            </a:pPr>
-            <a:r>
-              <a:rPr sz="1300">
-                <a:solidFill>
-                  <a:srgbClr val="3D5466"/>
+            <a:pPr algn="l"/>
+            <a:r>
+              <a:rPr sz="1600" b="0" i="0">
+                <a:solidFill>
+                  <a:srgbClr val="C8D2E6"/>
                 </a:solidFill>
                 <a:latin typeface="Arial"/>
               </a:rPr>
-              <a:t>▸  Stellen Sie sich vor, Ihr Bestand zeigt folgendes NMZ-Ranking (Auszug):</a:t>
-            </a:r>
-          </a:p>
-          <a:p>
-            <a:pPr marL="190500" indent="-190500">
-              <a:spcBef>
-                <a:spcPts val="400"/>
-              </a:spcBef>
-              <a:spcAft>
-                <a:spcPts val="200"/>
-              </a:spcAft>
-            </a:pPr>
-            <a:r>
-              <a:rPr sz="1300">
-                <a:solidFill>
-                  <a:srgbClr val="3D5466"/>
-                </a:solidFill>
-                <a:latin typeface="Arial"/>
-              </a:rPr>
-              <a:t>▸  Sofortmaßnahmen aus diesem Ranking:</a:t>
-            </a:r>
-          </a:p>
-          <a:p>
-            <a:pPr marL="190500" indent="-190500">
-              <a:spcBef>
-                <a:spcPts val="400"/>
-              </a:spcBef>
-              <a:spcAft>
-                <a:spcPts val="200"/>
-              </a:spcAft>
-            </a:pPr>
-            <a:r>
-              <a:rPr sz="1300">
-                <a:solidFill>
-                  <a:srgbClr val="3D5466"/>
-                </a:solidFill>
-                <a:latin typeface="Arial"/>
-              </a:rPr>
-              <a:t>▸  Huber Bau GmbH (0,30 %): Rating prüfen, Besicherung optimieren, Verbund aktivieren</a:t>
-            </a:r>
-          </a:p>
-          <a:p>
-            <a:pPr marL="190500" indent="-190500">
-              <a:spcBef>
-                <a:spcPts val="400"/>
-              </a:spcBef>
-              <a:spcAft>
-                <a:spcPts val="200"/>
-              </a:spcAft>
-            </a:pPr>
-            <a:r>
-              <a:rPr sz="1300">
-                <a:solidFill>
-                  <a:srgbClr val="3D5466"/>
-                </a:solidFill>
-                <a:latin typeface="Arial"/>
-              </a:rPr>
-              <a:t>▸  Fischer Transport (−0,30 %): Konditionengespräch unverzüglich, Exit-Prüfung falls keine Verbesserung möglich</a:t>
-            </a:r>
-          </a:p>
-          <a:p>
-            <a:pPr marL="190500" indent="-190500">
-              <a:spcBef>
-                <a:spcPts val="400"/>
-              </a:spcBef>
-              <a:spcAft>
-                <a:spcPts val="200"/>
-              </a:spcAft>
-            </a:pPr>
-            <a:r>
-              <a:rPr sz="1300">
-                <a:solidFill>
-                  <a:srgbClr val="3D5466"/>
-                </a:solidFill>
-                <a:latin typeface="Arial"/>
-              </a:rPr>
-              <a:t>▸  ## 4.4 Der NMZ-Optimierungsprozess: 3 Schritte</a:t>
-            </a:r>
-          </a:p>
-        </p:txBody>
-      </p:sp>
-      <p:sp>
-        <p:nvSpPr>
-          <p:cNvPr id="9" name="Rectangle 8"/>
-          <p:cNvSpPr/>
-          <p:nvPr/>
-        </p:nvSpPr>
-        <p:spPr>
-          <a:xfrm>
-            <a:off x="0" y="6510528"/>
-            <a:ext cx="12188952" cy="347472"/>
-          </a:xfrm>
-          <a:prstGeom prst="rect">
-            <a:avLst/>
-          </a:prstGeom>
-          <a:solidFill>
-            <a:srgbClr val="0A1937"/>
-          </a:solidFill>
-          <a:ln>
-            <a:noFill/>
-          </a:ln>
-        </p:spPr>
-        <p:style>
-          <a:lnRef idx="1">
-            <a:schemeClr val="accent1"/>
-          </a:lnRef>
-          <a:fillRef idx="3">
-            <a:schemeClr val="accent1"/>
-          </a:fillRef>
-          <a:effectRef idx="2">
-            <a:schemeClr val="accent1"/>
-          </a:effectRef>
-          <a:fontRef idx="minor">
-            <a:schemeClr val="lt1"/>
-          </a:fontRef>
-        </p:style>
-        <p:txBody>
-          <a:bodyPr rtlCol="0" anchor="ctr"/>
-          <a:lstStyle/>
-          <a:p>
-            <a:pPr algn="ctr"/>
-          </a:p>
-        </p:txBody>
-      </p:sp>
-      <p:sp>
-        <p:nvSpPr>
-          <p:cNvPr id="10" name="TextBox 9"/>
+              <a:t>Identifizieren, priorisieren, handeln – monatlich, mit Fokus.</a:t>
+            </a:r>
+          </a:p>
+        </p:txBody>
+      </p:sp>
+      <p:sp>
+        <p:nvSpPr>
+          <p:cNvPr id="7" name="TextBox 6"/>
           <p:cNvSpPr txBox="1"/>
           <p:nvPr/>
         </p:nvSpPr>
         <p:spPr>
           <a:xfrm>
-            <a:off x="685800" y="6583680"/>
-            <a:ext cx="6490411" cy="256032"/>
+            <a:off x="685800" y="6355080"/>
+            <a:ext cx="10817352" cy="274320"/>
           </a:xfrm>
           <a:prstGeom prst="rect">
             <a:avLst/>
@@ -12447,7 +11491,7 @@
             <a:r>
               <a:rPr sz="700">
                 <a:solidFill>
-                  <a:srgbClr val="A0B4D2"/>
+                  <a:srgbClr val="8CA0C3"/>
                 </a:solidFill>
                 <a:latin typeface="Consolas"/>
               </a:rPr>

--- a/protected-downloads/praesentation/M16.pptx
+++ b/protected-downloads/praesentation/M16.pptx
@@ -728,7 +728,7 @@
           <a:lstStyle/>
           <a:p>
             <a:r>
-              <a:t>Einstieg: „Welche Kennzahl nutzen Sie heute, um Ihren Bestand zu steuern?" Meist DB – die NMZ geht weiter.</a:t>
+              <a:t>Einstieg: „Welche Kennzahl nutzen Sie heute, um Ihren Bestand zu steuern?" Meist DB – die KNM geht weiter.</a:t>
             </a:r>
           </a:p>
         </p:txBody>
@@ -798,7 +798,7 @@
           <a:lstStyle/>
           <a:p>
             <a:r>
-              <a:t>Kernbotschaft: der DB kann trügen – ein margenstarker, aber risikoreicher Kunde ist auf NMZ-Basis oft unattraktiv.</a:t>
+              <a:t>Kernbotschaft: der DB kann trügen – ein margenstarker, aber risikoreicher Kunde ist auf KNM-Basis oft unattraktiv.</a:t>
             </a:r>
           </a:p>
         </p:txBody>
@@ -868,7 +868,7 @@
           <a:lstStyle/>
           <a:p>
             <a:r>
-              <a:t>Leseübung: ein NMZ-Ranking gemeinsam interpretieren – wo sitzt der Ertrag, wo die Verlustbringer?</a:t>
+              <a:t>Leseübung: ein KNM-Ranking gemeinsam interpretieren – wo sitzt der Ertrag, wo die Verlustbringer?</a:t>
             </a:r>
           </a:p>
         </p:txBody>
@@ -1148,7 +1148,7 @@
           <a:lstStyle/>
           <a:p>
             <a:r>
-              <a:t>Felix ist 0,29 Prozentpunkte unter Ziel. Sieben Kunden ziehen die Bestands-NMZ nach unten – dort liegt der Hebel.</a:t>
+              <a:t>Felix ist 0,29 Prozentpunkte unter Ziel. Sieben Kunden ziehen die Bestands-KNM nach unten – dort liegt der Hebel.</a:t>
             </a:r>
           </a:p>
         </p:txBody>
@@ -1223,7 +1223,7 @@
           </a:p>
           <a:p>
             <a:r>
-              <a:t>Beispiel Metzger GmbH: NMZ −0,20 %, Rating D, Marge zu niedrig – Hebel Rating/Exit, nicht Konditionen. Ursachengerecht handeln, nicht pauschal.</a:t>
+              <a:t>Beispiel Metzger GmbH: KNM −0,20 %, Rating D, Marge zu niedrig – Hebel Rating/Exit, nicht Konditionen. Ursachengerecht handeln, nicht pauschal.</a:t>
             </a:r>
           </a:p>
         </p:txBody>
@@ -4380,7 +4380,7 @@
                 </a:solidFill>
                 <a:latin typeface="Arial"/>
               </a:rPr>
-              <a:t>NMZ-Optimierung</a:t>
+              <a:t>Kundennettomarge optimieren</a:t>
             </a:r>
           </a:p>
         </p:txBody>
@@ -4415,7 +4415,7 @@
                 </a:solidFill>
                 <a:latin typeface="Arial"/>
               </a:rPr>
-              <a:t>Nettomargenziffer im Firmenkundenbestand messen, verstehen und systematisch verbessern</a:t>
+              <a:t>Kundennettomarge (KNM) im Firmenkundenbestand messen, verstehen und systematisch verbessern</a:t>
             </a:r>
           </a:p>
         </p:txBody>
@@ -5102,7 +5102,7 @@
                 </a:solidFill>
                 <a:latin typeface="Arial"/>
               </a:rPr>
-              <a:t>▸  Monatlich das NMZ-Ranking aufrufen und die Kunden unter Benchmark markieren.</a:t>
+              <a:t>▸  Monatlich das KNM-Ranking aufrufen und die Kunden unter Benchmark markieren.</a:t>
             </a:r>
           </a:p>
           <a:p>
@@ -5121,7 +5121,7 @@
                 </a:solidFill>
                 <a:latin typeface="Arial"/>
               </a:rPr>
-              <a:t>▸  Besonderes Augenmerk auf Kunden mit NMZ unter 0,5 % oder negativem DB.</a:t>
+              <a:t>▸  Besonderes Augenmerk auf Kunden mit KNM unter 0,5 % oder negativem DB.</a:t>
             </a:r>
           </a:p>
         </p:txBody>
@@ -5539,7 +5539,7 @@
                 </a:solidFill>
                 <a:latin typeface="Arial"/>
               </a:rPr>
-              <a:t>▸  Nach Hebelgröße sortieren – wo bringt eine Maßnahme den meisten NMZ-Zuwachs?</a:t>
+              <a:t>▸  Nach Hebelgröße sortieren – wo bringt eine Maßnahme den meisten KNM-Zuwachs?</a:t>
             </a:r>
           </a:p>
         </p:txBody>
@@ -5919,7 +5919,7 @@
                 </a:solidFill>
                 <a:latin typeface="Arial"/>
               </a:rPr>
-              <a:t>→  Eine erkannte NMZ-Lücke ist erst geschlossen, wenn die Maßnahme umgesetzt und dokumentiert ist.</a:t>
+              <a:t>→  Eine erkannte KNM-Lücke ist erst geschlossen, wenn die Maßnahme umgesetzt und dokumentiert ist.</a:t>
             </a:r>
           </a:p>
           <a:p>
@@ -6244,7 +6244,7 @@
                 </a:solidFill>
                 <a:latin typeface="Arial"/>
               </a:rPr>
-              <a:t>Ein Maßnahmenpaket entwickeln, das die Bestands-NMZ zum Benchmark bringt.</a:t>
+              <a:t>Ein Maßnahmenpaket entwickeln, das die Bestands-KNM zum Benchmark bringt.</a:t>
             </a:r>
           </a:p>
         </p:txBody>
@@ -6605,7 +6605,7 @@
                           </a:solidFill>
                           <a:latin typeface="Arial"/>
                         </a:rPr>
-                        <a:t>Bestands-NMZ</a:t>
+                        <a:t>Bestands-KNM</a:t>
                       </a:r>
                     </a:p>
                   </a:txBody>
@@ -6717,7 +6717,7 @@
                           </a:solidFill>
                           <a:latin typeface="Arial"/>
                         </a:rPr>
-                        <a:t>NMZ &lt; 0,5 %</a:t>
+                        <a:t>KNM &lt; 0,5 %</a:t>
                       </a:r>
                     </a:p>
                   </a:txBody>
@@ -7132,7 +7132,7 @@
                 </a:solidFill>
                 <a:latin typeface="Arial"/>
               </a:rPr>
-              <a:t>Praxisfall bearbeiten: NMZ-Bestandsbild und Maßnahmenplan</a:t>
+              <a:t>Praxisfall bearbeiten: KNM-Bestandsbild und Maßnahmenplan</a:t>
             </a:r>
           </a:p>
         </p:txBody>
@@ -7174,7 +7174,7 @@
                 </a:solidFill>
                 <a:latin typeface="Arial"/>
               </a:rPr>
-              <a:t>▸  Erstellen Sie Ihr NMZ-Bestandsbild und markieren Sie die Kunden unter Benchmark (AB-1).</a:t>
+              <a:t>▸  Erstellen Sie Ihr KNM-Bestandsbild und markieren Sie die Kunden unter Benchmark (AB-1).</a:t>
             </a:r>
           </a:p>
           <a:p>
@@ -7689,7 +7689,7 @@
                 </a:solidFill>
                 <a:latin typeface="Arial"/>
               </a:rPr>
-              <a:t>▸  Die NMZ zeigt, wo Ertrag verloren geht – die drei Kunden mit dem größten Hebel schlagen zwanzig Aktionen ohne Fokus.</a:t>
+              <a:t>▸  Die KNM zeigt, wo Ertrag verloren geht – die drei Kunden mit dem größten Hebel schlagen zwanzig Aktionen ohne Fokus.</a:t>
             </a:r>
           </a:p>
         </p:txBody>
@@ -8069,7 +8069,7 @@
                 </a:solidFill>
                 <a:latin typeface="Arial"/>
               </a:rPr>
-              <a:t>▸  Welche drei Kunden in Ihrem Bestand haben den größten NMZ-Hebel?</a:t>
+              <a:t>▸  Welche drei Kunden in Ihrem Bestand haben den größten KNM-Hebel?</a:t>
             </a:r>
           </a:p>
           <a:p>
@@ -8088,7 +8088,7 @@
                 </a:solidFill>
                 <a:latin typeface="Arial"/>
               </a:rPr>
-              <a:t>▸  Wann in Ihrem Monat ist die feste halbe Stunde für den NMZ-Blick?</a:t>
+              <a:t>▸  Wann in Ihrem Monat ist die feste halbe Stunde für den KNM-Blick?</a:t>
             </a:r>
           </a:p>
           <a:p>
@@ -8441,7 +8441,7 @@
                 </a:solidFill>
                 <a:latin typeface="Arial"/>
               </a:rPr>
-              <a:t>Ein erheblicher Teil der Beraterzeit fließt in Administration statt in Kundenkontakt.</a:t>
+              <a:t>Nicht jeder Kunde mit hohem Volumen bringt hohen Ertrag.</a:t>
             </a:r>
           </a:p>
           <a:p>
@@ -8457,7 +8457,7 @@
                 </a:solidFill>
                 <a:latin typeface="Arial"/>
               </a:rPr>
-              <a:t>Sie analysieren Ihre eigene Nettomarktzeit, identifizieren die größten Zeitfresser und entwickeln konkrete Gegenmaßnahmen.</a:t>
+              <a:t>Die Kundennettomarge (KNM) macht sichtbar, welchen bereinigten Nettoertrag ein Engagement je Euro Kreditvolumen wirklich abwirft – nach Refinanzierungs- und Risikokosten.</a:t>
             </a:r>
           </a:p>
           <a:p>
@@ -8473,7 +8473,23 @@
                 </a:solidFill>
                 <a:latin typeface="Arial"/>
               </a:rPr>
-              <a:t>Danach gewinnen Sie messbar Zeit für das, was Ertrag bringt: das Kundengespräch.</a:t>
+              <a:t>In diesem Modul lesen Sie Ihre KNM-Berichte in agree, identifizieren die Kunden mit dem größten Verbesserungspotenzial und leiten für jeden einen konkreten Ertragshebel ab.</a:t>
+            </a:r>
+          </a:p>
+          <a:p>
+            <a:pPr>
+              <a:spcAft>
+                <a:spcPts val="1200"/>
+              </a:spcAft>
+            </a:pPr>
+            <a:r>
+              <a:rPr sz="1700">
+                <a:solidFill>
+                  <a:srgbClr val="3D5466"/>
+                </a:solidFill>
+                <a:latin typeface="Arial"/>
+              </a:rPr>
+              <a:t>So steuern Sie Ihren Bestand nicht nach Volumen, sondern nach Ertrag.</a:t>
             </a:r>
           </a:p>
         </p:txBody>
@@ -8810,7 +8826,7 @@
                 </a:solidFill>
                 <a:latin typeface="Arial"/>
               </a:rPr>
-              <a:t>▸  Erklären, was die Nettomargenziffer (NMZ) misst, wie sie berechnet wird und warum sie die zentrale Steuerungsgröße im VR-Firmenkundensegment ist</a:t>
+              <a:t>▸  Erklären, was die Kundennettomarge (KNM) misst, wie sie berechnet wird und warum sie die zentrale Steuerungsgröße im VR-Firmenkundensegment ist</a:t>
             </a:r>
           </a:p>
           <a:p>
@@ -8829,7 +8845,7 @@
                 </a:solidFill>
                 <a:latin typeface="Arial"/>
               </a:rPr>
-              <a:t>▸  Unterschiede zwischen NMZ auf Einzel-, Segment- und Bestandsebene erläutern und die eigene NMZ in den internen Benchmark einordnen</a:t>
+              <a:t>▸  Unterschiede zwischen KNM auf Einzel-, Segment- und Bestandsebene erläutern und die eigene KNM in den internen Benchmark einordnen</a:t>
             </a:r>
           </a:p>
           <a:p>
@@ -8848,7 +8864,7 @@
                 </a:solidFill>
                 <a:latin typeface="Arial"/>
               </a:rPr>
-              <a:t>▸  NMZ-Berichte in agree lesen und die drei Kunden mit dem größten Verbesserungspotenzial im eigenen Bestand identifizieren</a:t>
+              <a:t>▸  KNM-Berichte in agree lesen und die drei Kunden mit dem größten Verbesserungspotenzial im eigenen Bestand identifizieren</a:t>
             </a:r>
           </a:p>
           <a:p>
@@ -8867,7 +8883,7 @@
                 </a:solidFill>
                 <a:latin typeface="Arial"/>
               </a:rPr>
-              <a:t>▸  Für jeden identifizierten Kunden mind. eine konkrete NMZ-Verbesserungsmaßnahme ableiten und den Hebel begründen</a:t>
+              <a:t>▸  Für jeden identifizierten Kunden mind. eine konkrete KNM-Verbesserungsmaßnahme ableiten und den Hebel begründen</a:t>
             </a:r>
           </a:p>
           <a:p>
@@ -8886,7 +8902,7 @@
                 </a:solidFill>
                 <a:latin typeface="Arial"/>
               </a:rPr>
-              <a:t>▸  Die NMZ-Struktur des Gesamtbestands nach Ertragskomponenten analysieren und das dominante Schwachfeld benennen</a:t>
+              <a:t>▸  Die KNM-Struktur des Gesamtbestands nach Ertragskomponenten analysieren und das dominante Schwachfeld benennen</a:t>
             </a:r>
           </a:p>
         </p:txBody>
@@ -9945,7 +9961,7 @@
                 </a:solidFill>
                 <a:latin typeface="Arial"/>
               </a:rPr>
-              <a:t>→  Steuere den Bestand über die eine Kennzahl, die alles bündelt: die Nettomarge (NMZ).</a:t>
+              <a:t>→  Steuere den Bestand über die eine Kennzahl, die alles bündelt: die Nettomarge (KNM).</a:t>
             </a:r>
           </a:p>
           <a:p>
@@ -9964,7 +9980,7 @@
                 </a:solidFill>
                 <a:latin typeface="Arial"/>
               </a:rPr>
-              <a:t>▸  Die NMZ vereint Zinsergebnis, Provisionen, Risikokosten und Eigenkapitalkosten in einer Zahl.</a:t>
+              <a:t>▸  Die KNM vereint Zinsergebnis, Provisionen, Risikokosten und Eigenkapitalkosten in einer Zahl.</a:t>
             </a:r>
           </a:p>
           <a:p>
@@ -10321,7 +10337,7 @@
                 </a:solidFill>
                 <a:latin typeface="Arial"/>
               </a:rPr>
-              <a:t>Warum die NMZ dem Deckungsbeitrag überlegen ist</a:t>
+              <a:t>Warum die KNM dem Deckungsbeitrag überlegen ist</a:t>
             </a:r>
           </a:p>
         </p:txBody>
@@ -10363,7 +10379,7 @@
                 </a:solidFill>
                 <a:latin typeface="Arial"/>
               </a:rPr>
-              <a:t>→  Der DB zeigt den Ertrag, die NMZ zeigt den Ertrag nach Risiko und Kapitalbindung – erst das ist Steuerungsgröße.</a:t>
+              <a:t>→  Der DB zeigt den Ertrag, die KNM zeigt den Ertrag nach Risiko und Kapitalbindung – erst das ist Steuerungsgröße.</a:t>
             </a:r>
           </a:p>
           <a:p>
@@ -10382,7 +10398,7 @@
                 </a:solidFill>
                 <a:latin typeface="Arial"/>
               </a:rPr>
-              <a:t>▸  Der DB ignoriert Risikokosten und Eigenkapitalkosten; die NMZ rechnet sie ein.</a:t>
+              <a:t>▸  Der DB ignoriert Risikokosten und Eigenkapitalkosten; die KNM rechnet sie ein.</a:t>
             </a:r>
           </a:p>
           <a:p>
@@ -10401,7 +10417,7 @@
                 </a:solidFill>
                 <a:latin typeface="Arial"/>
               </a:rPr>
-              <a:t>▸  Zwei Kunden mit gleichem DB können völlig unterschiedliche NMZ haben.</a:t>
+              <a:t>▸  Zwei Kunden mit gleichem DB können völlig unterschiedliche KNM haben.</a:t>
             </a:r>
           </a:p>
         </p:txBody>
@@ -10653,7 +10669,7 @@
                 </a:solidFill>
                 <a:latin typeface="Arial"/>
               </a:rPr>
-              <a:t>Der Nettomargenbeitrag (NMZ) im Aufbau</a:t>
+              <a:t>Der Kundennettomarge (KNM) im Aufbau</a:t>
             </a:r>
           </a:p>
         </p:txBody>
@@ -11093,7 +11109,7 @@
                 </a:solidFill>
                 <a:latin typeface="Arial"/>
               </a:rPr>
-              <a:t>Wo die NMZ-Daten herkommen</a:t>
+              <a:t>Wo die KNM-Daten herkommen</a:t>
             </a:r>
           </a:p>
         </p:txBody>
@@ -11135,7 +11151,7 @@
                 </a:solidFill>
                 <a:latin typeface="Arial"/>
               </a:rPr>
-              <a:t>→  Die NMZ liegt im agree-Reporting bereit – man muss das Ranking nur regelmäßig lesen.</a:t>
+              <a:t>→  Die KNM liegt im agree-Reporting bereit – man muss das Ranking nur regelmäßig lesen.</a:t>
             </a:r>
           </a:p>
           <a:p>
@@ -11154,7 +11170,7 @@
                 </a:solidFill>
                 <a:latin typeface="Arial"/>
               </a:rPr>
-              <a:t>▸  Das Bestandsranking zeigt jeden Kunden mit seiner NMZ und den Komponenten.</a:t>
+              <a:t>▸  Das Bestandsranking zeigt jeden Kunden mit seiner KNM und den Komponenten.</a:t>
             </a:r>
           </a:p>
           <a:p>
@@ -11425,7 +11441,7 @@
                 </a:solidFill>
                 <a:latin typeface="Arial"/>
               </a:rPr>
-              <a:t>Der NMZ-Optimierungsprozess</a:t>
+              <a:t>Der KNM-Optimierungsprozess</a:t>
             </a:r>
           </a:p>
         </p:txBody>
